--- a/発表用/発表用スライド.pptx
+++ b/発表用/発表用スライド.pptx
@@ -7,14 +7,18 @@
   <p:sldIdLst>
     <p:sldId id="256" r:id="rId2"/>
     <p:sldId id="257" r:id="rId3"/>
-    <p:sldId id="262" r:id="rId4"/>
-    <p:sldId id="263" r:id="rId5"/>
-    <p:sldId id="268" r:id="rId6"/>
-    <p:sldId id="269" r:id="rId7"/>
-    <p:sldId id="264" r:id="rId8"/>
-    <p:sldId id="267" r:id="rId9"/>
-    <p:sldId id="265" r:id="rId10"/>
-    <p:sldId id="266" r:id="rId11"/>
+    <p:sldId id="276" r:id="rId4"/>
+    <p:sldId id="269" r:id="rId5"/>
+    <p:sldId id="264" r:id="rId6"/>
+    <p:sldId id="267" r:id="rId7"/>
+    <p:sldId id="277" r:id="rId8"/>
+    <p:sldId id="274" r:id="rId9"/>
+    <p:sldId id="273" r:id="rId10"/>
+    <p:sldId id="272" r:id="rId11"/>
+    <p:sldId id="265" r:id="rId12"/>
+    <p:sldId id="270" r:id="rId13"/>
+    <p:sldId id="275" r:id="rId14"/>
+    <p:sldId id="278" r:id="rId15"/>
   </p:sldIdLst>
   <p:sldSz cx="12192000" cy="6858000"/>
   <p:notesSz cx="6858000" cy="9144000"/>
@@ -288,6 +292,13 @@
               <a:schemeClr val="lt1"/>
             </a:fontRef>
           </p:style>
+          <p:txBody>
+            <a:bodyPr/>
+            <a:lstStyle/>
+            <a:p>
+              <a:endParaRPr lang="ja-JP" altLang="en-US"/>
+            </a:p>
+          </p:txBody>
         </p:sp>
         <p:sp>
           <p:nvSpPr>
@@ -351,6 +362,13 @@
               <a:schemeClr val="lt1"/>
             </a:fontRef>
           </p:style>
+          <p:txBody>
+            <a:bodyPr/>
+            <a:lstStyle/>
+            <a:p>
+              <a:endParaRPr lang="ja-JP" altLang="en-US"/>
+            </a:p>
+          </p:txBody>
         </p:sp>
         <p:sp>
           <p:nvSpPr>
@@ -392,6 +410,13 @@
               <a:schemeClr val="lt1"/>
             </a:fontRef>
           </p:style>
+          <p:txBody>
+            <a:bodyPr/>
+            <a:lstStyle/>
+            <a:p>
+              <a:endParaRPr lang="ja-JP" altLang="en-US"/>
+            </a:p>
+          </p:txBody>
         </p:sp>
         <p:sp>
           <p:nvSpPr>
@@ -456,6 +481,13 @@
               <a:schemeClr val="lt1"/>
             </a:fontRef>
           </p:style>
+          <p:txBody>
+            <a:bodyPr/>
+            <a:lstStyle/>
+            <a:p>
+              <a:endParaRPr lang="ja-JP" altLang="en-US"/>
+            </a:p>
+          </p:txBody>
         </p:sp>
         <p:sp>
           <p:nvSpPr>
@@ -521,6 +553,13 @@
               <a:schemeClr val="lt1"/>
             </a:fontRef>
           </p:style>
+          <p:txBody>
+            <a:bodyPr/>
+            <a:lstStyle/>
+            <a:p>
+              <a:endParaRPr lang="ja-JP" altLang="en-US"/>
+            </a:p>
+          </p:txBody>
         </p:sp>
         <p:sp>
           <p:nvSpPr>
@@ -584,6 +623,13 @@
               <a:schemeClr val="lt1"/>
             </a:fontRef>
           </p:style>
+          <p:txBody>
+            <a:bodyPr/>
+            <a:lstStyle/>
+            <a:p>
+              <a:endParaRPr lang="ja-JP" altLang="en-US"/>
+            </a:p>
+          </p:txBody>
         </p:sp>
         <p:sp>
           <p:nvSpPr>
@@ -625,6 +671,13 @@
               <a:schemeClr val="lt1"/>
             </a:fontRef>
           </p:style>
+          <p:txBody>
+            <a:bodyPr/>
+            <a:lstStyle/>
+            <a:p>
+              <a:endParaRPr lang="ja-JP" altLang="en-US"/>
+            </a:p>
+          </p:txBody>
         </p:sp>
         <p:sp>
           <p:nvSpPr>
@@ -666,6 +719,13 @@
               <a:schemeClr val="lt1"/>
             </a:fontRef>
           </p:style>
+          <p:txBody>
+            <a:bodyPr/>
+            <a:lstStyle/>
+            <a:p>
+              <a:endParaRPr lang="ja-JP" altLang="en-US"/>
+            </a:p>
+          </p:txBody>
         </p:sp>
       </p:grpSp>
       <p:sp>
@@ -843,7 +903,7 @@
           <a:p>
             <a:fld id="{3DCF00BD-1168-4E9D-8CE7-0332C6AB0A70}" type="datetimeFigureOut">
               <a:rPr kumimoji="1" lang="ja-JP" altLang="en-US" smtClean="0"/>
-              <a:t>2026/2/13</a:t>
+              <a:t>2026/2/17</a:t>
             </a:fld>
             <a:endParaRPr kumimoji="1" lang="ja-JP" altLang="en-US"/>
           </a:p>
@@ -1094,7 +1154,7 @@
           <a:p>
             <a:fld id="{3DCF00BD-1168-4E9D-8CE7-0332C6AB0A70}" type="datetimeFigureOut">
               <a:rPr kumimoji="1" lang="ja-JP" altLang="en-US" smtClean="0"/>
-              <a:t>2026/2/13</a:t>
+              <a:t>2026/2/17</a:t>
             </a:fld>
             <a:endParaRPr kumimoji="1" lang="ja-JP" altLang="en-US"/>
           </a:p>
@@ -1408,7 +1468,7 @@
           <a:p>
             <a:fld id="{3DCF00BD-1168-4E9D-8CE7-0332C6AB0A70}" type="datetimeFigureOut">
               <a:rPr kumimoji="1" lang="ja-JP" altLang="en-US" smtClean="0"/>
-              <a:t>2026/2/13</a:t>
+              <a:t>2026/2/17</a:t>
             </a:fld>
             <a:endParaRPr kumimoji="1" lang="ja-JP" altLang="en-US"/>
           </a:p>
@@ -1749,7 +1809,7 @@
           <a:p>
             <a:fld id="{3DCF00BD-1168-4E9D-8CE7-0332C6AB0A70}" type="datetimeFigureOut">
               <a:rPr kumimoji="1" lang="ja-JP" altLang="en-US" smtClean="0"/>
-              <a:t>2026/2/13</a:t>
+              <a:t>2026/2/17</a:t>
             </a:fld>
             <a:endParaRPr kumimoji="1" lang="ja-JP" altLang="en-US"/>
           </a:p>
@@ -2063,7 +2123,7 @@
           <a:p>
             <a:fld id="{3DCF00BD-1168-4E9D-8CE7-0332C6AB0A70}" type="datetimeFigureOut">
               <a:rPr kumimoji="1" lang="ja-JP" altLang="en-US" smtClean="0"/>
-              <a:t>2026/2/13</a:t>
+              <a:t>2026/2/17</a:t>
             </a:fld>
             <a:endParaRPr kumimoji="1" lang="ja-JP" altLang="en-US"/>
           </a:p>
@@ -2456,7 +2516,7 @@
           <a:p>
             <a:fld id="{3DCF00BD-1168-4E9D-8CE7-0332C6AB0A70}" type="datetimeFigureOut">
               <a:rPr kumimoji="1" lang="ja-JP" altLang="en-US" smtClean="0"/>
-              <a:t>2026/2/13</a:t>
+              <a:t>2026/2/17</a:t>
             </a:fld>
             <a:endParaRPr kumimoji="1" lang="ja-JP" altLang="en-US"/>
           </a:p>
@@ -2658,7 +2718,7 @@
           <a:p>
             <a:fld id="{3DCF00BD-1168-4E9D-8CE7-0332C6AB0A70}" type="datetimeFigureOut">
               <a:rPr kumimoji="1" lang="ja-JP" altLang="en-US" smtClean="0"/>
-              <a:t>2026/2/13</a:t>
+              <a:t>2026/2/17</a:t>
             </a:fld>
             <a:endParaRPr kumimoji="1" lang="ja-JP" altLang="en-US"/>
           </a:p>
@@ -2870,7 +2930,7 @@
           <a:p>
             <a:fld id="{3DCF00BD-1168-4E9D-8CE7-0332C6AB0A70}" type="datetimeFigureOut">
               <a:rPr kumimoji="1" lang="ja-JP" altLang="en-US" smtClean="0"/>
-              <a:t>2026/2/13</a:t>
+              <a:t>2026/2/17</a:t>
             </a:fld>
             <a:endParaRPr kumimoji="1" lang="ja-JP" altLang="en-US"/>
           </a:p>
@@ -3078,7 +3138,7 @@
           <a:p>
             <a:fld id="{3DCF00BD-1168-4E9D-8CE7-0332C6AB0A70}" type="datetimeFigureOut">
               <a:rPr kumimoji="1" lang="ja-JP" altLang="en-US" smtClean="0"/>
-              <a:t>2026/2/13</a:t>
+              <a:t>2026/2/17</a:t>
             </a:fld>
             <a:endParaRPr kumimoji="1" lang="ja-JP" altLang="en-US"/>
           </a:p>
@@ -3325,7 +3385,7 @@
           <a:p>
             <a:fld id="{3DCF00BD-1168-4E9D-8CE7-0332C6AB0A70}" type="datetimeFigureOut">
               <a:rPr kumimoji="1" lang="ja-JP" altLang="en-US" smtClean="0"/>
-              <a:t>2026/2/13</a:t>
+              <a:t>2026/2/17</a:t>
             </a:fld>
             <a:endParaRPr kumimoji="1" lang="ja-JP" altLang="en-US"/>
           </a:p>
@@ -3621,7 +3681,7 @@
           <a:p>
             <a:fld id="{3DCF00BD-1168-4E9D-8CE7-0332C6AB0A70}" type="datetimeFigureOut">
               <a:rPr kumimoji="1" lang="ja-JP" altLang="en-US" smtClean="0"/>
-              <a:t>2026/2/13</a:t>
+              <a:t>2026/2/17</a:t>
             </a:fld>
             <a:endParaRPr kumimoji="1" lang="ja-JP" altLang="en-US"/>
           </a:p>
@@ -4059,7 +4119,7 @@
           <a:p>
             <a:fld id="{3DCF00BD-1168-4E9D-8CE7-0332C6AB0A70}" type="datetimeFigureOut">
               <a:rPr kumimoji="1" lang="ja-JP" altLang="en-US" smtClean="0"/>
-              <a:t>2026/2/13</a:t>
+              <a:t>2026/2/17</a:t>
             </a:fld>
             <a:endParaRPr kumimoji="1" lang="ja-JP" altLang="en-US"/>
           </a:p>
@@ -4182,7 +4242,7 @@
           <a:p>
             <a:fld id="{3DCF00BD-1168-4E9D-8CE7-0332C6AB0A70}" type="datetimeFigureOut">
               <a:rPr kumimoji="1" lang="ja-JP" altLang="en-US" smtClean="0"/>
-              <a:t>2026/2/13</a:t>
+              <a:t>2026/2/17</a:t>
             </a:fld>
             <a:endParaRPr kumimoji="1" lang="ja-JP" altLang="en-US"/>
           </a:p>
@@ -4277,7 +4337,7 @@
           <a:p>
             <a:fld id="{3DCF00BD-1168-4E9D-8CE7-0332C6AB0A70}" type="datetimeFigureOut">
               <a:rPr kumimoji="1" lang="ja-JP" altLang="en-US" smtClean="0"/>
-              <a:t>2026/2/13</a:t>
+              <a:t>2026/2/17</a:t>
             </a:fld>
             <a:endParaRPr kumimoji="1" lang="ja-JP" altLang="en-US"/>
           </a:p>
@@ -4564,7 +4624,7 @@
           <a:p>
             <a:fld id="{3DCF00BD-1168-4E9D-8CE7-0332C6AB0A70}" type="datetimeFigureOut">
               <a:rPr kumimoji="1" lang="ja-JP" altLang="en-US" smtClean="0"/>
-              <a:t>2026/2/13</a:t>
+              <a:t>2026/2/17</a:t>
             </a:fld>
             <a:endParaRPr kumimoji="1" lang="ja-JP" altLang="en-US"/>
           </a:p>
@@ -4827,7 +4887,7 @@
           <a:p>
             <a:fld id="{3DCF00BD-1168-4E9D-8CE7-0332C6AB0A70}" type="datetimeFigureOut">
               <a:rPr kumimoji="1" lang="ja-JP" altLang="en-US" smtClean="0"/>
-              <a:t>2026/2/13</a:t>
+              <a:t>2026/2/17</a:t>
             </a:fld>
             <a:endParaRPr kumimoji="1" lang="ja-JP" altLang="en-US"/>
           </a:p>
@@ -5060,6 +5120,13 @@
               <a:schemeClr val="lt1"/>
             </a:fontRef>
           </p:style>
+          <p:txBody>
+            <a:bodyPr/>
+            <a:lstStyle/>
+            <a:p>
+              <a:endParaRPr lang="ja-JP" altLang="en-US"/>
+            </a:p>
+          </p:txBody>
         </p:sp>
         <p:sp>
           <p:nvSpPr>
@@ -5123,6 +5190,13 @@
               <a:schemeClr val="lt1"/>
             </a:fontRef>
           </p:style>
+          <p:txBody>
+            <a:bodyPr/>
+            <a:lstStyle/>
+            <a:p>
+              <a:endParaRPr lang="ja-JP" altLang="en-US"/>
+            </a:p>
+          </p:txBody>
         </p:sp>
         <p:sp>
           <p:nvSpPr>
@@ -5164,6 +5238,13 @@
               <a:schemeClr val="lt1"/>
             </a:fontRef>
           </p:style>
+          <p:txBody>
+            <a:bodyPr/>
+            <a:lstStyle/>
+            <a:p>
+              <a:endParaRPr lang="ja-JP" altLang="en-US"/>
+            </a:p>
+          </p:txBody>
         </p:sp>
         <p:sp>
           <p:nvSpPr>
@@ -5228,6 +5309,13 @@
               <a:schemeClr val="lt1"/>
             </a:fontRef>
           </p:style>
+          <p:txBody>
+            <a:bodyPr/>
+            <a:lstStyle/>
+            <a:p>
+              <a:endParaRPr lang="ja-JP" altLang="en-US"/>
+            </a:p>
+          </p:txBody>
         </p:sp>
         <p:sp>
           <p:nvSpPr>
@@ -5293,6 +5381,13 @@
               <a:schemeClr val="lt1"/>
             </a:fontRef>
           </p:style>
+          <p:txBody>
+            <a:bodyPr/>
+            <a:lstStyle/>
+            <a:p>
+              <a:endParaRPr lang="ja-JP" altLang="en-US"/>
+            </a:p>
+          </p:txBody>
         </p:sp>
         <p:sp>
           <p:nvSpPr>
@@ -5356,6 +5451,13 @@
               <a:schemeClr val="lt1"/>
             </a:fontRef>
           </p:style>
+          <p:txBody>
+            <a:bodyPr/>
+            <a:lstStyle/>
+            <a:p>
+              <a:endParaRPr lang="ja-JP" altLang="en-US"/>
+            </a:p>
+          </p:txBody>
         </p:sp>
         <p:sp>
           <p:nvSpPr>
@@ -5397,6 +5499,13 @@
               <a:schemeClr val="lt1"/>
             </a:fontRef>
           </p:style>
+          <p:txBody>
+            <a:bodyPr/>
+            <a:lstStyle/>
+            <a:p>
+              <a:endParaRPr lang="ja-JP" altLang="en-US"/>
+            </a:p>
+          </p:txBody>
         </p:sp>
         <p:sp>
           <p:nvSpPr>
@@ -5438,6 +5547,13 @@
               <a:schemeClr val="lt1"/>
             </a:fontRef>
           </p:style>
+          <p:txBody>
+            <a:bodyPr/>
+            <a:lstStyle/>
+            <a:p>
+              <a:endParaRPr lang="ja-JP" altLang="en-US"/>
+            </a:p>
+          </p:txBody>
         </p:sp>
       </p:grpSp>
       <p:sp>
@@ -5602,7 +5718,7 @@
           <a:p>
             <a:fld id="{3DCF00BD-1168-4E9D-8CE7-0332C6AB0A70}" type="datetimeFigureOut">
               <a:rPr kumimoji="1" lang="ja-JP" altLang="en-US" smtClean="0"/>
-              <a:t>2026/2/13</a:t>
+              <a:t>2026/2/17</a:t>
             </a:fld>
             <a:endParaRPr kumimoji="1" lang="ja-JP" altLang="en-US"/>
           </a:p>
@@ -6375,7 +6491,7 @@
         <p:cNvPr id="1" name="">
           <a:extLst>
             <a:ext uri="{FF2B5EF4-FFF2-40B4-BE49-F238E27FC236}">
-              <a16:creationId xmlns:a16="http://schemas.microsoft.com/office/drawing/2014/main" id="{48953EBA-11E6-E901-3763-0B40357F5586}"/>
+              <a16:creationId xmlns:a16="http://schemas.microsoft.com/office/drawing/2014/main" id="{7E9B4F56-FBE8-3961-3C46-CB199AA5C9BC}"/>
             </a:ext>
           </a:extLst>
         </p:cNvPr>
@@ -6395,7 +6511,1406 @@
           <p:cNvPr id="2" name="タイトル 1">
             <a:extLst>
               <a:ext uri="{FF2B5EF4-FFF2-40B4-BE49-F238E27FC236}">
-                <a16:creationId xmlns:a16="http://schemas.microsoft.com/office/drawing/2014/main" id="{6DFC5680-D8F3-1061-DF0C-917907A4BA37}"/>
+                <a16:creationId xmlns:a16="http://schemas.microsoft.com/office/drawing/2014/main" id="{1CC1A4E9-8E3A-8F33-E46B-82429244074D}"/>
+              </a:ext>
+            </a:extLst>
+          </p:cNvPr>
+          <p:cNvSpPr>
+            <a:spLocks noGrp="1"/>
+          </p:cNvSpPr>
+          <p:nvPr>
+            <p:ph type="title"/>
+          </p:nvPr>
+        </p:nvSpPr>
+        <p:spPr>
+          <a:xfrm>
+            <a:off x="1363617" y="571624"/>
+            <a:ext cx="8074815" cy="1618489"/>
+          </a:xfrm>
+        </p:spPr>
+        <p:txBody>
+          <a:bodyPr anchor="ctr">
+            <a:normAutofit/>
+          </a:bodyPr>
+          <a:lstStyle/>
+          <a:p>
+            <a:pPr algn="ctr"/>
+            <a:r>
+              <a:rPr kumimoji="1" lang="ja-JP" altLang="en-US" sz="6000" dirty="0"/>
+              <a:t>アルゴリズム</a:t>
+            </a:r>
+            <a:r>
+              <a:rPr lang="ja-JP" altLang="en-US" sz="6000" dirty="0"/>
+              <a:t>について</a:t>
+            </a:r>
+            <a:endParaRPr kumimoji="1" lang="ja-JP" altLang="en-US" sz="6000" dirty="0"/>
+          </a:p>
+        </p:txBody>
+      </p:sp>
+      <p:graphicFrame>
+        <p:nvGraphicFramePr>
+          <p:cNvPr id="13" name="表 12">
+            <a:extLst>
+              <a:ext uri="{FF2B5EF4-FFF2-40B4-BE49-F238E27FC236}">
+                <a16:creationId xmlns:a16="http://schemas.microsoft.com/office/drawing/2014/main" id="{FE903091-85B2-129C-D7FE-A4F9FE5427B6}"/>
+              </a:ext>
+            </a:extLst>
+          </p:cNvPr>
+          <p:cNvGraphicFramePr>
+            <a:graphicFrameLocks noGrp="1"/>
+          </p:cNvGraphicFramePr>
+          <p:nvPr>
+            <p:extLst>
+              <p:ext uri="{D42A27DB-BD31-4B8C-83A1-F6EECF244321}">
+                <p14:modId xmlns:p14="http://schemas.microsoft.com/office/powerpoint/2010/main" val="1717133069"/>
+              </p:ext>
+            </p:extLst>
+          </p:nvPr>
+        </p:nvGraphicFramePr>
+        <p:xfrm>
+          <a:off x="8813687" y="2160630"/>
+          <a:ext cx="2777223" cy="4515822"/>
+        </p:xfrm>
+        <a:graphic>
+          <a:graphicData uri="http://schemas.openxmlformats.org/drawingml/2006/table">
+            <a:tbl>
+              <a:tblPr>
+                <a:tableStyleId>{073A0DAA-6AF3-43AB-8588-CEC1D06C72B9}</a:tableStyleId>
+              </a:tblPr>
+              <a:tblGrid>
+                <a:gridCol w="2777223">
+                  <a:extLst>
+                    <a:ext uri="{9D8B030D-6E8A-4147-A177-3AD203B41FA5}">
+                      <a16:colId xmlns:a16="http://schemas.microsoft.com/office/drawing/2014/main" val="159393942"/>
+                    </a:ext>
+                  </a:extLst>
+                </a:gridCol>
+              </a:tblGrid>
+              <a:tr h="815037">
+                <a:tc>
+                  <a:txBody>
+                    <a:bodyPr/>
+                    <a:lstStyle/>
+                    <a:p>
+                      <a:pPr algn="l" fontAlgn="ctr">
+                        <a:buNone/>
+                      </a:pPr>
+                      <a:r>
+                        <a:rPr lang="en-US" altLang="ja-JP" sz="2800" dirty="0"/>
+                        <a:t> LGBM</a:t>
+                      </a:r>
+                      <a:r>
+                        <a:rPr lang="ja-JP" altLang="en-US" sz="2800" dirty="0"/>
+                        <a:t>の選定理由</a:t>
+                      </a:r>
+                      <a:endParaRPr lang="ja-JP" altLang="en-US" sz="2800" b="0" i="0" u="none" strike="noStrike" dirty="0">
+                        <a:solidFill>
+                          <a:srgbClr val="000000"/>
+                        </a:solidFill>
+                        <a:effectLst/>
+                        <a:latin typeface="游ゴシック" panose="020B0400000000000000" pitchFamily="50" charset="-128"/>
+                        <a:ea typeface="游ゴシック" panose="020B0400000000000000" pitchFamily="50" charset="-128"/>
+                      </a:endParaRPr>
+                    </a:p>
+                  </a:txBody>
+                  <a:tcPr marL="9525" marR="9525" marT="9525" marB="0" anchor="ctr">
+                    <a:lnL w="12700" cap="flat" cmpd="sng" algn="ctr">
+                      <a:solidFill>
+                        <a:schemeClr val="tx1"/>
+                      </a:solidFill>
+                      <a:prstDash val="solid"/>
+                      <a:round/>
+                      <a:headEnd type="none" w="med" len="med"/>
+                      <a:tailEnd type="none" w="med" len="med"/>
+                    </a:lnL>
+                    <a:lnR w="12700" cap="flat" cmpd="sng" algn="ctr">
+                      <a:solidFill>
+                        <a:schemeClr val="tx1"/>
+                      </a:solidFill>
+                      <a:prstDash val="solid"/>
+                      <a:round/>
+                      <a:headEnd type="none" w="med" len="med"/>
+                      <a:tailEnd type="none" w="med" len="med"/>
+                    </a:lnR>
+                    <a:lnT w="12700" cap="flat" cmpd="sng" algn="ctr">
+                      <a:solidFill>
+                        <a:schemeClr val="tx1"/>
+                      </a:solidFill>
+                      <a:prstDash val="solid"/>
+                      <a:round/>
+                      <a:headEnd type="none" w="med" len="med"/>
+                      <a:tailEnd type="none" w="med" len="med"/>
+                    </a:lnT>
+                    <a:lnB w="12700" cap="flat" cmpd="sng" algn="ctr">
+                      <a:solidFill>
+                        <a:schemeClr val="tx1"/>
+                      </a:solidFill>
+                      <a:prstDash val="solid"/>
+                      <a:round/>
+                      <a:headEnd type="none" w="med" len="med"/>
+                      <a:tailEnd type="none" w="med" len="med"/>
+                    </a:lnB>
+                    <a:solidFill>
+                      <a:schemeClr val="bg1"/>
+                    </a:solidFill>
+                  </a:tcPr>
+                </a:tc>
+                <a:extLst>
+                  <a:ext uri="{0D108BD9-81ED-4DB2-BD59-A6C34878D82A}">
+                    <a16:rowId xmlns:a16="http://schemas.microsoft.com/office/drawing/2014/main" val="3953469068"/>
+                  </a:ext>
+                </a:extLst>
+              </a:tr>
+              <a:tr h="815037">
+                <a:tc>
+                  <a:txBody>
+                    <a:bodyPr/>
+                    <a:lstStyle/>
+                    <a:p>
+                      <a:pPr algn="l" fontAlgn="ctr">
+                        <a:buNone/>
+                      </a:pPr>
+                      <a:r>
+                        <a:rPr lang="ja-JP" altLang="en-US" sz="2800" dirty="0"/>
+                        <a:t> 数値特徴量に強い</a:t>
+                      </a:r>
+                      <a:endParaRPr lang="ja-JP" altLang="en-US" sz="2800" b="0" i="0" u="none" strike="noStrike" dirty="0">
+                        <a:solidFill>
+                          <a:srgbClr val="000000"/>
+                        </a:solidFill>
+                        <a:effectLst/>
+                        <a:latin typeface="游ゴシック" panose="020B0400000000000000" pitchFamily="50" charset="-128"/>
+                        <a:ea typeface="游ゴシック" panose="020B0400000000000000" pitchFamily="50" charset="-128"/>
+                      </a:endParaRPr>
+                    </a:p>
+                  </a:txBody>
+                  <a:tcPr marL="9525" marR="9525" marT="9525" marB="0" anchor="ctr">
+                    <a:lnL w="12700" cap="flat" cmpd="sng" algn="ctr">
+                      <a:solidFill>
+                        <a:schemeClr val="tx1"/>
+                      </a:solidFill>
+                      <a:prstDash val="solid"/>
+                      <a:round/>
+                      <a:headEnd type="none" w="med" len="med"/>
+                      <a:tailEnd type="none" w="med" len="med"/>
+                    </a:lnL>
+                    <a:lnR w="12700" cap="flat" cmpd="sng" algn="ctr">
+                      <a:solidFill>
+                        <a:schemeClr val="tx1"/>
+                      </a:solidFill>
+                      <a:prstDash val="solid"/>
+                      <a:round/>
+                      <a:headEnd type="none" w="med" len="med"/>
+                      <a:tailEnd type="none" w="med" len="med"/>
+                    </a:lnR>
+                    <a:lnT w="12700" cap="flat" cmpd="sng" algn="ctr">
+                      <a:solidFill>
+                        <a:schemeClr val="tx1"/>
+                      </a:solidFill>
+                      <a:prstDash val="solid"/>
+                      <a:round/>
+                      <a:headEnd type="none" w="med" len="med"/>
+                      <a:tailEnd type="none" w="med" len="med"/>
+                    </a:lnT>
+                    <a:lnB w="12700" cap="flat" cmpd="sng" algn="ctr">
+                      <a:solidFill>
+                        <a:schemeClr val="tx1"/>
+                      </a:solidFill>
+                      <a:prstDash val="solid"/>
+                      <a:round/>
+                      <a:headEnd type="none" w="med" len="med"/>
+                      <a:tailEnd type="none" w="med" len="med"/>
+                    </a:lnB>
+                    <a:solidFill>
+                      <a:schemeClr val="bg1"/>
+                    </a:solidFill>
+                  </a:tcPr>
+                </a:tc>
+                <a:extLst>
+                  <a:ext uri="{0D108BD9-81ED-4DB2-BD59-A6C34878D82A}">
+                    <a16:rowId xmlns:a16="http://schemas.microsoft.com/office/drawing/2014/main" val="2980872199"/>
+                  </a:ext>
+                </a:extLst>
+              </a:tr>
+              <a:tr h="963686">
+                <a:tc>
+                  <a:txBody>
+                    <a:bodyPr/>
+                    <a:lstStyle/>
+                    <a:p>
+                      <a:pPr algn="l" fontAlgn="ctr">
+                        <a:buNone/>
+                      </a:pPr>
+                      <a:r>
+                        <a:rPr lang="ja-JP" altLang="en-US" sz="2800" dirty="0"/>
+                        <a:t> 少量データでも  動く</a:t>
+                      </a:r>
+                      <a:endParaRPr lang="ja-JP" altLang="en-US" sz="2800" b="0" i="0" u="none" strike="noStrike" dirty="0">
+                        <a:solidFill>
+                          <a:srgbClr val="000000"/>
+                        </a:solidFill>
+                        <a:effectLst/>
+                        <a:latin typeface="游ゴシック" panose="020B0400000000000000" pitchFamily="50" charset="-128"/>
+                        <a:ea typeface="游ゴシック" panose="020B0400000000000000" pitchFamily="50" charset="-128"/>
+                      </a:endParaRPr>
+                    </a:p>
+                  </a:txBody>
+                  <a:tcPr marL="9525" marR="9525" marT="9525" marB="0" anchor="ctr">
+                    <a:lnL w="12700" cap="flat" cmpd="sng" algn="ctr">
+                      <a:solidFill>
+                        <a:schemeClr val="tx1"/>
+                      </a:solidFill>
+                      <a:prstDash val="solid"/>
+                      <a:round/>
+                      <a:headEnd type="none" w="med" len="med"/>
+                      <a:tailEnd type="none" w="med" len="med"/>
+                    </a:lnL>
+                    <a:lnR w="12700" cap="flat" cmpd="sng" algn="ctr">
+                      <a:solidFill>
+                        <a:schemeClr val="tx1"/>
+                      </a:solidFill>
+                      <a:prstDash val="solid"/>
+                      <a:round/>
+                      <a:headEnd type="none" w="med" len="med"/>
+                      <a:tailEnd type="none" w="med" len="med"/>
+                    </a:lnR>
+                    <a:lnT w="12700" cap="flat" cmpd="sng" algn="ctr">
+                      <a:solidFill>
+                        <a:schemeClr val="tx1"/>
+                      </a:solidFill>
+                      <a:prstDash val="solid"/>
+                      <a:round/>
+                      <a:headEnd type="none" w="med" len="med"/>
+                      <a:tailEnd type="none" w="med" len="med"/>
+                    </a:lnT>
+                    <a:lnB w="12700" cap="flat" cmpd="sng" algn="ctr">
+                      <a:solidFill>
+                        <a:schemeClr val="tx1"/>
+                      </a:solidFill>
+                      <a:prstDash val="solid"/>
+                      <a:round/>
+                      <a:headEnd type="none" w="med" len="med"/>
+                      <a:tailEnd type="none" w="med" len="med"/>
+                    </a:lnB>
+                    <a:solidFill>
+                      <a:schemeClr val="bg1"/>
+                    </a:solidFill>
+                  </a:tcPr>
+                </a:tc>
+                <a:extLst>
+                  <a:ext uri="{0D108BD9-81ED-4DB2-BD59-A6C34878D82A}">
+                    <a16:rowId xmlns:a16="http://schemas.microsoft.com/office/drawing/2014/main" val="1056017188"/>
+                  </a:ext>
+                </a:extLst>
+              </a:tr>
+              <a:tr h="998797">
+                <a:tc>
+                  <a:txBody>
+                    <a:bodyPr/>
+                    <a:lstStyle/>
+                    <a:p>
+                      <a:pPr algn="l" fontAlgn="ctr">
+                        <a:buNone/>
+                      </a:pPr>
+                      <a:r>
+                        <a:rPr lang="ja-JP" altLang="en-US" sz="2800" dirty="0"/>
+                        <a:t> 学習速度が速い</a:t>
+                      </a:r>
+                      <a:endParaRPr lang="ja-JP" altLang="en-US" sz="2800" b="0" i="0" u="none" strike="noStrike" dirty="0">
+                        <a:solidFill>
+                          <a:srgbClr val="000000"/>
+                        </a:solidFill>
+                        <a:effectLst/>
+                        <a:latin typeface="游ゴシック" panose="020B0400000000000000" pitchFamily="50" charset="-128"/>
+                        <a:ea typeface="游ゴシック" panose="020B0400000000000000" pitchFamily="50" charset="-128"/>
+                      </a:endParaRPr>
+                    </a:p>
+                  </a:txBody>
+                  <a:tcPr marL="9525" marR="9525" marT="9525" marB="0" anchor="ctr">
+                    <a:lnL w="12700" cap="flat" cmpd="sng" algn="ctr">
+                      <a:solidFill>
+                        <a:schemeClr val="tx1"/>
+                      </a:solidFill>
+                      <a:prstDash val="solid"/>
+                      <a:round/>
+                      <a:headEnd type="none" w="med" len="med"/>
+                      <a:tailEnd type="none" w="med" len="med"/>
+                    </a:lnL>
+                    <a:lnR w="12700" cap="flat" cmpd="sng" algn="ctr">
+                      <a:solidFill>
+                        <a:schemeClr val="tx1"/>
+                      </a:solidFill>
+                      <a:prstDash val="solid"/>
+                      <a:round/>
+                      <a:headEnd type="none" w="med" len="med"/>
+                      <a:tailEnd type="none" w="med" len="med"/>
+                    </a:lnR>
+                    <a:lnT w="12700" cap="flat" cmpd="sng" algn="ctr">
+                      <a:solidFill>
+                        <a:schemeClr val="tx1"/>
+                      </a:solidFill>
+                      <a:prstDash val="solid"/>
+                      <a:round/>
+                      <a:headEnd type="none" w="med" len="med"/>
+                      <a:tailEnd type="none" w="med" len="med"/>
+                    </a:lnT>
+                    <a:lnB w="12700" cap="flat" cmpd="sng" algn="ctr">
+                      <a:solidFill>
+                        <a:schemeClr val="tx1"/>
+                      </a:solidFill>
+                      <a:prstDash val="solid"/>
+                      <a:round/>
+                      <a:headEnd type="none" w="med" len="med"/>
+                      <a:tailEnd type="none" w="med" len="med"/>
+                    </a:lnB>
+                    <a:solidFill>
+                      <a:schemeClr val="bg1"/>
+                    </a:solidFill>
+                  </a:tcPr>
+                </a:tc>
+                <a:extLst>
+                  <a:ext uri="{0D108BD9-81ED-4DB2-BD59-A6C34878D82A}">
+                    <a16:rowId xmlns:a16="http://schemas.microsoft.com/office/drawing/2014/main" val="1420370465"/>
+                  </a:ext>
+                </a:extLst>
+              </a:tr>
+              <a:tr h="875337">
+                <a:tc>
+                  <a:txBody>
+                    <a:bodyPr/>
+                    <a:lstStyle/>
+                    <a:p>
+                      <a:pPr algn="l" fontAlgn="ctr">
+                        <a:buNone/>
+                      </a:pPr>
+                      <a:r>
+                        <a:rPr lang="ja-JP" altLang="en-US" sz="2800" dirty="0"/>
+                        <a:t> 非線形関係を学べる</a:t>
+                      </a:r>
+                      <a:endParaRPr lang="ja-JP" altLang="en-US" sz="2800" b="0" i="0" u="none" strike="noStrike" dirty="0">
+                        <a:solidFill>
+                          <a:srgbClr val="000000"/>
+                        </a:solidFill>
+                        <a:effectLst/>
+                        <a:latin typeface="游ゴシック" panose="020B0400000000000000" pitchFamily="50" charset="-128"/>
+                        <a:ea typeface="游ゴシック" panose="020B0400000000000000" pitchFamily="50" charset="-128"/>
+                      </a:endParaRPr>
+                    </a:p>
+                  </a:txBody>
+                  <a:tcPr marL="9525" marR="9525" marT="9525" marB="0" anchor="ctr">
+                    <a:lnL w="12700" cap="flat" cmpd="sng" algn="ctr">
+                      <a:solidFill>
+                        <a:schemeClr val="tx1"/>
+                      </a:solidFill>
+                      <a:prstDash val="solid"/>
+                      <a:round/>
+                      <a:headEnd type="none" w="med" len="med"/>
+                      <a:tailEnd type="none" w="med" len="med"/>
+                    </a:lnL>
+                    <a:lnR w="12700" cap="flat" cmpd="sng" algn="ctr">
+                      <a:solidFill>
+                        <a:schemeClr val="tx1"/>
+                      </a:solidFill>
+                      <a:prstDash val="solid"/>
+                      <a:round/>
+                      <a:headEnd type="none" w="med" len="med"/>
+                      <a:tailEnd type="none" w="med" len="med"/>
+                    </a:lnR>
+                    <a:lnT w="12700" cap="flat" cmpd="sng" algn="ctr">
+                      <a:solidFill>
+                        <a:schemeClr val="tx1"/>
+                      </a:solidFill>
+                      <a:prstDash val="solid"/>
+                      <a:round/>
+                      <a:headEnd type="none" w="med" len="med"/>
+                      <a:tailEnd type="none" w="med" len="med"/>
+                    </a:lnT>
+                    <a:lnB w="12700" cap="flat" cmpd="sng" algn="ctr">
+                      <a:solidFill>
+                        <a:schemeClr val="tx1"/>
+                      </a:solidFill>
+                      <a:prstDash val="solid"/>
+                      <a:round/>
+                      <a:headEnd type="none" w="med" len="med"/>
+                      <a:tailEnd type="none" w="med" len="med"/>
+                    </a:lnB>
+                    <a:solidFill>
+                      <a:schemeClr val="bg1"/>
+                    </a:solidFill>
+                  </a:tcPr>
+                </a:tc>
+                <a:extLst>
+                  <a:ext uri="{0D108BD9-81ED-4DB2-BD59-A6C34878D82A}">
+                    <a16:rowId xmlns:a16="http://schemas.microsoft.com/office/drawing/2014/main" val="30414892"/>
+                  </a:ext>
+                </a:extLst>
+              </a:tr>
+            </a:tbl>
+          </a:graphicData>
+        </a:graphic>
+      </p:graphicFrame>
+      <p:graphicFrame>
+        <p:nvGraphicFramePr>
+          <p:cNvPr id="5" name="表 4">
+            <a:extLst>
+              <a:ext uri="{FF2B5EF4-FFF2-40B4-BE49-F238E27FC236}">
+                <a16:creationId xmlns:a16="http://schemas.microsoft.com/office/drawing/2014/main" id="{AE9B09C5-ED3D-5FDA-073F-DB93A783BE38}"/>
+              </a:ext>
+            </a:extLst>
+          </p:cNvPr>
+          <p:cNvGraphicFramePr>
+            <a:graphicFrameLocks noGrp="1"/>
+          </p:cNvGraphicFramePr>
+          <p:nvPr>
+            <p:extLst>
+              <p:ext uri="{D42A27DB-BD31-4B8C-83A1-F6EECF244321}">
+                <p14:modId xmlns:p14="http://schemas.microsoft.com/office/powerpoint/2010/main" val="1804786111"/>
+              </p:ext>
+            </p:extLst>
+          </p:nvPr>
+        </p:nvGraphicFramePr>
+        <p:xfrm>
+          <a:off x="5843959" y="2166165"/>
+          <a:ext cx="2969728" cy="4467894"/>
+        </p:xfrm>
+        <a:graphic>
+          <a:graphicData uri="http://schemas.openxmlformats.org/drawingml/2006/table">
+            <a:tbl>
+              <a:tblPr>
+                <a:tableStyleId>{073A0DAA-6AF3-43AB-8588-CEC1D06C72B9}</a:tableStyleId>
+              </a:tblPr>
+              <a:tblGrid>
+                <a:gridCol w="2969728">
+                  <a:extLst>
+                    <a:ext uri="{9D8B030D-6E8A-4147-A177-3AD203B41FA5}">
+                      <a16:colId xmlns:a16="http://schemas.microsoft.com/office/drawing/2014/main" val="159393942"/>
+                    </a:ext>
+                  </a:extLst>
+                </a:gridCol>
+              </a:tblGrid>
+              <a:tr h="815037">
+                <a:tc>
+                  <a:txBody>
+                    <a:bodyPr/>
+                    <a:lstStyle/>
+                    <a:p>
+                      <a:pPr algn="l" fontAlgn="ctr">
+                        <a:buNone/>
+                      </a:pPr>
+                      <a:r>
+                        <a:rPr lang="ja-JP" altLang="en-US" sz="2800" u="none" strike="noStrike" dirty="0">
+                          <a:effectLst/>
+                        </a:rPr>
+                        <a:t> 音楽的特徴</a:t>
+                      </a:r>
+                      <a:endParaRPr lang="ja-JP" altLang="en-US" sz="2800" b="0" i="0" u="none" strike="noStrike" dirty="0">
+                        <a:solidFill>
+                          <a:srgbClr val="000000"/>
+                        </a:solidFill>
+                        <a:effectLst/>
+                        <a:latin typeface="游ゴシック" panose="020B0400000000000000" pitchFamily="50" charset="-128"/>
+                        <a:ea typeface="游ゴシック" panose="020B0400000000000000" pitchFamily="50" charset="-128"/>
+                      </a:endParaRPr>
+                    </a:p>
+                  </a:txBody>
+                  <a:tcPr marL="9525" marR="9525" marT="9525" marB="0" anchor="ctr">
+                    <a:lnL w="12700" cap="flat" cmpd="sng" algn="ctr">
+                      <a:solidFill>
+                        <a:schemeClr val="tx1"/>
+                      </a:solidFill>
+                      <a:prstDash val="solid"/>
+                      <a:round/>
+                      <a:headEnd type="none" w="med" len="med"/>
+                      <a:tailEnd type="none" w="med" len="med"/>
+                    </a:lnL>
+                    <a:lnR w="12700" cap="flat" cmpd="sng" algn="ctr">
+                      <a:solidFill>
+                        <a:schemeClr val="tx1"/>
+                      </a:solidFill>
+                      <a:prstDash val="solid"/>
+                      <a:round/>
+                      <a:headEnd type="none" w="med" len="med"/>
+                      <a:tailEnd type="none" w="med" len="med"/>
+                    </a:lnR>
+                    <a:lnT w="12700" cap="flat" cmpd="sng" algn="ctr">
+                      <a:solidFill>
+                        <a:schemeClr val="tx1"/>
+                      </a:solidFill>
+                      <a:prstDash val="solid"/>
+                      <a:round/>
+                      <a:headEnd type="none" w="med" len="med"/>
+                      <a:tailEnd type="none" w="med" len="med"/>
+                    </a:lnT>
+                    <a:lnB w="12700" cap="flat" cmpd="sng" algn="ctr">
+                      <a:solidFill>
+                        <a:schemeClr val="tx1"/>
+                      </a:solidFill>
+                      <a:prstDash val="solid"/>
+                      <a:round/>
+                      <a:headEnd type="none" w="med" len="med"/>
+                      <a:tailEnd type="none" w="med" len="med"/>
+                    </a:lnB>
+                    <a:solidFill>
+                      <a:schemeClr val="bg1"/>
+                    </a:solidFill>
+                  </a:tcPr>
+                </a:tc>
+                <a:extLst>
+                  <a:ext uri="{0D108BD9-81ED-4DB2-BD59-A6C34878D82A}">
+                    <a16:rowId xmlns:a16="http://schemas.microsoft.com/office/drawing/2014/main" val="3953469068"/>
+                  </a:ext>
+                </a:extLst>
+              </a:tr>
+              <a:tr h="815037">
+                <a:tc>
+                  <a:txBody>
+                    <a:bodyPr/>
+                    <a:lstStyle/>
+                    <a:p>
+                      <a:pPr algn="l" fontAlgn="ctr">
+                        <a:buNone/>
+                      </a:pPr>
+                      <a:r>
+                        <a:rPr lang="en-US" altLang="ja-JP" sz="2800" u="none" strike="noStrike" dirty="0">
+                          <a:effectLst/>
+                        </a:rPr>
+                        <a:t> Motion(</a:t>
+                      </a:r>
+                      <a:r>
+                        <a:rPr lang="ja-JP" altLang="en-US" sz="2800" u="none" strike="noStrike" dirty="0">
+                          <a:effectLst/>
+                        </a:rPr>
+                        <a:t>動き</a:t>
+                      </a:r>
+                      <a:r>
+                        <a:rPr lang="en-US" altLang="ja-JP" sz="2800" u="none" strike="noStrike" dirty="0">
+                          <a:effectLst/>
+                        </a:rPr>
+                        <a:t>)</a:t>
+                      </a:r>
+                      <a:endParaRPr lang="ja-JP" altLang="en-US" sz="2800" b="0" i="0" u="none" strike="noStrike" dirty="0">
+                        <a:solidFill>
+                          <a:srgbClr val="000000"/>
+                        </a:solidFill>
+                        <a:effectLst/>
+                        <a:latin typeface="游ゴシック" panose="020B0400000000000000" pitchFamily="50" charset="-128"/>
+                        <a:ea typeface="游ゴシック" panose="020B0400000000000000" pitchFamily="50" charset="-128"/>
+                      </a:endParaRPr>
+                    </a:p>
+                  </a:txBody>
+                  <a:tcPr marL="9525" marR="9525" marT="9525" marB="0" anchor="ctr">
+                    <a:lnL w="12700" cap="flat" cmpd="sng" algn="ctr">
+                      <a:solidFill>
+                        <a:schemeClr val="tx1"/>
+                      </a:solidFill>
+                      <a:prstDash val="solid"/>
+                      <a:round/>
+                      <a:headEnd type="none" w="med" len="med"/>
+                      <a:tailEnd type="none" w="med" len="med"/>
+                    </a:lnL>
+                    <a:lnR w="12700" cap="flat" cmpd="sng" algn="ctr">
+                      <a:solidFill>
+                        <a:schemeClr val="tx1"/>
+                      </a:solidFill>
+                      <a:prstDash val="solid"/>
+                      <a:round/>
+                      <a:headEnd type="none" w="med" len="med"/>
+                      <a:tailEnd type="none" w="med" len="med"/>
+                    </a:lnR>
+                    <a:lnT w="12700" cap="flat" cmpd="sng" algn="ctr">
+                      <a:solidFill>
+                        <a:schemeClr val="tx1"/>
+                      </a:solidFill>
+                      <a:prstDash val="solid"/>
+                      <a:round/>
+                      <a:headEnd type="none" w="med" len="med"/>
+                      <a:tailEnd type="none" w="med" len="med"/>
+                    </a:lnT>
+                    <a:lnB w="12700" cap="flat" cmpd="sng" algn="ctr">
+                      <a:solidFill>
+                        <a:schemeClr val="tx1"/>
+                      </a:solidFill>
+                      <a:prstDash val="solid"/>
+                      <a:round/>
+                      <a:headEnd type="none" w="med" len="med"/>
+                      <a:tailEnd type="none" w="med" len="med"/>
+                    </a:lnB>
+                    <a:solidFill>
+                      <a:schemeClr val="bg1"/>
+                    </a:solidFill>
+                  </a:tcPr>
+                </a:tc>
+                <a:extLst>
+                  <a:ext uri="{0D108BD9-81ED-4DB2-BD59-A6C34878D82A}">
+                    <a16:rowId xmlns:a16="http://schemas.microsoft.com/office/drawing/2014/main" val="2980872199"/>
+                  </a:ext>
+                </a:extLst>
+              </a:tr>
+              <a:tr h="963686">
+                <a:tc>
+                  <a:txBody>
+                    <a:bodyPr/>
+                    <a:lstStyle/>
+                    <a:p>
+                      <a:pPr algn="l" fontAlgn="ctr">
+                        <a:buNone/>
+                      </a:pPr>
+                      <a:r>
+                        <a:rPr lang="en-US" altLang="ja-JP" sz="2800" u="none" strike="noStrike" dirty="0">
+                          <a:effectLst/>
+                        </a:rPr>
+                        <a:t> Density(</a:t>
+                      </a:r>
+                      <a:r>
+                        <a:rPr lang="ja-JP" altLang="en-US" sz="2800" u="none" strike="noStrike" dirty="0">
+                          <a:effectLst/>
+                        </a:rPr>
+                        <a:t>密度</a:t>
+                      </a:r>
+                      <a:r>
+                        <a:rPr lang="en-US" altLang="ja-JP" sz="2800" u="none" strike="noStrike" dirty="0">
+                          <a:effectLst/>
+                        </a:rPr>
+                        <a:t>)</a:t>
+                      </a:r>
+                      <a:endParaRPr lang="ja-JP" altLang="en-US" sz="2800" b="0" i="0" u="none" strike="noStrike" dirty="0">
+                        <a:solidFill>
+                          <a:srgbClr val="000000"/>
+                        </a:solidFill>
+                        <a:effectLst/>
+                        <a:latin typeface="游ゴシック" panose="020B0400000000000000" pitchFamily="50" charset="-128"/>
+                        <a:ea typeface="游ゴシック" panose="020B0400000000000000" pitchFamily="50" charset="-128"/>
+                      </a:endParaRPr>
+                    </a:p>
+                  </a:txBody>
+                  <a:tcPr marL="9525" marR="9525" marT="9525" marB="0" anchor="ctr">
+                    <a:lnL w="12700" cap="flat" cmpd="sng" algn="ctr">
+                      <a:solidFill>
+                        <a:schemeClr val="tx1"/>
+                      </a:solidFill>
+                      <a:prstDash val="solid"/>
+                      <a:round/>
+                      <a:headEnd type="none" w="med" len="med"/>
+                      <a:tailEnd type="none" w="med" len="med"/>
+                    </a:lnL>
+                    <a:lnR w="12700" cap="flat" cmpd="sng" algn="ctr">
+                      <a:solidFill>
+                        <a:schemeClr val="tx1"/>
+                      </a:solidFill>
+                      <a:prstDash val="solid"/>
+                      <a:round/>
+                      <a:headEnd type="none" w="med" len="med"/>
+                      <a:tailEnd type="none" w="med" len="med"/>
+                    </a:lnR>
+                    <a:lnT w="12700" cap="flat" cmpd="sng" algn="ctr">
+                      <a:solidFill>
+                        <a:schemeClr val="tx1"/>
+                      </a:solidFill>
+                      <a:prstDash val="solid"/>
+                      <a:round/>
+                      <a:headEnd type="none" w="med" len="med"/>
+                      <a:tailEnd type="none" w="med" len="med"/>
+                    </a:lnT>
+                    <a:lnB w="12700" cap="flat" cmpd="sng" algn="ctr">
+                      <a:solidFill>
+                        <a:schemeClr val="tx1"/>
+                      </a:solidFill>
+                      <a:prstDash val="solid"/>
+                      <a:round/>
+                      <a:headEnd type="none" w="med" len="med"/>
+                      <a:tailEnd type="none" w="med" len="med"/>
+                    </a:lnB>
+                    <a:solidFill>
+                      <a:schemeClr val="bg1"/>
+                    </a:solidFill>
+                  </a:tcPr>
+                </a:tc>
+                <a:extLst>
+                  <a:ext uri="{0D108BD9-81ED-4DB2-BD59-A6C34878D82A}">
+                    <a16:rowId xmlns:a16="http://schemas.microsoft.com/office/drawing/2014/main" val="1056017188"/>
+                  </a:ext>
+                </a:extLst>
+              </a:tr>
+              <a:tr h="998797">
+                <a:tc>
+                  <a:txBody>
+                    <a:bodyPr/>
+                    <a:lstStyle/>
+                    <a:p>
+                      <a:pPr algn="l" fontAlgn="ctr">
+                        <a:buNone/>
+                      </a:pPr>
+                      <a:r>
+                        <a:rPr lang="en-US" altLang="ja-JP" sz="2800" u="none" strike="noStrike" dirty="0">
+                          <a:effectLst/>
+                        </a:rPr>
+                        <a:t> Order(</a:t>
+                      </a:r>
+                      <a:r>
+                        <a:rPr lang="ja-JP" altLang="en-US" sz="2800" u="none" strike="noStrike" dirty="0">
+                          <a:effectLst/>
+                        </a:rPr>
+                        <a:t>構造</a:t>
+                      </a:r>
+                      <a:r>
+                        <a:rPr lang="en-US" altLang="ja-JP" sz="2800" u="none" strike="noStrike" dirty="0">
+                          <a:effectLst/>
+                        </a:rPr>
+                        <a:t>)</a:t>
+                      </a:r>
+                      <a:endParaRPr lang="ja-JP" altLang="en-US" sz="2800" b="0" i="0" u="none" strike="noStrike" dirty="0">
+                        <a:solidFill>
+                          <a:srgbClr val="000000"/>
+                        </a:solidFill>
+                        <a:effectLst/>
+                        <a:latin typeface="游ゴシック" panose="020B0400000000000000" pitchFamily="50" charset="-128"/>
+                        <a:ea typeface="游ゴシック" panose="020B0400000000000000" pitchFamily="50" charset="-128"/>
+                      </a:endParaRPr>
+                    </a:p>
+                  </a:txBody>
+                  <a:tcPr marL="9525" marR="9525" marT="9525" marB="0" anchor="ctr">
+                    <a:lnL w="12700" cap="flat" cmpd="sng" algn="ctr">
+                      <a:solidFill>
+                        <a:schemeClr val="tx1"/>
+                      </a:solidFill>
+                      <a:prstDash val="solid"/>
+                      <a:round/>
+                      <a:headEnd type="none" w="med" len="med"/>
+                      <a:tailEnd type="none" w="med" len="med"/>
+                    </a:lnL>
+                    <a:lnR w="12700" cap="flat" cmpd="sng" algn="ctr">
+                      <a:solidFill>
+                        <a:schemeClr val="tx1"/>
+                      </a:solidFill>
+                      <a:prstDash val="solid"/>
+                      <a:round/>
+                      <a:headEnd type="none" w="med" len="med"/>
+                      <a:tailEnd type="none" w="med" len="med"/>
+                    </a:lnR>
+                    <a:lnT w="12700" cap="flat" cmpd="sng" algn="ctr">
+                      <a:solidFill>
+                        <a:schemeClr val="tx1"/>
+                      </a:solidFill>
+                      <a:prstDash val="solid"/>
+                      <a:round/>
+                      <a:headEnd type="none" w="med" len="med"/>
+                      <a:tailEnd type="none" w="med" len="med"/>
+                    </a:lnT>
+                    <a:lnB w="12700" cap="flat" cmpd="sng" algn="ctr">
+                      <a:solidFill>
+                        <a:schemeClr val="tx1"/>
+                      </a:solidFill>
+                      <a:prstDash val="solid"/>
+                      <a:round/>
+                      <a:headEnd type="none" w="med" len="med"/>
+                      <a:tailEnd type="none" w="med" len="med"/>
+                    </a:lnB>
+                    <a:solidFill>
+                      <a:schemeClr val="bg1"/>
+                    </a:solidFill>
+                  </a:tcPr>
+                </a:tc>
+                <a:extLst>
+                  <a:ext uri="{0D108BD9-81ED-4DB2-BD59-A6C34878D82A}">
+                    <a16:rowId xmlns:a16="http://schemas.microsoft.com/office/drawing/2014/main" val="1420370465"/>
+                  </a:ext>
+                </a:extLst>
+              </a:tr>
+              <a:tr h="875337">
+                <a:tc>
+                  <a:txBody>
+                    <a:bodyPr/>
+                    <a:lstStyle/>
+                    <a:p>
+                      <a:pPr algn="l" fontAlgn="ctr">
+                        <a:buNone/>
+                      </a:pPr>
+                      <a:r>
+                        <a:rPr lang="en-US" altLang="ja-JP" sz="2800" u="none" strike="noStrike" dirty="0">
+                          <a:effectLst/>
+                        </a:rPr>
+                        <a:t> Rhythm(</a:t>
+                      </a:r>
+                      <a:r>
+                        <a:rPr lang="ja-JP" altLang="en-US" sz="2800" u="none" strike="noStrike" dirty="0">
+                          <a:effectLst/>
+                        </a:rPr>
+                        <a:t>リズム</a:t>
+                      </a:r>
+                      <a:r>
+                        <a:rPr lang="en-US" altLang="ja-JP" sz="2800" u="none" strike="noStrike" dirty="0">
+                          <a:effectLst/>
+                        </a:rPr>
+                        <a:t>)</a:t>
+                      </a:r>
+                      <a:endParaRPr lang="ja-JP" altLang="en-US" sz="2800" b="0" i="0" u="none" strike="noStrike" dirty="0">
+                        <a:solidFill>
+                          <a:srgbClr val="000000"/>
+                        </a:solidFill>
+                        <a:effectLst/>
+                        <a:latin typeface="游ゴシック" panose="020B0400000000000000" pitchFamily="50" charset="-128"/>
+                        <a:ea typeface="游ゴシック" panose="020B0400000000000000" pitchFamily="50" charset="-128"/>
+                      </a:endParaRPr>
+                    </a:p>
+                  </a:txBody>
+                  <a:tcPr marL="9525" marR="9525" marT="9525" marB="0" anchor="ctr">
+                    <a:lnL w="12700" cap="flat" cmpd="sng" algn="ctr">
+                      <a:solidFill>
+                        <a:schemeClr val="tx1"/>
+                      </a:solidFill>
+                      <a:prstDash val="solid"/>
+                      <a:round/>
+                      <a:headEnd type="none" w="med" len="med"/>
+                      <a:tailEnd type="none" w="med" len="med"/>
+                    </a:lnL>
+                    <a:lnR w="12700" cap="flat" cmpd="sng" algn="ctr">
+                      <a:solidFill>
+                        <a:schemeClr val="tx1"/>
+                      </a:solidFill>
+                      <a:prstDash val="solid"/>
+                      <a:round/>
+                      <a:headEnd type="none" w="med" len="med"/>
+                      <a:tailEnd type="none" w="med" len="med"/>
+                    </a:lnR>
+                    <a:lnT w="12700" cap="flat" cmpd="sng" algn="ctr">
+                      <a:solidFill>
+                        <a:schemeClr val="tx1"/>
+                      </a:solidFill>
+                      <a:prstDash val="solid"/>
+                      <a:round/>
+                      <a:headEnd type="none" w="med" len="med"/>
+                      <a:tailEnd type="none" w="med" len="med"/>
+                    </a:lnT>
+                    <a:lnB w="12700" cap="flat" cmpd="sng" algn="ctr">
+                      <a:solidFill>
+                        <a:schemeClr val="tx1"/>
+                      </a:solidFill>
+                      <a:prstDash val="solid"/>
+                      <a:round/>
+                      <a:headEnd type="none" w="med" len="med"/>
+                      <a:tailEnd type="none" w="med" len="med"/>
+                    </a:lnB>
+                    <a:solidFill>
+                      <a:schemeClr val="bg1"/>
+                    </a:solidFill>
+                  </a:tcPr>
+                </a:tc>
+                <a:extLst>
+                  <a:ext uri="{0D108BD9-81ED-4DB2-BD59-A6C34878D82A}">
+                    <a16:rowId xmlns:a16="http://schemas.microsoft.com/office/drawing/2014/main" val="30414892"/>
+                  </a:ext>
+                </a:extLst>
+              </a:tr>
+            </a:tbl>
+          </a:graphicData>
+        </a:graphic>
+      </p:graphicFrame>
+      <p:graphicFrame>
+        <p:nvGraphicFramePr>
+          <p:cNvPr id="6" name="表 5">
+            <a:extLst>
+              <a:ext uri="{FF2B5EF4-FFF2-40B4-BE49-F238E27FC236}">
+                <a16:creationId xmlns:a16="http://schemas.microsoft.com/office/drawing/2014/main" id="{CC32230D-F851-A23D-E2A7-4F3B88B12772}"/>
+              </a:ext>
+            </a:extLst>
+          </p:cNvPr>
+          <p:cNvGraphicFramePr>
+            <a:graphicFrameLocks noGrp="1"/>
+          </p:cNvGraphicFramePr>
+          <p:nvPr>
+            <p:extLst>
+              <p:ext uri="{D42A27DB-BD31-4B8C-83A1-F6EECF244321}">
+                <p14:modId xmlns:p14="http://schemas.microsoft.com/office/powerpoint/2010/main" val="2184646310"/>
+              </p:ext>
+            </p:extLst>
+          </p:nvPr>
+        </p:nvGraphicFramePr>
+        <p:xfrm>
+          <a:off x="459159" y="2166165"/>
+          <a:ext cx="5384800" cy="4467894"/>
+        </p:xfrm>
+        <a:graphic>
+          <a:graphicData uri="http://schemas.openxmlformats.org/drawingml/2006/table">
+            <a:tbl>
+              <a:tblPr>
+                <a:tableStyleId>{073A0DAA-6AF3-43AB-8588-CEC1D06C72B9}</a:tableStyleId>
+              </a:tblPr>
+              <a:tblGrid>
+                <a:gridCol w="5384800">
+                  <a:extLst>
+                    <a:ext uri="{9D8B030D-6E8A-4147-A177-3AD203B41FA5}">
+                      <a16:colId xmlns:a16="http://schemas.microsoft.com/office/drawing/2014/main" val="159393942"/>
+                    </a:ext>
+                  </a:extLst>
+                </a:gridCol>
+              </a:tblGrid>
+              <a:tr h="815037">
+                <a:tc>
+                  <a:txBody>
+                    <a:bodyPr/>
+                    <a:lstStyle/>
+                    <a:p>
+                      <a:pPr algn="l" fontAlgn="ctr">
+                        <a:buNone/>
+                      </a:pPr>
+                      <a:r>
+                        <a:rPr lang="ja-JP" altLang="en-US" sz="2800" u="none" strike="noStrike" dirty="0">
+                          <a:effectLst/>
+                        </a:rPr>
+                        <a:t> 処理</a:t>
+                      </a:r>
+                      <a:endParaRPr lang="ja-JP" altLang="en-US" sz="2800" b="0" i="0" u="none" strike="noStrike" dirty="0">
+                        <a:solidFill>
+                          <a:srgbClr val="000000"/>
+                        </a:solidFill>
+                        <a:effectLst/>
+                        <a:latin typeface="游ゴシック" panose="020B0400000000000000" pitchFamily="50" charset="-128"/>
+                        <a:ea typeface="游ゴシック" panose="020B0400000000000000" pitchFamily="50" charset="-128"/>
+                      </a:endParaRPr>
+                    </a:p>
+                  </a:txBody>
+                  <a:tcPr marL="9525" marR="9525" marT="9525" marB="0" anchor="ctr">
+                    <a:lnL w="12700" cap="flat" cmpd="sng" algn="ctr">
+                      <a:solidFill>
+                        <a:schemeClr val="tx1"/>
+                      </a:solidFill>
+                      <a:prstDash val="solid"/>
+                      <a:round/>
+                      <a:headEnd type="none" w="med" len="med"/>
+                      <a:tailEnd type="none" w="med" len="med"/>
+                    </a:lnL>
+                    <a:lnR w="12700" cap="flat" cmpd="sng" algn="ctr">
+                      <a:solidFill>
+                        <a:schemeClr val="tx1"/>
+                      </a:solidFill>
+                      <a:prstDash val="solid"/>
+                      <a:round/>
+                      <a:headEnd type="none" w="med" len="med"/>
+                      <a:tailEnd type="none" w="med" len="med"/>
+                    </a:lnR>
+                    <a:lnT w="12700" cap="flat" cmpd="sng" algn="ctr">
+                      <a:solidFill>
+                        <a:schemeClr val="tx1"/>
+                      </a:solidFill>
+                      <a:prstDash val="solid"/>
+                      <a:round/>
+                      <a:headEnd type="none" w="med" len="med"/>
+                      <a:tailEnd type="none" w="med" len="med"/>
+                    </a:lnT>
+                    <a:lnB w="12700" cap="flat" cmpd="sng" algn="ctr">
+                      <a:solidFill>
+                        <a:schemeClr val="tx1"/>
+                      </a:solidFill>
+                      <a:prstDash val="solid"/>
+                      <a:round/>
+                      <a:headEnd type="none" w="med" len="med"/>
+                      <a:tailEnd type="none" w="med" len="med"/>
+                    </a:lnB>
+                    <a:solidFill>
+                      <a:schemeClr val="bg1"/>
+                    </a:solidFill>
+                  </a:tcPr>
+                </a:tc>
+                <a:extLst>
+                  <a:ext uri="{0D108BD9-81ED-4DB2-BD59-A6C34878D82A}">
+                    <a16:rowId xmlns:a16="http://schemas.microsoft.com/office/drawing/2014/main" val="3953469068"/>
+                  </a:ext>
+                </a:extLst>
+              </a:tr>
+              <a:tr h="815037">
+                <a:tc>
+                  <a:txBody>
+                    <a:bodyPr/>
+                    <a:lstStyle/>
+                    <a:p>
+                      <a:pPr algn="l" fontAlgn="ctr">
+                        <a:buNone/>
+                      </a:pPr>
+                      <a:r>
+                        <a:rPr lang="en-US" altLang="ja-JP" sz="2800" u="none" strike="noStrike" dirty="0">
+                          <a:effectLst/>
+                        </a:rPr>
+                        <a:t> </a:t>
+                      </a:r>
+                      <a:r>
+                        <a:rPr lang="en-US" altLang="ja-JP" sz="2800" u="none" strike="noStrike" dirty="0" err="1">
+                          <a:effectLst/>
+                        </a:rPr>
+                        <a:t>MusicXML</a:t>
+                      </a:r>
+                      <a:r>
+                        <a:rPr lang="ja-JP" altLang="en-US" sz="2800" u="none" strike="noStrike" dirty="0">
+                          <a:effectLst/>
+                        </a:rPr>
+                        <a:t>を</a:t>
+                      </a:r>
+                      <a:r>
+                        <a:rPr lang="en-US" altLang="ja-JP" sz="2800" u="none" strike="noStrike" dirty="0">
+                          <a:effectLst/>
+                        </a:rPr>
+                        <a:t>Music21</a:t>
+                      </a:r>
+                      <a:r>
+                        <a:rPr lang="ja-JP" altLang="en-US" sz="2800" u="none" strike="noStrike" dirty="0">
+                          <a:effectLst/>
+                        </a:rPr>
+                        <a:t>を用いて解析</a:t>
+                      </a:r>
+                      <a:endParaRPr lang="ja-JP" altLang="en-US" sz="2800" b="0" i="0" u="none" strike="noStrike" dirty="0">
+                        <a:solidFill>
+                          <a:srgbClr val="000000"/>
+                        </a:solidFill>
+                        <a:effectLst/>
+                        <a:latin typeface="游ゴシック" panose="020B0400000000000000" pitchFamily="50" charset="-128"/>
+                        <a:ea typeface="游ゴシック" panose="020B0400000000000000" pitchFamily="50" charset="-128"/>
+                      </a:endParaRPr>
+                    </a:p>
+                  </a:txBody>
+                  <a:tcPr marL="9525" marR="9525" marT="9525" marB="0" anchor="ctr">
+                    <a:lnL w="12700" cap="flat" cmpd="sng" algn="ctr">
+                      <a:solidFill>
+                        <a:schemeClr val="tx1"/>
+                      </a:solidFill>
+                      <a:prstDash val="solid"/>
+                      <a:round/>
+                      <a:headEnd type="none" w="med" len="med"/>
+                      <a:tailEnd type="none" w="med" len="med"/>
+                    </a:lnL>
+                    <a:lnR w="12700" cap="flat" cmpd="sng" algn="ctr">
+                      <a:solidFill>
+                        <a:schemeClr val="tx1"/>
+                      </a:solidFill>
+                      <a:prstDash val="solid"/>
+                      <a:round/>
+                      <a:headEnd type="none" w="med" len="med"/>
+                      <a:tailEnd type="none" w="med" len="med"/>
+                    </a:lnR>
+                    <a:lnT w="12700" cap="flat" cmpd="sng" algn="ctr">
+                      <a:solidFill>
+                        <a:schemeClr val="tx1"/>
+                      </a:solidFill>
+                      <a:prstDash val="solid"/>
+                      <a:round/>
+                      <a:headEnd type="none" w="med" len="med"/>
+                      <a:tailEnd type="none" w="med" len="med"/>
+                    </a:lnT>
+                    <a:lnB w="12700" cap="flat" cmpd="sng" algn="ctr">
+                      <a:solidFill>
+                        <a:schemeClr val="tx1"/>
+                      </a:solidFill>
+                      <a:prstDash val="solid"/>
+                      <a:round/>
+                      <a:headEnd type="none" w="med" len="med"/>
+                      <a:tailEnd type="none" w="med" len="med"/>
+                    </a:lnB>
+                    <a:solidFill>
+                      <a:schemeClr val="bg1"/>
+                    </a:solidFill>
+                  </a:tcPr>
+                </a:tc>
+                <a:extLst>
+                  <a:ext uri="{0D108BD9-81ED-4DB2-BD59-A6C34878D82A}">
+                    <a16:rowId xmlns:a16="http://schemas.microsoft.com/office/drawing/2014/main" val="2980872199"/>
+                  </a:ext>
+                </a:extLst>
+              </a:tr>
+              <a:tr h="963686">
+                <a:tc>
+                  <a:txBody>
+                    <a:bodyPr/>
+                    <a:lstStyle/>
+                    <a:p>
+                      <a:pPr algn="l" fontAlgn="ctr">
+                        <a:buNone/>
+                      </a:pPr>
+                      <a:r>
+                        <a:rPr lang="ja-JP" altLang="en-US" sz="2800" u="none" strike="noStrike" dirty="0">
+                          <a:effectLst/>
+                        </a:rPr>
+                        <a:t> 特徴量を</a:t>
+                      </a:r>
+                      <a:r>
+                        <a:rPr lang="en-US" altLang="ja-JP" sz="2800" u="none" strike="noStrike" dirty="0">
+                          <a:effectLst/>
+                        </a:rPr>
+                        <a:t>CSV</a:t>
+                      </a:r>
+                      <a:r>
+                        <a:rPr lang="ja-JP" altLang="en-US" sz="2800" u="none" strike="noStrike" dirty="0">
+                          <a:effectLst/>
+                        </a:rPr>
+                        <a:t>に集積</a:t>
+                      </a:r>
+                      <a:endParaRPr lang="ja-JP" altLang="en-US" sz="2800" b="0" i="0" u="none" strike="noStrike" dirty="0">
+                        <a:solidFill>
+                          <a:srgbClr val="000000"/>
+                        </a:solidFill>
+                        <a:effectLst/>
+                        <a:latin typeface="游ゴシック" panose="020B0400000000000000" pitchFamily="50" charset="-128"/>
+                        <a:ea typeface="游ゴシック" panose="020B0400000000000000" pitchFamily="50" charset="-128"/>
+                      </a:endParaRPr>
+                    </a:p>
+                  </a:txBody>
+                  <a:tcPr marL="9525" marR="9525" marT="9525" marB="0" anchor="ctr">
+                    <a:lnL w="12700" cap="flat" cmpd="sng" algn="ctr">
+                      <a:solidFill>
+                        <a:schemeClr val="tx1"/>
+                      </a:solidFill>
+                      <a:prstDash val="solid"/>
+                      <a:round/>
+                      <a:headEnd type="none" w="med" len="med"/>
+                      <a:tailEnd type="none" w="med" len="med"/>
+                    </a:lnL>
+                    <a:lnR w="12700" cap="flat" cmpd="sng" algn="ctr">
+                      <a:solidFill>
+                        <a:schemeClr val="tx1"/>
+                      </a:solidFill>
+                      <a:prstDash val="solid"/>
+                      <a:round/>
+                      <a:headEnd type="none" w="med" len="med"/>
+                      <a:tailEnd type="none" w="med" len="med"/>
+                    </a:lnR>
+                    <a:lnT w="12700" cap="flat" cmpd="sng" algn="ctr">
+                      <a:solidFill>
+                        <a:schemeClr val="tx1"/>
+                      </a:solidFill>
+                      <a:prstDash val="solid"/>
+                      <a:round/>
+                      <a:headEnd type="none" w="med" len="med"/>
+                      <a:tailEnd type="none" w="med" len="med"/>
+                    </a:lnT>
+                    <a:lnB w="12700" cap="flat" cmpd="sng" algn="ctr">
+                      <a:solidFill>
+                        <a:schemeClr val="tx1"/>
+                      </a:solidFill>
+                      <a:prstDash val="solid"/>
+                      <a:round/>
+                      <a:headEnd type="none" w="med" len="med"/>
+                      <a:tailEnd type="none" w="med" len="med"/>
+                    </a:lnB>
+                    <a:solidFill>
+                      <a:schemeClr val="bg1"/>
+                    </a:solidFill>
+                  </a:tcPr>
+                </a:tc>
+                <a:extLst>
+                  <a:ext uri="{0D108BD9-81ED-4DB2-BD59-A6C34878D82A}">
+                    <a16:rowId xmlns:a16="http://schemas.microsoft.com/office/drawing/2014/main" val="1056017188"/>
+                  </a:ext>
+                </a:extLst>
+              </a:tr>
+              <a:tr h="998797">
+                <a:tc>
+                  <a:txBody>
+                    <a:bodyPr/>
+                    <a:lstStyle/>
+                    <a:p>
+                      <a:pPr algn="l" fontAlgn="ctr">
+                        <a:buNone/>
+                      </a:pPr>
+                      <a:r>
+                        <a:rPr lang="ja-JP" altLang="en-US" sz="2800" u="none" strike="noStrike" dirty="0">
+                          <a:effectLst/>
+                        </a:rPr>
+                        <a:t> 特徴量から音楽的特徴を計算</a:t>
+                      </a:r>
+                      <a:endParaRPr lang="ja-JP" altLang="en-US" sz="2800" b="0" i="0" u="none" strike="noStrike" dirty="0">
+                        <a:solidFill>
+                          <a:srgbClr val="000000"/>
+                        </a:solidFill>
+                        <a:effectLst/>
+                        <a:latin typeface="游ゴシック" panose="020B0400000000000000" pitchFamily="50" charset="-128"/>
+                        <a:ea typeface="游ゴシック" panose="020B0400000000000000" pitchFamily="50" charset="-128"/>
+                      </a:endParaRPr>
+                    </a:p>
+                  </a:txBody>
+                  <a:tcPr marL="9525" marR="9525" marT="9525" marB="0" anchor="ctr">
+                    <a:lnL w="12700" cap="flat" cmpd="sng" algn="ctr">
+                      <a:solidFill>
+                        <a:schemeClr val="tx1"/>
+                      </a:solidFill>
+                      <a:prstDash val="solid"/>
+                      <a:round/>
+                      <a:headEnd type="none" w="med" len="med"/>
+                      <a:tailEnd type="none" w="med" len="med"/>
+                    </a:lnL>
+                    <a:lnR w="12700" cap="flat" cmpd="sng" algn="ctr">
+                      <a:solidFill>
+                        <a:schemeClr val="tx1"/>
+                      </a:solidFill>
+                      <a:prstDash val="solid"/>
+                      <a:round/>
+                      <a:headEnd type="none" w="med" len="med"/>
+                      <a:tailEnd type="none" w="med" len="med"/>
+                    </a:lnR>
+                    <a:lnT w="12700" cap="flat" cmpd="sng" algn="ctr">
+                      <a:solidFill>
+                        <a:schemeClr val="tx1"/>
+                      </a:solidFill>
+                      <a:prstDash val="solid"/>
+                      <a:round/>
+                      <a:headEnd type="none" w="med" len="med"/>
+                      <a:tailEnd type="none" w="med" len="med"/>
+                    </a:lnT>
+                    <a:lnB w="12700" cap="flat" cmpd="sng" algn="ctr">
+                      <a:solidFill>
+                        <a:schemeClr val="tx1"/>
+                      </a:solidFill>
+                      <a:prstDash val="solid"/>
+                      <a:round/>
+                      <a:headEnd type="none" w="med" len="med"/>
+                      <a:tailEnd type="none" w="med" len="med"/>
+                    </a:lnB>
+                    <a:solidFill>
+                      <a:schemeClr val="bg1"/>
+                    </a:solidFill>
+                  </a:tcPr>
+                </a:tc>
+                <a:extLst>
+                  <a:ext uri="{0D108BD9-81ED-4DB2-BD59-A6C34878D82A}">
+                    <a16:rowId xmlns:a16="http://schemas.microsoft.com/office/drawing/2014/main" val="1420370465"/>
+                  </a:ext>
+                </a:extLst>
+              </a:tr>
+              <a:tr h="875337">
+                <a:tc>
+                  <a:txBody>
+                    <a:bodyPr/>
+                    <a:lstStyle/>
+                    <a:p>
+                      <a:pPr algn="l" fontAlgn="ctr">
+                        <a:buNone/>
+                      </a:pPr>
+                      <a:r>
+                        <a:rPr lang="ja-JP" altLang="en-US" sz="2800" u="none" strike="noStrike" dirty="0">
+                          <a:effectLst/>
+                        </a:rPr>
+                        <a:t> 音楽的特徴を閾値から</a:t>
+                      </a:r>
+                      <a:r>
+                        <a:rPr lang="en-US" altLang="ja-JP" sz="2800" u="none" strike="noStrike" dirty="0">
+                          <a:effectLst/>
+                        </a:rPr>
+                        <a:t>Low/Middle/High</a:t>
+                      </a:r>
+                      <a:r>
+                        <a:rPr lang="ja-JP" altLang="en-US" sz="2800" u="none" strike="noStrike" dirty="0">
+                          <a:effectLst/>
+                        </a:rPr>
+                        <a:t>にタグつけする</a:t>
+                      </a:r>
+                      <a:endParaRPr lang="ja-JP" altLang="en-US" sz="2800" b="0" i="0" u="none" strike="noStrike" dirty="0">
+                        <a:solidFill>
+                          <a:srgbClr val="000000"/>
+                        </a:solidFill>
+                        <a:effectLst/>
+                        <a:latin typeface="游ゴシック" panose="020B0400000000000000" pitchFamily="50" charset="-128"/>
+                        <a:ea typeface="游ゴシック" panose="020B0400000000000000" pitchFamily="50" charset="-128"/>
+                      </a:endParaRPr>
+                    </a:p>
+                  </a:txBody>
+                  <a:tcPr marL="9525" marR="9525" marT="9525" marB="0" anchor="ctr">
+                    <a:lnL w="12700" cap="flat" cmpd="sng" algn="ctr">
+                      <a:solidFill>
+                        <a:schemeClr val="tx1"/>
+                      </a:solidFill>
+                      <a:prstDash val="solid"/>
+                      <a:round/>
+                      <a:headEnd type="none" w="med" len="med"/>
+                      <a:tailEnd type="none" w="med" len="med"/>
+                    </a:lnL>
+                    <a:lnR w="12700" cap="flat" cmpd="sng" algn="ctr">
+                      <a:solidFill>
+                        <a:schemeClr val="tx1"/>
+                      </a:solidFill>
+                      <a:prstDash val="solid"/>
+                      <a:round/>
+                      <a:headEnd type="none" w="med" len="med"/>
+                      <a:tailEnd type="none" w="med" len="med"/>
+                    </a:lnR>
+                    <a:lnT w="12700" cap="flat" cmpd="sng" algn="ctr">
+                      <a:solidFill>
+                        <a:schemeClr val="tx1"/>
+                      </a:solidFill>
+                      <a:prstDash val="solid"/>
+                      <a:round/>
+                      <a:headEnd type="none" w="med" len="med"/>
+                      <a:tailEnd type="none" w="med" len="med"/>
+                    </a:lnT>
+                    <a:lnB w="12700" cap="flat" cmpd="sng" algn="ctr">
+                      <a:solidFill>
+                        <a:schemeClr val="tx1"/>
+                      </a:solidFill>
+                      <a:prstDash val="solid"/>
+                      <a:round/>
+                      <a:headEnd type="none" w="med" len="med"/>
+                      <a:tailEnd type="none" w="med" len="med"/>
+                    </a:lnB>
+                    <a:solidFill>
+                      <a:schemeClr val="bg1"/>
+                    </a:solidFill>
+                  </a:tcPr>
+                </a:tc>
+                <a:extLst>
+                  <a:ext uri="{0D108BD9-81ED-4DB2-BD59-A6C34878D82A}">
+                    <a16:rowId xmlns:a16="http://schemas.microsoft.com/office/drawing/2014/main" val="30414892"/>
+                  </a:ext>
+                </a:extLst>
+              </a:tr>
+            </a:tbl>
+          </a:graphicData>
+        </a:graphic>
+      </p:graphicFrame>
+    </p:spTree>
+    <p:extLst>
+      <p:ext uri="{BB962C8B-B14F-4D97-AF65-F5344CB8AC3E}">
+        <p14:creationId xmlns:p14="http://schemas.microsoft.com/office/powerpoint/2010/main" val="427804714"/>
+      </p:ext>
+    </p:extLst>
+  </p:cSld>
+  <p:clrMapOvr>
+    <a:masterClrMapping/>
+  </p:clrMapOvr>
+</p:sld>
+</file>
+
+<file path=ppt/slides/slide11.xml><?xml version="1.0" encoding="utf-8"?>
+<p:sld xmlns:a="http://schemas.openxmlformats.org/drawingml/2006/main" xmlns:r="http://schemas.openxmlformats.org/officeDocument/2006/relationships" xmlns:p="http://schemas.openxmlformats.org/presentationml/2006/main">
+  <p:cSld>
+    <p:bg>
+      <p:bgPr>
+        <a:solidFill>
+          <a:schemeClr val="bg1"/>
+        </a:solidFill>
+        <a:effectLst/>
+      </p:bgPr>
+    </p:bg>
+    <p:spTree>
+      <p:nvGrpSpPr>
+        <p:cNvPr id="1" name="">
+          <a:extLst>
+            <a:ext uri="{FF2B5EF4-FFF2-40B4-BE49-F238E27FC236}">
+              <a16:creationId xmlns:a16="http://schemas.microsoft.com/office/drawing/2014/main" id="{DC26CFA2-05F5-EDF7-03EF-D784C54F9DA7}"/>
+            </a:ext>
+          </a:extLst>
+        </p:cNvPr>
+        <p:cNvGrpSpPr/>
+        <p:nvPr/>
+      </p:nvGrpSpPr>
+      <p:grpSpPr>
+        <a:xfrm>
+          <a:off x="0" y="0"/>
+          <a:ext cx="0" cy="0"/>
+          <a:chOff x="0" y="0"/>
+          <a:chExt cx="0" cy="0"/>
+        </a:xfrm>
+      </p:grpSpPr>
+      <p:sp>
+        <p:nvSpPr>
+          <p:cNvPr id="2" name="タイトル 1">
+            <a:extLst>
+              <a:ext uri="{FF2B5EF4-FFF2-40B4-BE49-F238E27FC236}">
+                <a16:creationId xmlns:a16="http://schemas.microsoft.com/office/drawing/2014/main" id="{F9525B7C-76D2-FB88-417B-800751D7E1E8}"/>
               </a:ext>
             </a:extLst>
           </p:cNvPr>
@@ -6421,7 +7936,678 @@
             <a:pPr algn="ctr"/>
             <a:r>
               <a:rPr kumimoji="1" lang="ja-JP" altLang="en-US" sz="6000" dirty="0"/>
-              <a:t>総評</a:t>
+              <a:t>制作スケジュール</a:t>
+            </a:r>
+          </a:p>
+        </p:txBody>
+      </p:sp>
+      <p:sp>
+        <p:nvSpPr>
+          <p:cNvPr id="4" name="テキスト ボックス 3">
+            <a:extLst>
+              <a:ext uri="{FF2B5EF4-FFF2-40B4-BE49-F238E27FC236}">
+                <a16:creationId xmlns:a16="http://schemas.microsoft.com/office/drawing/2014/main" id="{FCCA7EA8-DC3C-812C-28CE-DE960EFE166D}"/>
+              </a:ext>
+            </a:extLst>
+          </p:cNvPr>
+          <p:cNvSpPr txBox="1"/>
+          <p:nvPr/>
+        </p:nvSpPr>
+        <p:spPr>
+          <a:xfrm>
+            <a:off x="2085981" y="2581422"/>
+            <a:ext cx="7676328" cy="646331"/>
+          </a:xfrm>
+          <a:prstGeom prst="rect">
+            <a:avLst/>
+          </a:prstGeom>
+          <a:noFill/>
+        </p:spPr>
+        <p:txBody>
+          <a:bodyPr wrap="square" rtlCol="0">
+            <a:spAutoFit/>
+          </a:bodyPr>
+          <a:lstStyle/>
+          <a:p>
+            <a:r>
+              <a:rPr kumimoji="1" lang="en-US" altLang="ja-JP" dirty="0"/>
+              <a:t>Unity</a:t>
+            </a:r>
+            <a:r>
+              <a:rPr kumimoji="1" lang="ja-JP" altLang="en-US" dirty="0"/>
+              <a:t>で表示と管理をし、</a:t>
+            </a:r>
+            <a:r>
+              <a:rPr kumimoji="1" lang="en-US" altLang="ja-JP" dirty="0"/>
+              <a:t>Python</a:t>
+            </a:r>
+            <a:r>
+              <a:rPr kumimoji="1" lang="ja-JP" altLang="en-US" dirty="0"/>
+              <a:t>で楽譜データの処理、再生をする</a:t>
+            </a:r>
+            <a:endParaRPr kumimoji="1" lang="en-US" altLang="ja-JP" dirty="0"/>
+          </a:p>
+          <a:p>
+            <a:r>
+              <a:rPr kumimoji="1" lang="ja-JP" altLang="en-US" dirty="0"/>
+              <a:t>全体構成を計画。</a:t>
+            </a:r>
+          </a:p>
+        </p:txBody>
+      </p:sp>
+      <p:sp>
+        <p:nvSpPr>
+          <p:cNvPr id="5" name="正方形/長方形 4">
+            <a:extLst>
+              <a:ext uri="{FF2B5EF4-FFF2-40B4-BE49-F238E27FC236}">
+                <a16:creationId xmlns:a16="http://schemas.microsoft.com/office/drawing/2014/main" id="{B81D4DF6-D7E4-5DDC-4EFC-A79A932CB054}"/>
+              </a:ext>
+            </a:extLst>
+          </p:cNvPr>
+          <p:cNvSpPr/>
+          <p:nvPr/>
+        </p:nvSpPr>
+        <p:spPr>
+          <a:xfrm>
+            <a:off x="1968137" y="2478690"/>
+            <a:ext cx="7916091" cy="815222"/>
+          </a:xfrm>
+          <a:prstGeom prst="rect">
+            <a:avLst/>
+          </a:prstGeom>
+          <a:noFill/>
+        </p:spPr>
+        <p:style>
+          <a:lnRef idx="2">
+            <a:schemeClr val="accent1">
+              <a:shade val="15000"/>
+            </a:schemeClr>
+          </a:lnRef>
+          <a:fillRef idx="1">
+            <a:schemeClr val="accent1"/>
+          </a:fillRef>
+          <a:effectRef idx="0">
+            <a:schemeClr val="accent1"/>
+          </a:effectRef>
+          <a:fontRef idx="minor">
+            <a:schemeClr val="lt1"/>
+          </a:fontRef>
+        </p:style>
+        <p:txBody>
+          <a:bodyPr rtlCol="0" anchor="ctr"/>
+          <a:lstStyle/>
+          <a:p>
+            <a:pPr algn="ctr"/>
+            <a:endParaRPr kumimoji="1" lang="ja-JP" altLang="en-US" dirty="0"/>
+          </a:p>
+        </p:txBody>
+      </p:sp>
+      <p:sp>
+        <p:nvSpPr>
+          <p:cNvPr id="6" name="テキスト ボックス 5">
+            <a:extLst>
+              <a:ext uri="{FF2B5EF4-FFF2-40B4-BE49-F238E27FC236}">
+                <a16:creationId xmlns:a16="http://schemas.microsoft.com/office/drawing/2014/main" id="{6FEBEF86-22F4-893B-93A2-63943FC837D1}"/>
+              </a:ext>
+            </a:extLst>
+          </p:cNvPr>
+          <p:cNvSpPr txBox="1"/>
+          <p:nvPr/>
+        </p:nvSpPr>
+        <p:spPr>
+          <a:xfrm>
+            <a:off x="1045306" y="2478690"/>
+            <a:ext cx="731243" cy="646331"/>
+          </a:xfrm>
+          <a:prstGeom prst="rect">
+            <a:avLst/>
+          </a:prstGeom>
+          <a:noFill/>
+        </p:spPr>
+        <p:txBody>
+          <a:bodyPr wrap="square" rtlCol="0">
+            <a:spAutoFit/>
+          </a:bodyPr>
+          <a:lstStyle/>
+          <a:p>
+            <a:r>
+              <a:rPr kumimoji="1" lang="ja-JP" altLang="en-US" dirty="0"/>
+              <a:t>  </a:t>
+            </a:r>
+            <a:r>
+              <a:rPr kumimoji="1" lang="en-US" altLang="ja-JP" dirty="0"/>
+              <a:t>9</a:t>
+            </a:r>
+            <a:r>
+              <a:rPr kumimoji="1" lang="ja-JP" altLang="en-US" dirty="0"/>
+              <a:t>月</a:t>
+            </a:r>
+            <a:br>
+              <a:rPr kumimoji="1" lang="en-US" altLang="ja-JP" dirty="0"/>
+            </a:br>
+            <a:r>
+              <a:rPr kumimoji="1" lang="en-US" altLang="ja-JP" dirty="0"/>
+              <a:t>10</a:t>
+            </a:r>
+            <a:r>
+              <a:rPr kumimoji="1" lang="ja-JP" altLang="en-US" dirty="0"/>
+              <a:t>月</a:t>
+            </a:r>
+          </a:p>
+        </p:txBody>
+      </p:sp>
+      <p:sp>
+        <p:nvSpPr>
+          <p:cNvPr id="7" name="テキスト ボックス 6">
+            <a:extLst>
+              <a:ext uri="{FF2B5EF4-FFF2-40B4-BE49-F238E27FC236}">
+                <a16:creationId xmlns:a16="http://schemas.microsoft.com/office/drawing/2014/main" id="{6150B521-F5A9-4B04-24B2-7572CFA1C8BB}"/>
+              </a:ext>
+            </a:extLst>
+          </p:cNvPr>
+          <p:cNvSpPr txBox="1"/>
+          <p:nvPr/>
+        </p:nvSpPr>
+        <p:spPr>
+          <a:xfrm>
+            <a:off x="2085981" y="3536403"/>
+            <a:ext cx="7676328" cy="646331"/>
+          </a:xfrm>
+          <a:prstGeom prst="rect">
+            <a:avLst/>
+          </a:prstGeom>
+          <a:noFill/>
+        </p:spPr>
+        <p:txBody>
+          <a:bodyPr wrap="square" rtlCol="0">
+            <a:spAutoFit/>
+          </a:bodyPr>
+          <a:lstStyle/>
+          <a:p>
+            <a:r>
+              <a:rPr kumimoji="1" lang="en-US" altLang="ja-JP" dirty="0"/>
+              <a:t>Python</a:t>
+            </a:r>
+            <a:r>
+              <a:rPr kumimoji="1" lang="ja-JP" altLang="en-US" dirty="0"/>
+              <a:t>を起動するための仮想環境</a:t>
+            </a:r>
+            <a:r>
+              <a:rPr kumimoji="1" lang="en-US" altLang="ja-JP" dirty="0" err="1"/>
+              <a:t>micromamba</a:t>
+            </a:r>
+            <a:r>
+              <a:rPr kumimoji="1" lang="ja-JP" altLang="en-US" dirty="0"/>
+              <a:t>について学習。</a:t>
+            </a:r>
+            <a:endParaRPr kumimoji="1" lang="en-US" altLang="ja-JP" dirty="0"/>
+          </a:p>
+          <a:p>
+            <a:r>
+              <a:rPr kumimoji="1" lang="en-US" altLang="ja-JP" dirty="0"/>
+              <a:t>Unity</a:t>
+            </a:r>
+            <a:r>
+              <a:rPr kumimoji="1" lang="ja-JP" altLang="en-US" dirty="0"/>
+              <a:t>で起動できるように導入。</a:t>
+            </a:r>
+          </a:p>
+        </p:txBody>
+      </p:sp>
+      <p:sp>
+        <p:nvSpPr>
+          <p:cNvPr id="8" name="正方形/長方形 7">
+            <a:extLst>
+              <a:ext uri="{FF2B5EF4-FFF2-40B4-BE49-F238E27FC236}">
+                <a16:creationId xmlns:a16="http://schemas.microsoft.com/office/drawing/2014/main" id="{7D591E43-1382-94E5-860D-76379EB7E4EF}"/>
+              </a:ext>
+            </a:extLst>
+          </p:cNvPr>
+          <p:cNvSpPr/>
+          <p:nvPr/>
+        </p:nvSpPr>
+        <p:spPr>
+          <a:xfrm>
+            <a:off x="1968137" y="3492982"/>
+            <a:ext cx="7916091" cy="815222"/>
+          </a:xfrm>
+          <a:prstGeom prst="rect">
+            <a:avLst/>
+          </a:prstGeom>
+          <a:noFill/>
+        </p:spPr>
+        <p:style>
+          <a:lnRef idx="2">
+            <a:schemeClr val="accent1">
+              <a:shade val="15000"/>
+            </a:schemeClr>
+          </a:lnRef>
+          <a:fillRef idx="1">
+            <a:schemeClr val="accent1"/>
+          </a:fillRef>
+          <a:effectRef idx="0">
+            <a:schemeClr val="accent1"/>
+          </a:effectRef>
+          <a:fontRef idx="minor">
+            <a:schemeClr val="lt1"/>
+          </a:fontRef>
+        </p:style>
+        <p:txBody>
+          <a:bodyPr rtlCol="0" anchor="ctr"/>
+          <a:lstStyle/>
+          <a:p>
+            <a:pPr algn="ctr"/>
+            <a:endParaRPr kumimoji="1" lang="ja-JP" altLang="en-US" dirty="0"/>
+          </a:p>
+        </p:txBody>
+      </p:sp>
+      <p:sp>
+        <p:nvSpPr>
+          <p:cNvPr id="9" name="テキスト ボックス 8">
+            <a:extLst>
+              <a:ext uri="{FF2B5EF4-FFF2-40B4-BE49-F238E27FC236}">
+                <a16:creationId xmlns:a16="http://schemas.microsoft.com/office/drawing/2014/main" id="{548E707C-0B68-AEB3-DCFD-29032AE10C77}"/>
+              </a:ext>
+            </a:extLst>
+          </p:cNvPr>
+          <p:cNvSpPr txBox="1"/>
+          <p:nvPr/>
+        </p:nvSpPr>
+        <p:spPr>
+          <a:xfrm>
+            <a:off x="1045306" y="3491609"/>
+            <a:ext cx="731243" cy="369332"/>
+          </a:xfrm>
+          <a:prstGeom prst="rect">
+            <a:avLst/>
+          </a:prstGeom>
+          <a:noFill/>
+        </p:spPr>
+        <p:txBody>
+          <a:bodyPr wrap="square" rtlCol="0">
+            <a:spAutoFit/>
+          </a:bodyPr>
+          <a:lstStyle/>
+          <a:p>
+            <a:r>
+              <a:rPr kumimoji="1" lang="en-US" altLang="ja-JP" dirty="0"/>
+              <a:t>11</a:t>
+            </a:r>
+            <a:r>
+              <a:rPr kumimoji="1" lang="ja-JP" altLang="en-US" dirty="0"/>
+              <a:t>月</a:t>
+            </a:r>
+          </a:p>
+        </p:txBody>
+      </p:sp>
+      <p:sp>
+        <p:nvSpPr>
+          <p:cNvPr id="10" name="テキスト ボックス 9">
+            <a:extLst>
+              <a:ext uri="{FF2B5EF4-FFF2-40B4-BE49-F238E27FC236}">
+                <a16:creationId xmlns:a16="http://schemas.microsoft.com/office/drawing/2014/main" id="{9915D18C-28B3-FB42-ACD4-6A1423806838}"/>
+              </a:ext>
+            </a:extLst>
+          </p:cNvPr>
+          <p:cNvSpPr txBox="1"/>
+          <p:nvPr/>
+        </p:nvSpPr>
+        <p:spPr>
+          <a:xfrm>
+            <a:off x="2085981" y="4550695"/>
+            <a:ext cx="7676328" cy="646331"/>
+          </a:xfrm>
+          <a:prstGeom prst="rect">
+            <a:avLst/>
+          </a:prstGeom>
+          <a:noFill/>
+        </p:spPr>
+        <p:txBody>
+          <a:bodyPr wrap="square" rtlCol="0">
+            <a:spAutoFit/>
+          </a:bodyPr>
+          <a:lstStyle/>
+          <a:p>
+            <a:r>
+              <a:rPr kumimoji="1" lang="ja-JP" altLang="en-US" dirty="0"/>
+              <a:t>学習に用いる音楽データを収集。音楽データのラベル付けを実施。</a:t>
+            </a:r>
+            <a:br>
+              <a:rPr kumimoji="1" lang="en-US" altLang="ja-JP" dirty="0"/>
+            </a:br>
+            <a:r>
+              <a:rPr kumimoji="1" lang="ja-JP" altLang="en-US" dirty="0"/>
+              <a:t>感情判定に用いるモデルを作成。</a:t>
+            </a:r>
+          </a:p>
+        </p:txBody>
+      </p:sp>
+      <p:sp>
+        <p:nvSpPr>
+          <p:cNvPr id="11" name="正方形/長方形 10">
+            <a:extLst>
+              <a:ext uri="{FF2B5EF4-FFF2-40B4-BE49-F238E27FC236}">
+                <a16:creationId xmlns:a16="http://schemas.microsoft.com/office/drawing/2014/main" id="{717B578A-4CE4-04B5-C86C-C353B78AE50A}"/>
+              </a:ext>
+            </a:extLst>
+          </p:cNvPr>
+          <p:cNvSpPr/>
+          <p:nvPr/>
+        </p:nvSpPr>
+        <p:spPr>
+          <a:xfrm>
+            <a:off x="1968137" y="4505901"/>
+            <a:ext cx="7916091" cy="815222"/>
+          </a:xfrm>
+          <a:prstGeom prst="rect">
+            <a:avLst/>
+          </a:prstGeom>
+          <a:noFill/>
+        </p:spPr>
+        <p:style>
+          <a:lnRef idx="2">
+            <a:schemeClr val="accent1">
+              <a:shade val="15000"/>
+            </a:schemeClr>
+          </a:lnRef>
+          <a:fillRef idx="1">
+            <a:schemeClr val="accent1"/>
+          </a:fillRef>
+          <a:effectRef idx="0">
+            <a:schemeClr val="accent1"/>
+          </a:effectRef>
+          <a:fontRef idx="minor">
+            <a:schemeClr val="lt1"/>
+          </a:fontRef>
+        </p:style>
+        <p:txBody>
+          <a:bodyPr rtlCol="0" anchor="ctr"/>
+          <a:lstStyle/>
+          <a:p>
+            <a:pPr algn="ctr"/>
+            <a:endParaRPr kumimoji="1" lang="ja-JP" altLang="en-US" dirty="0"/>
+          </a:p>
+        </p:txBody>
+      </p:sp>
+      <p:sp>
+        <p:nvSpPr>
+          <p:cNvPr id="12" name="テキスト ボックス 11">
+            <a:extLst>
+              <a:ext uri="{FF2B5EF4-FFF2-40B4-BE49-F238E27FC236}">
+                <a16:creationId xmlns:a16="http://schemas.microsoft.com/office/drawing/2014/main" id="{A25DEACA-8AA8-B690-3843-4CB043E2B5D3}"/>
+              </a:ext>
+            </a:extLst>
+          </p:cNvPr>
+          <p:cNvSpPr txBox="1"/>
+          <p:nvPr/>
+        </p:nvSpPr>
+        <p:spPr>
+          <a:xfrm>
+            <a:off x="1045306" y="4504528"/>
+            <a:ext cx="731243" cy="369332"/>
+          </a:xfrm>
+          <a:prstGeom prst="rect">
+            <a:avLst/>
+          </a:prstGeom>
+          <a:noFill/>
+        </p:spPr>
+        <p:txBody>
+          <a:bodyPr wrap="square" rtlCol="0">
+            <a:spAutoFit/>
+          </a:bodyPr>
+          <a:lstStyle/>
+          <a:p>
+            <a:r>
+              <a:rPr kumimoji="1" lang="en-US" altLang="ja-JP" dirty="0"/>
+              <a:t>12</a:t>
+            </a:r>
+            <a:r>
+              <a:rPr kumimoji="1" lang="ja-JP" altLang="en-US" dirty="0"/>
+              <a:t>月</a:t>
+            </a:r>
+          </a:p>
+        </p:txBody>
+      </p:sp>
+      <p:sp>
+        <p:nvSpPr>
+          <p:cNvPr id="16" name="テキスト ボックス 15">
+            <a:extLst>
+              <a:ext uri="{FF2B5EF4-FFF2-40B4-BE49-F238E27FC236}">
+                <a16:creationId xmlns:a16="http://schemas.microsoft.com/office/drawing/2014/main" id="{BD77F8CF-3BF6-4DD2-8A25-DB08B7A12905}"/>
+              </a:ext>
+            </a:extLst>
+          </p:cNvPr>
+          <p:cNvSpPr txBox="1"/>
+          <p:nvPr/>
+        </p:nvSpPr>
+        <p:spPr>
+          <a:xfrm>
+            <a:off x="2085981" y="5549593"/>
+            <a:ext cx="7676328" cy="923330"/>
+          </a:xfrm>
+          <a:prstGeom prst="rect">
+            <a:avLst/>
+          </a:prstGeom>
+          <a:noFill/>
+        </p:spPr>
+        <p:txBody>
+          <a:bodyPr wrap="square" rtlCol="0">
+            <a:spAutoFit/>
+          </a:bodyPr>
+          <a:lstStyle/>
+          <a:p>
+            <a:r>
+              <a:rPr kumimoji="1" lang="en-US" altLang="ja-JP" dirty="0"/>
+              <a:t>Unity</a:t>
+            </a:r>
+            <a:r>
+              <a:rPr kumimoji="1" lang="ja-JP" altLang="en-US" dirty="0"/>
+              <a:t>内で作成した楽譜を</a:t>
+            </a:r>
+            <a:r>
+              <a:rPr kumimoji="1" lang="en-US" altLang="ja-JP" dirty="0"/>
+              <a:t>Python</a:t>
+            </a:r>
+            <a:r>
+              <a:rPr kumimoji="1" lang="ja-JP" altLang="en-US" dirty="0"/>
+              <a:t>で</a:t>
+            </a:r>
+            <a:r>
+              <a:rPr kumimoji="1" lang="en-US" altLang="ja-JP" dirty="0" err="1"/>
+              <a:t>MusicXML</a:t>
+            </a:r>
+            <a:r>
+              <a:rPr kumimoji="1" lang="ja-JP" altLang="en-US" dirty="0"/>
+              <a:t>ファイルに変換し、再生する処理及び</a:t>
+            </a:r>
+            <a:r>
+              <a:rPr kumimoji="1" lang="en-US" altLang="ja-JP" dirty="0" err="1"/>
+              <a:t>MusicXML</a:t>
+            </a:r>
+            <a:r>
+              <a:rPr kumimoji="1" lang="ja-JP" altLang="en-US" dirty="0"/>
+              <a:t>ファイルから楽譜を取り出し、五線譜に配置する処理を追加。</a:t>
+            </a:r>
+          </a:p>
+        </p:txBody>
+      </p:sp>
+      <p:sp>
+        <p:nvSpPr>
+          <p:cNvPr id="17" name="正方形/長方形 16">
+            <a:extLst>
+              <a:ext uri="{FF2B5EF4-FFF2-40B4-BE49-F238E27FC236}">
+                <a16:creationId xmlns:a16="http://schemas.microsoft.com/office/drawing/2014/main" id="{E9E4A585-A35E-74A2-2821-CC84F3040AA2}"/>
+              </a:ext>
+            </a:extLst>
+          </p:cNvPr>
+          <p:cNvSpPr/>
+          <p:nvPr/>
+        </p:nvSpPr>
+        <p:spPr>
+          <a:xfrm>
+            <a:off x="1968137" y="5511313"/>
+            <a:ext cx="7916091" cy="961609"/>
+          </a:xfrm>
+          <a:prstGeom prst="rect">
+            <a:avLst/>
+          </a:prstGeom>
+          <a:noFill/>
+        </p:spPr>
+        <p:style>
+          <a:lnRef idx="2">
+            <a:schemeClr val="accent1">
+              <a:shade val="15000"/>
+            </a:schemeClr>
+          </a:lnRef>
+          <a:fillRef idx="1">
+            <a:schemeClr val="accent1"/>
+          </a:fillRef>
+          <a:effectRef idx="0">
+            <a:schemeClr val="accent1"/>
+          </a:effectRef>
+          <a:fontRef idx="minor">
+            <a:schemeClr val="lt1"/>
+          </a:fontRef>
+        </p:style>
+        <p:txBody>
+          <a:bodyPr rtlCol="0" anchor="ctr"/>
+          <a:lstStyle/>
+          <a:p>
+            <a:pPr algn="ctr"/>
+            <a:endParaRPr kumimoji="1" lang="ja-JP" altLang="en-US" dirty="0"/>
+          </a:p>
+        </p:txBody>
+      </p:sp>
+      <p:sp>
+        <p:nvSpPr>
+          <p:cNvPr id="18" name="テキスト ボックス 17">
+            <a:extLst>
+              <a:ext uri="{FF2B5EF4-FFF2-40B4-BE49-F238E27FC236}">
+                <a16:creationId xmlns:a16="http://schemas.microsoft.com/office/drawing/2014/main" id="{D4EC0A28-B6FD-2C3A-97B7-B103E6D4356E}"/>
+              </a:ext>
+            </a:extLst>
+          </p:cNvPr>
+          <p:cNvSpPr txBox="1"/>
+          <p:nvPr/>
+        </p:nvSpPr>
+        <p:spPr>
+          <a:xfrm>
+            <a:off x="1045306" y="5549593"/>
+            <a:ext cx="731243" cy="646331"/>
+          </a:xfrm>
+          <a:prstGeom prst="rect">
+            <a:avLst/>
+          </a:prstGeom>
+          <a:noFill/>
+        </p:spPr>
+        <p:txBody>
+          <a:bodyPr wrap="square" rtlCol="0">
+            <a:spAutoFit/>
+          </a:bodyPr>
+          <a:lstStyle/>
+          <a:p>
+            <a:r>
+              <a:rPr kumimoji="1" lang="ja-JP" altLang="en-US" dirty="0"/>
+              <a:t> </a:t>
+            </a:r>
+            <a:r>
+              <a:rPr kumimoji="1" lang="en-US" altLang="ja-JP" dirty="0"/>
+              <a:t>1</a:t>
+            </a:r>
+            <a:r>
+              <a:rPr kumimoji="1" lang="ja-JP" altLang="en-US" dirty="0"/>
+              <a:t>月</a:t>
+            </a:r>
+            <a:endParaRPr kumimoji="1" lang="en-US" altLang="ja-JP" dirty="0"/>
+          </a:p>
+          <a:p>
+            <a:r>
+              <a:rPr kumimoji="1" lang="en-US" altLang="ja-JP" dirty="0"/>
+              <a:t> 2</a:t>
+            </a:r>
+            <a:r>
+              <a:rPr kumimoji="1" lang="ja-JP" altLang="en-US" dirty="0"/>
+              <a:t>月</a:t>
+            </a:r>
+          </a:p>
+        </p:txBody>
+      </p:sp>
+    </p:spTree>
+    <p:extLst>
+      <p:ext uri="{BB962C8B-B14F-4D97-AF65-F5344CB8AC3E}">
+        <p14:creationId xmlns:p14="http://schemas.microsoft.com/office/powerpoint/2010/main" val="2122248352"/>
+      </p:ext>
+    </p:extLst>
+  </p:cSld>
+  <p:clrMapOvr>
+    <a:masterClrMapping/>
+  </p:clrMapOvr>
+</p:sld>
+</file>
+
+<file path=ppt/slides/slide12.xml><?xml version="1.0" encoding="utf-8"?>
+<p:sld xmlns:a="http://schemas.openxmlformats.org/drawingml/2006/main" xmlns:r="http://schemas.openxmlformats.org/officeDocument/2006/relationships" xmlns:p="http://schemas.openxmlformats.org/presentationml/2006/main">
+  <p:cSld>
+    <p:bg>
+      <p:bgPr>
+        <a:solidFill>
+          <a:schemeClr val="bg1"/>
+        </a:solidFill>
+        <a:effectLst/>
+      </p:bgPr>
+    </p:bg>
+    <p:spTree>
+      <p:nvGrpSpPr>
+        <p:cNvPr id="1" name="">
+          <a:extLst>
+            <a:ext uri="{FF2B5EF4-FFF2-40B4-BE49-F238E27FC236}">
+              <a16:creationId xmlns:a16="http://schemas.microsoft.com/office/drawing/2014/main" id="{BC16B5BA-8D5D-D002-7628-9CB890544C37}"/>
+            </a:ext>
+          </a:extLst>
+        </p:cNvPr>
+        <p:cNvGrpSpPr/>
+        <p:nvPr/>
+      </p:nvGrpSpPr>
+      <p:grpSpPr>
+        <a:xfrm>
+          <a:off x="0" y="0"/>
+          <a:ext cx="0" cy="0"/>
+          <a:chOff x="0" y="0"/>
+          <a:chExt cx="0" cy="0"/>
+        </a:xfrm>
+      </p:grpSpPr>
+      <p:sp>
+        <p:nvSpPr>
+          <p:cNvPr id="2" name="タイトル 1">
+            <a:extLst>
+              <a:ext uri="{FF2B5EF4-FFF2-40B4-BE49-F238E27FC236}">
+                <a16:creationId xmlns:a16="http://schemas.microsoft.com/office/drawing/2014/main" id="{35BBA8E4-A752-7878-204A-D61058599E32}"/>
+              </a:ext>
+            </a:extLst>
+          </p:cNvPr>
+          <p:cNvSpPr>
+            <a:spLocks noGrp="1"/>
+          </p:cNvSpPr>
+          <p:nvPr>
+            <p:ph type="title"/>
+          </p:nvPr>
+        </p:nvSpPr>
+        <p:spPr>
+          <a:xfrm>
+            <a:off x="1285240" y="1050595"/>
+            <a:ext cx="8074815" cy="1618489"/>
+          </a:xfrm>
+        </p:spPr>
+        <p:txBody>
+          <a:bodyPr anchor="ctr">
+            <a:normAutofit/>
+          </a:bodyPr>
+          <a:lstStyle/>
+          <a:p>
+            <a:pPr algn="ctr"/>
+            <a:r>
+              <a:rPr kumimoji="1" lang="ja-JP" altLang="en-US" sz="6000" dirty="0"/>
+              <a:t>結果</a:t>
             </a:r>
           </a:p>
         </p:txBody>
@@ -6431,7 +8617,7 @@
           <p:cNvPr id="3" name="コンテンツ プレースホルダー 2">
             <a:extLst>
               <a:ext uri="{FF2B5EF4-FFF2-40B4-BE49-F238E27FC236}">
-                <a16:creationId xmlns:a16="http://schemas.microsoft.com/office/drawing/2014/main" id="{602F7124-29A1-C17D-5188-23CE37AE9DF4}"/>
+                <a16:creationId xmlns:a16="http://schemas.microsoft.com/office/drawing/2014/main" id="{F4FE5BD3-3E66-552B-2027-8377C0FA016F}"/>
               </a:ext>
             </a:extLst>
           </p:cNvPr>
@@ -6444,8 +8630,8 @@
         </p:nvSpPr>
         <p:spPr>
           <a:xfrm>
-            <a:off x="1285240" y="2969469"/>
-            <a:ext cx="8074815" cy="2800395"/>
+            <a:off x="711200" y="2669084"/>
+            <a:ext cx="9260114" cy="3760745"/>
           </a:xfrm>
         </p:spPr>
         <p:txBody>
@@ -6454,14 +8640,389 @@
           </a:bodyPr>
           <a:lstStyle/>
           <a:p>
-            <a:endParaRPr kumimoji="1" lang="ja-JP" altLang="en-US" sz="2400" dirty="0"/>
+            <a:pPr marL="0" indent="0">
+              <a:buNone/>
+            </a:pPr>
+            <a:r>
+              <a:rPr lang="ja-JP" altLang="en-US" sz="2800" dirty="0"/>
+              <a:t>・五線譜に配置した音符から、</a:t>
+            </a:r>
+            <a:r>
+              <a:rPr lang="en-US" altLang="ja-JP" sz="2800" dirty="0" err="1"/>
+              <a:t>MusicXML</a:t>
+            </a:r>
+            <a:r>
+              <a:rPr lang="ja-JP" altLang="en-US" sz="2800" dirty="0"/>
+              <a:t>ファイルに</a:t>
+            </a:r>
+            <a:endParaRPr lang="en-US" altLang="ja-JP" sz="2800" dirty="0"/>
+          </a:p>
+          <a:p>
+            <a:pPr marL="0" indent="0">
+              <a:buNone/>
+            </a:pPr>
+            <a:r>
+              <a:rPr lang="ja-JP" altLang="en-US" sz="2800" dirty="0"/>
+              <a:t>変換する工程を作成した。</a:t>
+            </a:r>
+            <a:endParaRPr lang="en-US" altLang="ja-JP" sz="2800" dirty="0"/>
+          </a:p>
+          <a:p>
+            <a:pPr marL="0" indent="0">
+              <a:buNone/>
+            </a:pPr>
+            <a:r>
+              <a:rPr lang="ja-JP" altLang="en-US" sz="2800" dirty="0"/>
+              <a:t>・</a:t>
+            </a:r>
+            <a:r>
+              <a:rPr lang="en-US" altLang="ja-JP" sz="2800" dirty="0" err="1"/>
+              <a:t>MusicXML</a:t>
+            </a:r>
+            <a:r>
+              <a:rPr lang="ja-JP" altLang="en-US" sz="2800" dirty="0"/>
+              <a:t>から感情判定を行う事に成功した。</a:t>
+            </a:r>
+            <a:endParaRPr lang="en-US" altLang="ja-JP" sz="2800" dirty="0"/>
+          </a:p>
+          <a:p>
+            <a:pPr marL="0" indent="0">
+              <a:buNone/>
+            </a:pPr>
+            <a:r>
+              <a:rPr lang="ja-JP" altLang="en-US" sz="2800" dirty="0"/>
+              <a:t>・</a:t>
+            </a:r>
+            <a:r>
+              <a:rPr lang="en-US" altLang="ja-JP" sz="2800" dirty="0"/>
+              <a:t>C#</a:t>
+            </a:r>
+            <a:r>
+              <a:rPr lang="ja-JP" altLang="en-US" sz="2800" dirty="0"/>
+              <a:t>から仮想環境を動かす事に成功した。</a:t>
+            </a:r>
+            <a:endParaRPr lang="en-US" altLang="ja-JP" sz="2800" dirty="0"/>
           </a:p>
         </p:txBody>
       </p:sp>
     </p:spTree>
     <p:extLst>
       <p:ext uri="{BB962C8B-B14F-4D97-AF65-F5344CB8AC3E}">
-        <p14:creationId xmlns:p14="http://schemas.microsoft.com/office/powerpoint/2010/main" val="3792764140"/>
+        <p14:creationId xmlns:p14="http://schemas.microsoft.com/office/powerpoint/2010/main" val="2027774625"/>
+      </p:ext>
+    </p:extLst>
+  </p:cSld>
+  <p:clrMapOvr>
+    <a:masterClrMapping/>
+  </p:clrMapOvr>
+</p:sld>
+</file>
+
+<file path=ppt/slides/slide13.xml><?xml version="1.0" encoding="utf-8"?>
+<p:sld xmlns:a="http://schemas.openxmlformats.org/drawingml/2006/main" xmlns:r="http://schemas.openxmlformats.org/officeDocument/2006/relationships" xmlns:p="http://schemas.openxmlformats.org/presentationml/2006/main">
+  <p:cSld>
+    <p:bg>
+      <p:bgPr>
+        <a:solidFill>
+          <a:schemeClr val="bg1"/>
+        </a:solidFill>
+        <a:effectLst/>
+      </p:bgPr>
+    </p:bg>
+    <p:spTree>
+      <p:nvGrpSpPr>
+        <p:cNvPr id="1" name="">
+          <a:extLst>
+            <a:ext uri="{FF2B5EF4-FFF2-40B4-BE49-F238E27FC236}">
+              <a16:creationId xmlns:a16="http://schemas.microsoft.com/office/drawing/2014/main" id="{6F02C121-BEBF-3614-D3E5-1126145A3343}"/>
+            </a:ext>
+          </a:extLst>
+        </p:cNvPr>
+        <p:cNvGrpSpPr/>
+        <p:nvPr/>
+      </p:nvGrpSpPr>
+      <p:grpSpPr>
+        <a:xfrm>
+          <a:off x="0" y="0"/>
+          <a:ext cx="0" cy="0"/>
+          <a:chOff x="0" y="0"/>
+          <a:chExt cx="0" cy="0"/>
+        </a:xfrm>
+      </p:grpSpPr>
+      <p:sp>
+        <p:nvSpPr>
+          <p:cNvPr id="2" name="タイトル 1">
+            <a:extLst>
+              <a:ext uri="{FF2B5EF4-FFF2-40B4-BE49-F238E27FC236}">
+                <a16:creationId xmlns:a16="http://schemas.microsoft.com/office/drawing/2014/main" id="{7DF9FAAA-42E3-DC5B-8611-915A0B59EE48}"/>
+              </a:ext>
+            </a:extLst>
+          </p:cNvPr>
+          <p:cNvSpPr>
+            <a:spLocks noGrp="1"/>
+          </p:cNvSpPr>
+          <p:nvPr>
+            <p:ph type="title"/>
+          </p:nvPr>
+        </p:nvSpPr>
+        <p:spPr>
+          <a:xfrm>
+            <a:off x="1285240" y="1050595"/>
+            <a:ext cx="8074815" cy="1618489"/>
+          </a:xfrm>
+        </p:spPr>
+        <p:txBody>
+          <a:bodyPr anchor="ctr">
+            <a:normAutofit/>
+          </a:bodyPr>
+          <a:lstStyle/>
+          <a:p>
+            <a:pPr algn="ctr"/>
+            <a:r>
+              <a:rPr lang="ja-JP" altLang="en-US" sz="6000" dirty="0"/>
+              <a:t>課題・考察</a:t>
+            </a:r>
+            <a:endParaRPr kumimoji="1" lang="ja-JP" altLang="en-US" sz="6000" dirty="0"/>
+          </a:p>
+        </p:txBody>
+      </p:sp>
+      <p:sp>
+        <p:nvSpPr>
+          <p:cNvPr id="3" name="コンテンツ プレースホルダー 2">
+            <a:extLst>
+              <a:ext uri="{FF2B5EF4-FFF2-40B4-BE49-F238E27FC236}">
+                <a16:creationId xmlns:a16="http://schemas.microsoft.com/office/drawing/2014/main" id="{7E56B6F6-501B-8275-BCE5-9BFCC1E40C40}"/>
+              </a:ext>
+            </a:extLst>
+          </p:cNvPr>
+          <p:cNvSpPr>
+            <a:spLocks noGrp="1"/>
+          </p:cNvSpPr>
+          <p:nvPr>
+            <p:ph idx="1"/>
+          </p:nvPr>
+        </p:nvSpPr>
+        <p:spPr>
+          <a:xfrm>
+            <a:off x="711200" y="2669084"/>
+            <a:ext cx="9260114" cy="3760745"/>
+          </a:xfrm>
+        </p:spPr>
+        <p:txBody>
+          <a:bodyPr anchor="t">
+            <a:normAutofit/>
+          </a:bodyPr>
+          <a:lstStyle/>
+          <a:p>
+            <a:pPr>
+              <a:buFont typeface="Wingdings" panose="05000000000000000000" pitchFamily="2" charset="2"/>
+              <a:buChar char="l"/>
+            </a:pPr>
+            <a:r>
+              <a:rPr lang="ja-JP" altLang="en-US" sz="2800" dirty="0"/>
+              <a:t>そもそもの学習元の数が少なかった。</a:t>
+            </a:r>
+            <a:endParaRPr lang="en-US" altLang="ja-JP" sz="2800" dirty="0"/>
+          </a:p>
+          <a:p>
+            <a:pPr lvl="1">
+              <a:buFont typeface="Wingdings" panose="05000000000000000000" pitchFamily="2" charset="2"/>
+              <a:buChar char="l"/>
+            </a:pPr>
+            <a:r>
+              <a:rPr lang="ja-JP" altLang="en-US" sz="2400" dirty="0"/>
+              <a:t>・約</a:t>
+            </a:r>
+            <a:r>
+              <a:rPr lang="en-US" altLang="ja-JP" sz="2400" dirty="0"/>
+              <a:t>30</a:t>
+            </a:r>
+            <a:r>
+              <a:rPr lang="ja-JP" altLang="en-US" sz="2400" dirty="0"/>
+              <a:t>曲からイントロ、サビ、間奏で</a:t>
+            </a:r>
+            <a:r>
+              <a:rPr lang="en-US" altLang="ja-JP" sz="2400" dirty="0"/>
+              <a:t>90</a:t>
+            </a:r>
+            <a:r>
+              <a:rPr lang="ja-JP" altLang="en-US" sz="2400" dirty="0"/>
+              <a:t>個ほど生成しそこから感情が判定できなかった物を省いた。</a:t>
+            </a:r>
+            <a:endParaRPr lang="en-US" altLang="ja-JP" sz="2600" dirty="0"/>
+          </a:p>
+          <a:p>
+            <a:pPr>
+              <a:buFont typeface="Wingdings" panose="05000000000000000000" pitchFamily="2" charset="2"/>
+              <a:buChar char="l"/>
+            </a:pPr>
+            <a:r>
+              <a:rPr lang="ja-JP" altLang="en-US" sz="2800" dirty="0"/>
+              <a:t>感情をタグ付けした数に偏りがあり判定制度が微妙。</a:t>
+            </a:r>
+            <a:endParaRPr lang="en-US" altLang="ja-JP" sz="2800" dirty="0"/>
+          </a:p>
+          <a:p>
+            <a:pPr>
+              <a:buFont typeface="Wingdings" panose="05000000000000000000" pitchFamily="2" charset="2"/>
+              <a:buChar char="l"/>
+            </a:pPr>
+            <a:r>
+              <a:rPr lang="ja-JP" altLang="en-US" sz="2800" dirty="0"/>
+              <a:t>技術的な問題で主旋律のみで感情判定モデルを生成したため、パートを問わず主旋律として扱っている。</a:t>
+            </a:r>
+            <a:endParaRPr lang="en-US" altLang="ja-JP" sz="2800" dirty="0"/>
+          </a:p>
+        </p:txBody>
+      </p:sp>
+    </p:spTree>
+    <p:extLst>
+      <p:ext uri="{BB962C8B-B14F-4D97-AF65-F5344CB8AC3E}">
+        <p14:creationId xmlns:p14="http://schemas.microsoft.com/office/powerpoint/2010/main" val="3722333255"/>
+      </p:ext>
+    </p:extLst>
+  </p:cSld>
+  <p:clrMapOvr>
+    <a:masterClrMapping/>
+  </p:clrMapOvr>
+</p:sld>
+</file>
+
+<file path=ppt/slides/slide14.xml><?xml version="1.0" encoding="utf-8"?>
+<p:sld xmlns:a="http://schemas.openxmlformats.org/drawingml/2006/main" xmlns:r="http://schemas.openxmlformats.org/officeDocument/2006/relationships" xmlns:p="http://schemas.openxmlformats.org/presentationml/2006/main">
+  <p:cSld>
+    <p:bg>
+      <p:bgPr>
+        <a:solidFill>
+          <a:schemeClr val="bg1"/>
+        </a:solidFill>
+        <a:effectLst/>
+      </p:bgPr>
+    </p:bg>
+    <p:spTree>
+      <p:nvGrpSpPr>
+        <p:cNvPr id="1" name="">
+          <a:extLst>
+            <a:ext uri="{FF2B5EF4-FFF2-40B4-BE49-F238E27FC236}">
+              <a16:creationId xmlns:a16="http://schemas.microsoft.com/office/drawing/2014/main" id="{8871D37F-FD28-C9DC-9519-3E4BC0A6097D}"/>
+            </a:ext>
+          </a:extLst>
+        </p:cNvPr>
+        <p:cNvGrpSpPr/>
+        <p:nvPr/>
+      </p:nvGrpSpPr>
+      <p:grpSpPr>
+        <a:xfrm>
+          <a:off x="0" y="0"/>
+          <a:ext cx="0" cy="0"/>
+          <a:chOff x="0" y="0"/>
+          <a:chExt cx="0" cy="0"/>
+        </a:xfrm>
+      </p:grpSpPr>
+      <p:sp>
+        <p:nvSpPr>
+          <p:cNvPr id="2" name="タイトル 1">
+            <a:extLst>
+              <a:ext uri="{FF2B5EF4-FFF2-40B4-BE49-F238E27FC236}">
+                <a16:creationId xmlns:a16="http://schemas.microsoft.com/office/drawing/2014/main" id="{01B0D950-6A21-093F-BCA9-414BA9BF98C4}"/>
+              </a:ext>
+            </a:extLst>
+          </p:cNvPr>
+          <p:cNvSpPr>
+            <a:spLocks noGrp="1"/>
+          </p:cNvSpPr>
+          <p:nvPr>
+            <p:ph type="title"/>
+          </p:nvPr>
+        </p:nvSpPr>
+        <p:spPr>
+          <a:xfrm>
+            <a:off x="1285240" y="1050595"/>
+            <a:ext cx="8074815" cy="1618489"/>
+          </a:xfrm>
+        </p:spPr>
+        <p:txBody>
+          <a:bodyPr anchor="ctr">
+            <a:normAutofit/>
+          </a:bodyPr>
+          <a:lstStyle/>
+          <a:p>
+            <a:pPr algn="ctr"/>
+            <a:r>
+              <a:rPr kumimoji="1" lang="ja-JP" altLang="en-US" sz="6000" dirty="0"/>
+              <a:t>総評</a:t>
+            </a:r>
+          </a:p>
+        </p:txBody>
+      </p:sp>
+      <p:sp>
+        <p:nvSpPr>
+          <p:cNvPr id="3" name="コンテンツ プレースホルダー 2">
+            <a:extLst>
+              <a:ext uri="{FF2B5EF4-FFF2-40B4-BE49-F238E27FC236}">
+                <a16:creationId xmlns:a16="http://schemas.microsoft.com/office/drawing/2014/main" id="{B32E7216-1290-E539-FEF5-D01888BC2CD7}"/>
+              </a:ext>
+            </a:extLst>
+          </p:cNvPr>
+          <p:cNvSpPr>
+            <a:spLocks noGrp="1"/>
+          </p:cNvSpPr>
+          <p:nvPr>
+            <p:ph idx="1"/>
+          </p:nvPr>
+        </p:nvSpPr>
+        <p:spPr>
+          <a:xfrm>
+            <a:off x="711200" y="2669084"/>
+            <a:ext cx="9260114" cy="3760745"/>
+          </a:xfrm>
+        </p:spPr>
+        <p:txBody>
+          <a:bodyPr anchor="t">
+            <a:normAutofit/>
+          </a:bodyPr>
+          <a:lstStyle/>
+          <a:p>
+            <a:r>
+              <a:rPr lang="ja-JP" altLang="en-US" sz="2800" dirty="0"/>
+              <a:t>音楽分析とゲーム進行を統合した。</a:t>
+            </a:r>
+            <a:endParaRPr lang="en-US" altLang="ja-JP" sz="2800" dirty="0"/>
+          </a:p>
+          <a:p>
+            <a:r>
+              <a:rPr lang="en-US" altLang="ja-JP" sz="2800" dirty="0" err="1"/>
+              <a:t>MusicXML</a:t>
+            </a:r>
+            <a:r>
+              <a:rPr lang="en-US" altLang="ja-JP" sz="2800" dirty="0"/>
+              <a:t> → </a:t>
+            </a:r>
+            <a:r>
+              <a:rPr lang="ja-JP" altLang="en-US" sz="2800" dirty="0"/>
+              <a:t>感情 → ゲーム用のタグつけを実現できた</a:t>
+            </a:r>
+            <a:endParaRPr lang="en-US" altLang="ja-JP" sz="2800" dirty="0"/>
+          </a:p>
+          <a:p>
+            <a:r>
+              <a:rPr lang="ja-JP" altLang="en-US" sz="2800" dirty="0"/>
+              <a:t>現在のモデルは主旋律のみを入力として生成・判定を行っているが、より音楽的な特徴を反映するため、今後は主旋律と副旋律の組み合わせを統合した判定手法へ拡張したい。</a:t>
+            </a:r>
+            <a:endParaRPr lang="en-US" altLang="ja-JP" sz="2800" dirty="0"/>
+          </a:p>
+          <a:p>
+            <a:pPr marL="0" indent="0">
+              <a:buNone/>
+            </a:pPr>
+            <a:endParaRPr lang="en-US" altLang="ja-JP" sz="2800" dirty="0"/>
+          </a:p>
+        </p:txBody>
+      </p:sp>
+    </p:spTree>
+    <p:extLst>
+      <p:ext uri="{BB962C8B-B14F-4D97-AF65-F5344CB8AC3E}">
+        <p14:creationId xmlns:p14="http://schemas.microsoft.com/office/powerpoint/2010/main" val="3490763829"/>
       </p:ext>
     </p:extLst>
   </p:cSld>
@@ -6514,22 +9075,22 @@
         </p:nvSpPr>
         <p:spPr>
           <a:xfrm>
-            <a:off x="2058592" y="501955"/>
-            <a:ext cx="8074815" cy="1618489"/>
+            <a:off x="677334" y="609600"/>
+            <a:ext cx="8596668" cy="1320800"/>
           </a:xfrm>
         </p:spPr>
         <p:txBody>
-          <a:bodyPr anchor="ctr">
+          <a:bodyPr anchor="t">
             <a:normAutofit/>
           </a:bodyPr>
           <a:lstStyle/>
           <a:p>
             <a:pPr algn="ctr"/>
             <a:r>
-              <a:rPr lang="ja-JP" altLang="en-US" sz="6000" dirty="0"/>
+              <a:rPr lang="ja-JP" altLang="en-US" sz="5400" dirty="0"/>
               <a:t>概要</a:t>
             </a:r>
-            <a:endParaRPr kumimoji="1" lang="ja-JP" altLang="en-US" sz="6000" dirty="0"/>
+            <a:endParaRPr kumimoji="1" lang="ja-JP" altLang="en-US" sz="5400" dirty="0"/>
           </a:p>
         </p:txBody>
       </p:sp>
@@ -6551,13 +9112,13 @@
         </p:nvSpPr>
         <p:spPr>
           <a:xfrm>
-            <a:off x="1285240" y="2502569"/>
-            <a:ext cx="9864023" cy="3267296"/>
+            <a:off x="841179" y="1930400"/>
+            <a:ext cx="2934714" cy="4336464"/>
           </a:xfrm>
         </p:spPr>
         <p:txBody>
-          <a:bodyPr anchor="t">
-            <a:normAutofit/>
+          <a:bodyPr>
+            <a:normAutofit fontScale="70000" lnSpcReduction="20000"/>
           </a:bodyPr>
           <a:lstStyle/>
           <a:p>
@@ -6565,13 +9126,97 @@
               <a:buNone/>
             </a:pPr>
             <a:r>
-              <a:rPr kumimoji="1" lang="ja-JP" altLang="en-US" sz="3600" dirty="0"/>
-              <a:t>　あらかじめ指定した６つのヒントに合う曲を、ゲーム内で作成し、それが下記のヒントとどれほど一致しているかを判定する。</a:t>
-            </a:r>
-            <a:endParaRPr kumimoji="1" lang="en-US" altLang="ja-JP" sz="3600" dirty="0"/>
+              <a:rPr kumimoji="1" lang="ja-JP" altLang="en-US" sz="4000" dirty="0"/>
+              <a:t>　</a:t>
+            </a:r>
+            <a:r>
+              <a:rPr lang="en-US" altLang="ja-JP" sz="4000" dirty="0" err="1"/>
+              <a:t>MusicXML</a:t>
+            </a:r>
+            <a:r>
+              <a:rPr lang="ja-JP" altLang="en-US" sz="4000" dirty="0"/>
+              <a:t>から音楽特徴を抽出し、</a:t>
+            </a:r>
+            <a:r>
+              <a:rPr lang="en-US" altLang="ja-JP" sz="4000" dirty="0" err="1"/>
+              <a:t>LightGBM</a:t>
+            </a:r>
+            <a:r>
+              <a:rPr lang="ja-JP" altLang="en-US" sz="4000" dirty="0"/>
+              <a:t>を用いて感情分類を行う。</a:t>
+            </a:r>
+            <a:endParaRPr lang="en-US" altLang="ja-JP" sz="4000" dirty="0"/>
+          </a:p>
+          <a:p>
+            <a:pPr marL="0" indent="0">
+              <a:buNone/>
+            </a:pPr>
+            <a:r>
+              <a:rPr kumimoji="1" lang="ja-JP" altLang="en-US" sz="4000" dirty="0"/>
+              <a:t>　</a:t>
+            </a:r>
+            <a:r>
+              <a:rPr lang="en-US" altLang="ja-JP" sz="4000" dirty="0"/>
+              <a:t>Unity</a:t>
+            </a:r>
+            <a:r>
+              <a:rPr lang="ja-JP" altLang="en-US" sz="4000" dirty="0"/>
+              <a:t>と</a:t>
+            </a:r>
+            <a:r>
+              <a:rPr lang="en-US" altLang="ja-JP" sz="4000" dirty="0"/>
+              <a:t>Python</a:t>
+            </a:r>
+            <a:r>
+              <a:rPr lang="ja-JP" altLang="en-US" sz="4000" dirty="0"/>
+              <a:t>を連携し、判定結果をゲーム内ヒントとして利用する。</a:t>
+            </a:r>
+            <a:endParaRPr kumimoji="1" lang="en-US" altLang="ja-JP" sz="4000" dirty="0"/>
+          </a:p>
+          <a:p>
+            <a:pPr marL="0" indent="0">
+              <a:buNone/>
+            </a:pPr>
+            <a:endParaRPr kumimoji="1" lang="en-US" altLang="ja-JP" dirty="0"/>
           </a:p>
         </p:txBody>
       </p:sp>
+      <p:pic>
+        <p:nvPicPr>
+          <p:cNvPr id="5" name="図 4">
+            <a:extLst>
+              <a:ext uri="{FF2B5EF4-FFF2-40B4-BE49-F238E27FC236}">
+                <a16:creationId xmlns:a16="http://schemas.microsoft.com/office/drawing/2014/main" id="{3A594733-A0AE-E6C5-688D-367ACF0D7FAA}"/>
+              </a:ext>
+            </a:extLst>
+          </p:cNvPr>
+          <p:cNvPicPr>
+            <a:picLocks noChangeAspect="1"/>
+          </p:cNvPicPr>
+          <p:nvPr/>
+        </p:nvPicPr>
+        <p:blipFill>
+          <a:blip r:embed="rId2">
+            <a:extLst>
+              <a:ext uri="{28A0092B-C50C-407E-A947-70E740481C1C}">
+                <a14:useLocalDpi xmlns:a14="http://schemas.microsoft.com/office/drawing/2010/main" val="0"/>
+              </a:ext>
+            </a:extLst>
+          </a:blip>
+          <a:stretch>
+            <a:fillRect/>
+          </a:stretch>
+        </p:blipFill>
+        <p:spPr>
+          <a:xfrm>
+            <a:off x="3939738" y="1930401"/>
+            <a:ext cx="8143597" cy="4336463"/>
+          </a:xfrm>
+          <a:prstGeom prst="rect">
+            <a:avLst/>
+          </a:prstGeom>
+        </p:spPr>
+      </p:pic>
     </p:spTree>
     <p:extLst>
       <p:ext uri="{BB962C8B-B14F-4D97-AF65-F5344CB8AC3E}">
@@ -6588,23 +9233,9 @@
 <file path=ppt/slides/slide3.xml><?xml version="1.0" encoding="utf-8"?>
 <p:sld xmlns:a="http://schemas.openxmlformats.org/drawingml/2006/main" xmlns:r="http://schemas.openxmlformats.org/officeDocument/2006/relationships" xmlns:p="http://schemas.openxmlformats.org/presentationml/2006/main">
   <p:cSld>
-    <p:bg>
-      <p:bgPr>
-        <a:solidFill>
-          <a:schemeClr val="bg1"/>
-        </a:solidFill>
-        <a:effectLst/>
-      </p:bgPr>
-    </p:bg>
     <p:spTree>
       <p:nvGrpSpPr>
-        <p:cNvPr id="1" name="">
-          <a:extLst>
-            <a:ext uri="{FF2B5EF4-FFF2-40B4-BE49-F238E27FC236}">
-              <a16:creationId xmlns:a16="http://schemas.microsoft.com/office/drawing/2014/main" id="{B7F77268-5080-2000-F745-EBF88C88B89A}"/>
-            </a:ext>
-          </a:extLst>
-        </p:cNvPr>
+        <p:cNvPr id="1" name=""/>
         <p:cNvGrpSpPr/>
         <p:nvPr/>
       </p:nvGrpSpPr>
@@ -6621,7 +9252,7 @@
           <p:cNvPr id="2" name="タイトル 1">
             <a:extLst>
               <a:ext uri="{FF2B5EF4-FFF2-40B4-BE49-F238E27FC236}">
-                <a16:creationId xmlns:a16="http://schemas.microsoft.com/office/drawing/2014/main" id="{9BAFE9A3-41C6-FDAC-872D-845908035631}"/>
+                <a16:creationId xmlns:a16="http://schemas.microsoft.com/office/drawing/2014/main" id="{58BA0117-4C7B-BB15-0C22-5612A307316F}"/>
               </a:ext>
             </a:extLst>
           </p:cNvPr>
@@ -6634,7 +9265,7 @@
         </p:nvSpPr>
         <p:spPr>
           <a:xfrm>
-            <a:off x="1333502" y="609600"/>
+            <a:off x="1797666" y="499291"/>
             <a:ext cx="8596668" cy="1320800"/>
           </a:xfrm>
         </p:spPr>
@@ -6646,57 +9277,72 @@
           <a:p>
             <a:pPr algn="ctr"/>
             <a:r>
-              <a:rPr lang="ja-JP" altLang="en-US" sz="5400" dirty="0"/>
-              <a:t>テーマ決定の動機</a:t>
-            </a:r>
-            <a:endParaRPr kumimoji="1" lang="ja-JP" altLang="en-US" sz="5400" dirty="0"/>
+              <a:rPr kumimoji="1" lang="ja-JP" altLang="en-US" sz="5400" dirty="0"/>
+              <a:t>目的</a:t>
+            </a:r>
           </a:p>
         </p:txBody>
       </p:sp>
       <p:sp>
         <p:nvSpPr>
-          <p:cNvPr id="3" name="コンテンツ プレースホルダー 2">
+          <p:cNvPr id="10" name="テキスト ボックス 9">
             <a:extLst>
               <a:ext uri="{FF2B5EF4-FFF2-40B4-BE49-F238E27FC236}">
-                <a16:creationId xmlns:a16="http://schemas.microsoft.com/office/drawing/2014/main" id="{1EE3AE15-AEDA-A5E4-9C3A-AFA52638D705}"/>
+                <a16:creationId xmlns:a16="http://schemas.microsoft.com/office/drawing/2014/main" id="{702114D7-7077-92F9-BFD8-8699D92DC717}"/>
               </a:ext>
             </a:extLst>
           </p:cNvPr>
-          <p:cNvSpPr>
-            <a:spLocks noGrp="1"/>
-          </p:cNvSpPr>
-          <p:nvPr>
-            <p:ph idx="1"/>
-          </p:nvPr>
+          <p:cNvSpPr txBox="1"/>
+          <p:nvPr/>
         </p:nvSpPr>
         <p:spPr>
           <a:xfrm>
-            <a:off x="1333502" y="2160589"/>
-            <a:ext cx="8596668" cy="3880773"/>
+            <a:off x="1257300" y="2076450"/>
+            <a:ext cx="8734425" cy="3416320"/>
           </a:xfrm>
+          <a:prstGeom prst="rect">
+            <a:avLst/>
+          </a:prstGeom>
+          <a:noFill/>
         </p:spPr>
         <p:txBody>
-          <a:bodyPr>
-            <a:normAutofit/>
+          <a:bodyPr wrap="square" rtlCol="0">
+            <a:spAutoFit/>
           </a:bodyPr>
           <a:lstStyle/>
           <a:p>
-            <a:pPr marL="0" indent="0">
-              <a:buNone/>
+            <a:pPr marL="285750" lvl="0" indent="-285750" fontAlgn="ctr">
+              <a:buFont typeface="Arial" panose="020B0604020202020204" pitchFamily="34" charset="0"/>
+              <a:buChar char="•"/>
+              <a:defRPr/>
             </a:pPr>
             <a:r>
-              <a:rPr kumimoji="1" lang="ja-JP" altLang="en-US" sz="3200" dirty="0"/>
-              <a:t>　機械学習について一度触れておくことは、将来的にそういった業務につかないとしても役に立つだろうと考えたため。</a:t>
-            </a:r>
-            <a:endParaRPr kumimoji="1" lang="en-US" altLang="ja-JP" sz="3200" dirty="0"/>
-          </a:p>
-          <a:p>
-            <a:pPr marL="0" indent="0">
-              <a:buNone/>
+              <a:rPr lang="ja-JP" altLang="en-US" sz="3600" dirty="0"/>
+              <a:t>音楽の印象は主観的なため、感情分類モデルを使い音楽の印象を判定したい</a:t>
+            </a:r>
+            <a:endParaRPr lang="en-US" altLang="ja-JP" sz="3600" dirty="0"/>
+          </a:p>
+          <a:p>
+            <a:pPr marL="285750" indent="-285750" fontAlgn="ctr">
+              <a:buFont typeface="Arial" panose="020B0604020202020204" pitchFamily="34" charset="0"/>
+              <a:buChar char="•"/>
+              <a:defRPr/>
             </a:pPr>
             <a:r>
-              <a:rPr kumimoji="1" lang="ja-JP" altLang="en-US" dirty="0"/>
-              <a:t>　</a:t>
+              <a:rPr lang="ja-JP" altLang="en-US" sz="3600" dirty="0"/>
+              <a:t>判定結果をゲーム内ヒントとして使用し、ゲームと音楽分析を合わせた物をつくりたい。</a:t>
+            </a:r>
+            <a:endParaRPr lang="en-US" altLang="ja-JP" sz="3600" dirty="0"/>
+          </a:p>
+          <a:p>
+            <a:pPr marL="285750" indent="-285750" fontAlgn="ctr">
+              <a:buFont typeface="Arial" panose="020B0604020202020204" pitchFamily="34" charset="0"/>
+              <a:buChar char="•"/>
+              <a:defRPr/>
+            </a:pPr>
+            <a:r>
+              <a:rPr lang="ja-JP" altLang="en-US" sz="3600" dirty="0"/>
+              <a:t>どのような環境でも動くものにしたい</a:t>
             </a:r>
           </a:p>
         </p:txBody>
@@ -6704,7 +9350,7 @@
     </p:spTree>
     <p:extLst>
       <p:ext uri="{BB962C8B-B14F-4D97-AF65-F5344CB8AC3E}">
-        <p14:creationId xmlns:p14="http://schemas.microsoft.com/office/powerpoint/2010/main" val="2348987953"/>
+        <p14:creationId xmlns:p14="http://schemas.microsoft.com/office/powerpoint/2010/main" val="849406073"/>
       </p:ext>
     </p:extLst>
   </p:cSld>
@@ -6715,290 +9361,6 @@
 </file>
 
 <file path=ppt/slides/slide4.xml><?xml version="1.0" encoding="utf-8"?>
-<p:sld xmlns:a="http://schemas.openxmlformats.org/drawingml/2006/main" xmlns:r="http://schemas.openxmlformats.org/officeDocument/2006/relationships" xmlns:p="http://schemas.openxmlformats.org/presentationml/2006/main">
-  <p:cSld>
-    <p:bg>
-      <p:bgPr>
-        <a:solidFill>
-          <a:schemeClr val="bg1"/>
-        </a:solidFill>
-        <a:effectLst/>
-      </p:bgPr>
-    </p:bg>
-    <p:spTree>
-      <p:nvGrpSpPr>
-        <p:cNvPr id="1" name="">
-          <a:extLst>
-            <a:ext uri="{FF2B5EF4-FFF2-40B4-BE49-F238E27FC236}">
-              <a16:creationId xmlns:a16="http://schemas.microsoft.com/office/drawing/2014/main" id="{1AAB6AAB-382E-FE41-6430-1FC3D8012D69}"/>
-            </a:ext>
-          </a:extLst>
-        </p:cNvPr>
-        <p:cNvGrpSpPr/>
-        <p:nvPr/>
-      </p:nvGrpSpPr>
-      <p:grpSpPr>
-        <a:xfrm>
-          <a:off x="0" y="0"/>
-          <a:ext cx="0" cy="0"/>
-          <a:chOff x="0" y="0"/>
-          <a:chExt cx="0" cy="0"/>
-        </a:xfrm>
-      </p:grpSpPr>
-      <p:sp>
-        <p:nvSpPr>
-          <p:cNvPr id="2" name="タイトル 1">
-            <a:extLst>
-              <a:ext uri="{FF2B5EF4-FFF2-40B4-BE49-F238E27FC236}">
-                <a16:creationId xmlns:a16="http://schemas.microsoft.com/office/drawing/2014/main" id="{D5A5AFD4-F3A8-148D-B475-4E648DCBA532}"/>
-              </a:ext>
-            </a:extLst>
-          </p:cNvPr>
-          <p:cNvSpPr>
-            <a:spLocks noGrp="1"/>
-          </p:cNvSpPr>
-          <p:nvPr>
-            <p:ph type="title"/>
-          </p:nvPr>
-        </p:nvSpPr>
-        <p:spPr>
-          <a:xfrm>
-            <a:off x="2058592" y="617458"/>
-            <a:ext cx="8074815" cy="1618489"/>
-          </a:xfrm>
-        </p:spPr>
-        <p:txBody>
-          <a:bodyPr anchor="ctr">
-            <a:normAutofit/>
-          </a:bodyPr>
-          <a:lstStyle/>
-          <a:p>
-            <a:pPr algn="ctr"/>
-            <a:r>
-              <a:rPr lang="ja-JP" altLang="en-US" sz="6000" dirty="0"/>
-              <a:t>開発の初期目標</a:t>
-            </a:r>
-            <a:endParaRPr kumimoji="1" lang="ja-JP" altLang="en-US" sz="6000" dirty="0"/>
-          </a:p>
-        </p:txBody>
-      </p:sp>
-      <p:sp>
-        <p:nvSpPr>
-          <p:cNvPr id="3" name="コンテンツ プレースホルダー 2">
-            <a:extLst>
-              <a:ext uri="{FF2B5EF4-FFF2-40B4-BE49-F238E27FC236}">
-                <a16:creationId xmlns:a16="http://schemas.microsoft.com/office/drawing/2014/main" id="{342ECC2E-CA2B-8BDF-EF90-F64FF03EE445}"/>
-              </a:ext>
-            </a:extLst>
-          </p:cNvPr>
-          <p:cNvSpPr>
-            <a:spLocks noGrp="1"/>
-          </p:cNvSpPr>
-          <p:nvPr>
-            <p:ph idx="1"/>
-          </p:nvPr>
-        </p:nvSpPr>
-        <p:spPr>
-          <a:xfrm>
-            <a:off x="1285240" y="2969469"/>
-            <a:ext cx="9880065" cy="2800395"/>
-          </a:xfrm>
-        </p:spPr>
-        <p:txBody>
-          <a:bodyPr anchor="t">
-            <a:normAutofit/>
-          </a:bodyPr>
-          <a:lstStyle/>
-          <a:p>
-            <a:pPr marL="0" indent="0">
-              <a:buNone/>
-            </a:pPr>
-            <a:r>
-              <a:rPr kumimoji="1" lang="ja-JP" altLang="en-US" sz="3600" dirty="0"/>
-              <a:t>　ゲーム内にて楽譜を作成し、それを仮想環境内にある</a:t>
-            </a:r>
-            <a:r>
-              <a:rPr kumimoji="1" lang="en-US" altLang="ja-JP" sz="3600" dirty="0"/>
-              <a:t>Python</a:t>
-            </a:r>
-            <a:r>
-              <a:rPr lang="ja-JP" altLang="en-US" sz="3600" dirty="0"/>
-              <a:t>へ渡す。そちらで楽譜を処理し</a:t>
-            </a:r>
-            <a:r>
-              <a:rPr kumimoji="1" lang="ja-JP" altLang="en-US" sz="3600" dirty="0"/>
-              <a:t>感情をゲームへ返す。</a:t>
-            </a:r>
-          </a:p>
-        </p:txBody>
-      </p:sp>
-    </p:spTree>
-    <p:extLst>
-      <p:ext uri="{BB962C8B-B14F-4D97-AF65-F5344CB8AC3E}">
-        <p14:creationId xmlns:p14="http://schemas.microsoft.com/office/powerpoint/2010/main" val="3877857629"/>
-      </p:ext>
-    </p:extLst>
-  </p:cSld>
-  <p:clrMapOvr>
-    <a:masterClrMapping/>
-  </p:clrMapOvr>
-</p:sld>
-</file>
-
-<file path=ppt/slides/slide5.xml><?xml version="1.0" encoding="utf-8"?>
-<p:sld xmlns:a="http://schemas.openxmlformats.org/drawingml/2006/main" xmlns:r="http://schemas.openxmlformats.org/officeDocument/2006/relationships" xmlns:p="http://schemas.openxmlformats.org/presentationml/2006/main">
-  <p:cSld>
-    <p:bg>
-      <p:bgPr>
-        <a:solidFill>
-          <a:schemeClr val="bg1"/>
-        </a:solidFill>
-        <a:effectLst/>
-      </p:bgPr>
-    </p:bg>
-    <p:spTree>
-      <p:nvGrpSpPr>
-        <p:cNvPr id="1" name="">
-          <a:extLst>
-            <a:ext uri="{FF2B5EF4-FFF2-40B4-BE49-F238E27FC236}">
-              <a16:creationId xmlns:a16="http://schemas.microsoft.com/office/drawing/2014/main" id="{0B363392-6776-3723-B094-48F15ED89941}"/>
-            </a:ext>
-          </a:extLst>
-        </p:cNvPr>
-        <p:cNvGrpSpPr/>
-        <p:nvPr/>
-      </p:nvGrpSpPr>
-      <p:grpSpPr>
-        <a:xfrm>
-          <a:off x="0" y="0"/>
-          <a:ext cx="0" cy="0"/>
-          <a:chOff x="0" y="0"/>
-          <a:chExt cx="0" cy="0"/>
-        </a:xfrm>
-      </p:grpSpPr>
-      <p:sp>
-        <p:nvSpPr>
-          <p:cNvPr id="2" name="タイトル 1">
-            <a:extLst>
-              <a:ext uri="{FF2B5EF4-FFF2-40B4-BE49-F238E27FC236}">
-                <a16:creationId xmlns:a16="http://schemas.microsoft.com/office/drawing/2014/main" id="{B554B49E-3873-7A47-276C-0B9574E16638}"/>
-              </a:ext>
-            </a:extLst>
-          </p:cNvPr>
-          <p:cNvSpPr>
-            <a:spLocks noGrp="1"/>
-          </p:cNvSpPr>
-          <p:nvPr>
-            <p:ph type="title"/>
-          </p:nvPr>
-        </p:nvSpPr>
-        <p:spPr>
-          <a:xfrm>
-            <a:off x="1583089" y="576090"/>
-            <a:ext cx="9025822" cy="1753224"/>
-          </a:xfrm>
-        </p:spPr>
-        <p:txBody>
-          <a:bodyPr vert="horz" lIns="91440" tIns="45720" rIns="91440" bIns="45720" rtlCol="0" anchor="ctr">
-            <a:normAutofit/>
-          </a:bodyPr>
-          <a:lstStyle/>
-          <a:p>
-            <a:pPr algn="r"/>
-            <a:r>
-              <a:rPr lang="ja-JP" altLang="en-US" sz="6000" dirty="0"/>
-              <a:t>開発の初期目標の問題点</a:t>
-            </a:r>
-            <a:endParaRPr kumimoji="1" lang="en-US" altLang="ja-JP" sz="6000" dirty="0"/>
-          </a:p>
-        </p:txBody>
-      </p:sp>
-      <p:sp>
-        <p:nvSpPr>
-          <p:cNvPr id="3" name="コンテンツ プレースホルダー 2">
-            <a:extLst>
-              <a:ext uri="{FF2B5EF4-FFF2-40B4-BE49-F238E27FC236}">
-                <a16:creationId xmlns:a16="http://schemas.microsoft.com/office/drawing/2014/main" id="{20286B8C-E081-DDBA-6466-D2ADB53A778D}"/>
-              </a:ext>
-            </a:extLst>
-          </p:cNvPr>
-          <p:cNvSpPr>
-            <a:spLocks noGrp="1"/>
-          </p:cNvSpPr>
-          <p:nvPr>
-            <p:ph idx="1"/>
-          </p:nvPr>
-        </p:nvSpPr>
-        <p:spPr>
-          <a:xfrm>
-            <a:off x="616017" y="2396691"/>
-            <a:ext cx="9971772" cy="3190961"/>
-          </a:xfrm>
-        </p:spPr>
-        <p:txBody>
-          <a:bodyPr vert="horz" lIns="91440" tIns="45720" rIns="91440" bIns="45720" rtlCol="0" anchor="ctr">
-            <a:noAutofit/>
-          </a:bodyPr>
-          <a:lstStyle/>
-          <a:p>
-            <a:pPr marL="0" indent="0">
-              <a:buNone/>
-            </a:pPr>
-            <a:r>
-              <a:rPr kumimoji="1" lang="ja-JP" altLang="en-US" sz="3600" cap="all" spc="200" dirty="0">
-                <a:solidFill>
-                  <a:schemeClr val="tx2"/>
-                </a:solidFill>
-                <a:latin typeface="+mj-lt"/>
-              </a:rPr>
-              <a:t>　ゲーム内で提示される６つのヒントのみを渡された状態から楽譜を作成する仕様となってい</a:t>
-            </a:r>
-            <a:r>
-              <a:rPr lang="ja-JP" altLang="en-US" sz="3600" cap="all" spc="200" dirty="0">
-                <a:solidFill>
-                  <a:schemeClr val="tx2"/>
-                </a:solidFill>
-                <a:latin typeface="+mj-lt"/>
-              </a:rPr>
-              <a:t>る。</a:t>
-            </a:r>
-            <a:endParaRPr lang="en-US" altLang="ja-JP" sz="3600" cap="all" spc="200" dirty="0">
-              <a:solidFill>
-                <a:schemeClr val="tx2"/>
-              </a:solidFill>
-              <a:latin typeface="+mj-lt"/>
-            </a:endParaRPr>
-          </a:p>
-          <a:p>
-            <a:pPr marL="0" indent="0">
-              <a:buNone/>
-            </a:pPr>
-            <a:r>
-              <a:rPr kumimoji="1" lang="ja-JP" altLang="en-US" sz="3600" cap="all" spc="200" dirty="0">
-                <a:solidFill>
-                  <a:schemeClr val="tx2"/>
-                </a:solidFill>
-                <a:latin typeface="+mj-lt"/>
-              </a:rPr>
-              <a:t>　非常に難解で、音楽知識を前提としている。</a:t>
-            </a:r>
-          </a:p>
-        </p:txBody>
-      </p:sp>
-    </p:spTree>
-    <p:extLst>
-      <p:ext uri="{BB962C8B-B14F-4D97-AF65-F5344CB8AC3E}">
-        <p14:creationId xmlns:p14="http://schemas.microsoft.com/office/powerpoint/2010/main" val="2578117821"/>
-      </p:ext>
-    </p:extLst>
-  </p:cSld>
-  <p:clrMapOvr>
-    <a:masterClrMapping/>
-  </p:clrMapOvr>
-</p:sld>
-</file>
-
-<file path=ppt/slides/slide6.xml><?xml version="1.0" encoding="utf-8"?>
 <p:sld xmlns:a="http://schemas.openxmlformats.org/drawingml/2006/main" xmlns:r="http://schemas.openxmlformats.org/officeDocument/2006/relationships" xmlns:p="http://schemas.openxmlformats.org/presentationml/2006/main">
   <p:cSld>
     <p:bg>
@@ -7060,7 +9422,7 @@
             <a:pPr algn="ctr"/>
             <a:r>
               <a:rPr lang="ja-JP" altLang="en-US" sz="5400" dirty="0"/>
-              <a:t>改善後の概要</a:t>
+              <a:t>システム概要</a:t>
             </a:r>
             <a:endParaRPr kumimoji="1" lang="ja-JP" altLang="en-US" sz="5400" dirty="0"/>
           </a:p>
@@ -7084,13 +9446,13 @@
         </p:nvSpPr>
         <p:spPr>
           <a:xfrm>
-            <a:off x="537738" y="2117558"/>
-            <a:ext cx="4958966" cy="3917773"/>
+            <a:off x="328731" y="2117558"/>
+            <a:ext cx="6809187" cy="3917773"/>
           </a:xfrm>
         </p:spPr>
         <p:txBody>
           <a:bodyPr>
-            <a:normAutofit/>
+            <a:normAutofit fontScale="92500" lnSpcReduction="20000"/>
           </a:bodyPr>
           <a:lstStyle/>
           <a:p>
@@ -7107,13 +9469,47 @@
             <a:pPr marL="0" indent="0">
               <a:buNone/>
             </a:pPr>
+            <a:endParaRPr lang="en-US" altLang="ja-JP" sz="3200" dirty="0"/>
+          </a:p>
+          <a:p>
+            <a:pPr marL="0" indent="0">
+              <a:buNone/>
+            </a:pPr>
             <a:r>
               <a:rPr lang="ja-JP" altLang="en-US" sz="3200" dirty="0"/>
-              <a:t>　ヒントに応じたテンプレ楽譜を設置する機能を追加。　　　　　　　　　　　</a:t>
+              <a:t>　楽譜配置を押すとテンプレートとタグが等しい楽曲からランダムに選び</a:t>
+            </a:r>
+            <a:endParaRPr lang="en-US" altLang="ja-JP" sz="3200" dirty="0"/>
+          </a:p>
+          <a:p>
+            <a:pPr marL="0" indent="0">
+              <a:buNone/>
+            </a:pPr>
+            <a:r>
+              <a:rPr lang="ja-JP" altLang="en-US" sz="3200" dirty="0"/>
+              <a:t>配置する。</a:t>
+            </a:r>
+            <a:endParaRPr lang="en-US" altLang="ja-JP" sz="3200" dirty="0"/>
+          </a:p>
+          <a:p>
+            <a:pPr marL="0" indent="0">
+              <a:buNone/>
+            </a:pPr>
+            <a:r>
+              <a:rPr lang="ja-JP" altLang="en-US" sz="3200" dirty="0"/>
+              <a:t>　再生＆判定を押すと五線譜に従い</a:t>
+            </a:r>
+            <a:r>
+              <a:rPr lang="en-US" altLang="ja-JP" sz="3200" dirty="0"/>
+              <a:t>XML</a:t>
+            </a:r>
+            <a:r>
+              <a:rPr lang="ja-JP" altLang="en-US" sz="3200" dirty="0"/>
+              <a:t>ファイルの生成と再生、それの判定を行う。</a:t>
             </a:r>
             <a:r>
               <a:rPr lang="ja-JP" altLang="en-US" sz="2000" dirty="0"/>
-              <a:t>　　　　　　　　　　　　　　　　　　　　　　　　　　　　　　　　　　　　　　　　　　　　　　　　　　　　　　　　　　　　　　　　　　　　　　　　　　　　　　　　　　　　　　　　　　　　　　　　　　　　　　　　　　　　　　　　　　　　　　　　　　　　　　　　　　　　　　　　　　　　　　　　　　　　　　　　　　　　　　　　　　　　　　　　　　　　　　　　　　　　　　　　　　　　　　　　　　　　　　　　　　　　　　　　　　　　　　　　　　　　　　　　　　　　　　　　　　　　　　　　　　　　　　　　　　　　　　　　　　　　　　　　　　　　　　　　　　　　　　　　　　　　　　　　　　　　　　　　　　　　　　　　　　　　　　　　　　　　　　　　　　　　　　　　　　　　　　　　　　　　　　　　　　　　　　　　　　　　　　　　　　　　　　　　　　　　　　　　　　　　　　　　　　　　　　　　　　　　　　　　　　　　　　　　　　　　　　　　　　　　　　　　　　　　　　　　　　　　　　　　　　　　　　　　　　　　　　　　　　　　　　　　　　　　　　　　　　　　　　　　　　　　　　　　　　　　　　　　　　　　　　　　　　　　　　　　　　　　　　　　　　　　　　　　　　　　　　　　　　　　　　　　　　　　　　　　　　　　　　　　　　　　　　　　　　　　　　　　　　　　　　　　　　　　　　　　　　　　　　　　　　　　　　　　　　　　　　　　　　　　　　　　　　　　　　　　　　　　　　　　　　　　　　　　　　　　　　　　　　　　　　　　　　　　　　　　　　　　　　　　　　　　　　　　　　　　　　　　　　　　　　　　　　　　　　　　　　　　　　　　　　　　　　　　　　　　　　　　　　　　　　　　　　　　　　　　　　　　　　　　　　　　　　　　　　　　　　　　　　　　　　　　　　　　　　　　　　　　　　　　　　　　　　　　　　　　　　　　　　　　　　　　　　　　　　　　　　　　　　　　　　　　　　　　　　　　　　　　　　　　　　　　　　　　　　　　　　　　　　　　　　　　　　　　　　　　　　　　　　　　　　　　　　　　　　　　　　　　　　　　　　　　　　　　　　　　　　　　　　　　　　　　　　　　　　　　　　　　　　　　　　　　　　　　　　　　　　　　　　　　　　　　　　　　　　　　　　　　　　　　　　　　　　　　　　　　　　　　　　　　　　　　　　　　　　　　　　　　　　　　　　　　　　　　　　　　　　　　　　　　　　　　　　　　　　　　　　　　　　　　　　　　　　　　　　　　　　　　　　　　　　　　　　　　　　　　　　　　　　　　　　　　　　　　　　　　　　　　　　　　　　　　　　　　　　　　　　　　　　　　　　　　　　　　　　　　　　　　　　　　　　　　　　　　　　　　　　　　　　　　　　　　　　　　　　　　　　　　　　　　　　　　　　　　　　　　　　　　　　　　　　　　　　　　　　　　　　　　　　　　　　　　　　　　　　　　　　　　　　　　　　　　　　　　　　　　　　　　　　　　　　　　　　　　　　　　　　　　　　　　　　　　　　　　　　　　　　　　　　　　　　　　　　　　　　　　　　　　　　　　　　　　　　　　　　　　　　　　　　　　　　　　　　　　　　　　　　　　　　　　　　　　　　　　　　　　　　　　　　　　　　　　　　　　　　　　　　　　　　　　　　　　　　　　　　　　　　　　　　　　　　　　　　　　　　　　　　　　　　　　　　　　　　　　　　　　　　　　　　　　　　　　　　　　　　　　　　　　　　　　　　　　　　　　　　　　　　　　　　　　　　　　　　　　　　　　　　　　　　　　　　　　　　　　　　　　　　　　　　　　　　　　　　　　　　　　　　　　　　　　　　　　　　　　　　　　　　　　　　　　　　　　　　　　　　　　　　　　　　　　　　　　　　　　　　　　　　　　　　　　　　　　　　　　　　　　　　　　　　　　　　　　　　　　　　　　　　　　　　　　　　　　　　　　　　　　　　　　　　　　　　　　　　　　　　　　　　　　　　　　　　　　　　　　　　　　　　　　　　　　　　　　　　　　　　　　　　　　　　　　　　　　　　　　　　　　　　　　　　　　　　　　　　　　　　　　　　　　　　　　　　　　　　　　　　　　　　　　　　　　　　　　　　　　　　　　　　　　　　　　　　　　　　　　　　　　　　　　　　　　　　　　　　　　　　　　　　　　　　　　　　　　　　　　　　　　　　　　　　　　　　　　　　　　　　　　　　　　　　　　　　　　　　　　　　　　　　　　　　　　　　　　　　　　　　　　　　　　　　　　　　　　　　　　　　　　　　　　　　　　　　　　　　　　　　　　　　　　　　　　　　　　　　　　　　　　　　　　　　　　　　　　　　　　　　　　　　　　　　　　　　　　　　　　　　　　　　　　　　　　　　　　　　　　　　　　　　　　　　　　　　　　　　　　　　　　　　　　　　　　　　　　　　　　　　　　　　　　　　　　　　　　　　　　　　　　　　　　　　　　　　　　　　　　　　　　　　　　　　　　　　　　　　　　　　　　　　　　　　　　　　　　　　　　　　　　　　　　　　　　　　　　　　　　　　　　　　　　　　　　　　　　　　　　　　　　　　　　　　　　　　　　　　　　　　　　　　　　　　　　　　　　　　　　　　　　　　　　　　　　　　　　　　　　　　　　　　　　　　　　　　　　　　　　　　　　　　　　　　　　　　　　　　　　　　　　　　　　　　　　　　　　　　　　　　　　　　　　　　　　　　　　　　　　　　　　　　　　　　　　　　　　　　　　　　　　　　　　　　　　　　　　　　　　　　　　　　　　　　　　　　　　　　　　　　　　　　　　　　　　　　　　　　　　　　　　　　　　　　　　　　　　　　　　　　　　　　　　　　　　　　　　　　　　　　　　　　　　　　　　　　　　　　　　　　　　　　　　　　　　　　　　　　　　　　　　　　　　　　　　　　　　　　　　　　　　　　　　　　　　　　　　　　　　　　　　　　　　　　　　　　　　　　　　　　　　　　　　　　　　　　　　　　　　　　　　　　　　　　　　　　　　　　　　　　　　　　　　　　　　　　　　　　　　　　　　　　　　　　　　　　　　　　　　　　　　　　　　　　　　　　　　　　　　　　　　　　　　　　　　　　　　　　　　　　　　　　　　　　　　　　　　　　　　　　　　　　　　　　　　　　　　　　　　　　　　　　　　　　　　　　　　　　　　　　　　　　　　　　　　　　　　　　　　　　　　　　　　　　　　　　　　　　　　　　　　　　　　　　　　　　　　　　　　　　　　　　　　　　　　　　　　　　　　　　　　　　　　　　　　　　　　　　　　　　　　　　　　　　　　　　　　　　　　　　　　　　　　　　　　　　　　　　　　　　　　　　　　　　　　　　　　　　　　　　　　　　　　　　　　　　　　　　　　　　　　　　　　　　　　　　　　　　　　　　　　　　　　　　　　　　　　　　　　　　　　　　　　　　　　　　　　　　　　　　　　　　　　　　　　　　　　　　　　　　　　　　　　　　　　　　　　　　　　　　　　　　　　　　　　　　　　　　　　　　　　　　　　　　　　　　　　　　　　　　　　　　　　　　　　　　　　　　　　　　　　　　　　　　　　　　　　　　　　　　　　　　　　　　　　　　　　　　　　　　　　　　　　　　　　　　　　　　　　　　　　　　　　　　　　　　　　　　　　　　　　　　　　　　　　　　　　　　　　　　　　　　　　　　　　　　　　　　　　　　　　　　　　　　　　　　　　　　　　　　　　　　　　　　　　　　　　　　　　　　　　　　　　　　　　　　　　　　　　　　　　　　　　　　　　　　　　　　　　　　　　　　　　　　　　　　　　　　　　　　　　　　　　　　　　　　　　　　　　　　　　　　　　　　　　　　　　　　　　　　　　　　　　　　　　　　　　　　　　　　　　　　　　　　　　　　　　　　　　　　　　　　　　　　　　　　　　　　　　　　　　　　　　　　　　　　　　　　　　　　　　　　　　　　　　　　　　　　　　　　　　　　　　　　　　　　　　　　　　　　　　　　　　　　　　　　　　　　　　　　　　　　　　　　　　　　　　　　　　　　　　　　　　　　　　　　　　　　　　　　　　　　　　　　　　　　　　　　　　　　　　　　　　　　　　　　　　　　　　　　　　　　　　　　　　　　　　　　　　　　　　　　　　　　　　　　　　　　　　　　　　　　　　　　　　　　　　　　　　　　　　　　　　　　　　　　　　　　　　　　　　　　　　　　　　　　　　　　　　　　　　　　　　　　　　　　　　　　　　　　　　　　　　　　　　　　　　　　　　　　　　　　　　　　　　　　　　　　　　　　　　　　　　　　　　　　　　　　　　　　　　　　　　　　　　　　　　　　　　　　　　　　　　　　　　　　　　　　　　　　　　　　　　　　　　　　　　　　　　　　　　　　　　　　　　　　　　　　　　　　　　　　　　　　　　　　　　　　　　　　　　　　　　　　　　　　　　　　　　　　　　　　　　　　　　　　　　　　　　　　　　　　　　　　　　　　　　　　　　　　　　　　　　　　　　　　　　　　　　　　　　　　　　　　　　　　　　　　　　　　　　　　　　　　　　　　　　　　　　　　　　　　　　　　　　　　　　　　　　　　　　　　　　　　　　　　　　　　　　　　　　　　　　　　　　　　　　　　　　　　　　　　　　　　　　　　　　　　　　　　　　　　　　　　　　　　　　　　　　　　　　　　　　　　　　　　　　　　　　　　　　　　　　　　　　　　　　　　　　　　　　　　　　　　　　　　　　　　　　　　　　　　　　　　　　　　　　　　　　　　　　　　　　　　　　　　　　　　　　　　　　　　　　　　　　　　　　　　　　　　　　　　　　　　　　　　　　　　　　　　　　　　　　　　　　　　　　　　　　　　　　　　　　　　　　　　　　　　　　　　　　　　　　　　　　　　　　　　　　　　　　　　　　　　　　　　　　　　　　　　　　　　　　　　　　　　　　　　　　　　　　　　　　　　　　　　　　　　　　　　　　　　　　　　　　　　　　　　　　　　　　　　　　　　　　　　　　　　　　　　　　　　　　　　　　　　　　　　　　　　　　　　　　　　　　　　　　　　　　　　　　　　　　　　　　　　　　　　　　　　　　　　　　　　　　　　　　　　　　　　　　　　　　　　　　　　　　　　　　　　　　　　　　　　　　　　　　　　　　　　　　　　　　　　　　　　　　　　　　　　　　　　　　　　　　　　　　　　　　　　　　　　　　　　　　　　　　　　　　　　　　　　　　　　　　　　　　　　　　　　　　　　　　　　　　　　　　　　　　　　　　　　　　　　　　　　　　　　　　　　　　　　　　　　　　　　　　　　　　　　　　　　　　　　　　　　　　　　　　　　　　　　　　　　　　　　　　　　　　　　　　　　　　　　　　　　　　　　　　　　　　　　　　　　　　　　　　　　　　　　　　　　　　　　　　　　　　　　　　　　　　　　　　　　　　　　　　　　　　　　　　　　　　　　　　　　　　　　　　　　　　　　　　　　　　　　　　　　　　　　　　　　　　　　　　　　　　　　　　　　　　　　　　　　　　　　　　　　　　　　　　　　　　　　　　　　　　　　　　　　　　　　　　　　　　　　　　　　　　　　　　　　　　　　　　　　　　　　　　　　　　　　　　　　　　　　　　　　　　　　　　　　　　　　　　　　　　　　　　　　　　　　　　　　　　　　　　　　　　　　　　　　　　　　　　　　　　　　　　　　　　　　　　　　　　　　　　　　　　　　　　　　　　　　　　　　　　　　　　　　　　　　　　　　　　　　　　　　　　　　　　　　　　　　　　　　　　　　　　　　　　　　　　　　　　　　　　　　　　　　　　　　　　　　　　　　　　　　　　　　　　　　　　　　　　　　　　　　　　　　　　　　　　　　　　　　　　　　　　　　　　　　　　　　　　　　　　　　　　　　　　　　　　　　　　　　　　　　　　　　　　　　　　　　　　　　　　　　　　　　　　　　　　　　　　　　　　　　　　　　　　　　　　　　　　　　　　　　　　　　　　　　　　　　　　　　　　　　　　　　　　　　　　　　　　　　　　　　　　　　　　　　　　　　　　　　　　　　　　　　　　　　　　　　　　　　　　　　　　　　　　　　　　　　　　　　　　　　　　　　　　　　　　　　　　　　　　　　　　　　　　　　　　　　　　　　　　　　　　　　　　　　　　　　　　　　　　　　　　　　　　　　　　　　　　　　　　　　　　　　　　　　　　　　　　　　　　　　　　　　　　　　　　　　　　　　　　　　　　　　　　　　　　　　　　　　　　　　　　　　　　　　　　　　　　　　　　　　　　　　　　　　　　　　　　　　　　　　　　　　　　　　　　　　　　　　　　　　　　　　　　　　　　　　　　　　　　　　　　　　　　　　　　　　　　　　　　　　　　　　　　　　　　　　　　　　　　　　　　　　　　　　　　　　　　　　　　　　　　　　　　　　　　　　　　　　　　　　　　　　　　　　　　　　　　　　　　　　　　　　　　　　　　　　　　　　　　　　　　　　　　　　　　　　　　　　　　　　　　　　　　　　　　　　　　　　　　　　　　　　　　　　　　　　　　　　　　　　　　　　　　　　　　　　　　　　　　　　　　　　　　　　　　　　　　　　　　　　　　　　　　　　　　　　　　　　　　　　　　　　　　　　　　　　　　　　　　　　　　　　　　　　　　　　　　　　　　　　　　　　　　　　　　　　　　　　　　　　　　　　　　　　　　　　　　　　　　　　　　　　　　　　　　　　　　　　　　　　　　　　　　　　　　　　　　　　　　　　　　　　　　　　　　　　　　　　　　　　　　　　　　　　　　　　　　　　　　　　　　　　　　　　　　　　　　　　　　　　　　　　　　　　　　　　　　　　　　　　　　　　　　　　　　　　　　　　　　　　　　　　　　　　　　　　　　　　　　　　　　　　　　　　　　　　　　　　　　　　　　　　　　　　　　　　　　　　　　　　　　　　　　　　　　　　　　　　　　　　　　　　　　　　　　　　　　　　　　　　　　　　　　　　　　　　　　　　　　　　　　　　　　　　　　　　　　　　　　　　　　　　　　　　　　　　　　　　　　　　　　　　　　　　　　　　　　　　　　　　　　　　　　　　　　　　　　　　　　　　　　　　　　　　　　　　　　　　　　　　　　　　　　　　　　　　　　　　　　　　　　　　　　　　　　　　　　　　　　　　　　　　　　　　　　　　　　　　　　　　　　　　　　　　　　　　　　　　　　　　　　　　　　　　　　　　　　　　　　　　　　　　　　　　　　　　　　　　　　　　　　　　　　　　　　　　　　　　　　　　　　　　　　　　　　　　　　　　　　　　　　　　　　　　　　　　　　　　　　　　　　　　　　　　　　　　　　　　　　　　　　　　　　　　　　　　　　　　　　　　　　　　　　　　　　　　　　　　　　　　　　　　　　　　　　　　　　　　　　　　　　　　　　　　　　　　　　　　　　　　　　　　　　　　　　　　　　　　　　　　　　　　　　　　　　　　　　　　　　　　　　　　　　　　　　　　　　　　　　　　　　　　　　　　　　　　　　　　　　　　　　　　　　　　　　　　　　　　　　　　　　　　　　　　　　　　　　　　　　　　　　　　　　　　　　　　　　　　　　　　　　　　　　　　　　　　　　　　　　　　　　　　　　　　　　　　　　　　　　　　　　　　　　　　　　　　　　　　　　　　　　　　　　　　　　　　　　　　　　　　　　　　　　　　　　　　　　　　　　　　　　　　　　　　　　　　　　　　　　　　　　　　　　　　　　　　　　　　　　　　　　　　　　　　　　　　　　　　　　　　　　　　　　　　　　　　　　　　　　　　　　　　　　　　　　　　　　　　　　　　　　　　　　　　　　　　　　　　　　　　　　　　　　　　　　　　　　　　　　　　　　　　　　　　　　　　　　　　　　　　　　　　　　　　　　　　　　　　　　　　　　　　　　　　　　　　　　　　　　　　　　　　　　　　　　　　　　　　　　　　　　　　　　　　　　　　　　　　　　　　　　　　　　　　　　　　　　　　　　　　　　　　　　　　　　　　　　　　　　　　　　　　　　　　　　　　　　　　　　　　　　　　　　　　　　　　　　　　　　　　　　　　　　　　　　　　　　　　　　　　　　　　　　　　　　　　　　　　　　　　　　　　　　　　　　　　　　　　　　　　　　　　　　　　　　　　　　　　　　　　　　　　　　　　　　　　　　　　　　　　　　　　　　　　　　　　　　　　　　　　　　　　　　　　　　　　　　　　　　　　　　　　　　　　　　　　　　　　　　　　　　　　　　　　　　　　　　　　　　　　　　　　　　　　　　　　　　　　　　　　　　　　　　　　　　　　　　　　　　　　　　　　　　　　　　　　　　　　　　　　　　　　　　　　　　　　　　　　　　　　　　　　　　　　　　　　　　　　　　　　　　　　　　　　　　　　　　　　　　　　　　　　　　　　　　　　　　　　　　　　　　　　　　　　　　　　　　　　　　　　　　　　　　　　　　　　　　　　　　　　　　　　　　　　　　　　　　　　　　　　　　　　　　　　　　　　　　　　　　　　　　　　　　　　　　　　　　　　　　　　　　　　　　　　　　　　　　　　　　　　　　　　　　　　　　　　　　　　　　　　　　　　　　　　　　　　　　　　　　　　　　　　　　　　　　　　　　　　　　　　　　　　　　　　　　　　　　　　　　　　　　　　　　　　　　　　　　　　　　　　　　　　　　　　　　　　　　　　　　　　　　　　　　　　　　　　　　　　　　　　　　　　　　　　　　　　　　　　　　　　　　　　　　　　　　　　　　　　　　　　　　　　　　　　　　　　　　　　　　　　　　　　　　　　　　　　　　　　　　　　　　　　　　　　　　　　　　　　　　　　　　　　　　　　　　　　　　　　　　　　　　　　　　　　　　　　　　　　　　　　　　　　　　　　　　　　　　　　　　　　　　　　　　　　　　　　　　　　　　　　　　　　　　　　　　　　　　　　　　　　　　　　　　　　　　　　　　　　　　　　　　　　　　　　　　　　　　　　　　　　　　　　　　　　　　　　　　　　　　　　　　　　　　　　　　　　　　　　　　　　　　　　　　　　　　　　　　　　　　　　　　　　　　　　　　　　　　　　　　　　　　　　　　　　　　　　　　　　　　　　　　　　　　　　　　　　　　　　　　　　　　　　　　　　　　　　　　　　　　　　　　　　　　　　　　　　　　　　　　　　　　　　　　　　　　　　　　　　　　　　　　　　　　　　　　　　　　　　　　　　　　　　　　　　　　　　　　　　　　　　　　　　　　　　　　　　　　　　　　　　　　　　　　　　　　　　　　　　　　　　　　　　　　　　　　　　　　　　　　　　　　　　　　　　　　　　　　　　　　　　　　　　　　　　　　　　　　　　　　　　　　　　　　　　　　　　　　　　　　　　　　　　　　　　　　　　　　　　　　　　　　　　　　　　　　　　　　　　　　　　　　　　　　　　　　　　　　　　　　　　　　　　　　　　　　　　　　　　　　　　　　　　　　　　　　　　　　　　　　　　　　　　　　　　　　　　　　　　　　　　　　　　　　　　　　　　　　　　　　　　　　　　　　　　　　　　　　　　　　　　　　　　　　　　　　　　　　　　　　　　　　　　　　　　　　　　　　　　　　　　　　　　　　　　　　　　　　　　　　　　　　　　　　　　　　　　　　　　　　　　　　　　　　　　　　　　　　　　　　　　　　　　　　　　　　　　　　　　　　　　　　　　　　　　　　　　　　　　　　　　　　　　　　　　　　　　　　　　　　　　　　　　　　　　　　　　　　　　　　　　　　　　　　　　　　　　　　　　　　　　　　　　　　　　　　　　　　　　　　　　　　　　　　　　　　　　　　　　　　　　　　　　　　　　　　　　　　　　　　　　　　　　　　　　　　　　　　　　　　　　　　　　　　　　　　　　　　　　　　　　　　　　　　　　　　　　　　　　　　　　　　　　　　　　　　　　　　　　　　　　　　　　　　　　　　　　　　　　　　　　　　　　　　　　　　　　　　　　　　　　　　　　　　　　　　　　　　　　　　　　　　　　　　　　　　　　　　　　　　　　　　　　　　　　　　　　　　　　　　　　　　　　　　　　　　　　　　　　　　　　　　　　　　　　　　　　　　　　　　　　　　　　　　　　　　　　　　　　　　　　　　　　　　　　　　　　　　　　　　　　　　　　　　　　　　　　　　　　　　　　　　　　　　　　　　　　　　　　　　　　　　　　　　　　　　　　　　　　　　　　　　　　　　　　　　　　　　　　　　　　　　　　　　　　　　　　　　　　　　　　　　　　　　　　　　　　　　　　　　　　　　　　　　　　　　　　　　　　　　　　　　　　　　　　　　　　　　　　　　　　　　　　　　　　　　　　　　　　　　　　　　　　　　　　　　　　　　　　　　　　　　　　　　　　　　　　　　　　　　　　　　　　　　　　　　　　　　　　　　　　　　　　　　　　　　　　　　　　　　　　　　　　　　　　　　　　　　　　　　　　　　　　　　　　　　　　　　　　　　　　　　　　　　　　　　　　　　　　　　　　　　　　　　　　　　　　　　　　　　　　　　　　　　　　　　　　　　　　　　　　　　　　　　　　　　　　　　　　　　　　　　　　　　　　　　　　　　　　　　　　　　　　　　　　　　　　　　　　　　　　　　　　　　　　　　　　　　　　　　　　　　　　　　　　　　　　　　　　　　　　　　　　　　　　　　　　　　　　　　　　　　　　　　　　　　　　　　　　　　　　　　　　　　　　　　　　　　　　　　　　　　　　　　　　　　　　　　　　　　　　　　　　　　　　　　　　　　　　　　　　　　　　　　　　　　　　　　　　　　　　　　　　　　　　　　　　　　　　　　　　　　　　　　　　　　　　　　　　　　　　　　　　　　　　　　　　　　　　　　　　　　　　　　　　　　　　　　　　　　　　　　　　　　　　　　　　　　　　　　　　　　　　　　　　　　　　　　　　　　　　　　　　　　　　　　　　　　　　　　　　　　　　　　　　　　　　　　　　　　　　　　　　　　　　　　　　　　　　　　　　　　　　　　　　　　　　　　　　　　　　　　　　　　　　　　　　　　　　　　　　　　　　　　　　　　　　　　　　　　　　　　　　　　　　　　　　　　　　　　　　　　　　　　　　　　　　　　　　　　　　　　　　　　　　　　　　　　　　　　　　　　　　　　　　　　　　　　　　　　　　　　　　　　　　　　　　　　　　　　　　　　　　　　　　　　　　　　　　　　　　　　　　　　　　　　　　　　　　　　　　　　　　　　　　　　　　　　　　　　　　　　　　　　　　　　　　　　　　　　　　　　　　　　　　　　　　　　　　　　　　　　　　　　　　　　　　　　　　　　　　　　　　　　　　　　　　　　　　　　　　　　　　　　　　　　　　　　　　　　　　　　　　　　　　　　　　　　　　　　　　　　　　　　　　　　　　　　　　　　　　　　　　　　　　　　　　　　　　　　　　　　　　　　　　　　　　　　　　　　　　　　　　　　　　　　　　　　　　　　　　　　　　　　　　　　　　　　　　　　　　　　　　　　　　　　　　　　　　　　　　　　　　　　　　　　　　　　　　　　　　　　　　　　　　　　　　　　　　　　　　　　　　　　　　　　　　　　　　　　　　　　　　　　　　　　　　　　　　　　　　　　　　　　　　　　　　　　　　　　　　　　　　　　　　　　　　　　　　　　　　　　　　　　　　　　　　　　　　　　　　　　　　　　　　　　　　　　　　　　　　　　　　　　　　　　　　　　　　　　　　　　　　　　　　　　　　　　　　　　　　　　　　　　　　　　　　　　　　　　　　　　　　　　　　　　　　　　　　　　　　　　　　　　　　　　　　　　　　　　　　　　　　　　　　　　　　　　　　　　　　　　　　　　　　　　　　　　　　　　　　　　　　　　　　　　　　　　　　　　　　　　　　　　　　　　　　　　　　　　　　　　　　　　　　　　　　　　　　　　　　　　　　　　　　　　　　　　　　　　　　　　　　　　　　　　　　　　　　　　　　　　　　　　　　　　　　　　　　　　　　　　　　　　　　　　　　　　　　　　　　　　　　　　　　　　　　　　　　　　　　　　　　　　　　　　　　　　　　　　　　　　　　　　　　　　　　　　　　　　　　　　　　　　　　　　　　　　　　　　　　　　　　　　　　　　　　　　　　　　　　　　　　　　　　　　　　　　　　　　　　　　　　　　　　　　　　　　　　　　　　　　　　　　　　　　　　　　　　　　　　　　　　　　　　　　　　　　　　　　　　　　　　　　　　　　　　　　　　　　　　　　　　　　　　　　　　　　　　　　　　　　　　　　　　　　　　　　　　　　　　　　　　　　　　　　　　　　　　　　　　　　　　　　　　　　　　　　　　　　　　　　　　　　　　　　　　　　　　　　　　　　　　　　　　　　　　　　　　　　　　　　　　　　　　　　　　　　　　　　　　　　　　　　　　　　　　　　　　　　　　　　　　　　　　　　　　　　　　　　　　　　　　　　　　　　　　　　　　　　　　　　　　　　　　　　　　　　　　　　　　　　　　　　　　　　　　　　　　　　　　　　　　　　　　　　　　　　　　　　　　　　　　　　　　　　　　　　　　　　　　　　　　　　　　　　　　　　　　　　　　　　　　　　　　　　　　　　　　　　　　　　　　　　　　　　　　　　　　　　　　　　　　　　　　　　　　　　　　　　　　　　　　　　　　　　　　　　　　　　　　　　　　　　　　　　　　　　　　　　　　　　　　　　　　　　　　　　　　　　　　　　　　　　　　　　　　　　　　　　　　　　　　　　　　　　　　　　　　　　　　　　　　　　　　　　　　　　　　　　　　　　　　　　　　　　　　　　　　　　　　　　　　　　　　　　　　　　　　　　　　　　　　　　　　　　　　　　　　　　　　　　　　　　　　　　　　　　　　　　　　　　　　　　　　　　　　　　　　　　　　　　　　　　　　　　　　　　　　　　　　　　　　　　　　　　　　　　　　　　　　　　　　　　　　　　　　　　　　　　　　　　　　　　　　　　　　　　　　　　　　　　　　　　　　　　　　　　　　　　　　　　　　　　　　　　　　　　　　　　　　　　　　　　　　　　　　　　　　　　　　　　　　　　　　　　　　　　　　　　　　　　　　　　　　　　　　　　　　　　　　　　　　　　　　　　　　　　　　　　　　　　　　　　　　　　　　　　　　　　　　　　　　　　　　　　　　　　　　　　　　　　　　　　　　　　　　　　　　　　　　　　　　　　　　　　　　　　　　　　　　　　　　　　　　　　　　　　　　　　　　　　　　　　　　　　　　　　　　　　　　　　　　　　　　　　　　　　　　　　　　　　　　　　　　　　　　　　　　　　　　　　　　　　　　　　　　　　　　　　　　　　　　　　　　　　　　　　　　　　　　　　　　　　　　　　　　　　　　　　　　　　　　　　　　　　　　　　　　　　　　　　　　　　　　　　　　　　　　　　　　　　　　　　　　　　　　　　　　　　　　　　　　　　　　　　　　　　　　　　　　　　　　　　　　　　　　　　　　　　　　　　　　　　　　　　　　　　　　　　　　　　　　　　　　　　　　　　　　　　　　　　　　　　　　　　　　　　　　　　　　　　　　　　　　　　　　　　　　　　　　　　　　　　　　　　　　　　　　　　　　　　　　　　　　　　　　　　　　　　　　　　　　　　　　　　　　　　　　　　　　　　　　　　　　　　　　　　　　　　　　　　　　　　　　　　　　　　　　　　　　　　　　　　　　　　　　　　　　　　　　　　　　　　　　　　　　　　　　　　　　　　　　　　　　　　　　　　　　　　　　　　　　　　　　　　　　　　　　　　　　　　　　　　　　　　　　　　　　　　　　　　　　　　　　　　　　　　　　　　　　　　　　　　　　　　　　　　　　　　　　　　　　　　　　　　　　　　　　　　　　　　　　　　　　　　　　　　　　　　　　　　　　　　　　　　　　　　　　　　　　　　　　　　　　　　　　　　　　　　　　　　　　　　　　　　　　　　　　　　　　　　　　　　　　　　　　　　　　　　　　　　　　　　　　　　　　　　　　　　　　　　　　　　　　　　　　　　　　　　　　　　　　　　　　　　　　　　　　　　　　　　　　　　　　　　　　　　　　　　　　　　　　　　　　　　　　　　　　　　　　　　　　　　　　　　　　　　　　　　　　　　　　　　　　　　　　　　　　　　　　　　　　　　　　　　　　　　　　　　　　　　　　　　　　　　　　　　　　　　　　　　　　　　　　　　　　　　　　　　　　　　　　　　　　　　　　　　　　　　　　　　　　　　　　　　　　　　　　　　　　　　　　　　　　　　　　　　　　　　　　　　　　　　　　　　　　　　　　　　　　　　　　　　　　　　　　　　　　　　　　　　　　　　　　　　　　　　　　　　　　　　　　　　　　　　　　　　　　　　　　　　　　　　　　　　　　　　　　　　　　　　　　　　　　　　　　　　　　　　　　　　　　　　　　　　　　　　　　　　　　　　　　　　　　　　　　　　　　　　　　　　　　　　　　　　　　　　　　　　　　　　　　　　　　　　　　　　　　　　　　　　　　　　　　　　　　　　　　　　　　　　　　　　　　　　　　　　　　　　　　　　　　　　　　　　　　　　　　　　　　　　　　　　　　　　　　　　　　　　　　　　　　　　　　　　　　　　　　　　　　　　　　　　　　　　　　　　　　　　　　　　　　　　　　　　　　　　　　　　　　　　　　　　　　　　　　　　　　　　　　　　　　　　　　　　　　　　　　　　　　　　　　　　　　　　　　　　　　　　　　　　　　　　　　　　　　　　　　　　　　　　　　　　　　　　　　　　　　　　　　　　　　　　　　　　　　　　　　　　　　　　　　　　　　　　　　　　　　　　　　　　　　　　　　　　　　　　　　　　　　　　　　　　　　　　　　　　　　　　　　　　　　　　　　　　　　　　　　　　　　　　　　　　　　　　　　　　　　　　　　　　　　　　　　　　　　　　　　　　　　　　　　　　　　　　　　　　　　　　　　　　　　　　　　　　　　　　　　　　　　　　　　　　　　　　　　　　　　　　　　　　　　　　　　　　　　　　　　　　　　　　　　　　　　　　　　　　　　　　　　　　　　　　　　　　　　　　　　　　　　　　　　　　　　　　　　　　　　　　　　　　　　　　　　　　　　　　　　　　　　　　　　　　　　　　　　　　　　　　　　　　　　　　　　　　　　　　　　　　　　　　　　　　　　　　　　　　　　　　　　　　　　　　　　　　　　　　　　　　　　　　　　　　　　　　　　　　　　　　　　　　　　　　　　　　　　　　　　　　　　　　　　　　　　　　　　　　　　　　　　　　　　　　　　　　　　　　　　　　　　　　　　　　　　　　　　　　　　　　　　　　　　　　　　　　　　　　　　　　　　　　　　　　　　　　　　　　　　　　　　　　　　　　　　　　　　　　　　　　　　　　　　　　　　　　　　　　　　　　　　　　　　　　　　　　　　　　　　　　　　　　　　　　　　　　　　　　　　　　　　　　　　　　　　　　　　　　　　　　　　　　　　　　　　　　　　　　　　　　　　　　　　　　　　　　　　　　　　　　　　　　　　　　　　　　　　　　　　　　　　　　　　　　　　　　　　　　　　　　　　　　　　　　　　　　　　　　　　　　　　　　　　　　　　　　　　　　　　　　　　　　　　　　　　　　　　　　　　　　　　　　　　　　　　　　　　　　　　　　　　　　　　　　　　　　　　　　　　　　　　　　　　　　　　　　　　　　　　　　　　　　　　　　　　　　　　　　　　　　　　　　　　　　　　　　　　　　　　　　　　　　　　　　　　　　　　　　　　　　　　　　　　　　　　　　　　　　　　　　　　　　　　　　　　　　　　　　　　　　　　　　　　　　　　　　　　　　　　　　　　　　　　　　　　　　　　　　　　　　　　　　　　　　　　　　　　　　　　　　　　　　　　　　　　　　　　　　　　　　　　　　　　　　　　　　　　　　　　　　　　　　　　　　　　　　　　　　　　　　　　　　　　　　　　　　　　　　　　　　　　　　　　　　　　　　　　　　　　　　　　　　　　　　　　　　　　　　　　　　　　　　　　　　　　　　　　　　　　　　　　　　　　　　　　　　　　　　　　　　　　　　　　　　　　　　　　　　　　　　　　　　　　　　　　　</a:t>
+              <a:t>　　　　　　　　　　　　　　　　　　　　　　　　　　　　　　　　　　　　　　　　　　　　　　　　　　　　　　　　　　　　　　　　　　　　　　　　　　　　　　　　　　　　　　　　　　　　　　　　　　　　　　　　　　　　　　　　　　　　　　　　　　　　　　　　　　　　　　　　　　　　　　　　　　　　　　　　　　　　　　　　　　　　　　　　　　　　　　　　　　　　　　　　　　　　　　　　　　　　　　　　　　　　　　　　　　　　　　　　　　　　　　　　　　　　　　　　　　　　　　　　　　　　　　　　　　　　　　　　　　　　　　　　　　　　　　　　　　　　　　　　　　　　　　　　　　　　　　　　　　　　　　　　　　　　　　　　　　　　　　　　　　　　　　　　　　　　　　　　　　　　　　　　　　　　　　　　　　　　　　　　　　　　　　　　　　　　　　　　　　　　　　　　　　　　　　　　　　　　　　　　　　　　　　　　　　　　　　　　　　　　　　　　　　　　　　　　　　　　　　　　　　　　　　　　　　　　　　　　　　　　　　　　　　　　　　　　　　　　　　　　　　　　　　　　　　　　　　　　　　　　　　　　　　　　　　　　　　　　　　　　　　　　　　　　　　　　　　　　　　　　　　　　　　　　　　　　　　　　　　　　　　　　　　　　　　　　　　　　　　　　　　　　　　　　　　　　　　　　　　　　　　　　　　　　　　　　　　　　　　　　　　　　　　　　　　　　　　　　　　　　　　　　　　　　　　　　　　　　　　　　　　　　　　　　　　　　　　　　　　　　　　　　　　　　　　　　　　　　　　　　　　　　　　　　　　　　　　　　　　　　　　　　　　　　　　　　　　　　　　　　　　　　　　　　　　　　　　　　　　　　　　　　　　　　　　　　　　　　　　　　　　　　　　　　　　　　　　　　　　　　　　　　　　　　　　　　　　　　　　　　　　　　　　　　　　　　　　　　　　　　　　　　　　　　　　　　　　　　　　　　　　　　　　　　　　　　　　　　　　　　　　　　　　　　　　　　　　　　　　　　　　　　　　　　　　　　　　　　　　　　　　　　　　　　　　　　　　　　　　　　　　　　　　　　　　　　　　　　　　　　　　　　　　　　　　　　　　　　　　　　　　　　　　　　　　　　　　　　　　　　　　　　　　　　　　　　　　　　　　　　　　　　　　　　　　　　　　　　　　　　　　　　　　　　　　　　　　　　　　　　　　　　　　　　　　　　　　　　　　　　　　　　　　　　　　　　　　　　　　　　　　　　　　　　　　　　　　　　　　　　　　　　　　　　　　　　　　　　　　　　　　　　　　　　　　　　　　　　　　　　　　　　　　　　　　　　　　　　　　　　　　　　　　　　　　　　　　　　　　　　　　　　　　　　　　　　　　　　　　　　　　　　　　　　　　　　　　　　　　　　　　　　　　　　　　　　　　　　　　　　　　　　　　　　　　　　　　　　　　　　　　　　　　　　　　　　　　　　　　　　　　　　　　　　　　　　　　　　　　　　　　　　　　　　　　　　　　　　　　　　　　　　　　　　　　　　　　　　　　　　　　　　　　　　　　　　　　　　　　　　　　　　　　　　　　　　　　　　　　　　　　　　　　　　　　　　　　　　　　　　　　　　　　　　　　　　　　　　　　　　　　　　　　　　　　　　　　　　　　　　　　　　　　　　　　　　　　　　　　　　　　　　　　　　　　　　　　　　　　　　　　　　　　　　　　　　　　　　　　　　　　　　　　　　　　　　　　　　　　　　　　　　　　　　　　　　　　　　　　　　　　　　　　　　　　　　　　　　　　　　　　　　　　　　　　　　　　　　　　　　　　　　　　　　　　　　　　　　　　　　　　　　　　　　　　　　　　　　　　　　　　　　　　　　　　　　　　　　　　　　　　　　　　　　　　　　　　　　　　　　　　　　　　　　　　　　　　　　　　　　　　　　　　　　　　　　　　　　　　　　　　　　　　　　　　　　　　　　　　　　　　　　　　　　　　　　　　　　　　　　　　　　　　　　　　　　　　　　　　　　　　　　　　　　　　　　　　　　　　　　　　　　　　　　　　　　　　　　　　　　　　　　　　　　　　　　　　　　　　　　　　　　　　　　　　　　　　　　　　　　　　　　　　　　　　　　　　　　　　　　　　　　　　　　　　　　　　　　　　　　　　　　　　　　　　　　　　　　　　　　　　　　　　　　　　　　　　　　　　　　　　　　　　　　　　　　　　　　　　　　　　　　　　　　　　　　　　　　　　　　　　　　　　　　　　　　　　　　　　　　　　　　　　　　　　　　　　　　　　　　　　　　　　　　　　　　　　　　　　　　　　　　　　　　　　　　　　　　　　　　　　　　　　　　　　　　　　　　　　　　　　　　　　　　　　　　　　　　　　　　　　　　　　　　　　　　　　　　　　　　　　　　　　　　　　　　　　　　　　　　　　　　　　　　　　　　　　　　　　　　　　　　　　　　　　　　　　　　　　　　　　　　　　　　　　　　　　　　　　　　　　　　　　　　　　　　　　　　　　　　　　　　　　　　　　　　　　　　　　　　　　　　　　　　　　　　　　　　　　　　　　　　　　　　　　　　　　　　　　　　　　　　　　　　　　　　　　　　　　　　　　　　　　　　　　　　　　　　　　　　　　　　　　　　　　　　　　　　　　　　　　　　　　　　　　　　　　　　　　　　　　　　　　　　　　　　　　　　　　　　　　　　　　　　　　　　　　　　　　　　　　　　　　　　　　　　　　　　　　　　　　　　　　　　　　　　　　　　　　　　　　　　　　　　　　　　　　　　　　　　　　　　　　　　　　　　　　　　　　　　　　　　　　　　　　　　　　　　　　　　　　　　　　　　　　　　　　　　　　　　　　　　　　　　　　　　　　　　　　　　　　　　　　　　　　　　　　　　　　　　　　　　　　　　　　　　　　　　　　　　　　　　　　　　　　　　　　　　　　　　　　　　　　　　　　　　　　　　　　　　　　　　　　　　　　　　　　　　　　　　　　　　　　　　　　　　　　　　　　　　　　　　　　　　　　　　　　　　　　　　　　　　　　　　　　　　　　　　　　　　　　　　　　　　　　　　　　　　　　　　　　　　　　　　　　　　　　　　　　　　　　　　　　　　　　　　　　　　　　　　　　　　　　　　　　　　　　　　　　　　　　　　　　　　　　　　　　　　　　　　　　　　　　　　　　　　　　　　　　　　　　　　　　　　　　　　　　　　　　　　　　　　　　　　　　　　　　　　　　　　　　　　　　　　　　　　　　　　　　　　　　　　　　　　　　　　　　　　　　　　　　　　　　　　　　　　　　　　　　　　　　　　　　　　　　　　　　　　　　　　　　　　　　　　　　　　　　　　　　　　　　　　　　　　　　　　　　　　　　　　　　　　　　　　　　　　　　　　　　　　　　　　　　　　　　　　　　　　　　　　　　　　　　　　　　　　　　　　　　　　　　　　　　　　　　　　　　　　　　　　　　　　　　　　　　　　　　　　　　　　　　　　　　　　　　　　　　　　　　　　　　　　　　　　　　　　　　　　　　　　　　　　　　　　　　　　　　　　　　　　　　　　　　　　　　　　　　　　　　　　　　　　　　　　　　　　　　　　　　　　　　　　　　　　　　　　　　　　　　　　　　　　　　　　　　　　　　　　　　　　　　　　　　　　　　　　　　　　　　　　　　　　　　　　　　　　　　　　　　　　　　　　　　　　　　　　　　　　　　　　　　　　　　　　　　　　　　　　　　　　　　　　　　　　　　　　　　　　　　　　　　　　　　　　　　　　　　　　　　　　　　　　　　　　　　　　　　　　　　　　　　　　　　　　　　　　　　　　　　　　　　　　　　　　　　　　　　　　　　　　　　　　　　　　　　　　　　　　　　　　　　　　　　　　　　　　　　　　　　　　　　　　　　　　　　　　　　　　　　　　　　　　　　　　　　　　　　　　　　　　　　　　　　　　　　　　　　　　　　　　　　　　　　　　　　　　　　　　　　　　　　　　　　　　　　　　　　　　　　　　　　　　　　　　　　　　　　　　　　　　　　　　　　　　　　　　　　　　　　　　　　　　　　　　　　　　　　　　　　　　　　　　　　　　　　　　　　　　　　　　　　　　　　　　　　　　　　　　　　　　　　　　　　　　　　　　　　　　　　　　　　　　　　　　　　　　　　　　　　　　　　　　　　　　　　　　　　　　　　　　　　　　　　　　　　　　　　　　　　　　　　　　　　　　　　　　　　　　　　　　　　　　　　　　　　　　　　　　　　　　　　　　　　　　　　　　　　　　　　　　　　　　　　　　　　　　　　　　　　　　　　　　　　　　　　　　　　　　　　　　　　　　　　　　　　　　　　　　　　　　　　　　　　　　　　　　　　　　　　　　　　　　　　　　　　　　　　　　　　　　　　　　　　　　　　　　　　　　　　　　　　　　　　　　　　　　　　　　　　　　　　　　　　　　　　　　　　　　　　　　　　　　　　　　　　　　　　　　　　　　　　　　　　　　　　　　　　　　　　　　　　　　　　　　　　　　　　　　　　　　　　　　　　　　　　　　　　　　　　　　　　　　　　　　　　　　　　　　　　　　　　　　　　　　　　　　　　　　　　　　　　　　　　　　　　　　　　　　　　　　　　　　　　　　　　　　　　　　　　　　　　　　　　　　　　　　　　　　　　　　　　　　　　　　　　　　　　　　　　　　　　　　　　　　　　　　　　　　　　　　　　　　　　　　　　　　　　　　　　　　　　　　　　　　　　　　　　　　　　　　　　　　　　　　　　　　　　　　　　　　　　　　　　　　　　　　　　　　　　　　　　　　　　　　　　　　　　　　　　　　　　　　　　　　　　　　　　　　　　　　　　　　　　　　　　　　　　　　　　　　　　　　　　　　　　　　　　　　　　　　　　　　　　　　　　　　　　　　　　　　　　　　　　　　　　　　　　　　　　　　　　　　　　　　　　　　　　　　　　　　　　　　　　　　　　　　　　　　　　　　　　　　　　　　　　　　　　　　　　　　　　　　　　　　　　　　　　　　　　　　　　　　　　　　　　　　　　　　　　　　　　　　　　　　　　　　　　　　　　　　　　　　　　　　　　　　　　　　　　　　　　　　　　　　　　　　　　　　　　　　　　　　　　　　　　　　　　　　　　　　　　　　　　　　　　　　　　　　　　　　　　　　　　　　　　　　　　　　　　　　　　　　　　　　　　　　　　　　　　　　　　　　　　　　　　　　　　　　　　　　　　　　　　　　　　　　　　　　　　　　　　　　　　　　　　　　　　　　　　　　　　　　　　　　　　　　　　　　　　　　　　　　　　　　　　　　　　　　　　　　　　　　　　　　　　　　　　　　　　　　　　　　　　　　　　　　　　　　　　　　　　　　　　　　　　　　　　　　　　　　　　　　　　　　　　　　　　　　　　　　　　　　　　　　　　　　　　　　　　　　　　　　　　　　　　　　　　　　　　　　　　　　　　　　　　　　　　　　　　　　　　　　　　　　　　　　　　　　　　　　　　　　　　　　　　　　　　　　　　　　　　　　　　　　　　　　　　　　　　　　　　　　　　　　　　　　　　　　　　　　　　　　　　　　　　　　　　　　　　　　　　　　　　　　　　　　　　　　　　　　　　　　　　　　　　　　　　　　　　　　　　　　　　　　　　　　　　　　　　　　　　　　　　　　　　　　　　　　　　　　　　　　　　　　　　　　　　　　　　　　　　　　　　　　　　　　　　　　　　　　　　　　　　　　　　　　　　　　　　　　　　　　　　　　　　　　　　　　　　　　　　　　　　　　　　　　　　　　　　　　　　　　　　　　　　　　　　　　　　　　　　　　　　　　　　　　　　　　　　　　　　　　　　　　　　　　　　　　　　　　　　　　　　　　　　　　　　　　　　　　　　　　　　　　　　　　　　　　　　　　　　　　　　　　　　　　　　　　　　　　　　　　　　　　　　　　　　　　　　　　　　　　　　　　　　　　　　　　　　　　　　　　　　　　　　　　　　　　　　　　　　　　　　　　　　　　　　　　　　　　　　　　　　　　　　　　　　　　　　　　　　　　　　　　　　　　　　　　　　　　　　　　　　　　　　　　　　　　　　　　　　　　　　　　　　　　　　　　　　　　　　　　　　　　　　　　　　　　　　　　　　　　　　　　　　　　　　　　　　　　　　　　　　　　　　　　　　　　　　　　　　　　　　　　　　　　　　　　　　　　　　　　　　　　　　　　　　　　　　　　　　　　　　　　　　　　　　　　　　　　　　　　　　　　　　　　　　　　　　　　　　　　　　　　　　　　　　　　　　　　　　　　　　　　　　　　　　　　　　　　　　　　　　　　　　　　　　　　　　　　　　　　　　　　　　　　　　　　　　　　　　　　　　　　　　　　　　　　　　　　　　　　　　　　　　　　　　　　　　　　　　　　　　　　　　　　　　　　　　　　　　　　　　　　　　　　　　　　　　　　　　　　　　　　　　　　　　　　　　　　　　　　　　　　　　　　　　　　　　　　　　　　　　　　　　　　　　　　　　　　　　　　　　　　　　　　　　　　　　　　　　　　　　　　　　　　　　　　　　　　　　　　　　　　　　　　　　　　　　　　　　　　　　　　　　　　　　　　　　　　　　　　　　　　　　　　　　　　　　　　　　　　　　　　　　　　　　　　　　　　　　　　　　　　　　　　　　　　　　　　　　　　　　　　　　　　　　　　　　　　　　　　　　　　　　　　　　　　　　　　　　　　　　　　　　　　　　　　　　　　　　　　　　　　　　　　　　　　　　　　　　　　　　　　　　　　　　　　　　　　　　　　　　　　　　　　　　　　　　　　　　　　　　　　　　　　　　　　　　　　　　　　　　　　　　　　　　　　　　　　　　　　　　　　　　　　　　　　　　　　　　　　　　　　　　　　　　　　　　　　　　　　　　　　　　　　　　　　　　　　　　　　　　　　　　　　　　　　　　　　　　　　　　　　　　　　　　　　　　　　　　　　　　　　　　　　　　　　　　　　　　　　　　　　　　　　　　　　　　　　　　　　　　　　　　　　　　　　　　　　　　　　　　　　　　　　　　　　　　　　　　　　　　　　　　　　　　　　　　　　　　　　　　　　　　　　　　　　　　　　　　　　　　　　　　　　　　　　　　　　　　　　　　　　　　　　　　　　　　　　　　　　　　　　　　　　　　　　　　　　　　　　　　　　　　　　　　　　　　　　　　　　　　　　　　　　　　　　　　　　　　　　　　　　　　　　　　　　　　　　　　　　　　　　　　　　　　　　　　　　　　　　　　　　　　　　　　　　　　　　　　　　　　　　　　　　　　　　　　　　　　　　　　　　　　　　　　　　　　　　　　　　　　　　　　　　　　　　　　　　　　　　　　　　　　　　　　　　　　　　　　　　　　　　　　　　　　　　　　　　　　　　　　　　　　　　　　　　　　　　　　　　　　　　　　　　　　　　　　　　　　　　　　　　　　　　　　　　　　　　　　　　　　　　　　　　　　　　　　　　　　　　　　　　　　　　　　　　　　　　　　　　　　　　　　　　　　　　　　　　　　　　　　　　　　　　　　　　　　　　　　　　　　　　　　　　　　　　　　　　　　　　　　　　　　　　　　　　　　　　　　　　　　　　　　　　　　　　　　　　　　　　　　　　　　　　　　　　　　　　　　　　　　　　　　　　　　　　　　　　　　　　　　　　　　　　　　　　　　　　　　　　　　　　　　　　　　　　　　　　　　　　　　　　　　　　　　　　　　　　　　　　　　　　　　　　　　　　　　　　　　　　　　　　　　　　　　　　　　　　　　　　　　　　　　　　　　　　　　　　　　　　　　　　　　　　　　　　　　　　　　　　　　　　　　　　　　　　　　　　　　　　　　　　　　　　　　　　　　　　　　　　　　　　　　　　　　　　　　　　　　　　　　　　　　　　　　　　　　　　　　　　　　　　　　　　　　　　　　　　　　　　　　　　　　　　　　　　　　　　　　　　　　　　　　　　　　　　　　　　　　　　　　　　　　　　　　　　　　　　　　　　　　　　　　　　　　　　　　　　　　　　　　　　　　　　　　　　　　　　　　　　　　　　　　　　　　　　　　　　　　　　　　　　　　　　　　　　　　　　　　　　　　　　　　　　　　　　　　　　　　　　　　　　　　　　　　　　　　　　　　　　　　　　　　　　　　　　　　　　　　　　　　　　　　　　　　　　　　　　　　　　　　　　　　　　　　　　　　　　　　　　　　　　　　　　　　　　　　　　　　　　　　　　　　　　　　　　　　　　　　　　　　　　　　　　　　　　　　　　　　　　　　　　　　　　　　　　　　　　　　　　　　　　　　　　　　　　　　　　　　　　　　　　　　　　　　　　　　　　　　　　　　　　　　　　　　　　　　　　　　　　　　　　　　　　　　　　　　　　　　　　　　　　　　　　　　　　　　　　　　　　　　　　　　　　　　　　　　　　　　　　　　　　　　　　　　　　　　　　　　　　　　　　　　　　　　　　　　　　　　　　　　　　　　　　　　　　　　　　　　　　　　　　　　　　　　　　　　　　　　　　　　　　　　　　　　　　　　　　　　　　　　　　　　　　　　　　　　　　　　　　　　　　　　　　　　　　　　　　　　　　　　　　　　　　　　　　　　　　　　　　　　　　　　　　　　　　　　　　　　　　　　　　　　　　　　　　　　　　　　　　　　　　　　　　　　　　　　　　　　　　　　　　　　　　　　　　　　　　　　　　　　　　　　　　　　　　　　　　　　　　　　　　　　　　　　　　　　　　　　　　　　　　　　　　　　　　　　　　　　　　　　　　　　　　　　　　　　　　　　　　　　　　　　　　　　　　　　　　　　　　　　　　　　　　　　　　　　　　　　　　　　　　　　　　　　　　　　　　　　　　　　　　　　　　　　　　　　　　　　　　　　　　　　　　　　　　　　　　　　　　　　　　　　　　　　　　　　　　　　　　　　　　　　　　　　　　　　　　　　　　　　　　　　　　　　　　　　　　　　　　　　　　　　　　　　　　　　　　　　　　　　　　　　　　　　　　　　　　　　　　　　　　　　　　　　　　　　　　　　　　　　　　　　　　　　　　　　　　　　　　　　　　　　　　　　　　　　　　　　　　　　　　　　　　　　　　　　　　　　　　　　　　　　　　　　　　　　　　　　　　　　　　　　　　　　　　　　　　　　　　　　　　　　　　　　　　　　　　　　　　　　　　　　　　　　　　　　　　　　　　　　　　　　　　　　　　　　　　　　　　　　　　　　　　　　　　　　　　　　　　　　　　　　　　　　　　　　　　　　　　　　　　　　　　　　　　　　　　　　　　　　　　　　　　　　　　　　　　　　　　　　　　　　　　　　　　　　　　　　　　　　　　　　　　　　　　　　　　　　　　　　　　　　　　　　　　　　　　　　　　　　　　　　　　　　　　　　　　　　　　　　　　　　　　　　　　　　　　　　　　　　　　　　　　　　　　　　　　　　　　　　　　　　　　　　　　　　　　　　　　　　　　　　　　　　　　　　　　　　　　　　　　　　　　　　　　　　　　　　　　　　　　　　　　　　　　　　　　　　　　　　　　　　　　　　　　　　　　　　　　　　　　　　　　　　　　　　　　　　　　　　　　　　　　　　　　　　　　　　　　　　　　　　　　　　　　　　　　　　　　　　　　　　　　　　　　　　　　　　　　　　　　　　　　　　　　　　　　　　　　　　　　　　　　　　　　　　　　　　　　　　　　　　　　　　　　　　　　　　　　　　　　　　　　　　　　　　　　　　　　　　　　　　　　　　　　　　　　　　　　　　　　　　　　　　　　　　　　　　　　　　　　　　　　　　　　　　　　　　　　　　　　　　　　　　　　　　　　　　　　　　　　　　　　　　　　　　　　　　　　　　　　　　　　　　　　　　　　　　　　　　　　　　　　　　　　　　　　　　　　　　　　　　　　　　　　　　　　　　　　　　　　　　　　　　　　　　　　　　　　　　　　　　　　　　　　　　　　　　　　　　　　　　　　　　　　　　　　　　　　　　　　　　　　　　　　　　　　　　　　　　　　　　　　　　　　　　　　　　　　　　　　　　　　　　　　　　　　　　　　　　　　　　　　　　　　　　　　　　　　　　　　　　　　　　　　　　　　　　　　　　　　　　　　　　　　　　　　　　　　　　　　　　　　　　　　　　　　　　　　　　　　　　　　　　　　　　　　　　　　　　　　　　　　　　　　　　　　　　　　　　　　　　　　　　　　　　　　　　　　　　　　　　　　　　　　　　　　　　　　　　　　　　　　　　　　　　　　　　　　　　　　　　　　　　　　　　　　　　　　　　　　　　　　　　　　　　　　　　　　　　　　　　　　　　　　　　　　　　　　　　　　　　　　　　　　　　　　　　　　　　　　　　　　　　　　　　　　　　　　　　　　　　　　　　　　　　　　　　　　　　　　　　　　　　　　　　　　　　　　　　　　　　　　　　　　　　　　　　　　　　　　　　　　　　　　　　　　　　　　　　　　　　　　　　　　　　　　　　　　　　　　　　　　　　　　　　　　　　　　　　　　　　　　　　　　　　　　　　　　　　　　　　　　　　　　　　　　　　　　　　　　　　　　　　　　　　　　　　　　　　　　　　　　　　　　　　　　　　　　　　　　　　　　　　　　　　　　　　　　　　　　　　　　　　　　　　　　　　　　　　　　　　　　　　　　　　　　　　　　　　　　　　　　　　　　　　　　　　　　　　　　　　　　　　　　　　　　　　　　　　　　　　　　　　　　　　　　　　　　　　　　　　　　　　　　　　　　　　　　　　　　　　　　　　　　　　　　　　　　　　　　　　　　　　　　　　　　　　　　　　　　　　　　　　　　　　　　　　　　　　　　　　　　　　　　　　　　　　　　　　　　　　　　　　　　　　　　　　　　　　　　　　　　　　　　　　　　　　　　　　　　　　　　　　　　　　　　　　　　　　　　　　　　　　　　　　　　　　　　　　　　　　　　　　　　　　　　　　　　　　　　　　　　　　　　　　　　　　　　　　　　　　　　　　　　　　　　　　　　　　　　　　　　　　　　　　　　　　　　　　　　　　　　　　　　　　　　　　　　　　　　　　　　　　　　　　　　　　　　　　　　　　　　　　　　　　　　　　　　　　　　　　　　　　　　　　　　　　　　　　　　　　　　　　　　　　　　　　　　　　　　　　　　　　　　　　　　　　　　　　　　　　　　　　　　　　　　　　　　　　　　　　　　　　　　　　　　　　　　　　　　　　　　　　　　　　　　　　　　　　　　　　　　　　　　　　　　　　　　　　　　　　　　　　　　　　　　　　　　　　　　　　　　　　　　　　　　　　　　　　　　　　　　　　　　　　　　　　　　　　　　　　　　　　　　　　　　　　　　　　　　　　　　　　　　　　　　　　　　　　　　　　　　　　　　　　　　　　　　　　　　　　　　　　　　　　　　　　　　　　　　　　　　　　　　　　　　　　　　　　　　　　　　　　　　　　　　　　　　　　　　　　　　　　　　　　　　　　　　　　　　　　　　　　　　　　　　　　　　　　　　　　　　　　　　　　　　　　　　　　　　　　　　　　　　　　　　　　　　　　　　　　　　　　　　　　　　　　　　　　　　　　　　　　　　　　　　　　　　　　　　　　　　　　　　　　　　　　　　　　　　　　　　　　　　　　　　　　　　　　　　　　　　　　　　　　　　　　　　　　　　　　　　　　　　　　　　　　　　　　　　　　　　　　　　　　　　　　　　　　　　　　　　　　　　　　　　　　　　　　　　　　　　　　　　　　　　　　　　　　　　　　　　　　　　　　　　　　　　　　　　　　　　　　　　　　　　　　　　　　　　　　　　　　　　　　　　　　　　　　　　　　　　　　　　　　　　　　　　　　　　　　　　　　　　　　　　　　　　　　　　　　　　　　　　　　　　　　　　　　　　　　　　　　　　　　　　　　　　　　　　　　　　　　　　　　　　　　　　　　　　　　　　　　　　　　　　　　　　　　　　　　　　　　　　　　　　　　　　　　　　　　　　　　　　　　　　　　　　　　　　　　　　　　　　　　　　　　　　　　　　　　　　　　　　　　　　　　　　　　　　　　　　　　　　　　　　　　　　　　　　　　　　　　　　　　　　　　　　　　　　　　　　　　　　　　　　　　　　　　　　　　　　　　　　　　　　　　　　　　　　　　　　　　　　　　　　　　　　　　　　　　　　　　　　　　　　　　　　　　　　　　　　　　　　　　　　　　　　　　　　　　　　　　　　　　　　　　　　　　　　　　　　　　　　　　　　　　　　　　　　　　　　　　　　　　　　　　　　　　　　　　　　　　　　　　　　　　　　　　　　　　　　　　　　　　　　　　　　　　　　　　　　　　　　　　　　　　　　　　　　　　　　　　　　　　　　　　　　　　　　　　　　　　　　　　　　　　　　　　　　　　　　　　　　　　　　　　　　　　　　　　　　　　　　　　　　　　　　　　　　　　　　　　　　　　　　　　　　　　　　　　　　　　　　　　　　　　　　　　　　　　　　　　　　　　　　　　　　　　　　　　　　　　　　　　　　　　　　　　　　　　　　　　　　　　　　　　　　　　　　　　　　　　　　　　　　　　　　　　　　　　　　　　　　　　　　　　　　　　　　　　　　　　　　　　　　　　　　　　　　　　　　　　　　　　　　　　　　　　　　　　　　　　　　　　　　　　　　　　　　　　　　　　　　　　　　　　　　　　　　　　　　　　　　　　　　　　　　　　　　　　　　　　　　　　　　　　　　　　　　　　　　　　　　　　　　　　　　　　　　　　　　　　　　　　　　　　　　　　　　　　　　　　　　　　　　　　　　　　　　　　　　　　　　　　　　　　　　　　　　　　　　　　　　　　　　　　　　　　　　　　　　　　　　　　　　　　　　　　　　　　　　　　　　　　　　　　　　　　　　　　　　　　　　　　　　　　　　　　　　　　　　　　　　　　　　　　　　　　　　　　　　　　　　　　　　　　　　　　　　　　　　　　　　　　　　　　　　　　　　　　　　　　　　　　　　　　　　　　　　　　　　　　　　　　　　　　　　　　　　　　　　　　　　　　　　　　　　　　　　　　　　　　　　　　　　　　　　　　　　　　　　　　　　　　　　　　　　　　　　　　　　　　　　　　　　　　　　　　　　　　　　　　　　　　　　　　　　　　　　　　　　　　　　　　　　　　　　　　　　　　　　　　　　　　　　　　　　　　　　　　　　　　　　　　　　　　　　　　　　　　　　　　　　　　　　　　　　　　　　　　　　　　　　　　　　　　　　　　　　　　　　　　　　　　　　　　　　　　　　　　　　　　　　　　　　　　　　　　　　　　　　　　　　　　　　　　　　　　　　　　　　　　　　　　　　　　　　　　　　　　　　　　　　　　　　　　　　　　　　　　　　　　　　　　　　　　　　　　　　　　　　　　　　　　　　　　　　　　　　　　　　　　　　　　　　　　　　　　　　　　　　　　　　　　　　　　　　　　　　　　　　　　　　　　　　　　　　　　　　　　　　　　　　　　　　　　　　　　　　　　　　　　　　　　　　　　　　　　　　　　　　　　　　　　　　　　　　　　　　　　　　　　　　　　　　　　　　　　　　　　　　　　　　　　　　　　　　　　　　　　　　　　　　　　　　　　　　　　　　　　　　　　　　　　　　　　　　　　　　　　　　　　　　　　　　　　　　　　　　　　　　　　　　　　　　　　　　　　　　　　　　　　　　　　　　　　　　　　　　　　　　　　　　　　　　　　　　　　　　　　　　　　　　　　　　　　　　　　　　　　　　　　　　　　　　　　　　　　　　　　　　　　　　　　　　　　　　　　　　　　　　　　　　　　　　　　　　　　　　　　　　　　　　　　　　　　　　　　　　　　　　　　　　　　　　　　　　　　　　　　　　　　　　　　　　　　　　　　　　　　　　　　　　　　　　　　　　　　　　　　　　　　　　　　　　　　　　　　　　　　　　　　　　　　　　　　　　　　　　　　　　　　　　　　　　　　　　　　　　　　　　　　　　　　　　　　　　　　　　　　　　　　　　　　　　　　　　　　　　　　　　　　　　　　　　　　　　　　　　　　　　　　　　　　　　　　　　　　　　　　　　　　　　　　　　　　　　　　　　　　　　　　　　　　　　　　　　　　　　　　　　　　　　　　　　　　　　　　　　　　　　　　　　　　　　　　　　　　　　　　　　　　　　　　　　　　　　　　　　　　　　　　　　　　　　　　　　　　　　　　　　　　　　　　　　　　　　　　　　　　　　　　　　　　　　　　　　　　　　　　　　　　　　　　　　　　　　　　　　　　　　　　　　　　　　　　　　　　　　　　　　　　　　　　　　　　　　　　　　　　　　　　　　　　　　　　　　　　　　　　　　　　　　　　　　　　　　　　　　　　　　　　　　　　　　　　　　　　　　　　　　　　　　　　　　　　　　　　　　　　　　　　　　　　　　　　　　　　　　　　　　　　　　　　　　　　　　　　　　　　　　　　　　　　　　　　　　　　　　　　　　　　　　　　　　　　　　　　　　　　　　　　　　　　　　　　　　　　　　　　　　　　　　　　　　　　　　　　　　　　　　　　　　　　　　　　　　　　　　　　　　　　　　　　　　　　　　　　　　　　　　　　　　　　　　　　　　　　　　　　　　　　　　　　　　　　　　　　　　　　　　　　　　　　　　　　　　　　　　　　　　　　　　　　　　　　　　　　　　　　　　　　　　　　　　　　　　　　　　　　　　　　　　　　　　　　　　　　　　　　　　　　　　　　　　　　　　　　　　　　　　　　　　　　　　　　　　　　　　　　　　　　　　　　　　　　　　　　　　　　　　　　　　　　　　　　　　　　　　　　　　　　　　　　　　　　　　　　　　　　　　　　　　　　　　　　　　　　　　　　　　　　　　　　　　　　　　　　　　　　　　　　　　　　　　　　　　　　　　　　　　　　　　　　　　　　　　　　　　　　　　　　　　　　　　　　　　　　　　　　　　　　　　　　　　　　　　　　　　　　　　　　　　　　　　　　　　　　　　　　　　　　　　　　　　　　　　　　　　　　　　　　　　　　　　　　　　　　　　　　　　　　　　　　　　　　　　　　　　　　　　　　　　　　　　　　　　　　　　　　　　　　　　　　　　　　　　　　　　　　　　　　　　　　　　　　　　　　　　　　　　　　　　　　　　　　　　　　　　　　　　　　　　　　　　　　　　　　　　　　　　　　　　　　　　　　　　　　　　　　　　　　　　　　　　　　　　　　　　　　　　　　　　　　　　　　　　　　　　　　　　　　　　　　　　　　　　　　　　　　　　　　　　　　　　　　　　　　　　　　　　　　　　　　　　　　　　　　　　　　　　　　　　　　　　　　　　　　　　　　　　　　　　　　　　　　　　　　　　　　　　　　　　　　　　　　　　　　　　　　　　　　　　　　　　　　　　　　　　　　　　　　　　　　　　　　　　　　　　　　　　　　　　　　　　　　　　　　　　　　　　　　　　　　　　　　　　　　　　　　　　　　　　　　　　　　　　　　　　　　　　　　　　　　　　　　　　　　　　　　　　　　　　　　　　　　　　　　　　　　　　　　　　　　　　　　　　　　　　　　　　　　　　　　　　　　　　　　　　　　　　　　　　　　　　　　　　　　　　　　　　　　　　　　　　　　　　　　　　　　　　　　　　　　　　　　　　　　　　　　　　　　　　　　　　　　　　　　　　　　　　　　　　　　　　　　　　　　　　　　　　　　　　　　　　　　　　　　　　　　　　　　　　　　　　　　　　　　　　　　　　　　　　　　　　　　　　　　　　　　　　　　　　　　　　　　　　　　　　　　　　　　　　　　　　　　　　　　　　　　　　　　　　　　　　　　　　　　　　　　　　　　　　　　　　　　　　　　　　　　　　　　　　　　　　　　　　　　　　　　　　　　　　　　　　　　　　　　　　　　　　　　　　　　　　　　　　　　　　　　　　　　　　　　　　　　　　　　　　　　　　　　　　　　　　　　　　　　　　　　　　　　　　　　　　　　　　　　　　　　　　　　　　　　　　　　　　　　　　　　　　　　　　　　　　　　　　　　　　　　　　　　　　　　　　　　　　　　　　　　　</a:t>
             </a:r>
           </a:p>
         </p:txBody>
@@ -7140,14 +9536,15 @@
               </a:ext>
             </a:extLst>
           </a:blip>
+          <a:srcRect l="-49807" r="49807"/>
           <a:stretch>
             <a:fillRect/>
           </a:stretch>
         </p:blipFill>
         <p:spPr>
           <a:xfrm>
-            <a:off x="5434148" y="2420339"/>
-            <a:ext cx="6643570" cy="3537699"/>
+            <a:off x="4045046" y="2140013"/>
+            <a:ext cx="7272985" cy="3872862"/>
           </a:xfrm>
           <a:prstGeom prst="rect">
             <a:avLst/>
@@ -7167,7 +9564,7 @@
 </p:sld>
 </file>
 
-<file path=ppt/slides/slide7.xml><?xml version="1.0" encoding="utf-8"?>
+<file path=ppt/slides/slide5.xml><?xml version="1.0" encoding="utf-8"?>
 <p:sld xmlns:a="http://schemas.openxmlformats.org/drawingml/2006/main" xmlns:r="http://schemas.openxmlformats.org/officeDocument/2006/relationships" xmlns:p="http://schemas.openxmlformats.org/presentationml/2006/main">
   <p:cSld>
     <p:bg>
@@ -7249,7 +9646,7 @@
         </p:nvSpPr>
         <p:spPr>
           <a:xfrm>
-            <a:off x="1328398" y="1134888"/>
+            <a:off x="1227656" y="1484993"/>
             <a:ext cx="1386161" cy="646331"/>
           </a:xfrm>
           <a:prstGeom prst="rect">
@@ -7286,7 +9683,7 @@
         </p:nvSpPr>
         <p:spPr>
           <a:xfrm>
-            <a:off x="1010194" y="1117712"/>
+            <a:off x="909452" y="1467817"/>
             <a:ext cx="2050181" cy="646331"/>
           </a:xfrm>
           <a:prstGeom prst="rect">
@@ -7315,7 +9712,7 @@
           <a:lstStyle/>
           <a:p>
             <a:pPr algn="ctr"/>
-            <a:endParaRPr kumimoji="1" lang="ja-JP" altLang="en-US"/>
+            <a:endParaRPr kumimoji="1" lang="ja-JP" altLang="en-US" dirty="0"/>
           </a:p>
         </p:txBody>
       </p:sp>
@@ -7333,7 +9730,7 @@
         </p:nvSpPr>
         <p:spPr>
           <a:xfrm>
-            <a:off x="7473588" y="1106379"/>
+            <a:off x="7473587" y="1585609"/>
             <a:ext cx="1783485" cy="646331"/>
           </a:xfrm>
           <a:prstGeom prst="rect">
@@ -7370,7 +9767,7 @@
         </p:nvSpPr>
         <p:spPr>
           <a:xfrm>
-            <a:off x="7406249" y="1112798"/>
+            <a:off x="7419107" y="1583871"/>
             <a:ext cx="2050181" cy="646333"/>
           </a:xfrm>
           <a:prstGeom prst="rect">
@@ -7417,7 +9814,7 @@
         </p:nvSpPr>
         <p:spPr>
           <a:xfrm>
-            <a:off x="3762102" y="2258271"/>
+            <a:off x="3697974" y="2284583"/>
             <a:ext cx="1462643" cy="484632"/>
           </a:xfrm>
           <a:prstGeom prst="rightArrow">
@@ -7452,38 +9849,6 @@
       </p:sp>
       <p:sp>
         <p:nvSpPr>
-          <p:cNvPr id="16" name="コンテンツ プレースホルダー 15">
-            <a:extLst>
-              <a:ext uri="{FF2B5EF4-FFF2-40B4-BE49-F238E27FC236}">
-                <a16:creationId xmlns:a16="http://schemas.microsoft.com/office/drawing/2014/main" id="{3A6A2281-1427-7AF9-13FB-E8D6453947FC}"/>
-              </a:ext>
-            </a:extLst>
-          </p:cNvPr>
-          <p:cNvSpPr>
-            <a:spLocks noGrp="1"/>
-          </p:cNvSpPr>
-          <p:nvPr>
-            <p:ph idx="1"/>
-          </p:nvPr>
-        </p:nvSpPr>
-        <p:spPr>
-          <a:xfrm>
-            <a:off x="677334" y="5843451"/>
-            <a:ext cx="896334" cy="197911"/>
-          </a:xfrm>
-        </p:spPr>
-        <p:txBody>
-          <a:bodyPr>
-            <a:normAutofit fontScale="40000" lnSpcReduction="20000"/>
-          </a:bodyPr>
-          <a:lstStyle/>
-          <a:p>
-            <a:endParaRPr lang="ja-JP" altLang="en-US" dirty="0"/>
-          </a:p>
-        </p:txBody>
-      </p:sp>
-      <p:sp>
-        <p:nvSpPr>
           <p:cNvPr id="17" name="テキスト ボックス 16">
             <a:extLst>
               <a:ext uri="{FF2B5EF4-FFF2-40B4-BE49-F238E27FC236}">
@@ -7496,8 +9861,8 @@
         </p:nvSpPr>
         <p:spPr>
           <a:xfrm>
-            <a:off x="3927566" y="3429000"/>
-            <a:ext cx="1462643" cy="369332"/>
+            <a:off x="1416871" y="4684987"/>
+            <a:ext cx="1462643" cy="461665"/>
           </a:xfrm>
           <a:prstGeom prst="rect">
             <a:avLst/>
@@ -7510,7 +9875,7 @@
           </a:bodyPr>
           <a:lstStyle/>
           <a:p>
-            <a:endParaRPr kumimoji="1" lang="ja-JP" altLang="en-US" dirty="0"/>
+            <a:endParaRPr kumimoji="1" lang="ja-JP" altLang="en-US" sz="2400" dirty="0"/>
           </a:p>
         </p:txBody>
       </p:sp>
@@ -7528,8 +9893,8 @@
         </p:nvSpPr>
         <p:spPr>
           <a:xfrm>
-            <a:off x="1010194" y="1759131"/>
-            <a:ext cx="2419896" cy="4833258"/>
+            <a:off x="909452" y="2114148"/>
+            <a:ext cx="2419896" cy="4396212"/>
           </a:xfrm>
           <a:prstGeom prst="rect">
             <a:avLst/>
@@ -7575,8 +9940,8 @@
         </p:nvSpPr>
         <p:spPr>
           <a:xfrm>
-            <a:off x="5371898" y="1759131"/>
-            <a:ext cx="4582007" cy="4833258"/>
+            <a:off x="5410200" y="2228129"/>
+            <a:ext cx="4582007" cy="4282231"/>
           </a:xfrm>
           <a:prstGeom prst="rect">
             <a:avLst/>
@@ -7622,7 +9987,7 @@
         </p:nvSpPr>
         <p:spPr>
           <a:xfrm>
-            <a:off x="5690103" y="1854256"/>
+            <a:off x="7628113" y="2270741"/>
             <a:ext cx="1783485" cy="646331"/>
           </a:xfrm>
           <a:prstGeom prst="rect">
@@ -7665,8 +10030,8 @@
         </p:nvSpPr>
         <p:spPr>
           <a:xfrm>
-            <a:off x="1368757" y="1976065"/>
-            <a:ext cx="1783485" cy="369332"/>
+            <a:off x="1071099" y="4430087"/>
+            <a:ext cx="2202308" cy="1200329"/>
           </a:xfrm>
           <a:prstGeom prst="rect">
             <a:avLst/>
@@ -7680,10 +10045,20 @@
           <a:lstStyle/>
           <a:p>
             <a:r>
-              <a:rPr kumimoji="1" lang="en-US" altLang="ja-JP" dirty="0"/>
+              <a:rPr kumimoji="1" lang="en-US" altLang="ja-JP" sz="2400" dirty="0"/>
               <a:t>Unity</a:t>
             </a:r>
-            <a:endParaRPr kumimoji="1" lang="ja-JP" altLang="en-US" dirty="0"/>
+            <a:r>
+              <a:rPr kumimoji="1" lang="ja-JP" altLang="en-US" sz="2400" dirty="0"/>
+              <a:t>で</a:t>
+            </a:r>
+            <a:endParaRPr kumimoji="1" lang="en-US" altLang="ja-JP" sz="2400" dirty="0"/>
+          </a:p>
+          <a:p>
+            <a:r>
+              <a:rPr kumimoji="1" lang="ja-JP" altLang="en-US" sz="2400" dirty="0"/>
+              <a:t>タグつけ後のデータを表示</a:t>
+            </a:r>
           </a:p>
         </p:txBody>
       </p:sp>
@@ -7701,8 +10076,8 @@
         </p:nvSpPr>
         <p:spPr>
           <a:xfrm>
-            <a:off x="5556757" y="3562366"/>
-            <a:ext cx="2092536" cy="923330"/>
+            <a:off x="5547752" y="3064324"/>
+            <a:ext cx="2092536" cy="1200329"/>
           </a:xfrm>
           <a:prstGeom prst="rect">
             <a:avLst/>
@@ -7716,19 +10091,19 @@
           <a:lstStyle/>
           <a:p>
             <a:r>
-              <a:rPr kumimoji="1" lang="en-US" altLang="ja-JP" dirty="0"/>
+              <a:rPr kumimoji="1" lang="en-US" altLang="ja-JP" sz="2400" dirty="0"/>
               <a:t>Nodes</a:t>
             </a:r>
             <a:r>
-              <a:rPr kumimoji="1" lang="ja-JP" altLang="en-US" dirty="0"/>
+              <a:rPr kumimoji="1" lang="ja-JP" altLang="en-US" sz="2400" dirty="0"/>
               <a:t>を元に</a:t>
             </a:r>
             <a:r>
-              <a:rPr kumimoji="1" lang="en-US" altLang="ja-JP" dirty="0" err="1"/>
+              <a:rPr kumimoji="1" lang="en-US" altLang="ja-JP" sz="2400" dirty="0" err="1"/>
               <a:t>MusicXML</a:t>
             </a:r>
             <a:r>
-              <a:rPr kumimoji="1" lang="ja-JP" altLang="en-US" dirty="0"/>
+              <a:rPr kumimoji="1" lang="ja-JP" altLang="en-US" sz="2400" dirty="0"/>
               <a:t>ファイルを作成</a:t>
             </a:r>
           </a:p>
@@ -7748,8 +10123,8 @@
         </p:nvSpPr>
         <p:spPr>
           <a:xfrm>
-            <a:off x="1256451" y="2500587"/>
-            <a:ext cx="1783485" cy="646331"/>
+            <a:off x="1068735" y="3302441"/>
+            <a:ext cx="2134642" cy="830997"/>
           </a:xfrm>
           <a:prstGeom prst="rect">
             <a:avLst/>
@@ -7763,18 +10138,18 @@
           <a:lstStyle/>
           <a:p>
             <a:r>
-              <a:rPr kumimoji="1" lang="ja-JP" altLang="en-US" dirty="0"/>
+              <a:rPr kumimoji="1" lang="ja-JP" altLang="en-US" sz="2400" dirty="0"/>
               <a:t>音符リスト</a:t>
             </a:r>
             <a:br>
-              <a:rPr kumimoji="1" lang="en-US" altLang="ja-JP" dirty="0"/>
+              <a:rPr kumimoji="1" lang="en-US" altLang="ja-JP" sz="2400" dirty="0"/>
             </a:br>
             <a:r>
-              <a:rPr kumimoji="1" lang="en-US" altLang="ja-JP" dirty="0"/>
+              <a:rPr kumimoji="1" lang="en-US" altLang="ja-JP" sz="2400" dirty="0"/>
               <a:t>Nodes</a:t>
             </a:r>
             <a:r>
-              <a:rPr kumimoji="1" lang="ja-JP" altLang="en-US" dirty="0"/>
+              <a:rPr kumimoji="1" lang="ja-JP" altLang="en-US" sz="2400" dirty="0"/>
               <a:t>を作成</a:t>
             </a:r>
           </a:p>
@@ -7794,8 +10169,8 @@
         </p:nvSpPr>
         <p:spPr>
           <a:xfrm>
-            <a:off x="7649293" y="3528313"/>
-            <a:ext cx="2092536" cy="923330"/>
+            <a:off x="7749743" y="3022017"/>
+            <a:ext cx="2208909" cy="1200329"/>
           </a:xfrm>
           <a:prstGeom prst="rect">
             <a:avLst/>
@@ -7809,20 +10184,20 @@
           <a:lstStyle/>
           <a:p>
             <a:r>
-              <a:rPr kumimoji="1" lang="en-US" altLang="ja-JP" dirty="0" err="1"/>
+              <a:rPr kumimoji="1" lang="en-US" altLang="ja-JP" sz="2400" dirty="0" err="1"/>
               <a:t>MusicXML</a:t>
             </a:r>
             <a:r>
-              <a:rPr kumimoji="1" lang="ja-JP" altLang="en-US" dirty="0"/>
-              <a:t>ファイルを</a:t>
-            </a:r>
-            <a:r>
-              <a:rPr kumimoji="1" lang="en-US" altLang="ja-JP" dirty="0"/>
+              <a:rPr kumimoji="1" lang="ja-JP" altLang="en-US" sz="2400" dirty="0"/>
+              <a:t>を</a:t>
+            </a:r>
+            <a:r>
+              <a:rPr kumimoji="1" lang="en-US" altLang="ja-JP" sz="2400" dirty="0"/>
               <a:t>MIDI</a:t>
             </a:r>
             <a:r>
-              <a:rPr kumimoji="1" lang="ja-JP" altLang="en-US" dirty="0"/>
-              <a:t>ファイルに変換</a:t>
+              <a:rPr kumimoji="1" lang="ja-JP" altLang="en-US" sz="2400" dirty="0"/>
+              <a:t>ファイルに変換、再生</a:t>
             </a:r>
           </a:p>
         </p:txBody>
@@ -7841,8 +10216,8 @@
         </p:nvSpPr>
         <p:spPr>
           <a:xfrm>
-            <a:off x="5495109" y="3562366"/>
-            <a:ext cx="2050181" cy="992217"/>
+            <a:off x="5495109" y="3064324"/>
+            <a:ext cx="2050181" cy="1490260"/>
           </a:xfrm>
           <a:prstGeom prst="rect">
             <a:avLst/>
@@ -7870,7 +10245,7 @@
           <a:lstStyle/>
           <a:p>
             <a:pPr algn="ctr"/>
-            <a:endParaRPr kumimoji="1" lang="ja-JP" altLang="en-US"/>
+            <a:endParaRPr kumimoji="1" lang="ja-JP" altLang="en-US" sz="2400"/>
           </a:p>
         </p:txBody>
       </p:sp>
@@ -7888,8 +10263,8 @@
         </p:nvSpPr>
         <p:spPr>
           <a:xfrm>
-            <a:off x="7692443" y="3541155"/>
-            <a:ext cx="2050181" cy="992217"/>
+            <a:off x="7728565" y="3055035"/>
+            <a:ext cx="1992575" cy="1499550"/>
           </a:xfrm>
           <a:prstGeom prst="rect">
             <a:avLst/>
@@ -7921,6 +10296,558 @@
           </a:p>
         </p:txBody>
       </p:sp>
+      <p:sp>
+        <p:nvSpPr>
+          <p:cNvPr id="3" name="正方形/長方形 2">
+            <a:extLst>
+              <a:ext uri="{FF2B5EF4-FFF2-40B4-BE49-F238E27FC236}">
+                <a16:creationId xmlns:a16="http://schemas.microsoft.com/office/drawing/2014/main" id="{9750319A-2B5E-ABF1-B2F2-B95E154DF5F1}"/>
+              </a:ext>
+            </a:extLst>
+          </p:cNvPr>
+          <p:cNvSpPr/>
+          <p:nvPr/>
+        </p:nvSpPr>
+        <p:spPr>
+          <a:xfrm>
+            <a:off x="5495108" y="4678450"/>
+            <a:ext cx="2542903" cy="1805553"/>
+          </a:xfrm>
+          <a:prstGeom prst="rect">
+            <a:avLst/>
+          </a:prstGeom>
+          <a:noFill/>
+        </p:spPr>
+        <p:style>
+          <a:lnRef idx="2">
+            <a:schemeClr val="accent1">
+              <a:shade val="15000"/>
+            </a:schemeClr>
+          </a:lnRef>
+          <a:fillRef idx="1">
+            <a:schemeClr val="accent1"/>
+          </a:fillRef>
+          <a:effectRef idx="0">
+            <a:schemeClr val="accent1"/>
+          </a:effectRef>
+          <a:fontRef idx="minor">
+            <a:schemeClr val="lt1"/>
+          </a:fontRef>
+        </p:style>
+        <p:txBody>
+          <a:bodyPr rtlCol="0" anchor="ctr"/>
+          <a:lstStyle/>
+          <a:p>
+            <a:pPr algn="ctr"/>
+            <a:endParaRPr kumimoji="1" lang="ja-JP" altLang="en-US" sz="2400"/>
+          </a:p>
+        </p:txBody>
+      </p:sp>
+      <p:sp>
+        <p:nvSpPr>
+          <p:cNvPr id="7" name="テキスト ボックス 6">
+            <a:extLst>
+              <a:ext uri="{FF2B5EF4-FFF2-40B4-BE49-F238E27FC236}">
+                <a16:creationId xmlns:a16="http://schemas.microsoft.com/office/drawing/2014/main" id="{2AACE23A-BE41-6E78-5CAC-E829017CB867}"/>
+              </a:ext>
+            </a:extLst>
+          </p:cNvPr>
+          <p:cNvSpPr txBox="1"/>
+          <p:nvPr/>
+        </p:nvSpPr>
+        <p:spPr>
+          <a:xfrm>
+            <a:off x="5556757" y="4689172"/>
+            <a:ext cx="2481254" cy="1569660"/>
+          </a:xfrm>
+          <a:prstGeom prst="rect">
+            <a:avLst/>
+          </a:prstGeom>
+          <a:noFill/>
+        </p:spPr>
+        <p:txBody>
+          <a:bodyPr wrap="square" rtlCol="0">
+            <a:spAutoFit/>
+          </a:bodyPr>
+          <a:lstStyle/>
+          <a:p>
+            <a:r>
+              <a:rPr kumimoji="1" lang="en-US" altLang="ja-JP" sz="2400" dirty="0" err="1"/>
+              <a:t>MusicXML</a:t>
+            </a:r>
+            <a:r>
+              <a:rPr kumimoji="1" lang="ja-JP" altLang="en-US" sz="2400" dirty="0"/>
+              <a:t>から</a:t>
+            </a:r>
+            <a:endParaRPr kumimoji="1" lang="en-US" altLang="ja-JP" sz="2400" dirty="0"/>
+          </a:p>
+          <a:p>
+            <a:r>
+              <a:rPr kumimoji="1" lang="ja-JP" altLang="en-US" sz="2400" dirty="0"/>
+              <a:t>特徴量を抽出し、それを使い判定、タグつけ</a:t>
+            </a:r>
+          </a:p>
+        </p:txBody>
+      </p:sp>
+      <p:sp>
+        <p:nvSpPr>
+          <p:cNvPr id="10" name="テキスト ボックス 9">
+            <a:extLst>
+              <a:ext uri="{FF2B5EF4-FFF2-40B4-BE49-F238E27FC236}">
+                <a16:creationId xmlns:a16="http://schemas.microsoft.com/office/drawing/2014/main" id="{62CDB0DB-F035-31D3-0BBC-05AD2449C484}"/>
+              </a:ext>
+            </a:extLst>
+          </p:cNvPr>
+          <p:cNvSpPr txBox="1"/>
+          <p:nvPr/>
+        </p:nvSpPr>
+        <p:spPr>
+          <a:xfrm>
+            <a:off x="3390507" y="2925304"/>
+            <a:ext cx="2016324" cy="830997"/>
+          </a:xfrm>
+          <a:prstGeom prst="rect">
+            <a:avLst/>
+          </a:prstGeom>
+          <a:noFill/>
+        </p:spPr>
+        <p:txBody>
+          <a:bodyPr wrap="square" rtlCol="0">
+            <a:spAutoFit/>
+          </a:bodyPr>
+          <a:lstStyle/>
+          <a:p>
+            <a:r>
+              <a:rPr kumimoji="1" lang="ja-JP" altLang="en-US" sz="2400" dirty="0"/>
+              <a:t>管理しているデータを渡す</a:t>
+            </a:r>
+          </a:p>
+        </p:txBody>
+      </p:sp>
+      <p:sp>
+        <p:nvSpPr>
+          <p:cNvPr id="11" name="正方形/長方形 10">
+            <a:extLst>
+              <a:ext uri="{FF2B5EF4-FFF2-40B4-BE49-F238E27FC236}">
+                <a16:creationId xmlns:a16="http://schemas.microsoft.com/office/drawing/2014/main" id="{022AEE5B-544F-7113-5608-EC3960F2E0BE}"/>
+              </a:ext>
+            </a:extLst>
+          </p:cNvPr>
+          <p:cNvSpPr/>
+          <p:nvPr/>
+        </p:nvSpPr>
+        <p:spPr>
+          <a:xfrm>
+            <a:off x="3443432" y="2897447"/>
+            <a:ext cx="1901163" cy="923331"/>
+          </a:xfrm>
+          <a:prstGeom prst="rect">
+            <a:avLst/>
+          </a:prstGeom>
+          <a:noFill/>
+        </p:spPr>
+        <p:style>
+          <a:lnRef idx="2">
+            <a:schemeClr val="accent1">
+              <a:shade val="15000"/>
+            </a:schemeClr>
+          </a:lnRef>
+          <a:fillRef idx="1">
+            <a:schemeClr val="accent1"/>
+          </a:fillRef>
+          <a:effectRef idx="0">
+            <a:schemeClr val="accent1"/>
+          </a:effectRef>
+          <a:fontRef idx="minor">
+            <a:schemeClr val="lt1"/>
+          </a:fontRef>
+        </p:style>
+        <p:txBody>
+          <a:bodyPr rtlCol="0" anchor="ctr"/>
+          <a:lstStyle/>
+          <a:p>
+            <a:pPr algn="ctr"/>
+            <a:endParaRPr kumimoji="1" lang="ja-JP" altLang="en-US" sz="2400"/>
+          </a:p>
+        </p:txBody>
+      </p:sp>
+      <p:sp>
+        <p:nvSpPr>
+          <p:cNvPr id="12" name="矢印: 右 11">
+            <a:extLst>
+              <a:ext uri="{FF2B5EF4-FFF2-40B4-BE49-F238E27FC236}">
+                <a16:creationId xmlns:a16="http://schemas.microsoft.com/office/drawing/2014/main" id="{D4B7C2B8-4C0B-EEC3-B087-EED18642030E}"/>
+              </a:ext>
+            </a:extLst>
+          </p:cNvPr>
+          <p:cNvSpPr/>
+          <p:nvPr/>
+        </p:nvSpPr>
+        <p:spPr>
+          <a:xfrm rot="10800000">
+            <a:off x="3697974" y="4483748"/>
+            <a:ext cx="1462643" cy="484632"/>
+          </a:xfrm>
+          <a:prstGeom prst="rightArrow">
+            <a:avLst/>
+          </a:prstGeom>
+          <a:noFill/>
+        </p:spPr>
+        <p:style>
+          <a:lnRef idx="2">
+            <a:schemeClr val="accent1">
+              <a:shade val="15000"/>
+            </a:schemeClr>
+          </a:lnRef>
+          <a:fillRef idx="1">
+            <a:schemeClr val="accent1"/>
+          </a:fillRef>
+          <a:effectRef idx="0">
+            <a:schemeClr val="accent1"/>
+          </a:effectRef>
+          <a:fontRef idx="minor">
+            <a:schemeClr val="lt1"/>
+          </a:fontRef>
+        </p:style>
+        <p:txBody>
+          <a:bodyPr rtlCol="0" anchor="ctr"/>
+          <a:lstStyle/>
+          <a:p>
+            <a:pPr algn="ctr"/>
+            <a:endParaRPr kumimoji="1" lang="ja-JP" altLang="en-US" sz="2400"/>
+          </a:p>
+        </p:txBody>
+      </p:sp>
+      <p:sp>
+        <p:nvSpPr>
+          <p:cNvPr id="14" name="正方形/長方形 13">
+            <a:extLst>
+              <a:ext uri="{FF2B5EF4-FFF2-40B4-BE49-F238E27FC236}">
+                <a16:creationId xmlns:a16="http://schemas.microsoft.com/office/drawing/2014/main" id="{45B48CC9-B069-9B3D-A129-0EF9DDB0A503}"/>
+              </a:ext>
+            </a:extLst>
+          </p:cNvPr>
+          <p:cNvSpPr/>
+          <p:nvPr/>
+        </p:nvSpPr>
+        <p:spPr>
+          <a:xfrm>
+            <a:off x="1045517" y="3271464"/>
+            <a:ext cx="2134642" cy="756467"/>
+          </a:xfrm>
+          <a:prstGeom prst="rect">
+            <a:avLst/>
+          </a:prstGeom>
+          <a:noFill/>
+        </p:spPr>
+        <p:style>
+          <a:lnRef idx="2">
+            <a:schemeClr val="accent1">
+              <a:shade val="15000"/>
+            </a:schemeClr>
+          </a:lnRef>
+          <a:fillRef idx="1">
+            <a:schemeClr val="accent1"/>
+          </a:fillRef>
+          <a:effectRef idx="0">
+            <a:schemeClr val="accent1"/>
+          </a:effectRef>
+          <a:fontRef idx="minor">
+            <a:schemeClr val="lt1"/>
+          </a:fontRef>
+        </p:style>
+        <p:txBody>
+          <a:bodyPr rtlCol="0" anchor="ctr"/>
+          <a:lstStyle/>
+          <a:p>
+            <a:pPr algn="ctr"/>
+            <a:endParaRPr kumimoji="1" lang="ja-JP" altLang="en-US" sz="2400"/>
+          </a:p>
+        </p:txBody>
+      </p:sp>
+      <p:sp>
+        <p:nvSpPr>
+          <p:cNvPr id="15" name="テキスト ボックス 14">
+            <a:extLst>
+              <a:ext uri="{FF2B5EF4-FFF2-40B4-BE49-F238E27FC236}">
+                <a16:creationId xmlns:a16="http://schemas.microsoft.com/office/drawing/2014/main" id="{4BB42584-9ED0-30F8-B9AD-E2E69477B2C8}"/>
+              </a:ext>
+            </a:extLst>
+          </p:cNvPr>
+          <p:cNvSpPr txBox="1"/>
+          <p:nvPr/>
+        </p:nvSpPr>
+        <p:spPr>
+          <a:xfrm>
+            <a:off x="3634446" y="5255801"/>
+            <a:ext cx="1714595" cy="923330"/>
+          </a:xfrm>
+          <a:prstGeom prst="rect">
+            <a:avLst/>
+          </a:prstGeom>
+          <a:noFill/>
+        </p:spPr>
+        <p:txBody>
+          <a:bodyPr wrap="square" rtlCol="0">
+            <a:spAutoFit/>
+          </a:bodyPr>
+          <a:lstStyle/>
+          <a:p>
+            <a:r>
+              <a:rPr kumimoji="1" lang="ja-JP" altLang="en-US" dirty="0"/>
+              <a:t>作成した</a:t>
+            </a:r>
+            <a:endParaRPr kumimoji="1" lang="en-US" altLang="ja-JP" dirty="0"/>
+          </a:p>
+          <a:p>
+            <a:r>
+              <a:rPr kumimoji="1" lang="ja-JP" altLang="en-US" dirty="0"/>
+              <a:t>データを</a:t>
+            </a:r>
+            <a:r>
+              <a:rPr kumimoji="1" lang="en-US" altLang="ja-JP" dirty="0"/>
+              <a:t>Unity</a:t>
+            </a:r>
+            <a:r>
+              <a:rPr kumimoji="1" lang="ja-JP" altLang="en-US" dirty="0"/>
+              <a:t>へ返す。</a:t>
+            </a:r>
+          </a:p>
+        </p:txBody>
+      </p:sp>
+      <p:sp>
+        <p:nvSpPr>
+          <p:cNvPr id="21" name="正方形/長方形 20">
+            <a:extLst>
+              <a:ext uri="{FF2B5EF4-FFF2-40B4-BE49-F238E27FC236}">
+                <a16:creationId xmlns:a16="http://schemas.microsoft.com/office/drawing/2014/main" id="{FF27EE26-56AB-93C2-68AE-6921C79720AB}"/>
+              </a:ext>
+            </a:extLst>
+          </p:cNvPr>
+          <p:cNvSpPr/>
+          <p:nvPr/>
+        </p:nvSpPr>
+        <p:spPr>
+          <a:xfrm>
+            <a:off x="3615239" y="5214917"/>
+            <a:ext cx="1690651" cy="964214"/>
+          </a:xfrm>
+          <a:prstGeom prst="rect">
+            <a:avLst/>
+          </a:prstGeom>
+          <a:noFill/>
+        </p:spPr>
+        <p:style>
+          <a:lnRef idx="2">
+            <a:schemeClr val="accent1">
+              <a:shade val="15000"/>
+            </a:schemeClr>
+          </a:lnRef>
+          <a:fillRef idx="1">
+            <a:schemeClr val="accent1"/>
+          </a:fillRef>
+          <a:effectRef idx="0">
+            <a:schemeClr val="accent1"/>
+          </a:effectRef>
+          <a:fontRef idx="minor">
+            <a:schemeClr val="lt1"/>
+          </a:fontRef>
+        </p:style>
+        <p:txBody>
+          <a:bodyPr rtlCol="0" anchor="ctr"/>
+          <a:lstStyle/>
+          <a:p>
+            <a:pPr algn="ctr"/>
+            <a:endParaRPr kumimoji="1" lang="ja-JP" altLang="en-US"/>
+          </a:p>
+        </p:txBody>
+      </p:sp>
+      <p:sp>
+        <p:nvSpPr>
+          <p:cNvPr id="29" name="正方形/長方形 28">
+            <a:extLst>
+              <a:ext uri="{FF2B5EF4-FFF2-40B4-BE49-F238E27FC236}">
+                <a16:creationId xmlns:a16="http://schemas.microsoft.com/office/drawing/2014/main" id="{288FC3E5-37D1-3608-E87D-528E7522BF31}"/>
+              </a:ext>
+            </a:extLst>
+          </p:cNvPr>
+          <p:cNvSpPr/>
+          <p:nvPr/>
+        </p:nvSpPr>
+        <p:spPr>
+          <a:xfrm>
+            <a:off x="1068735" y="4325812"/>
+            <a:ext cx="2145107" cy="1938356"/>
+          </a:xfrm>
+          <a:prstGeom prst="rect">
+            <a:avLst/>
+          </a:prstGeom>
+          <a:noFill/>
+        </p:spPr>
+        <p:style>
+          <a:lnRef idx="2">
+            <a:schemeClr val="accent1">
+              <a:shade val="15000"/>
+            </a:schemeClr>
+          </a:lnRef>
+          <a:fillRef idx="1">
+            <a:schemeClr val="accent1"/>
+          </a:fillRef>
+          <a:effectRef idx="0">
+            <a:schemeClr val="accent1"/>
+          </a:effectRef>
+          <a:fontRef idx="minor">
+            <a:schemeClr val="lt1"/>
+          </a:fontRef>
+        </p:style>
+        <p:txBody>
+          <a:bodyPr rtlCol="0" anchor="ctr"/>
+          <a:lstStyle/>
+          <a:p>
+            <a:pPr algn="ctr"/>
+            <a:endParaRPr kumimoji="1" lang="ja-JP" altLang="en-US" sz="2400" dirty="0"/>
+          </a:p>
+        </p:txBody>
+      </p:sp>
+      <p:sp>
+        <p:nvSpPr>
+          <p:cNvPr id="31" name="正方形/長方形 30">
+            <a:extLst>
+              <a:ext uri="{FF2B5EF4-FFF2-40B4-BE49-F238E27FC236}">
+                <a16:creationId xmlns:a16="http://schemas.microsoft.com/office/drawing/2014/main" id="{542DEF96-38DB-8F98-098F-5AA31620484E}"/>
+              </a:ext>
+            </a:extLst>
+          </p:cNvPr>
+          <p:cNvSpPr/>
+          <p:nvPr/>
+        </p:nvSpPr>
+        <p:spPr>
+          <a:xfrm>
+            <a:off x="7425448" y="2249009"/>
+            <a:ext cx="2050181" cy="646333"/>
+          </a:xfrm>
+          <a:prstGeom prst="rect">
+            <a:avLst/>
+          </a:prstGeom>
+          <a:noFill/>
+        </p:spPr>
+        <p:style>
+          <a:lnRef idx="2">
+            <a:schemeClr val="accent1">
+              <a:shade val="15000"/>
+            </a:schemeClr>
+          </a:lnRef>
+          <a:fillRef idx="1">
+            <a:schemeClr val="accent1"/>
+          </a:fillRef>
+          <a:effectRef idx="0">
+            <a:schemeClr val="accent1"/>
+          </a:effectRef>
+          <a:fontRef idx="minor">
+            <a:schemeClr val="lt1"/>
+          </a:fontRef>
+        </p:style>
+        <p:txBody>
+          <a:bodyPr rtlCol="0" anchor="ctr"/>
+          <a:lstStyle/>
+          <a:p>
+            <a:pPr algn="ctr"/>
+            <a:endParaRPr kumimoji="1" lang="ja-JP" altLang="en-US"/>
+          </a:p>
+        </p:txBody>
+      </p:sp>
+      <p:sp>
+        <p:nvSpPr>
+          <p:cNvPr id="6" name="テキスト ボックス 5">
+            <a:extLst>
+              <a:ext uri="{FF2B5EF4-FFF2-40B4-BE49-F238E27FC236}">
+                <a16:creationId xmlns:a16="http://schemas.microsoft.com/office/drawing/2014/main" id="{9B0A8761-A5C8-3C82-8344-0FECCE9ADF7A}"/>
+              </a:ext>
+            </a:extLst>
+          </p:cNvPr>
+          <p:cNvSpPr txBox="1"/>
+          <p:nvPr/>
+        </p:nvSpPr>
+        <p:spPr>
+          <a:xfrm>
+            <a:off x="491534" y="2123666"/>
+            <a:ext cx="3022127" cy="646331"/>
+          </a:xfrm>
+          <a:prstGeom prst="rect">
+            <a:avLst/>
+          </a:prstGeom>
+          <a:noFill/>
+        </p:spPr>
+        <p:txBody>
+          <a:bodyPr wrap="square" rtlCol="0">
+            <a:spAutoFit/>
+          </a:bodyPr>
+          <a:lstStyle/>
+          <a:p>
+            <a:pPr algn="ctr"/>
+            <a:r>
+              <a:rPr kumimoji="1" lang="ja-JP" altLang="en-US" dirty="0"/>
+              <a:t>プラットフォーム</a:t>
+            </a:r>
+            <a:endParaRPr kumimoji="1" lang="en-US" altLang="ja-JP" dirty="0"/>
+          </a:p>
+          <a:p>
+            <a:pPr algn="ctr"/>
+            <a:r>
+              <a:rPr kumimoji="1" lang="en-US" altLang="ja-JP" dirty="0"/>
+              <a:t>Unity</a:t>
+            </a:r>
+            <a:endParaRPr kumimoji="1" lang="ja-JP" altLang="en-US" dirty="0"/>
+          </a:p>
+        </p:txBody>
+      </p:sp>
+      <p:sp>
+        <p:nvSpPr>
+          <p:cNvPr id="16" name="正方形/長方形 15">
+            <a:extLst>
+              <a:ext uri="{FF2B5EF4-FFF2-40B4-BE49-F238E27FC236}">
+                <a16:creationId xmlns:a16="http://schemas.microsoft.com/office/drawing/2014/main" id="{F6E84405-FFEE-2777-AAFF-3CDEB13A7C1D}"/>
+              </a:ext>
+            </a:extLst>
+          </p:cNvPr>
+          <p:cNvSpPr/>
+          <p:nvPr/>
+        </p:nvSpPr>
+        <p:spPr>
+          <a:xfrm>
+            <a:off x="909452" y="2099271"/>
+            <a:ext cx="2050181" cy="646331"/>
+          </a:xfrm>
+          <a:prstGeom prst="rect">
+            <a:avLst/>
+          </a:prstGeom>
+          <a:noFill/>
+        </p:spPr>
+        <p:style>
+          <a:lnRef idx="2">
+            <a:schemeClr val="accent1">
+              <a:shade val="15000"/>
+            </a:schemeClr>
+          </a:lnRef>
+          <a:fillRef idx="1">
+            <a:schemeClr val="accent1"/>
+          </a:fillRef>
+          <a:effectRef idx="0">
+            <a:schemeClr val="accent1"/>
+          </a:effectRef>
+          <a:fontRef idx="minor">
+            <a:schemeClr val="lt1"/>
+          </a:fontRef>
+        </p:style>
+        <p:txBody>
+          <a:bodyPr rtlCol="0" anchor="ctr"/>
+          <a:lstStyle/>
+          <a:p>
+            <a:pPr algn="ctr"/>
+            <a:endParaRPr kumimoji="1" lang="ja-JP" altLang="en-US" dirty="0"/>
+          </a:p>
+        </p:txBody>
+      </p:sp>
     </p:spTree>
     <p:extLst>
       <p:ext uri="{BB962C8B-B14F-4D97-AF65-F5344CB8AC3E}">
@@ -7934,7 +10861,7 @@
 </p:sld>
 </file>
 
-<file path=ppt/slides/slide8.xml><?xml version="1.0" encoding="utf-8"?>
+<file path=ppt/slides/slide6.xml><?xml version="1.0" encoding="utf-8"?>
 <p:sld xmlns:a="http://schemas.openxmlformats.org/drawingml/2006/main" xmlns:r="http://schemas.openxmlformats.org/officeDocument/2006/relationships" xmlns:p="http://schemas.openxmlformats.org/presentationml/2006/main">
   <p:cSld>
     <p:bg>
@@ -7983,7 +10910,7 @@
         </p:nvSpPr>
         <p:spPr>
           <a:xfrm>
-            <a:off x="1285240" y="1050595"/>
+            <a:off x="1363617" y="571624"/>
             <a:ext cx="8074815" cy="1618489"/>
           </a:xfrm>
         </p:spPr>
@@ -7995,19 +10922,1062 @@
           <a:p>
             <a:pPr algn="ctr"/>
             <a:r>
-              <a:rPr lang="ja-JP" altLang="en-US" sz="6000" dirty="0"/>
-              <a:t>全体構成</a:t>
-            </a:r>
-            <a:endParaRPr kumimoji="1" lang="ja-JP" altLang="en-US" sz="6000" dirty="0"/>
+              <a:rPr kumimoji="1" lang="ja-JP" altLang="en-US" sz="6000" dirty="0"/>
+              <a:t>仮想環境について</a:t>
+            </a:r>
           </a:p>
         </p:txBody>
       </p:sp>
+      <p:graphicFrame>
+        <p:nvGraphicFramePr>
+          <p:cNvPr id="13" name="表 12">
+            <a:extLst>
+              <a:ext uri="{FF2B5EF4-FFF2-40B4-BE49-F238E27FC236}">
+                <a16:creationId xmlns:a16="http://schemas.microsoft.com/office/drawing/2014/main" id="{C237C785-7CA0-73FE-433F-F8C49AACE8C0}"/>
+              </a:ext>
+            </a:extLst>
+          </p:cNvPr>
+          <p:cNvGraphicFramePr>
+            <a:graphicFrameLocks noGrp="1"/>
+          </p:cNvGraphicFramePr>
+          <p:nvPr>
+            <p:extLst>
+              <p:ext uri="{D42A27DB-BD31-4B8C-83A1-F6EECF244321}">
+                <p14:modId xmlns:p14="http://schemas.microsoft.com/office/powerpoint/2010/main" val="2735387633"/>
+              </p:ext>
+            </p:extLst>
+          </p:nvPr>
+        </p:nvGraphicFramePr>
+        <p:xfrm>
+          <a:off x="1166948" y="1820091"/>
+          <a:ext cx="6677886" cy="4085285"/>
+        </p:xfrm>
+        <a:graphic>
+          <a:graphicData uri="http://schemas.openxmlformats.org/drawingml/2006/table">
+            <a:tbl>
+              <a:tblPr>
+                <a:tableStyleId>{5C22544A-7EE6-4342-B048-85BDC9FD1C3A}</a:tableStyleId>
+              </a:tblPr>
+              <a:tblGrid>
+                <a:gridCol w="3255701">
+                  <a:extLst>
+                    <a:ext uri="{9D8B030D-6E8A-4147-A177-3AD203B41FA5}">
+                      <a16:colId xmlns:a16="http://schemas.microsoft.com/office/drawing/2014/main" val="723236475"/>
+                    </a:ext>
+                  </a:extLst>
+                </a:gridCol>
+                <a:gridCol w="3422185">
+                  <a:extLst>
+                    <a:ext uri="{9D8B030D-6E8A-4147-A177-3AD203B41FA5}">
+                      <a16:colId xmlns:a16="http://schemas.microsoft.com/office/drawing/2014/main" val="2484370049"/>
+                    </a:ext>
+                  </a:extLst>
+                </a:gridCol>
+              </a:tblGrid>
+              <a:tr h="541783">
+                <a:tc>
+                  <a:txBody>
+                    <a:bodyPr/>
+                    <a:lstStyle/>
+                    <a:p>
+                      <a:pPr algn="l" fontAlgn="ctr">
+                        <a:buNone/>
+                      </a:pPr>
+                      <a:r>
+                        <a:rPr lang="ja-JP" altLang="en-US" sz="2800" b="0" i="0" u="none" strike="noStrike" dirty="0">
+                          <a:solidFill>
+                            <a:srgbClr val="000000"/>
+                          </a:solidFill>
+                          <a:effectLst/>
+                          <a:latin typeface="游ゴシック" panose="020B0400000000000000" pitchFamily="50" charset="-128"/>
+                          <a:ea typeface="游ゴシック" panose="020B0400000000000000" pitchFamily="50" charset="-128"/>
+                        </a:rPr>
+                        <a:t>仮想環境とは</a:t>
+                      </a:r>
+                    </a:p>
+                  </a:txBody>
+                  <a:tcPr marL="9525" marR="9525" marT="9525" marB="0" anchor="ctr">
+                    <a:lnL w="12700" cap="flat" cmpd="sng" algn="ctr">
+                      <a:solidFill>
+                        <a:schemeClr val="tx1"/>
+                      </a:solidFill>
+                      <a:prstDash val="solid"/>
+                      <a:round/>
+                      <a:headEnd type="none" w="med" len="med"/>
+                      <a:tailEnd type="none" w="med" len="med"/>
+                    </a:lnL>
+                    <a:lnR w="12700" cap="flat" cmpd="sng" algn="ctr">
+                      <a:solidFill>
+                        <a:schemeClr val="tx1"/>
+                      </a:solidFill>
+                      <a:prstDash val="solid"/>
+                      <a:round/>
+                      <a:headEnd type="none" w="med" len="med"/>
+                      <a:tailEnd type="none" w="med" len="med"/>
+                    </a:lnR>
+                    <a:lnT w="12700" cap="flat" cmpd="sng" algn="ctr">
+                      <a:solidFill>
+                        <a:schemeClr val="tx1"/>
+                      </a:solidFill>
+                      <a:prstDash val="solid"/>
+                      <a:round/>
+                      <a:headEnd type="none" w="med" len="med"/>
+                      <a:tailEnd type="none" w="med" len="med"/>
+                    </a:lnT>
+                    <a:lnB w="12700" cap="flat" cmpd="sng" algn="ctr">
+                      <a:solidFill>
+                        <a:schemeClr val="tx1"/>
+                      </a:solidFill>
+                      <a:prstDash val="solid"/>
+                      <a:round/>
+                      <a:headEnd type="none" w="med" len="med"/>
+                      <a:tailEnd type="none" w="med" len="med"/>
+                    </a:lnB>
+                    <a:solidFill>
+                      <a:schemeClr val="bg1"/>
+                    </a:solidFill>
+                  </a:tcPr>
+                </a:tc>
+                <a:tc>
+                  <a:txBody>
+                    <a:bodyPr/>
+                    <a:lstStyle/>
+                    <a:p>
+                      <a:pPr algn="l" fontAlgn="ctr">
+                        <a:buNone/>
+                      </a:pPr>
+                      <a:r>
+                        <a:rPr lang="ja-JP" altLang="en-US" sz="2800" u="none" strike="noStrike" dirty="0">
+                          <a:effectLst/>
+                        </a:rPr>
+                        <a:t> 導入理由</a:t>
+                      </a:r>
+                      <a:endParaRPr lang="ja-JP" altLang="en-US" sz="2800" b="0" i="0" u="none" strike="noStrike" dirty="0">
+                        <a:solidFill>
+                          <a:srgbClr val="000000"/>
+                        </a:solidFill>
+                        <a:effectLst/>
+                        <a:latin typeface="游ゴシック" panose="020B0400000000000000" pitchFamily="50" charset="-128"/>
+                        <a:ea typeface="游ゴシック" panose="020B0400000000000000" pitchFamily="50" charset="-128"/>
+                      </a:endParaRPr>
+                    </a:p>
+                  </a:txBody>
+                  <a:tcPr marL="9525" marR="9525" marT="9525" marB="0" anchor="ctr">
+                    <a:lnL w="12700" cap="flat" cmpd="sng" algn="ctr">
+                      <a:solidFill>
+                        <a:schemeClr val="tx1"/>
+                      </a:solidFill>
+                      <a:prstDash val="solid"/>
+                      <a:round/>
+                      <a:headEnd type="none" w="med" len="med"/>
+                      <a:tailEnd type="none" w="med" len="med"/>
+                    </a:lnL>
+                    <a:lnR w="12700" cap="flat" cmpd="sng" algn="ctr">
+                      <a:solidFill>
+                        <a:schemeClr val="tx1"/>
+                      </a:solidFill>
+                      <a:prstDash val="solid"/>
+                      <a:round/>
+                      <a:headEnd type="none" w="med" len="med"/>
+                      <a:tailEnd type="none" w="med" len="med"/>
+                    </a:lnR>
+                    <a:lnT w="12700" cap="flat" cmpd="sng" algn="ctr">
+                      <a:solidFill>
+                        <a:schemeClr val="tx1"/>
+                      </a:solidFill>
+                      <a:prstDash val="solid"/>
+                      <a:round/>
+                      <a:headEnd type="none" w="med" len="med"/>
+                      <a:tailEnd type="none" w="med" len="med"/>
+                    </a:lnT>
+                    <a:lnB w="12700" cap="flat" cmpd="sng" algn="ctr">
+                      <a:solidFill>
+                        <a:schemeClr val="tx1"/>
+                      </a:solidFill>
+                      <a:prstDash val="solid"/>
+                      <a:round/>
+                      <a:headEnd type="none" w="med" len="med"/>
+                      <a:tailEnd type="none" w="med" len="med"/>
+                    </a:lnB>
+                    <a:solidFill>
+                      <a:schemeClr val="bg1"/>
+                    </a:solidFill>
+                  </a:tcPr>
+                </a:tc>
+                <a:extLst>
+                  <a:ext uri="{0D108BD9-81ED-4DB2-BD59-A6C34878D82A}">
+                    <a16:rowId xmlns:a16="http://schemas.microsoft.com/office/drawing/2014/main" val="3953469068"/>
+                  </a:ext>
+                </a:extLst>
+              </a:tr>
+              <a:tr h="541783">
+                <a:tc>
+                  <a:txBody>
+                    <a:bodyPr/>
+                    <a:lstStyle/>
+                    <a:p>
+                      <a:pPr algn="l" fontAlgn="ctr">
+                        <a:buNone/>
+                      </a:pPr>
+                      <a:r>
+                        <a:rPr lang="ja-JP" altLang="en-US" sz="2800" b="0" i="0" u="none" strike="noStrike" dirty="0">
+                          <a:solidFill>
+                            <a:srgbClr val="000000"/>
+                          </a:solidFill>
+                          <a:effectLst/>
+                          <a:latin typeface="游ゴシック" panose="020B0400000000000000" pitchFamily="50" charset="-128"/>
+                          <a:ea typeface="游ゴシック" panose="020B0400000000000000" pitchFamily="50" charset="-128"/>
+                        </a:rPr>
+                        <a:t> </a:t>
+                      </a:r>
+                      <a:r>
+                        <a:rPr lang="en-US" altLang="ja-JP" sz="2800" b="0" i="0" u="none" strike="noStrike" dirty="0">
+                          <a:solidFill>
+                            <a:srgbClr val="000000"/>
+                          </a:solidFill>
+                          <a:effectLst/>
+                          <a:latin typeface="游ゴシック" panose="020B0400000000000000" pitchFamily="50" charset="-128"/>
+                          <a:ea typeface="游ゴシック" panose="020B0400000000000000" pitchFamily="50" charset="-128"/>
+                        </a:rPr>
+                        <a:t>Python</a:t>
+                      </a:r>
+                      <a:r>
+                        <a:rPr lang="ja-JP" altLang="en-US" sz="2800" b="0" i="0" u="none" strike="noStrike" dirty="0">
+                          <a:solidFill>
+                            <a:srgbClr val="000000"/>
+                          </a:solidFill>
+                          <a:effectLst/>
+                          <a:latin typeface="游ゴシック" panose="020B0400000000000000" pitchFamily="50" charset="-128"/>
+                          <a:ea typeface="游ゴシック" panose="020B0400000000000000" pitchFamily="50" charset="-128"/>
+                        </a:rPr>
+                        <a:t>の実行環境をプロジェクトごとに分離する仕組み</a:t>
+                      </a:r>
+                    </a:p>
+                  </a:txBody>
+                  <a:tcPr marL="9525" marR="9525" marT="9525" marB="0" anchor="ctr">
+                    <a:lnL w="12700" cap="flat" cmpd="sng" algn="ctr">
+                      <a:solidFill>
+                        <a:schemeClr val="tx1"/>
+                      </a:solidFill>
+                      <a:prstDash val="solid"/>
+                      <a:round/>
+                      <a:headEnd type="none" w="med" len="med"/>
+                      <a:tailEnd type="none" w="med" len="med"/>
+                    </a:lnL>
+                    <a:lnR w="12700" cap="flat" cmpd="sng" algn="ctr">
+                      <a:solidFill>
+                        <a:schemeClr val="tx1"/>
+                      </a:solidFill>
+                      <a:prstDash val="solid"/>
+                      <a:round/>
+                      <a:headEnd type="none" w="med" len="med"/>
+                      <a:tailEnd type="none" w="med" len="med"/>
+                    </a:lnR>
+                    <a:lnT w="12700" cap="flat" cmpd="sng" algn="ctr">
+                      <a:solidFill>
+                        <a:schemeClr val="tx1"/>
+                      </a:solidFill>
+                      <a:prstDash val="solid"/>
+                      <a:round/>
+                      <a:headEnd type="none" w="med" len="med"/>
+                      <a:tailEnd type="none" w="med" len="med"/>
+                    </a:lnT>
+                    <a:lnB w="12700" cap="flat" cmpd="sng" algn="ctr">
+                      <a:noFill/>
+                      <a:prstDash val="solid"/>
+                      <a:round/>
+                      <a:headEnd type="none" w="med" len="med"/>
+                      <a:tailEnd type="none" w="med" len="med"/>
+                    </a:lnB>
+                    <a:solidFill>
+                      <a:schemeClr val="bg1"/>
+                    </a:solidFill>
+                  </a:tcPr>
+                </a:tc>
+                <a:tc>
+                  <a:txBody>
+                    <a:bodyPr/>
+                    <a:lstStyle/>
+                    <a:p>
+                      <a:pPr algn="l" fontAlgn="ctr">
+                        <a:buNone/>
+                      </a:pPr>
+                      <a:r>
+                        <a:rPr lang="ja-JP" altLang="en-US" sz="2800" dirty="0"/>
+                        <a:t> 依存関係を分離</a:t>
+                      </a:r>
+                      <a:endParaRPr lang="en-US" sz="2800" b="0" i="0" u="none" strike="noStrike" dirty="0">
+                        <a:solidFill>
+                          <a:srgbClr val="000000"/>
+                        </a:solidFill>
+                        <a:effectLst/>
+                        <a:latin typeface="游ゴシック" panose="020B0400000000000000" pitchFamily="50" charset="-128"/>
+                        <a:ea typeface="游ゴシック" panose="020B0400000000000000" pitchFamily="50" charset="-128"/>
+                      </a:endParaRPr>
+                    </a:p>
+                  </a:txBody>
+                  <a:tcPr marL="9525" marR="9525" marT="9525" marB="0" anchor="ctr">
+                    <a:lnL w="12700" cap="flat" cmpd="sng" algn="ctr">
+                      <a:solidFill>
+                        <a:schemeClr val="tx1"/>
+                      </a:solidFill>
+                      <a:prstDash val="solid"/>
+                      <a:round/>
+                      <a:headEnd type="none" w="med" len="med"/>
+                      <a:tailEnd type="none" w="med" len="med"/>
+                    </a:lnL>
+                    <a:lnR w="12700" cap="flat" cmpd="sng" algn="ctr">
+                      <a:solidFill>
+                        <a:schemeClr val="tx1"/>
+                      </a:solidFill>
+                      <a:prstDash val="solid"/>
+                      <a:round/>
+                      <a:headEnd type="none" w="med" len="med"/>
+                      <a:tailEnd type="none" w="med" len="med"/>
+                    </a:lnR>
+                    <a:lnT w="12700" cap="flat" cmpd="sng" algn="ctr">
+                      <a:solidFill>
+                        <a:schemeClr val="tx1"/>
+                      </a:solidFill>
+                      <a:prstDash val="solid"/>
+                      <a:round/>
+                      <a:headEnd type="none" w="med" len="med"/>
+                      <a:tailEnd type="none" w="med" len="med"/>
+                    </a:lnT>
+                    <a:lnB w="12700" cap="flat" cmpd="sng" algn="ctr">
+                      <a:solidFill>
+                        <a:schemeClr val="tx1"/>
+                      </a:solidFill>
+                      <a:prstDash val="solid"/>
+                      <a:round/>
+                      <a:headEnd type="none" w="med" len="med"/>
+                      <a:tailEnd type="none" w="med" len="med"/>
+                    </a:lnB>
+                    <a:solidFill>
+                      <a:schemeClr val="bg1"/>
+                    </a:solidFill>
+                  </a:tcPr>
+                </a:tc>
+                <a:extLst>
+                  <a:ext uri="{0D108BD9-81ED-4DB2-BD59-A6C34878D82A}">
+                    <a16:rowId xmlns:a16="http://schemas.microsoft.com/office/drawing/2014/main" val="2980872199"/>
+                  </a:ext>
+                </a:extLst>
+              </a:tr>
+              <a:tr h="1083566">
+                <a:tc>
+                  <a:txBody>
+                    <a:bodyPr/>
+                    <a:lstStyle/>
+                    <a:p>
+                      <a:pPr algn="l" fontAlgn="ctr">
+                        <a:buNone/>
+                      </a:pPr>
+                      <a:endParaRPr lang="en-US" altLang="ja-JP" sz="2800" u="none" strike="noStrike" dirty="0">
+                        <a:effectLst/>
+                      </a:endParaRPr>
+                    </a:p>
+                  </a:txBody>
+                  <a:tcPr marL="9525" marR="9525" marT="9525" marB="0" anchor="ctr">
+                    <a:lnL w="12700" cap="flat" cmpd="sng" algn="ctr">
+                      <a:solidFill>
+                        <a:schemeClr val="tx1"/>
+                      </a:solidFill>
+                      <a:prstDash val="solid"/>
+                      <a:round/>
+                      <a:headEnd type="none" w="med" len="med"/>
+                      <a:tailEnd type="none" w="med" len="med"/>
+                    </a:lnL>
+                    <a:lnR w="12700" cap="flat" cmpd="sng" algn="ctr">
+                      <a:solidFill>
+                        <a:schemeClr val="tx1"/>
+                      </a:solidFill>
+                      <a:prstDash val="solid"/>
+                      <a:round/>
+                      <a:headEnd type="none" w="med" len="med"/>
+                      <a:tailEnd type="none" w="med" len="med"/>
+                    </a:lnR>
+                    <a:lnT w="12700" cap="flat" cmpd="sng" algn="ctr">
+                      <a:noFill/>
+                      <a:prstDash val="solid"/>
+                      <a:round/>
+                      <a:headEnd type="none" w="med" len="med"/>
+                      <a:tailEnd type="none" w="med" len="med"/>
+                    </a:lnT>
+                    <a:lnB w="12700" cap="flat" cmpd="sng" algn="ctr">
+                      <a:noFill/>
+                      <a:prstDash val="solid"/>
+                      <a:round/>
+                      <a:headEnd type="none" w="med" len="med"/>
+                      <a:tailEnd type="none" w="med" len="med"/>
+                    </a:lnB>
+                    <a:lnTlToBr w="12700" cmpd="sng">
+                      <a:noFill/>
+                      <a:prstDash val="solid"/>
+                    </a:lnTlToBr>
+                    <a:lnBlToTr w="12700" cmpd="sng">
+                      <a:noFill/>
+                      <a:prstDash val="solid"/>
+                    </a:lnBlToTr>
+                    <a:solidFill>
+                      <a:schemeClr val="bg1"/>
+                    </a:solidFill>
+                  </a:tcPr>
+                </a:tc>
+                <a:tc>
+                  <a:txBody>
+                    <a:bodyPr/>
+                    <a:lstStyle/>
+                    <a:p>
+                      <a:r>
+                        <a:rPr lang="ja-JP" altLang="en-US" sz="2800" dirty="0"/>
+                        <a:t> 再現性の確保</a:t>
+                      </a:r>
+                      <a:endParaRPr lang="en-US" altLang="ja-JP" sz="2800" dirty="0"/>
+                    </a:p>
+                  </a:txBody>
+                  <a:tcPr marL="9525" marR="9525" marT="9525" marB="0" anchor="ctr">
+                    <a:lnL w="12700" cap="flat" cmpd="sng" algn="ctr">
+                      <a:solidFill>
+                        <a:schemeClr val="tx1"/>
+                      </a:solidFill>
+                      <a:prstDash val="solid"/>
+                      <a:round/>
+                      <a:headEnd type="none" w="med" len="med"/>
+                      <a:tailEnd type="none" w="med" len="med"/>
+                    </a:lnL>
+                    <a:lnR w="12700" cap="flat" cmpd="sng" algn="ctr">
+                      <a:solidFill>
+                        <a:schemeClr val="tx1"/>
+                      </a:solidFill>
+                      <a:prstDash val="solid"/>
+                      <a:round/>
+                      <a:headEnd type="none" w="med" len="med"/>
+                      <a:tailEnd type="none" w="med" len="med"/>
+                    </a:lnR>
+                    <a:lnT w="12700" cap="flat" cmpd="sng" algn="ctr">
+                      <a:solidFill>
+                        <a:schemeClr val="tx1"/>
+                      </a:solidFill>
+                      <a:prstDash val="solid"/>
+                      <a:round/>
+                      <a:headEnd type="none" w="med" len="med"/>
+                      <a:tailEnd type="none" w="med" len="med"/>
+                    </a:lnT>
+                    <a:lnB w="12700" cap="flat" cmpd="sng" algn="ctr">
+                      <a:solidFill>
+                        <a:schemeClr val="tx1"/>
+                      </a:solidFill>
+                      <a:prstDash val="solid"/>
+                      <a:round/>
+                      <a:headEnd type="none" w="med" len="med"/>
+                      <a:tailEnd type="none" w="med" len="med"/>
+                    </a:lnB>
+                    <a:solidFill>
+                      <a:schemeClr val="bg1"/>
+                    </a:solidFill>
+                  </a:tcPr>
+                </a:tc>
+                <a:extLst>
+                  <a:ext uri="{0D108BD9-81ED-4DB2-BD59-A6C34878D82A}">
+                    <a16:rowId xmlns:a16="http://schemas.microsoft.com/office/drawing/2014/main" val="1056017188"/>
+                  </a:ext>
+                </a:extLst>
+              </a:tr>
+              <a:tr h="1170251">
+                <a:tc>
+                  <a:txBody>
+                    <a:bodyPr/>
+                    <a:lstStyle/>
+                    <a:p>
+                      <a:pPr algn="l" fontAlgn="ctr">
+                        <a:buNone/>
+                      </a:pPr>
+                      <a:endParaRPr lang="ja-JP" altLang="en-US" sz="2800" b="0" i="0" u="none" strike="noStrike" dirty="0">
+                        <a:solidFill>
+                          <a:srgbClr val="000000"/>
+                        </a:solidFill>
+                        <a:effectLst/>
+                        <a:latin typeface="游ゴシック" panose="020B0400000000000000" pitchFamily="50" charset="-128"/>
+                        <a:ea typeface="游ゴシック" panose="020B0400000000000000" pitchFamily="50" charset="-128"/>
+                      </a:endParaRPr>
+                    </a:p>
+                  </a:txBody>
+                  <a:tcPr marL="9525" marR="9525" marT="9525" marB="0" anchor="ctr">
+                    <a:lnL w="12700" cap="flat" cmpd="sng" algn="ctr">
+                      <a:solidFill>
+                        <a:schemeClr val="tx1"/>
+                      </a:solidFill>
+                      <a:prstDash val="solid"/>
+                      <a:round/>
+                      <a:headEnd type="none" w="med" len="med"/>
+                      <a:tailEnd type="none" w="med" len="med"/>
+                    </a:lnL>
+                    <a:lnR w="12700" cap="flat" cmpd="sng" algn="ctr">
+                      <a:solidFill>
+                        <a:schemeClr val="tx1"/>
+                      </a:solidFill>
+                      <a:prstDash val="solid"/>
+                      <a:round/>
+                      <a:headEnd type="none" w="med" len="med"/>
+                      <a:tailEnd type="none" w="med" len="med"/>
+                    </a:lnR>
+                    <a:lnT w="12700" cap="flat" cmpd="sng" algn="ctr">
+                      <a:noFill/>
+                      <a:prstDash val="solid"/>
+                      <a:round/>
+                      <a:headEnd type="none" w="med" len="med"/>
+                      <a:tailEnd type="none" w="med" len="med"/>
+                    </a:lnT>
+                    <a:lnB w="12700" cap="flat" cmpd="sng" algn="ctr">
+                      <a:solidFill>
+                        <a:schemeClr val="tx1"/>
+                      </a:solidFill>
+                      <a:prstDash val="solid"/>
+                      <a:round/>
+                      <a:headEnd type="none" w="med" len="med"/>
+                      <a:tailEnd type="none" w="med" len="med"/>
+                    </a:lnB>
+                    <a:lnTlToBr w="12700" cmpd="sng">
+                      <a:noFill/>
+                      <a:prstDash val="solid"/>
+                    </a:lnTlToBr>
+                    <a:lnBlToTr w="12700" cmpd="sng">
+                      <a:noFill/>
+                      <a:prstDash val="solid"/>
+                    </a:lnBlToTr>
+                    <a:solidFill>
+                      <a:schemeClr val="bg1"/>
+                    </a:solidFill>
+                  </a:tcPr>
+                </a:tc>
+                <a:tc>
+                  <a:txBody>
+                    <a:bodyPr/>
+                    <a:lstStyle/>
+                    <a:p>
+                      <a:pPr algn="l" fontAlgn="ctr">
+                        <a:buNone/>
+                      </a:pPr>
+                      <a:r>
+                        <a:rPr lang="ja-JP" altLang="en-US" sz="2800" dirty="0"/>
+                        <a:t> 環境差異の排除</a:t>
+                      </a:r>
+                      <a:endParaRPr lang="ja-JP" altLang="en-US" sz="2800" b="0" i="0" u="none" strike="noStrike" dirty="0">
+                        <a:solidFill>
+                          <a:srgbClr val="000000"/>
+                        </a:solidFill>
+                        <a:effectLst/>
+                        <a:latin typeface="游ゴシック" panose="020B0400000000000000" pitchFamily="50" charset="-128"/>
+                        <a:ea typeface="游ゴシック" panose="020B0400000000000000" pitchFamily="50" charset="-128"/>
+                      </a:endParaRPr>
+                    </a:p>
+                  </a:txBody>
+                  <a:tcPr marL="9525" marR="9525" marT="9525" marB="0" anchor="ctr">
+                    <a:lnL w="12700" cap="flat" cmpd="sng" algn="ctr">
+                      <a:solidFill>
+                        <a:schemeClr val="tx1"/>
+                      </a:solidFill>
+                      <a:prstDash val="solid"/>
+                      <a:round/>
+                      <a:headEnd type="none" w="med" len="med"/>
+                      <a:tailEnd type="none" w="med" len="med"/>
+                    </a:lnL>
+                    <a:lnR w="12700" cap="flat" cmpd="sng" algn="ctr">
+                      <a:solidFill>
+                        <a:schemeClr val="tx1"/>
+                      </a:solidFill>
+                      <a:prstDash val="solid"/>
+                      <a:round/>
+                      <a:headEnd type="none" w="med" len="med"/>
+                      <a:tailEnd type="none" w="med" len="med"/>
+                    </a:lnR>
+                    <a:lnT w="12700" cap="flat" cmpd="sng" algn="ctr">
+                      <a:solidFill>
+                        <a:schemeClr val="tx1"/>
+                      </a:solidFill>
+                      <a:prstDash val="solid"/>
+                      <a:round/>
+                      <a:headEnd type="none" w="med" len="med"/>
+                      <a:tailEnd type="none" w="med" len="med"/>
+                    </a:lnT>
+                    <a:lnB w="12700" cap="flat" cmpd="sng" algn="ctr">
+                      <a:solidFill>
+                        <a:schemeClr val="tx1"/>
+                      </a:solidFill>
+                      <a:prstDash val="solid"/>
+                      <a:round/>
+                      <a:headEnd type="none" w="med" len="med"/>
+                      <a:tailEnd type="none" w="med" len="med"/>
+                    </a:lnB>
+                    <a:solidFill>
+                      <a:schemeClr val="bg1"/>
+                    </a:solidFill>
+                  </a:tcPr>
+                </a:tc>
+                <a:extLst>
+                  <a:ext uri="{0D108BD9-81ED-4DB2-BD59-A6C34878D82A}">
+                    <a16:rowId xmlns:a16="http://schemas.microsoft.com/office/drawing/2014/main" val="1420370465"/>
+                  </a:ext>
+                </a:extLst>
+              </a:tr>
+            </a:tbl>
+          </a:graphicData>
+        </a:graphic>
+      </p:graphicFrame>
+      <p:graphicFrame>
+        <p:nvGraphicFramePr>
+          <p:cNvPr id="5" name="表 4">
+            <a:extLst>
+              <a:ext uri="{FF2B5EF4-FFF2-40B4-BE49-F238E27FC236}">
+                <a16:creationId xmlns:a16="http://schemas.microsoft.com/office/drawing/2014/main" id="{6D09DD57-867D-3A2A-DF7F-B57194BAA871}"/>
+              </a:ext>
+            </a:extLst>
+          </p:cNvPr>
+          <p:cNvGraphicFramePr>
+            <a:graphicFrameLocks noGrp="1"/>
+          </p:cNvGraphicFramePr>
+          <p:nvPr>
+            <p:extLst>
+              <p:ext uri="{D42A27DB-BD31-4B8C-83A1-F6EECF244321}">
+                <p14:modId xmlns:p14="http://schemas.microsoft.com/office/powerpoint/2010/main" val="3982450191"/>
+              </p:ext>
+            </p:extLst>
+          </p:nvPr>
+        </p:nvGraphicFramePr>
+        <p:xfrm>
+          <a:off x="7844833" y="1820091"/>
+          <a:ext cx="3813767" cy="4128776"/>
+        </p:xfrm>
+        <a:graphic>
+          <a:graphicData uri="http://schemas.openxmlformats.org/drawingml/2006/table">
+            <a:tbl>
+              <a:tblPr>
+                <a:tableStyleId>{073A0DAA-6AF3-43AB-8588-CEC1D06C72B9}</a:tableStyleId>
+              </a:tblPr>
+              <a:tblGrid>
+                <a:gridCol w="3813767">
+                  <a:extLst>
+                    <a:ext uri="{9D8B030D-6E8A-4147-A177-3AD203B41FA5}">
+                      <a16:colId xmlns:a16="http://schemas.microsoft.com/office/drawing/2014/main" val="159393942"/>
+                    </a:ext>
+                  </a:extLst>
+                </a:gridCol>
+              </a:tblGrid>
+              <a:tr h="532584">
+                <a:tc>
+                  <a:txBody>
+                    <a:bodyPr/>
+                    <a:lstStyle/>
+                    <a:p>
+                      <a:pPr algn="l" fontAlgn="ctr">
+                        <a:buNone/>
+                      </a:pPr>
+                      <a:r>
+                        <a:rPr lang="en-US" altLang="ja-JP" sz="3600" b="0" i="0" u="none" strike="noStrike" dirty="0">
+                          <a:solidFill>
+                            <a:srgbClr val="000000"/>
+                          </a:solidFill>
+                          <a:effectLst/>
+                          <a:latin typeface="+mj-ea"/>
+                          <a:ea typeface="+mj-ea"/>
+                        </a:rPr>
+                        <a:t> </a:t>
+                      </a:r>
+                      <a:r>
+                        <a:rPr lang="en-US" altLang="ja-JP" sz="2800" b="0" i="0" u="none" strike="noStrike" dirty="0" err="1">
+                          <a:solidFill>
+                            <a:srgbClr val="000000"/>
+                          </a:solidFill>
+                          <a:effectLst/>
+                          <a:latin typeface="+mj-ea"/>
+                          <a:ea typeface="+mj-ea"/>
+                        </a:rPr>
+                        <a:t>micromamba</a:t>
+                      </a:r>
+                      <a:r>
+                        <a:rPr lang="ja-JP" altLang="en-US" sz="2800" b="0" i="0" u="none" strike="noStrike">
+                          <a:solidFill>
+                            <a:srgbClr val="000000"/>
+                          </a:solidFill>
+                          <a:effectLst/>
+                          <a:latin typeface="+mj-ea"/>
+                          <a:ea typeface="+mj-ea"/>
+                        </a:rPr>
+                        <a:t>の理由</a:t>
+                      </a:r>
+                      <a:endParaRPr lang="ja-JP" altLang="en-US" sz="2800" b="0" i="0" u="none" strike="noStrike" dirty="0">
+                        <a:solidFill>
+                          <a:srgbClr val="000000"/>
+                        </a:solidFill>
+                        <a:effectLst/>
+                        <a:latin typeface="+mj-ea"/>
+                        <a:ea typeface="+mj-ea"/>
+                      </a:endParaRPr>
+                    </a:p>
+                  </a:txBody>
+                  <a:tcPr marL="9525" marR="9525" marT="9525" marB="0" anchor="ctr">
+                    <a:lnL w="12700" cap="flat" cmpd="sng" algn="ctr">
+                      <a:solidFill>
+                        <a:schemeClr val="tx1"/>
+                      </a:solidFill>
+                      <a:prstDash val="solid"/>
+                      <a:round/>
+                      <a:headEnd type="none" w="med" len="med"/>
+                      <a:tailEnd type="none" w="med" len="med"/>
+                    </a:lnL>
+                    <a:lnR w="12700" cap="flat" cmpd="sng" algn="ctr">
+                      <a:solidFill>
+                        <a:schemeClr val="tx1"/>
+                      </a:solidFill>
+                      <a:prstDash val="solid"/>
+                      <a:round/>
+                      <a:headEnd type="none" w="med" len="med"/>
+                      <a:tailEnd type="none" w="med" len="med"/>
+                    </a:lnR>
+                    <a:lnT w="12700" cap="flat" cmpd="sng" algn="ctr">
+                      <a:solidFill>
+                        <a:schemeClr val="tx1"/>
+                      </a:solidFill>
+                      <a:prstDash val="solid"/>
+                      <a:round/>
+                      <a:headEnd type="none" w="med" len="med"/>
+                      <a:tailEnd type="none" w="med" len="med"/>
+                    </a:lnT>
+                    <a:lnB w="12700" cap="flat" cmpd="sng" algn="ctr">
+                      <a:solidFill>
+                        <a:schemeClr val="tx1"/>
+                      </a:solidFill>
+                      <a:prstDash val="solid"/>
+                      <a:round/>
+                      <a:headEnd type="none" w="med" len="med"/>
+                      <a:tailEnd type="none" w="med" len="med"/>
+                    </a:lnB>
+                    <a:solidFill>
+                      <a:schemeClr val="bg1"/>
+                    </a:solidFill>
+                  </a:tcPr>
+                </a:tc>
+                <a:extLst>
+                  <a:ext uri="{0D108BD9-81ED-4DB2-BD59-A6C34878D82A}">
+                    <a16:rowId xmlns:a16="http://schemas.microsoft.com/office/drawing/2014/main" val="3953469068"/>
+                  </a:ext>
+                </a:extLst>
+              </a:tr>
+              <a:tr h="991241">
+                <a:tc>
+                  <a:txBody>
+                    <a:bodyPr/>
+                    <a:lstStyle/>
+                    <a:p>
+                      <a:pPr algn="l" fontAlgn="ctr">
+                        <a:buNone/>
+                      </a:pPr>
+                      <a:r>
+                        <a:rPr lang="ja-JP" altLang="en-US" sz="2800" dirty="0"/>
+                        <a:t>軽量な</a:t>
+                      </a:r>
+                      <a:r>
+                        <a:rPr lang="en-US" altLang="ja-JP" sz="2800" dirty="0" err="1"/>
+                        <a:t>conda</a:t>
+                      </a:r>
+                      <a:r>
+                        <a:rPr lang="ja-JP" altLang="en-US" sz="2800" dirty="0"/>
+                        <a:t>互換環境</a:t>
+                      </a:r>
+                      <a:endParaRPr lang="en-US" altLang="ja-JP" sz="2800" dirty="0"/>
+                    </a:p>
+                    <a:p>
+                      <a:pPr algn="l" fontAlgn="ctr">
+                        <a:buNone/>
+                      </a:pPr>
+                      <a:r>
+                        <a:rPr lang="ja-JP" altLang="en-US" sz="2800" dirty="0"/>
+                        <a:t>管理ツール</a:t>
+                      </a:r>
+                      <a:endParaRPr lang="ja-JP" altLang="en-US" sz="2800" b="0" i="0" u="none" strike="noStrike" dirty="0">
+                        <a:solidFill>
+                          <a:srgbClr val="000000"/>
+                        </a:solidFill>
+                        <a:effectLst/>
+                        <a:latin typeface="游ゴシック" panose="020B0400000000000000" pitchFamily="50" charset="-128"/>
+                        <a:ea typeface="游ゴシック" panose="020B0400000000000000" pitchFamily="50" charset="-128"/>
+                      </a:endParaRPr>
+                    </a:p>
+                  </a:txBody>
+                  <a:tcPr marL="9525" marR="9525" marT="9525" marB="0" anchor="ctr">
+                    <a:lnL w="12700" cap="flat" cmpd="sng" algn="ctr">
+                      <a:solidFill>
+                        <a:schemeClr val="tx1"/>
+                      </a:solidFill>
+                      <a:prstDash val="solid"/>
+                      <a:round/>
+                      <a:headEnd type="none" w="med" len="med"/>
+                      <a:tailEnd type="none" w="med" len="med"/>
+                    </a:lnL>
+                    <a:lnR w="12700" cap="flat" cmpd="sng" algn="ctr">
+                      <a:solidFill>
+                        <a:schemeClr val="tx1"/>
+                      </a:solidFill>
+                      <a:prstDash val="solid"/>
+                      <a:round/>
+                      <a:headEnd type="none" w="med" len="med"/>
+                      <a:tailEnd type="none" w="med" len="med"/>
+                    </a:lnR>
+                    <a:lnT w="12700" cap="flat" cmpd="sng" algn="ctr">
+                      <a:solidFill>
+                        <a:schemeClr val="tx1"/>
+                      </a:solidFill>
+                      <a:prstDash val="solid"/>
+                      <a:round/>
+                      <a:headEnd type="none" w="med" len="med"/>
+                      <a:tailEnd type="none" w="med" len="med"/>
+                    </a:lnT>
+                    <a:lnB w="12700" cap="flat" cmpd="sng" algn="ctr">
+                      <a:solidFill>
+                        <a:schemeClr val="tx1"/>
+                      </a:solidFill>
+                      <a:prstDash val="solid"/>
+                      <a:round/>
+                      <a:headEnd type="none" w="med" len="med"/>
+                      <a:tailEnd type="none" w="med" len="med"/>
+                    </a:lnB>
+                    <a:solidFill>
+                      <a:schemeClr val="bg1"/>
+                    </a:solidFill>
+                  </a:tcPr>
+                </a:tc>
+                <a:extLst>
+                  <a:ext uri="{0D108BD9-81ED-4DB2-BD59-A6C34878D82A}">
+                    <a16:rowId xmlns:a16="http://schemas.microsoft.com/office/drawing/2014/main" val="2980872199"/>
+                  </a:ext>
+                </a:extLst>
+              </a:tr>
+              <a:tr h="1056535">
+                <a:tc>
+                  <a:txBody>
+                    <a:bodyPr/>
+                    <a:lstStyle/>
+                    <a:p>
+                      <a:pPr algn="l" fontAlgn="ctr">
+                        <a:buNone/>
+                      </a:pPr>
+                      <a:r>
+                        <a:rPr lang="en-US" altLang="ja-JP" sz="2800" u="none" strike="noStrike" dirty="0">
+                          <a:effectLst/>
+                          <a:latin typeface="+mn-ea"/>
+                          <a:ea typeface="+mn-ea"/>
+                        </a:rPr>
+                        <a:t> Unity</a:t>
+                      </a:r>
+                      <a:r>
+                        <a:rPr lang="ja-JP" altLang="en-US" sz="2800" u="none" strike="noStrike" dirty="0">
+                          <a:effectLst/>
+                          <a:latin typeface="+mn-ea"/>
+                          <a:ea typeface="+mn-ea"/>
+                        </a:rPr>
+                        <a:t>から連携する用途として軽いものがいい</a:t>
+                      </a:r>
+                      <a:endParaRPr lang="en-US" altLang="ja-JP" sz="2800" u="none" strike="noStrike" dirty="0">
+                        <a:effectLst/>
+                        <a:latin typeface="+mn-ea"/>
+                        <a:ea typeface="+mn-ea"/>
+                      </a:endParaRPr>
+                    </a:p>
+                  </a:txBody>
+                  <a:tcPr marL="9525" marR="9525" marT="9525" marB="0" anchor="ctr">
+                    <a:lnL w="12700" cap="flat" cmpd="sng" algn="ctr">
+                      <a:solidFill>
+                        <a:schemeClr val="tx1"/>
+                      </a:solidFill>
+                      <a:prstDash val="solid"/>
+                      <a:round/>
+                      <a:headEnd type="none" w="med" len="med"/>
+                      <a:tailEnd type="none" w="med" len="med"/>
+                    </a:lnL>
+                    <a:lnR w="12700" cap="flat" cmpd="sng" algn="ctr">
+                      <a:solidFill>
+                        <a:schemeClr val="tx1"/>
+                      </a:solidFill>
+                      <a:prstDash val="solid"/>
+                      <a:round/>
+                      <a:headEnd type="none" w="med" len="med"/>
+                      <a:tailEnd type="none" w="med" len="med"/>
+                    </a:lnR>
+                    <a:lnT w="12700" cap="flat" cmpd="sng" algn="ctr">
+                      <a:solidFill>
+                        <a:schemeClr val="tx1"/>
+                      </a:solidFill>
+                      <a:prstDash val="solid"/>
+                      <a:round/>
+                      <a:headEnd type="none" w="med" len="med"/>
+                      <a:tailEnd type="none" w="med" len="med"/>
+                    </a:lnT>
+                    <a:lnB w="12700" cap="flat" cmpd="sng" algn="ctr">
+                      <a:solidFill>
+                        <a:schemeClr val="tx1"/>
+                      </a:solidFill>
+                      <a:prstDash val="solid"/>
+                      <a:round/>
+                      <a:headEnd type="none" w="med" len="med"/>
+                      <a:tailEnd type="none" w="med" len="med"/>
+                    </a:lnB>
+                    <a:solidFill>
+                      <a:schemeClr val="bg1"/>
+                    </a:solidFill>
+                  </a:tcPr>
+                </a:tc>
+                <a:extLst>
+                  <a:ext uri="{0D108BD9-81ED-4DB2-BD59-A6C34878D82A}">
+                    <a16:rowId xmlns:a16="http://schemas.microsoft.com/office/drawing/2014/main" val="1056017188"/>
+                  </a:ext>
+                </a:extLst>
+              </a:tr>
+              <a:tr h="1247430">
+                <a:tc>
+                  <a:txBody>
+                    <a:bodyPr/>
+                    <a:lstStyle/>
+                    <a:p>
+                      <a:pPr algn="l" fontAlgn="ctr">
+                        <a:buNone/>
+                      </a:pPr>
+                      <a:r>
+                        <a:rPr lang="en-US" altLang="ja-JP" sz="2800" u="none" strike="noStrike" dirty="0">
+                          <a:effectLst/>
+                        </a:rPr>
+                        <a:t> C</a:t>
+                      </a:r>
+                      <a:r>
+                        <a:rPr lang="ja-JP" altLang="en-US" sz="2800" u="none" strike="noStrike" dirty="0">
+                          <a:effectLst/>
+                        </a:rPr>
+                        <a:t>依存ライブラリである</a:t>
+                      </a:r>
+                      <a:r>
+                        <a:rPr lang="en-US" altLang="ja-JP" sz="2800" u="none" strike="noStrike" dirty="0">
+                          <a:effectLst/>
+                        </a:rPr>
+                        <a:t>music21</a:t>
+                      </a:r>
+                      <a:r>
+                        <a:rPr lang="ja-JP" altLang="en-US" sz="2800" u="none" strike="noStrike" dirty="0">
+                          <a:effectLst/>
+                        </a:rPr>
+                        <a:t>が判定の芯であるため。</a:t>
+                      </a:r>
+                      <a:endParaRPr lang="ja-JP" altLang="en-US" sz="2800" b="0" i="0" u="none" strike="noStrike" dirty="0">
+                        <a:solidFill>
+                          <a:srgbClr val="000000"/>
+                        </a:solidFill>
+                        <a:effectLst/>
+                        <a:latin typeface="游ゴシック" panose="020B0400000000000000" pitchFamily="50" charset="-128"/>
+                        <a:ea typeface="游ゴシック" panose="020B0400000000000000" pitchFamily="50" charset="-128"/>
+                      </a:endParaRPr>
+                    </a:p>
+                  </a:txBody>
+                  <a:tcPr marL="9525" marR="9525" marT="9525" marB="0" anchor="ctr">
+                    <a:lnL w="12700" cap="flat" cmpd="sng" algn="ctr">
+                      <a:solidFill>
+                        <a:schemeClr val="tx1"/>
+                      </a:solidFill>
+                      <a:prstDash val="solid"/>
+                      <a:round/>
+                      <a:headEnd type="none" w="med" len="med"/>
+                      <a:tailEnd type="none" w="med" len="med"/>
+                    </a:lnL>
+                    <a:lnR w="12700" cap="flat" cmpd="sng" algn="ctr">
+                      <a:solidFill>
+                        <a:schemeClr val="tx1"/>
+                      </a:solidFill>
+                      <a:prstDash val="solid"/>
+                      <a:round/>
+                      <a:headEnd type="none" w="med" len="med"/>
+                      <a:tailEnd type="none" w="med" len="med"/>
+                    </a:lnR>
+                    <a:lnT w="12700" cap="flat" cmpd="sng" algn="ctr">
+                      <a:solidFill>
+                        <a:schemeClr val="tx1"/>
+                      </a:solidFill>
+                      <a:prstDash val="solid"/>
+                      <a:round/>
+                      <a:headEnd type="none" w="med" len="med"/>
+                      <a:tailEnd type="none" w="med" len="med"/>
+                    </a:lnT>
+                    <a:lnB w="12700" cap="flat" cmpd="sng" algn="ctr">
+                      <a:solidFill>
+                        <a:schemeClr val="tx1"/>
+                      </a:solidFill>
+                      <a:prstDash val="solid"/>
+                      <a:round/>
+                      <a:headEnd type="none" w="med" len="med"/>
+                      <a:tailEnd type="none" w="med" len="med"/>
+                    </a:lnB>
+                    <a:solidFill>
+                      <a:schemeClr val="bg1"/>
+                    </a:solidFill>
+                  </a:tcPr>
+                </a:tc>
+                <a:extLst>
+                  <a:ext uri="{0D108BD9-81ED-4DB2-BD59-A6C34878D82A}">
+                    <a16:rowId xmlns:a16="http://schemas.microsoft.com/office/drawing/2014/main" val="1420370465"/>
+                  </a:ext>
+                </a:extLst>
+              </a:tr>
+            </a:tbl>
+          </a:graphicData>
+        </a:graphic>
+      </p:graphicFrame>
+    </p:spTree>
+    <p:extLst>
+      <p:ext uri="{BB962C8B-B14F-4D97-AF65-F5344CB8AC3E}">
+        <p14:creationId xmlns:p14="http://schemas.microsoft.com/office/powerpoint/2010/main" val="1082943412"/>
+      </p:ext>
+    </p:extLst>
+  </p:cSld>
+  <p:clrMapOvr>
+    <a:masterClrMapping/>
+  </p:clrMapOvr>
+</p:sld>
+</file>
+
+<file path=ppt/slides/slide7.xml><?xml version="1.0" encoding="utf-8"?>
+<p:sld xmlns:a="http://schemas.openxmlformats.org/drawingml/2006/main" xmlns:r="http://schemas.openxmlformats.org/officeDocument/2006/relationships" xmlns:p="http://schemas.openxmlformats.org/presentationml/2006/main">
+  <p:cSld>
+    <p:bg>
+      <p:bgPr>
+        <a:solidFill>
+          <a:schemeClr val="bg1"/>
+        </a:solidFill>
+        <a:effectLst/>
+      </p:bgPr>
+    </p:bg>
+    <p:spTree>
+      <p:nvGrpSpPr>
+        <p:cNvPr id="1" name="">
+          <a:extLst>
+            <a:ext uri="{FF2B5EF4-FFF2-40B4-BE49-F238E27FC236}">
+              <a16:creationId xmlns:a16="http://schemas.microsoft.com/office/drawing/2014/main" id="{D3D3B5BB-AB0C-C86A-157F-A9205B9E05C9}"/>
+            </a:ext>
+          </a:extLst>
+        </p:cNvPr>
+        <p:cNvGrpSpPr/>
+        <p:nvPr/>
+      </p:nvGrpSpPr>
+      <p:grpSpPr>
+        <a:xfrm>
+          <a:off x="0" y="0"/>
+          <a:ext cx="0" cy="0"/>
+          <a:chOff x="0" y="0"/>
+          <a:chExt cx="0" cy="0"/>
+        </a:xfrm>
+      </p:grpSpPr>
       <p:sp>
         <p:nvSpPr>
-          <p:cNvPr id="3" name="コンテンツ プレースホルダー 2">
+          <p:cNvPr id="2" name="タイトル 1">
             <a:extLst>
               <a:ext uri="{FF2B5EF4-FFF2-40B4-BE49-F238E27FC236}">
-                <a16:creationId xmlns:a16="http://schemas.microsoft.com/office/drawing/2014/main" id="{206195BB-B3C1-3A2E-A3E1-BCB739E1619F}"/>
+                <a16:creationId xmlns:a16="http://schemas.microsoft.com/office/drawing/2014/main" id="{E2DD5992-7CE6-58D9-C25D-8AEDB1B69D0D}"/>
               </a:ext>
             </a:extLst>
           </p:cNvPr>
@@ -8015,29 +11985,2259 @@
             <a:spLocks noGrp="1"/>
           </p:cNvSpPr>
           <p:nvPr>
-            <p:ph idx="1"/>
+            <p:ph type="title"/>
           </p:nvPr>
         </p:nvSpPr>
         <p:spPr>
           <a:xfrm>
-            <a:off x="1285240" y="2969469"/>
-            <a:ext cx="8074815" cy="2800395"/>
+            <a:off x="1363617" y="571624"/>
+            <a:ext cx="8074815" cy="1618489"/>
           </a:xfrm>
         </p:spPr>
         <p:txBody>
-          <a:bodyPr anchor="t">
+          <a:bodyPr anchor="ctr">
             <a:normAutofit/>
           </a:bodyPr>
           <a:lstStyle/>
           <a:p>
-            <a:endParaRPr kumimoji="1" lang="ja-JP" altLang="en-US" sz="2400" dirty="0"/>
+            <a:pPr algn="ctr"/>
+            <a:r>
+              <a:rPr lang="ja-JP" altLang="en-US" sz="6000" dirty="0"/>
+              <a:t>音符と五線譜について</a:t>
+            </a:r>
+            <a:endParaRPr kumimoji="1" lang="ja-JP" altLang="en-US" sz="6000" dirty="0"/>
           </a:p>
         </p:txBody>
       </p:sp>
+      <p:graphicFrame>
+        <p:nvGraphicFramePr>
+          <p:cNvPr id="13" name="表 12">
+            <a:extLst>
+              <a:ext uri="{FF2B5EF4-FFF2-40B4-BE49-F238E27FC236}">
+                <a16:creationId xmlns:a16="http://schemas.microsoft.com/office/drawing/2014/main" id="{37522CA3-666E-2224-63E6-EEB78E904E7F}"/>
+              </a:ext>
+            </a:extLst>
+          </p:cNvPr>
+          <p:cNvGraphicFramePr>
+            <a:graphicFrameLocks noGrp="1"/>
+          </p:cNvGraphicFramePr>
+          <p:nvPr>
+            <p:extLst>
+              <p:ext uri="{D42A27DB-BD31-4B8C-83A1-F6EECF244321}">
+                <p14:modId xmlns:p14="http://schemas.microsoft.com/office/powerpoint/2010/main" val="3711511153"/>
+              </p:ext>
+            </p:extLst>
+          </p:nvPr>
+        </p:nvGraphicFramePr>
+        <p:xfrm>
+          <a:off x="1166948" y="1820091"/>
+          <a:ext cx="7415077" cy="4682180"/>
+        </p:xfrm>
+        <a:graphic>
+          <a:graphicData uri="http://schemas.openxmlformats.org/drawingml/2006/table">
+            <a:tbl>
+              <a:tblPr>
+                <a:tableStyleId>{5C22544A-7EE6-4342-B048-85BDC9FD1C3A}</a:tableStyleId>
+              </a:tblPr>
+              <a:tblGrid>
+                <a:gridCol w="2968431">
+                  <a:extLst>
+                    <a:ext uri="{9D8B030D-6E8A-4147-A177-3AD203B41FA5}">
+                      <a16:colId xmlns:a16="http://schemas.microsoft.com/office/drawing/2014/main" val="159393942"/>
+                    </a:ext>
+                  </a:extLst>
+                </a:gridCol>
+                <a:gridCol w="4446646">
+                  <a:extLst>
+                    <a:ext uri="{9D8B030D-6E8A-4147-A177-3AD203B41FA5}">
+                      <a16:colId xmlns:a16="http://schemas.microsoft.com/office/drawing/2014/main" val="2484370049"/>
+                    </a:ext>
+                  </a:extLst>
+                </a:gridCol>
+              </a:tblGrid>
+              <a:tr h="798446">
+                <a:tc>
+                  <a:txBody>
+                    <a:bodyPr/>
+                    <a:lstStyle/>
+                    <a:p>
+                      <a:pPr algn="l" fontAlgn="ctr">
+                        <a:buNone/>
+                      </a:pPr>
+                      <a:r>
+                        <a:rPr lang="ja-JP" altLang="en-US" sz="2800" u="none" strike="noStrike" dirty="0">
+                          <a:effectLst/>
+                        </a:rPr>
+                        <a:t> 配置方法一覧</a:t>
+                      </a:r>
+                      <a:endParaRPr lang="ja-JP" altLang="en-US" sz="2800" b="0" i="0" u="none" strike="noStrike" dirty="0">
+                        <a:solidFill>
+                          <a:srgbClr val="000000"/>
+                        </a:solidFill>
+                        <a:effectLst/>
+                        <a:latin typeface="游ゴシック" panose="020B0400000000000000" pitchFamily="50" charset="-128"/>
+                        <a:ea typeface="游ゴシック" panose="020B0400000000000000" pitchFamily="50" charset="-128"/>
+                      </a:endParaRPr>
+                    </a:p>
+                  </a:txBody>
+                  <a:tcPr marL="9525" marR="9525" marT="9525" marB="0" anchor="ctr">
+                    <a:lnL w="12700" cap="flat" cmpd="sng" algn="ctr">
+                      <a:solidFill>
+                        <a:schemeClr val="tx1"/>
+                      </a:solidFill>
+                      <a:prstDash val="solid"/>
+                      <a:round/>
+                      <a:headEnd type="none" w="med" len="med"/>
+                      <a:tailEnd type="none" w="med" len="med"/>
+                    </a:lnL>
+                    <a:lnR w="12700" cap="flat" cmpd="sng" algn="ctr">
+                      <a:solidFill>
+                        <a:schemeClr val="tx1"/>
+                      </a:solidFill>
+                      <a:prstDash val="solid"/>
+                      <a:round/>
+                      <a:headEnd type="none" w="med" len="med"/>
+                      <a:tailEnd type="none" w="med" len="med"/>
+                    </a:lnR>
+                    <a:lnT w="12700" cap="flat" cmpd="sng" algn="ctr">
+                      <a:solidFill>
+                        <a:schemeClr val="tx1"/>
+                      </a:solidFill>
+                      <a:prstDash val="solid"/>
+                      <a:round/>
+                      <a:headEnd type="none" w="med" len="med"/>
+                      <a:tailEnd type="none" w="med" len="med"/>
+                    </a:lnT>
+                    <a:lnB w="12700" cap="flat" cmpd="sng" algn="ctr">
+                      <a:solidFill>
+                        <a:schemeClr val="tx1"/>
+                      </a:solidFill>
+                      <a:prstDash val="solid"/>
+                      <a:round/>
+                      <a:headEnd type="none" w="med" len="med"/>
+                      <a:tailEnd type="none" w="med" len="med"/>
+                    </a:lnB>
+                    <a:solidFill>
+                      <a:schemeClr val="bg1"/>
+                    </a:solidFill>
+                  </a:tcPr>
+                </a:tc>
+                <a:tc>
+                  <a:txBody>
+                    <a:bodyPr/>
+                    <a:lstStyle/>
+                    <a:p>
+                      <a:pPr algn="l" fontAlgn="ctr">
+                        <a:buNone/>
+                      </a:pPr>
+                      <a:r>
+                        <a:rPr lang="ja-JP" altLang="en-US" sz="2800" u="none" strike="noStrike" dirty="0">
+                          <a:effectLst/>
+                        </a:rPr>
+                        <a:t> 五線譜から</a:t>
+                      </a:r>
+                      <a:r>
+                        <a:rPr lang="en-US" altLang="ja-JP" sz="2800" u="none" strike="noStrike" dirty="0" err="1">
+                          <a:effectLst/>
+                        </a:rPr>
+                        <a:t>MusicXML</a:t>
+                      </a:r>
+                      <a:r>
+                        <a:rPr lang="ja-JP" altLang="en-US" sz="2800" u="none" strike="noStrike" dirty="0">
+                          <a:effectLst/>
+                        </a:rPr>
+                        <a:t>への手順</a:t>
+                      </a:r>
+                      <a:endParaRPr lang="ja-JP" altLang="en-US" sz="2800" b="0" i="0" u="none" strike="noStrike" dirty="0">
+                        <a:solidFill>
+                          <a:srgbClr val="000000"/>
+                        </a:solidFill>
+                        <a:effectLst/>
+                        <a:latin typeface="游ゴシック" panose="020B0400000000000000" pitchFamily="50" charset="-128"/>
+                        <a:ea typeface="游ゴシック" panose="020B0400000000000000" pitchFamily="50" charset="-128"/>
+                      </a:endParaRPr>
+                    </a:p>
+                  </a:txBody>
+                  <a:tcPr marL="9525" marR="9525" marT="9525" marB="0" anchor="ctr">
+                    <a:lnL w="12700" cap="flat" cmpd="sng" algn="ctr">
+                      <a:solidFill>
+                        <a:schemeClr val="tx1"/>
+                      </a:solidFill>
+                      <a:prstDash val="solid"/>
+                      <a:round/>
+                      <a:headEnd type="none" w="med" len="med"/>
+                      <a:tailEnd type="none" w="med" len="med"/>
+                    </a:lnL>
+                    <a:lnR w="12700" cap="flat" cmpd="sng" algn="ctr">
+                      <a:solidFill>
+                        <a:schemeClr val="tx1"/>
+                      </a:solidFill>
+                      <a:prstDash val="solid"/>
+                      <a:round/>
+                      <a:headEnd type="none" w="med" len="med"/>
+                      <a:tailEnd type="none" w="med" len="med"/>
+                    </a:lnR>
+                    <a:lnT w="12700" cap="flat" cmpd="sng" algn="ctr">
+                      <a:solidFill>
+                        <a:schemeClr val="tx1"/>
+                      </a:solidFill>
+                      <a:prstDash val="solid"/>
+                      <a:round/>
+                      <a:headEnd type="none" w="med" len="med"/>
+                      <a:tailEnd type="none" w="med" len="med"/>
+                    </a:lnT>
+                    <a:lnB w="12700" cap="flat" cmpd="sng" algn="ctr">
+                      <a:solidFill>
+                        <a:schemeClr val="tx1"/>
+                      </a:solidFill>
+                      <a:prstDash val="solid"/>
+                      <a:round/>
+                      <a:headEnd type="none" w="med" len="med"/>
+                      <a:tailEnd type="none" w="med" len="med"/>
+                    </a:lnB>
+                    <a:solidFill>
+                      <a:schemeClr val="bg1"/>
+                    </a:solidFill>
+                  </a:tcPr>
+                </a:tc>
+                <a:extLst>
+                  <a:ext uri="{0D108BD9-81ED-4DB2-BD59-A6C34878D82A}">
+                    <a16:rowId xmlns:a16="http://schemas.microsoft.com/office/drawing/2014/main" val="3953469068"/>
+                  </a:ext>
+                </a:extLst>
+              </a:tr>
+              <a:tr h="1271784">
+                <a:tc>
+                  <a:txBody>
+                    <a:bodyPr/>
+                    <a:lstStyle/>
+                    <a:p>
+                      <a:pPr algn="l" fontAlgn="ctr">
+                        <a:buNone/>
+                      </a:pPr>
+                      <a:r>
+                        <a:rPr lang="ja-JP" altLang="en-US" sz="2800" u="none" strike="noStrike" dirty="0">
+                          <a:effectLst/>
+                        </a:rPr>
+                        <a:t> 五線譜の該当部分を</a:t>
+                      </a:r>
+                      <a:endParaRPr lang="en-US" altLang="ja-JP" sz="2800" u="none" strike="noStrike" dirty="0">
+                        <a:effectLst/>
+                      </a:endParaRPr>
+                    </a:p>
+                    <a:p>
+                      <a:pPr algn="l" fontAlgn="ctr">
+                        <a:buNone/>
+                      </a:pPr>
+                      <a:r>
+                        <a:rPr lang="ja-JP" altLang="en-US" sz="2800" u="none" strike="noStrike" dirty="0">
+                          <a:effectLst/>
+                        </a:rPr>
+                        <a:t>クリック</a:t>
+                      </a:r>
+                      <a:endParaRPr lang="ja-JP" altLang="en-US" sz="2800" b="0" i="0" u="none" strike="noStrike" dirty="0">
+                        <a:solidFill>
+                          <a:srgbClr val="000000"/>
+                        </a:solidFill>
+                        <a:effectLst/>
+                        <a:latin typeface="游ゴシック" panose="020B0400000000000000" pitchFamily="50" charset="-128"/>
+                        <a:ea typeface="游ゴシック" panose="020B0400000000000000" pitchFamily="50" charset="-128"/>
+                      </a:endParaRPr>
+                    </a:p>
+                  </a:txBody>
+                  <a:tcPr marL="9525" marR="9525" marT="9525" marB="0" anchor="ctr">
+                    <a:lnL w="12700" cap="flat" cmpd="sng" algn="ctr">
+                      <a:solidFill>
+                        <a:schemeClr val="tx1"/>
+                      </a:solidFill>
+                      <a:prstDash val="solid"/>
+                      <a:round/>
+                      <a:headEnd type="none" w="med" len="med"/>
+                      <a:tailEnd type="none" w="med" len="med"/>
+                    </a:lnL>
+                    <a:lnR w="12700" cap="flat" cmpd="sng" algn="ctr">
+                      <a:solidFill>
+                        <a:schemeClr val="tx1"/>
+                      </a:solidFill>
+                      <a:prstDash val="solid"/>
+                      <a:round/>
+                      <a:headEnd type="none" w="med" len="med"/>
+                      <a:tailEnd type="none" w="med" len="med"/>
+                    </a:lnR>
+                    <a:lnT w="12700" cap="flat" cmpd="sng" algn="ctr">
+                      <a:solidFill>
+                        <a:schemeClr val="tx1"/>
+                      </a:solidFill>
+                      <a:prstDash val="solid"/>
+                      <a:round/>
+                      <a:headEnd type="none" w="med" len="med"/>
+                      <a:tailEnd type="none" w="med" len="med"/>
+                    </a:lnT>
+                    <a:lnB w="12700" cap="flat" cmpd="sng" algn="ctr">
+                      <a:solidFill>
+                        <a:schemeClr val="tx1"/>
+                      </a:solidFill>
+                      <a:prstDash val="solid"/>
+                      <a:round/>
+                      <a:headEnd type="none" w="med" len="med"/>
+                      <a:tailEnd type="none" w="med" len="med"/>
+                    </a:lnB>
+                    <a:solidFill>
+                      <a:schemeClr val="bg1"/>
+                    </a:solidFill>
+                  </a:tcPr>
+                </a:tc>
+                <a:tc>
+                  <a:txBody>
+                    <a:bodyPr/>
+                    <a:lstStyle/>
+                    <a:p>
+                      <a:pPr algn="l" fontAlgn="ctr">
+                        <a:buNone/>
+                      </a:pPr>
+                      <a:r>
+                        <a:rPr lang="en-US" sz="2800" u="none" strike="noStrike" dirty="0">
+                          <a:effectLst/>
+                        </a:rPr>
+                        <a:t> </a:t>
+                      </a:r>
+                      <a:r>
+                        <a:rPr lang="ja-JP" altLang="en-US" sz="2800" u="none" strike="noStrike" dirty="0">
+                          <a:effectLst/>
+                        </a:rPr>
+                        <a:t>クリックと同時に音符と</a:t>
+                      </a:r>
+                      <a:r>
+                        <a:rPr lang="en-US" altLang="ja-JP" sz="2800" u="none" strike="noStrike" dirty="0">
+                          <a:effectLst/>
+                        </a:rPr>
+                        <a:t>Node</a:t>
+                      </a:r>
+                      <a:r>
+                        <a:rPr lang="ja-JP" altLang="en-US" sz="2800" u="none" strike="noStrike" dirty="0">
+                          <a:effectLst/>
+                        </a:rPr>
+                        <a:t>クラスを生成、これをリスト</a:t>
+                      </a:r>
+                      <a:r>
+                        <a:rPr lang="en-US" altLang="ja-JP" sz="2800" u="none" strike="noStrike" dirty="0">
+                          <a:effectLst/>
+                        </a:rPr>
+                        <a:t>Nodes</a:t>
+                      </a:r>
+                      <a:r>
+                        <a:rPr lang="ja-JP" altLang="en-US" sz="2800" u="none" strike="noStrike" dirty="0">
+                          <a:effectLst/>
+                        </a:rPr>
+                        <a:t>に入れる。</a:t>
+                      </a:r>
+                      <a:endParaRPr lang="en-US" sz="2800" b="0" i="0" u="none" strike="noStrike" dirty="0">
+                        <a:solidFill>
+                          <a:srgbClr val="000000"/>
+                        </a:solidFill>
+                        <a:effectLst/>
+                        <a:latin typeface="游ゴシック" panose="020B0400000000000000" pitchFamily="50" charset="-128"/>
+                        <a:ea typeface="游ゴシック" panose="020B0400000000000000" pitchFamily="50" charset="-128"/>
+                      </a:endParaRPr>
+                    </a:p>
+                  </a:txBody>
+                  <a:tcPr marL="9525" marR="9525" marT="9525" marB="0" anchor="ctr">
+                    <a:lnL w="12700" cap="flat" cmpd="sng" algn="ctr">
+                      <a:solidFill>
+                        <a:schemeClr val="tx1"/>
+                      </a:solidFill>
+                      <a:prstDash val="solid"/>
+                      <a:round/>
+                      <a:headEnd type="none" w="med" len="med"/>
+                      <a:tailEnd type="none" w="med" len="med"/>
+                    </a:lnL>
+                    <a:lnR w="12700" cap="flat" cmpd="sng" algn="ctr">
+                      <a:solidFill>
+                        <a:schemeClr val="tx1"/>
+                      </a:solidFill>
+                      <a:prstDash val="solid"/>
+                      <a:round/>
+                      <a:headEnd type="none" w="med" len="med"/>
+                      <a:tailEnd type="none" w="med" len="med"/>
+                    </a:lnR>
+                    <a:lnT w="12700" cap="flat" cmpd="sng" algn="ctr">
+                      <a:solidFill>
+                        <a:schemeClr val="tx1"/>
+                      </a:solidFill>
+                      <a:prstDash val="solid"/>
+                      <a:round/>
+                      <a:headEnd type="none" w="med" len="med"/>
+                      <a:tailEnd type="none" w="med" len="med"/>
+                    </a:lnT>
+                    <a:lnB w="12700" cap="flat" cmpd="sng" algn="ctr">
+                      <a:solidFill>
+                        <a:schemeClr val="tx1"/>
+                      </a:solidFill>
+                      <a:prstDash val="solid"/>
+                      <a:round/>
+                      <a:headEnd type="none" w="med" len="med"/>
+                      <a:tailEnd type="none" w="med" len="med"/>
+                    </a:lnB>
+                    <a:solidFill>
+                      <a:schemeClr val="bg1"/>
+                    </a:solidFill>
+                  </a:tcPr>
+                </a:tc>
+                <a:extLst>
+                  <a:ext uri="{0D108BD9-81ED-4DB2-BD59-A6C34878D82A}">
+                    <a16:rowId xmlns:a16="http://schemas.microsoft.com/office/drawing/2014/main" val="2980872199"/>
+                  </a:ext>
+                </a:extLst>
+              </a:tr>
+              <a:tr h="2529530">
+                <a:tc>
+                  <a:txBody>
+                    <a:bodyPr/>
+                    <a:lstStyle/>
+                    <a:p>
+                      <a:pPr algn="l" fontAlgn="ctr">
+                        <a:buNone/>
+                      </a:pPr>
+                      <a:r>
+                        <a:rPr lang="ja-JP" altLang="en-US" sz="2800" u="none" strike="noStrike" dirty="0">
+                          <a:effectLst/>
+                        </a:rPr>
+                        <a:t> 楽譜配置ボタンを</a:t>
+                      </a:r>
+                      <a:endParaRPr lang="en-US" altLang="ja-JP" sz="2800" u="none" strike="noStrike" dirty="0">
+                        <a:effectLst/>
+                      </a:endParaRPr>
+                    </a:p>
+                    <a:p>
+                      <a:pPr algn="l" fontAlgn="ctr">
+                        <a:buNone/>
+                      </a:pPr>
+                      <a:r>
+                        <a:rPr lang="ja-JP" altLang="en-US" sz="2800" u="none" strike="noStrike" dirty="0">
+                          <a:effectLst/>
+                        </a:rPr>
+                        <a:t>クリック</a:t>
+                      </a:r>
+                      <a:endParaRPr lang="ja-JP" altLang="en-US" sz="2800" b="0" i="0" u="none" strike="noStrike" dirty="0">
+                        <a:solidFill>
+                          <a:srgbClr val="000000"/>
+                        </a:solidFill>
+                        <a:effectLst/>
+                        <a:latin typeface="游ゴシック" panose="020B0400000000000000" pitchFamily="50" charset="-128"/>
+                        <a:ea typeface="游ゴシック" panose="020B0400000000000000" pitchFamily="50" charset="-128"/>
+                      </a:endParaRPr>
+                    </a:p>
+                  </a:txBody>
+                  <a:tcPr marL="9525" marR="9525" marT="9525" marB="0" anchor="ctr">
+                    <a:lnL w="12700" cap="flat" cmpd="sng" algn="ctr">
+                      <a:solidFill>
+                        <a:schemeClr val="tx1"/>
+                      </a:solidFill>
+                      <a:prstDash val="solid"/>
+                      <a:round/>
+                      <a:headEnd type="none" w="med" len="med"/>
+                      <a:tailEnd type="none" w="med" len="med"/>
+                    </a:lnL>
+                    <a:lnR w="12700" cap="flat" cmpd="sng" algn="ctr">
+                      <a:solidFill>
+                        <a:schemeClr val="tx1"/>
+                      </a:solidFill>
+                      <a:prstDash val="solid"/>
+                      <a:round/>
+                      <a:headEnd type="none" w="med" len="med"/>
+                      <a:tailEnd type="none" w="med" len="med"/>
+                    </a:lnR>
+                    <a:lnT w="12700" cap="flat" cmpd="sng" algn="ctr">
+                      <a:solidFill>
+                        <a:schemeClr val="tx1"/>
+                      </a:solidFill>
+                      <a:prstDash val="solid"/>
+                      <a:round/>
+                      <a:headEnd type="none" w="med" len="med"/>
+                      <a:tailEnd type="none" w="med" len="med"/>
+                    </a:lnT>
+                    <a:lnB w="12700" cap="flat" cmpd="sng" algn="ctr">
+                      <a:solidFill>
+                        <a:schemeClr val="tx1"/>
+                      </a:solidFill>
+                      <a:prstDash val="solid"/>
+                      <a:round/>
+                      <a:headEnd type="none" w="med" len="med"/>
+                      <a:tailEnd type="none" w="med" len="med"/>
+                    </a:lnB>
+                    <a:solidFill>
+                      <a:schemeClr val="bg1"/>
+                    </a:solidFill>
+                  </a:tcPr>
+                </a:tc>
+                <a:tc>
+                  <a:txBody>
+                    <a:bodyPr/>
+                    <a:lstStyle/>
+                    <a:p>
+                      <a:pPr algn="l" fontAlgn="ctr">
+                        <a:buNone/>
+                      </a:pPr>
+                      <a:r>
+                        <a:rPr lang="ja-JP" altLang="en-US" sz="2800" u="none" strike="noStrike" dirty="0">
+                          <a:effectLst/>
+                        </a:rPr>
+                        <a:t> </a:t>
+                      </a:r>
+                      <a:r>
+                        <a:rPr lang="en-US" altLang="ja-JP" sz="2800" u="none" strike="noStrike" dirty="0">
+                          <a:effectLst/>
+                        </a:rPr>
+                        <a:t>Node</a:t>
+                      </a:r>
+                      <a:r>
+                        <a:rPr lang="ja-JP" altLang="en-US" sz="2800" u="none" strike="noStrike" dirty="0">
+                          <a:effectLst/>
+                        </a:rPr>
+                        <a:t>の情報を</a:t>
+                      </a:r>
+                      <a:r>
+                        <a:rPr lang="en-US" altLang="ja-JP" sz="2800" u="none" strike="noStrike" dirty="0">
+                          <a:effectLst/>
+                        </a:rPr>
+                        <a:t>Python</a:t>
+                      </a:r>
+                      <a:r>
+                        <a:rPr lang="ja-JP" altLang="en-US" sz="2800" u="none" strike="noStrike" dirty="0">
+                          <a:effectLst/>
+                        </a:rPr>
+                        <a:t>の</a:t>
+                      </a:r>
+                      <a:r>
+                        <a:rPr lang="en-US" altLang="ja-JP" sz="2800" u="none" strike="noStrike" dirty="0">
+                          <a:effectLst/>
+                        </a:rPr>
+                        <a:t>Music21</a:t>
+                      </a:r>
+                      <a:r>
+                        <a:rPr lang="ja-JP" altLang="en-US" sz="2800" u="none" strike="noStrike" dirty="0">
+                          <a:effectLst/>
+                        </a:rPr>
+                        <a:t>というライブラリに処理させ、</a:t>
+                      </a:r>
+                      <a:r>
+                        <a:rPr lang="en-US" altLang="ja-JP" sz="2800" u="none" strike="noStrike" dirty="0" err="1">
+                          <a:effectLst/>
+                        </a:rPr>
+                        <a:t>MusicXML</a:t>
+                      </a:r>
+                      <a:r>
+                        <a:rPr lang="ja-JP" altLang="en-US" sz="2800" u="none" strike="noStrike" dirty="0">
+                          <a:effectLst/>
+                        </a:rPr>
+                        <a:t>ファイルに変換</a:t>
+                      </a:r>
+                      <a:endParaRPr lang="ja-JP" altLang="en-US" sz="2800" b="0" i="0" u="none" strike="noStrike" dirty="0">
+                        <a:solidFill>
+                          <a:srgbClr val="000000"/>
+                        </a:solidFill>
+                        <a:effectLst/>
+                        <a:latin typeface="游ゴシック" panose="020B0400000000000000" pitchFamily="50" charset="-128"/>
+                        <a:ea typeface="游ゴシック" panose="020B0400000000000000" pitchFamily="50" charset="-128"/>
+                      </a:endParaRPr>
+                    </a:p>
+                  </a:txBody>
+                  <a:tcPr marL="9525" marR="9525" marT="9525" marB="0" anchor="ctr">
+                    <a:lnL w="12700" cap="flat" cmpd="sng" algn="ctr">
+                      <a:solidFill>
+                        <a:schemeClr val="tx1"/>
+                      </a:solidFill>
+                      <a:prstDash val="solid"/>
+                      <a:round/>
+                      <a:headEnd type="none" w="med" len="med"/>
+                      <a:tailEnd type="none" w="med" len="med"/>
+                    </a:lnL>
+                    <a:lnR w="12700" cap="flat" cmpd="sng" algn="ctr">
+                      <a:solidFill>
+                        <a:schemeClr val="tx1"/>
+                      </a:solidFill>
+                      <a:prstDash val="solid"/>
+                      <a:round/>
+                      <a:headEnd type="none" w="med" len="med"/>
+                      <a:tailEnd type="none" w="med" len="med"/>
+                    </a:lnR>
+                    <a:lnT w="12700" cap="flat" cmpd="sng" algn="ctr">
+                      <a:solidFill>
+                        <a:schemeClr val="tx1"/>
+                      </a:solidFill>
+                      <a:prstDash val="solid"/>
+                      <a:round/>
+                      <a:headEnd type="none" w="med" len="med"/>
+                      <a:tailEnd type="none" w="med" len="med"/>
+                    </a:lnT>
+                    <a:lnB w="12700" cap="flat" cmpd="sng" algn="ctr">
+                      <a:solidFill>
+                        <a:schemeClr val="tx1"/>
+                      </a:solidFill>
+                      <a:prstDash val="solid"/>
+                      <a:round/>
+                      <a:headEnd type="none" w="med" len="med"/>
+                      <a:tailEnd type="none" w="med" len="med"/>
+                    </a:lnB>
+                    <a:solidFill>
+                      <a:schemeClr val="bg1"/>
+                    </a:solidFill>
+                  </a:tcPr>
+                </a:tc>
+                <a:extLst>
+                  <a:ext uri="{0D108BD9-81ED-4DB2-BD59-A6C34878D82A}">
+                    <a16:rowId xmlns:a16="http://schemas.microsoft.com/office/drawing/2014/main" val="1056017188"/>
+                  </a:ext>
+                </a:extLst>
+              </a:tr>
+            </a:tbl>
+          </a:graphicData>
+        </a:graphic>
+      </p:graphicFrame>
+      <p:graphicFrame>
+        <p:nvGraphicFramePr>
+          <p:cNvPr id="5" name="表 4">
+            <a:extLst>
+              <a:ext uri="{FF2B5EF4-FFF2-40B4-BE49-F238E27FC236}">
+                <a16:creationId xmlns:a16="http://schemas.microsoft.com/office/drawing/2014/main" id="{4CDCCA81-3092-9CE3-AD02-681D1B780962}"/>
+              </a:ext>
+            </a:extLst>
+          </p:cNvPr>
+          <p:cNvGraphicFramePr>
+            <a:graphicFrameLocks noGrp="1"/>
+          </p:cNvGraphicFramePr>
+          <p:nvPr>
+            <p:extLst>
+              <p:ext uri="{D42A27DB-BD31-4B8C-83A1-F6EECF244321}">
+                <p14:modId xmlns:p14="http://schemas.microsoft.com/office/powerpoint/2010/main" val="3526838493"/>
+              </p:ext>
+            </p:extLst>
+          </p:nvPr>
+        </p:nvGraphicFramePr>
+        <p:xfrm>
+          <a:off x="8582025" y="1828981"/>
+          <a:ext cx="3286125" cy="4682180"/>
+        </p:xfrm>
+        <a:graphic>
+          <a:graphicData uri="http://schemas.openxmlformats.org/drawingml/2006/table">
+            <a:tbl>
+              <a:tblPr>
+                <a:tableStyleId>{073A0DAA-6AF3-43AB-8588-CEC1D06C72B9}</a:tableStyleId>
+              </a:tblPr>
+              <a:tblGrid>
+                <a:gridCol w="3286125">
+                  <a:extLst>
+                    <a:ext uri="{9D8B030D-6E8A-4147-A177-3AD203B41FA5}">
+                      <a16:colId xmlns:a16="http://schemas.microsoft.com/office/drawing/2014/main" val="159393942"/>
+                    </a:ext>
+                  </a:extLst>
+                </a:gridCol>
+              </a:tblGrid>
+              <a:tr h="684335">
+                <a:tc>
+                  <a:txBody>
+                    <a:bodyPr/>
+                    <a:lstStyle/>
+                    <a:p>
+                      <a:pPr algn="l" fontAlgn="ctr">
+                        <a:buNone/>
+                      </a:pPr>
+                      <a:r>
+                        <a:rPr lang="en-US" altLang="ja-JP" sz="2800" dirty="0"/>
+                        <a:t> Node</a:t>
+                      </a:r>
+                      <a:r>
+                        <a:rPr lang="ja-JP" altLang="en-US" sz="2800" dirty="0"/>
+                        <a:t>の定義</a:t>
+                      </a:r>
+                      <a:endParaRPr lang="ja-JP" altLang="en-US" sz="2800" b="0" i="0" u="none" strike="noStrike" dirty="0">
+                        <a:solidFill>
+                          <a:srgbClr val="000000"/>
+                        </a:solidFill>
+                        <a:effectLst/>
+                        <a:latin typeface="游ゴシック" panose="020B0400000000000000" pitchFamily="50" charset="-128"/>
+                        <a:ea typeface="游ゴシック" panose="020B0400000000000000" pitchFamily="50" charset="-128"/>
+                      </a:endParaRPr>
+                    </a:p>
+                  </a:txBody>
+                  <a:tcPr marL="9525" marR="9525" marT="9525" marB="0" anchor="ctr">
+                    <a:lnL w="12700" cap="flat" cmpd="sng" algn="ctr">
+                      <a:solidFill>
+                        <a:schemeClr val="tx1"/>
+                      </a:solidFill>
+                      <a:prstDash val="solid"/>
+                      <a:round/>
+                      <a:headEnd type="none" w="med" len="med"/>
+                      <a:tailEnd type="none" w="med" len="med"/>
+                    </a:lnL>
+                    <a:lnR w="12700" cap="flat" cmpd="sng" algn="ctr">
+                      <a:solidFill>
+                        <a:schemeClr val="tx1"/>
+                      </a:solidFill>
+                      <a:prstDash val="solid"/>
+                      <a:round/>
+                      <a:headEnd type="none" w="med" len="med"/>
+                      <a:tailEnd type="none" w="med" len="med"/>
+                    </a:lnR>
+                    <a:lnT w="12700" cap="flat" cmpd="sng" algn="ctr">
+                      <a:solidFill>
+                        <a:schemeClr val="tx1"/>
+                      </a:solidFill>
+                      <a:prstDash val="solid"/>
+                      <a:round/>
+                      <a:headEnd type="none" w="med" len="med"/>
+                      <a:tailEnd type="none" w="med" len="med"/>
+                    </a:lnT>
+                    <a:lnB w="12700" cap="flat" cmpd="sng" algn="ctr">
+                      <a:solidFill>
+                        <a:schemeClr val="tx1"/>
+                      </a:solidFill>
+                      <a:prstDash val="solid"/>
+                      <a:round/>
+                      <a:headEnd type="none" w="med" len="med"/>
+                      <a:tailEnd type="none" w="med" len="med"/>
+                    </a:lnB>
+                    <a:solidFill>
+                      <a:schemeClr val="bg1"/>
+                    </a:solidFill>
+                  </a:tcPr>
+                </a:tc>
+                <a:extLst>
+                  <a:ext uri="{0D108BD9-81ED-4DB2-BD59-A6C34878D82A}">
+                    <a16:rowId xmlns:a16="http://schemas.microsoft.com/office/drawing/2014/main" val="3953469068"/>
+                  </a:ext>
+                </a:extLst>
+              </a:tr>
+              <a:tr h="684335">
+                <a:tc>
+                  <a:txBody>
+                    <a:bodyPr/>
+                    <a:lstStyle/>
+                    <a:p>
+                      <a:pPr algn="l" fontAlgn="ctr">
+                        <a:buNone/>
+                      </a:pPr>
+                      <a:r>
+                        <a:rPr lang="en-US" altLang="ja-JP" sz="2800" b="0" i="0" u="none" strike="noStrike" dirty="0">
+                          <a:solidFill>
+                            <a:srgbClr val="000000"/>
+                          </a:solidFill>
+                          <a:effectLst/>
+                          <a:latin typeface="游ゴシック" panose="020B0400000000000000" pitchFamily="50" charset="-128"/>
+                          <a:ea typeface="游ゴシック" panose="020B0400000000000000" pitchFamily="50" charset="-128"/>
+                        </a:rPr>
+                        <a:t> </a:t>
+                      </a:r>
+                      <a:r>
+                        <a:rPr lang="en-US" altLang="ja-JP" sz="2800" b="0" i="0" u="none" strike="noStrike" dirty="0">
+                          <a:solidFill>
+                            <a:srgbClr val="000000"/>
+                          </a:solidFill>
+                          <a:effectLst/>
+                          <a:latin typeface="+mn-ea"/>
+                          <a:ea typeface="+mn-ea"/>
+                        </a:rPr>
+                        <a:t>duration(</a:t>
+                      </a:r>
+                      <a:r>
+                        <a:rPr lang="ja-JP" altLang="en-US" sz="2800" b="0" i="0" u="none" strike="noStrike" dirty="0">
+                          <a:solidFill>
+                            <a:srgbClr val="000000"/>
+                          </a:solidFill>
+                          <a:effectLst/>
+                          <a:latin typeface="+mn-ea"/>
+                          <a:ea typeface="+mn-ea"/>
+                        </a:rPr>
+                        <a:t>拍数</a:t>
+                      </a:r>
+                      <a:r>
+                        <a:rPr lang="en-US" altLang="ja-JP" sz="2800" b="0" i="0" u="none" strike="noStrike" dirty="0">
+                          <a:solidFill>
+                            <a:srgbClr val="000000"/>
+                          </a:solidFill>
+                          <a:effectLst/>
+                          <a:latin typeface="+mn-ea"/>
+                          <a:ea typeface="+mn-ea"/>
+                        </a:rPr>
+                        <a:t>)</a:t>
+                      </a:r>
+                      <a:endParaRPr lang="ja-JP" altLang="en-US" sz="2800" b="0" i="0" u="none" strike="noStrike" dirty="0">
+                        <a:solidFill>
+                          <a:srgbClr val="000000"/>
+                        </a:solidFill>
+                        <a:effectLst/>
+                        <a:latin typeface="+mn-ea"/>
+                        <a:ea typeface="+mn-ea"/>
+                      </a:endParaRPr>
+                    </a:p>
+                  </a:txBody>
+                  <a:tcPr marL="9525" marR="9525" marT="9525" marB="0" anchor="ctr">
+                    <a:lnL w="12700" cap="flat" cmpd="sng" algn="ctr">
+                      <a:solidFill>
+                        <a:schemeClr val="tx1"/>
+                      </a:solidFill>
+                      <a:prstDash val="solid"/>
+                      <a:round/>
+                      <a:headEnd type="none" w="med" len="med"/>
+                      <a:tailEnd type="none" w="med" len="med"/>
+                    </a:lnL>
+                    <a:lnR w="12700" cap="flat" cmpd="sng" algn="ctr">
+                      <a:solidFill>
+                        <a:schemeClr val="tx1"/>
+                      </a:solidFill>
+                      <a:prstDash val="solid"/>
+                      <a:round/>
+                      <a:headEnd type="none" w="med" len="med"/>
+                      <a:tailEnd type="none" w="med" len="med"/>
+                    </a:lnR>
+                    <a:lnT w="12700" cap="flat" cmpd="sng" algn="ctr">
+                      <a:solidFill>
+                        <a:schemeClr val="tx1"/>
+                      </a:solidFill>
+                      <a:prstDash val="solid"/>
+                      <a:round/>
+                      <a:headEnd type="none" w="med" len="med"/>
+                      <a:tailEnd type="none" w="med" len="med"/>
+                    </a:lnT>
+                    <a:lnB w="12700" cap="flat" cmpd="sng" algn="ctr">
+                      <a:solidFill>
+                        <a:schemeClr val="tx1"/>
+                      </a:solidFill>
+                      <a:prstDash val="solid"/>
+                      <a:round/>
+                      <a:headEnd type="none" w="med" len="med"/>
+                      <a:tailEnd type="none" w="med" len="med"/>
+                    </a:lnB>
+                    <a:solidFill>
+                      <a:schemeClr val="bg1"/>
+                    </a:solidFill>
+                  </a:tcPr>
+                </a:tc>
+                <a:extLst>
+                  <a:ext uri="{0D108BD9-81ED-4DB2-BD59-A6C34878D82A}">
+                    <a16:rowId xmlns:a16="http://schemas.microsoft.com/office/drawing/2014/main" val="693740828"/>
+                  </a:ext>
+                </a:extLst>
+              </a:tr>
+              <a:tr h="824961">
+                <a:tc>
+                  <a:txBody>
+                    <a:bodyPr/>
+                    <a:lstStyle/>
+                    <a:p>
+                      <a:pPr algn="l" fontAlgn="ctr">
+                        <a:buNone/>
+                      </a:pPr>
+                      <a:r>
+                        <a:rPr lang="ja-JP" altLang="en-US" sz="2800" dirty="0"/>
+                        <a:t> </a:t>
+                      </a:r>
+                      <a:r>
+                        <a:rPr lang="en-US" altLang="ja-JP" sz="2800" dirty="0"/>
+                        <a:t>Part</a:t>
+                      </a:r>
+                      <a:r>
+                        <a:rPr lang="en-US" altLang="ja-JP" sz="2800" b="0" i="0" u="none" strike="noStrike" dirty="0">
+                          <a:solidFill>
+                            <a:srgbClr val="000000"/>
+                          </a:solidFill>
+                          <a:effectLst/>
+                          <a:latin typeface="游ゴシック" panose="020B0400000000000000" pitchFamily="50" charset="-128"/>
+                          <a:ea typeface="游ゴシック" panose="020B0400000000000000" pitchFamily="50" charset="-128"/>
+                        </a:rPr>
+                        <a:t>(</a:t>
+                      </a:r>
+                      <a:r>
+                        <a:rPr lang="ja-JP" altLang="en-US" sz="2800" b="0" i="0" u="none" strike="noStrike" dirty="0">
+                          <a:solidFill>
+                            <a:srgbClr val="000000"/>
+                          </a:solidFill>
+                          <a:effectLst/>
+                          <a:latin typeface="游ゴシック" panose="020B0400000000000000" pitchFamily="50" charset="-128"/>
+                          <a:ea typeface="游ゴシック" panose="020B0400000000000000" pitchFamily="50" charset="-128"/>
+                        </a:rPr>
+                        <a:t>どのパートか</a:t>
+                      </a:r>
+                      <a:r>
+                        <a:rPr lang="en-US" altLang="ja-JP" sz="2800" b="0" i="0" u="none" strike="noStrike" dirty="0">
+                          <a:solidFill>
+                            <a:srgbClr val="000000"/>
+                          </a:solidFill>
+                          <a:effectLst/>
+                          <a:latin typeface="游ゴシック" panose="020B0400000000000000" pitchFamily="50" charset="-128"/>
+                          <a:ea typeface="游ゴシック" panose="020B0400000000000000" pitchFamily="50" charset="-128"/>
+                        </a:rPr>
+                        <a:t>)</a:t>
+                      </a:r>
+                      <a:endParaRPr lang="en-US" altLang="ja-JP" sz="2800" dirty="0"/>
+                    </a:p>
+                  </a:txBody>
+                  <a:tcPr marL="9525" marR="9525" marT="9525" marB="0" anchor="ctr">
+                    <a:lnL w="12700" cap="flat" cmpd="sng" algn="ctr">
+                      <a:solidFill>
+                        <a:schemeClr val="tx1"/>
+                      </a:solidFill>
+                      <a:prstDash val="solid"/>
+                      <a:round/>
+                      <a:headEnd type="none" w="med" len="med"/>
+                      <a:tailEnd type="none" w="med" len="med"/>
+                    </a:lnL>
+                    <a:lnR w="12700" cap="flat" cmpd="sng" algn="ctr">
+                      <a:solidFill>
+                        <a:schemeClr val="tx1"/>
+                      </a:solidFill>
+                      <a:prstDash val="solid"/>
+                      <a:round/>
+                      <a:headEnd type="none" w="med" len="med"/>
+                      <a:tailEnd type="none" w="med" len="med"/>
+                    </a:lnR>
+                    <a:lnT w="12700" cap="flat" cmpd="sng" algn="ctr">
+                      <a:solidFill>
+                        <a:schemeClr val="tx1"/>
+                      </a:solidFill>
+                      <a:prstDash val="solid"/>
+                      <a:round/>
+                      <a:headEnd type="none" w="med" len="med"/>
+                      <a:tailEnd type="none" w="med" len="med"/>
+                    </a:lnT>
+                    <a:lnB w="12700" cap="flat" cmpd="sng" algn="ctr">
+                      <a:solidFill>
+                        <a:schemeClr val="tx1"/>
+                      </a:solidFill>
+                      <a:prstDash val="solid"/>
+                      <a:round/>
+                      <a:headEnd type="none" w="med" len="med"/>
+                      <a:tailEnd type="none" w="med" len="med"/>
+                    </a:lnB>
+                    <a:solidFill>
+                      <a:schemeClr val="bg1"/>
+                    </a:solidFill>
+                  </a:tcPr>
+                </a:tc>
+                <a:extLst>
+                  <a:ext uri="{0D108BD9-81ED-4DB2-BD59-A6C34878D82A}">
+                    <a16:rowId xmlns:a16="http://schemas.microsoft.com/office/drawing/2014/main" val="2980872199"/>
+                  </a:ext>
+                </a:extLst>
+              </a:tr>
+              <a:tr h="824961">
+                <a:tc>
+                  <a:txBody>
+                    <a:bodyPr/>
+                    <a:lstStyle/>
+                    <a:p>
+                      <a:pPr algn="l" fontAlgn="ctr">
+                        <a:buNone/>
+                      </a:pPr>
+                      <a:r>
+                        <a:rPr lang="ja-JP" altLang="en-US" sz="2800" dirty="0"/>
+                        <a:t> </a:t>
+                      </a:r>
+                      <a:r>
+                        <a:rPr lang="en-US" altLang="ja-JP" sz="2800" dirty="0"/>
+                        <a:t>pitch(</a:t>
+                      </a:r>
+                      <a:r>
+                        <a:rPr lang="ja-JP" altLang="en-US" sz="2800" dirty="0"/>
+                        <a:t>音階</a:t>
+                      </a:r>
+                      <a:r>
+                        <a:rPr lang="en-US" altLang="ja-JP" sz="2800" dirty="0"/>
+                        <a:t>)</a:t>
+                      </a:r>
+                      <a:endParaRPr lang="ja-JP" altLang="en-US" sz="2800" b="0" i="0" u="none" strike="noStrike" dirty="0">
+                        <a:solidFill>
+                          <a:srgbClr val="000000"/>
+                        </a:solidFill>
+                        <a:effectLst/>
+                        <a:latin typeface="游ゴシック" panose="020B0400000000000000" pitchFamily="50" charset="-128"/>
+                        <a:ea typeface="游ゴシック" panose="020B0400000000000000" pitchFamily="50" charset="-128"/>
+                      </a:endParaRPr>
+                    </a:p>
+                  </a:txBody>
+                  <a:tcPr marL="9525" marR="9525" marT="9525" marB="0" anchor="ctr">
+                    <a:lnL w="12700" cap="flat" cmpd="sng" algn="ctr">
+                      <a:solidFill>
+                        <a:schemeClr val="tx1"/>
+                      </a:solidFill>
+                      <a:prstDash val="solid"/>
+                      <a:round/>
+                      <a:headEnd type="none" w="med" len="med"/>
+                      <a:tailEnd type="none" w="med" len="med"/>
+                    </a:lnL>
+                    <a:lnR w="12700" cap="flat" cmpd="sng" algn="ctr">
+                      <a:solidFill>
+                        <a:schemeClr val="tx1"/>
+                      </a:solidFill>
+                      <a:prstDash val="solid"/>
+                      <a:round/>
+                      <a:headEnd type="none" w="med" len="med"/>
+                      <a:tailEnd type="none" w="med" len="med"/>
+                    </a:lnR>
+                    <a:lnT w="12700" cap="flat" cmpd="sng" algn="ctr">
+                      <a:solidFill>
+                        <a:schemeClr val="tx1"/>
+                      </a:solidFill>
+                      <a:prstDash val="solid"/>
+                      <a:round/>
+                      <a:headEnd type="none" w="med" len="med"/>
+                      <a:tailEnd type="none" w="med" len="med"/>
+                    </a:lnT>
+                    <a:lnB w="12700" cap="flat" cmpd="sng" algn="ctr">
+                      <a:solidFill>
+                        <a:schemeClr val="tx1"/>
+                      </a:solidFill>
+                      <a:prstDash val="solid"/>
+                      <a:round/>
+                      <a:headEnd type="none" w="med" len="med"/>
+                      <a:tailEnd type="none" w="med" len="med"/>
+                    </a:lnB>
+                    <a:solidFill>
+                      <a:schemeClr val="bg1"/>
+                    </a:solidFill>
+                  </a:tcPr>
+                </a:tc>
+                <a:extLst>
+                  <a:ext uri="{0D108BD9-81ED-4DB2-BD59-A6C34878D82A}">
+                    <a16:rowId xmlns:a16="http://schemas.microsoft.com/office/drawing/2014/main" val="1056017188"/>
+                  </a:ext>
+                </a:extLst>
+              </a:tr>
+              <a:tr h="838627">
+                <a:tc>
+                  <a:txBody>
+                    <a:bodyPr/>
+                    <a:lstStyle/>
+                    <a:p>
+                      <a:pPr algn="l" fontAlgn="ctr">
+                        <a:buNone/>
+                      </a:pPr>
+                      <a:r>
+                        <a:rPr lang="ja-JP" altLang="en-US" sz="2800" dirty="0"/>
+                        <a:t> </a:t>
+                      </a:r>
+                      <a:r>
+                        <a:rPr lang="en-US" altLang="ja-JP" sz="2800" dirty="0" err="1"/>
+                        <a:t>startBar</a:t>
+                      </a:r>
+                      <a:r>
+                        <a:rPr lang="en-US" altLang="ja-JP" sz="2800" dirty="0"/>
+                        <a:t>(</a:t>
+                      </a:r>
+                      <a:r>
+                        <a:rPr lang="ja-JP" altLang="en-US" sz="2800" dirty="0"/>
+                        <a:t>何拍目か</a:t>
+                      </a:r>
+                      <a:r>
+                        <a:rPr lang="en-US" altLang="ja-JP" sz="2800" dirty="0"/>
+                        <a:t>)</a:t>
+                      </a:r>
+                      <a:endParaRPr lang="ja-JP" altLang="en-US" sz="2800" b="0" i="0" u="none" strike="noStrike" dirty="0">
+                        <a:solidFill>
+                          <a:srgbClr val="000000"/>
+                        </a:solidFill>
+                        <a:effectLst/>
+                        <a:latin typeface="游ゴシック" panose="020B0400000000000000" pitchFamily="50" charset="-128"/>
+                        <a:ea typeface="游ゴシック" panose="020B0400000000000000" pitchFamily="50" charset="-128"/>
+                      </a:endParaRPr>
+                    </a:p>
+                  </a:txBody>
+                  <a:tcPr marL="9525" marR="9525" marT="9525" marB="0" anchor="ctr">
+                    <a:lnL w="12700" cap="flat" cmpd="sng" algn="ctr">
+                      <a:solidFill>
+                        <a:schemeClr val="tx1"/>
+                      </a:solidFill>
+                      <a:prstDash val="solid"/>
+                      <a:round/>
+                      <a:headEnd type="none" w="med" len="med"/>
+                      <a:tailEnd type="none" w="med" len="med"/>
+                    </a:lnL>
+                    <a:lnR w="12700" cap="flat" cmpd="sng" algn="ctr">
+                      <a:solidFill>
+                        <a:schemeClr val="tx1"/>
+                      </a:solidFill>
+                      <a:prstDash val="solid"/>
+                      <a:round/>
+                      <a:headEnd type="none" w="med" len="med"/>
+                      <a:tailEnd type="none" w="med" len="med"/>
+                    </a:lnR>
+                    <a:lnT w="12700" cap="flat" cmpd="sng" algn="ctr">
+                      <a:solidFill>
+                        <a:schemeClr val="tx1"/>
+                      </a:solidFill>
+                      <a:prstDash val="solid"/>
+                      <a:round/>
+                      <a:headEnd type="none" w="med" len="med"/>
+                      <a:tailEnd type="none" w="med" len="med"/>
+                    </a:lnT>
+                    <a:lnB w="12700" cap="flat" cmpd="sng" algn="ctr">
+                      <a:solidFill>
+                        <a:schemeClr val="tx1"/>
+                      </a:solidFill>
+                      <a:prstDash val="solid"/>
+                      <a:round/>
+                      <a:headEnd type="none" w="med" len="med"/>
+                      <a:tailEnd type="none" w="med" len="med"/>
+                    </a:lnB>
+                    <a:solidFill>
+                      <a:schemeClr val="bg1"/>
+                    </a:solidFill>
+                  </a:tcPr>
+                </a:tc>
+                <a:extLst>
+                  <a:ext uri="{0D108BD9-81ED-4DB2-BD59-A6C34878D82A}">
+                    <a16:rowId xmlns:a16="http://schemas.microsoft.com/office/drawing/2014/main" val="1420370465"/>
+                  </a:ext>
+                </a:extLst>
+              </a:tr>
+              <a:tr h="824961">
+                <a:tc>
+                  <a:txBody>
+                    <a:bodyPr/>
+                    <a:lstStyle/>
+                    <a:p>
+                      <a:pPr algn="l" fontAlgn="ctr">
+                        <a:buNone/>
+                      </a:pPr>
+                      <a:r>
+                        <a:rPr lang="ja-JP" altLang="en-US" sz="2800" dirty="0"/>
+                        <a:t> </a:t>
+                      </a:r>
+                      <a:r>
+                        <a:rPr lang="en-US" altLang="ja-JP" sz="2800" dirty="0"/>
+                        <a:t>bar(</a:t>
+                      </a:r>
+                      <a:r>
+                        <a:rPr lang="ja-JP" altLang="en-US" sz="2800" dirty="0"/>
+                        <a:t>何小節目か</a:t>
+                      </a:r>
+                      <a:r>
+                        <a:rPr lang="en-US" altLang="ja-JP" sz="2800" dirty="0"/>
+                        <a:t>)</a:t>
+                      </a:r>
+                      <a:endParaRPr lang="ja-JP" altLang="en-US" sz="2800" b="0" i="0" u="none" strike="noStrike" dirty="0">
+                        <a:solidFill>
+                          <a:srgbClr val="000000"/>
+                        </a:solidFill>
+                        <a:effectLst/>
+                        <a:latin typeface="游ゴシック" panose="020B0400000000000000" pitchFamily="50" charset="-128"/>
+                        <a:ea typeface="游ゴシック" panose="020B0400000000000000" pitchFamily="50" charset="-128"/>
+                      </a:endParaRPr>
+                    </a:p>
+                  </a:txBody>
+                  <a:tcPr marL="9525" marR="9525" marT="9525" marB="0" anchor="ctr">
+                    <a:lnL w="12700" cap="flat" cmpd="sng" algn="ctr">
+                      <a:solidFill>
+                        <a:schemeClr val="tx1"/>
+                      </a:solidFill>
+                      <a:prstDash val="solid"/>
+                      <a:round/>
+                      <a:headEnd type="none" w="med" len="med"/>
+                      <a:tailEnd type="none" w="med" len="med"/>
+                    </a:lnL>
+                    <a:lnR w="12700" cap="flat" cmpd="sng" algn="ctr">
+                      <a:solidFill>
+                        <a:schemeClr val="tx1"/>
+                      </a:solidFill>
+                      <a:prstDash val="solid"/>
+                      <a:round/>
+                      <a:headEnd type="none" w="med" len="med"/>
+                      <a:tailEnd type="none" w="med" len="med"/>
+                    </a:lnR>
+                    <a:lnT w="12700" cap="flat" cmpd="sng" algn="ctr">
+                      <a:solidFill>
+                        <a:schemeClr val="tx1"/>
+                      </a:solidFill>
+                      <a:prstDash val="solid"/>
+                      <a:round/>
+                      <a:headEnd type="none" w="med" len="med"/>
+                      <a:tailEnd type="none" w="med" len="med"/>
+                    </a:lnT>
+                    <a:lnB w="12700" cap="flat" cmpd="sng" algn="ctr">
+                      <a:solidFill>
+                        <a:schemeClr val="tx1"/>
+                      </a:solidFill>
+                      <a:prstDash val="solid"/>
+                      <a:round/>
+                      <a:headEnd type="none" w="med" len="med"/>
+                      <a:tailEnd type="none" w="med" len="med"/>
+                    </a:lnB>
+                    <a:solidFill>
+                      <a:schemeClr val="bg1"/>
+                    </a:solidFill>
+                  </a:tcPr>
+                </a:tc>
+                <a:extLst>
+                  <a:ext uri="{0D108BD9-81ED-4DB2-BD59-A6C34878D82A}">
+                    <a16:rowId xmlns:a16="http://schemas.microsoft.com/office/drawing/2014/main" val="30414892"/>
+                  </a:ext>
+                </a:extLst>
+              </a:tr>
+            </a:tbl>
+          </a:graphicData>
+        </a:graphic>
+      </p:graphicFrame>
     </p:spTree>
     <p:extLst>
       <p:ext uri="{BB962C8B-B14F-4D97-AF65-F5344CB8AC3E}">
-        <p14:creationId xmlns:p14="http://schemas.microsoft.com/office/powerpoint/2010/main" val="1082943412"/>
+        <p14:creationId xmlns:p14="http://schemas.microsoft.com/office/powerpoint/2010/main" val="811802297"/>
+      </p:ext>
+    </p:extLst>
+  </p:cSld>
+  <p:clrMapOvr>
+    <a:masterClrMapping/>
+  </p:clrMapOvr>
+</p:sld>
+</file>
+
+<file path=ppt/slides/slide8.xml><?xml version="1.0" encoding="utf-8"?>
+<p:sld xmlns:a="http://schemas.openxmlformats.org/drawingml/2006/main" xmlns:r="http://schemas.openxmlformats.org/officeDocument/2006/relationships" xmlns:p="http://schemas.openxmlformats.org/presentationml/2006/main">
+  <p:cSld>
+    <p:bg>
+      <p:bgPr>
+        <a:solidFill>
+          <a:schemeClr val="bg1"/>
+        </a:solidFill>
+        <a:effectLst/>
+      </p:bgPr>
+    </p:bg>
+    <p:spTree>
+      <p:nvGrpSpPr>
+        <p:cNvPr id="1" name="">
+          <a:extLst>
+            <a:ext uri="{FF2B5EF4-FFF2-40B4-BE49-F238E27FC236}">
+              <a16:creationId xmlns:a16="http://schemas.microsoft.com/office/drawing/2014/main" id="{CCD29AEA-E2C2-858B-4898-5800BFEE0D28}"/>
+            </a:ext>
+          </a:extLst>
+        </p:cNvPr>
+        <p:cNvGrpSpPr/>
+        <p:nvPr/>
+      </p:nvGrpSpPr>
+      <p:grpSpPr>
+        <a:xfrm>
+          <a:off x="0" y="0"/>
+          <a:ext cx="0" cy="0"/>
+          <a:chOff x="0" y="0"/>
+          <a:chExt cx="0" cy="0"/>
+        </a:xfrm>
+      </p:grpSpPr>
+      <p:sp>
+        <p:nvSpPr>
+          <p:cNvPr id="2" name="タイトル 1">
+            <a:extLst>
+              <a:ext uri="{FF2B5EF4-FFF2-40B4-BE49-F238E27FC236}">
+                <a16:creationId xmlns:a16="http://schemas.microsoft.com/office/drawing/2014/main" id="{BBDF8C75-9B03-3FF3-B67A-17C6D7D73C68}"/>
+              </a:ext>
+            </a:extLst>
+          </p:cNvPr>
+          <p:cNvSpPr>
+            <a:spLocks noGrp="1"/>
+          </p:cNvSpPr>
+          <p:nvPr>
+            <p:ph type="title"/>
+          </p:nvPr>
+        </p:nvSpPr>
+        <p:spPr>
+          <a:xfrm>
+            <a:off x="1363617" y="571624"/>
+            <a:ext cx="8074815" cy="1618489"/>
+          </a:xfrm>
+        </p:spPr>
+        <p:txBody>
+          <a:bodyPr anchor="ctr">
+            <a:normAutofit/>
+          </a:bodyPr>
+          <a:lstStyle/>
+          <a:p>
+            <a:pPr algn="ctr"/>
+            <a:r>
+              <a:rPr lang="ja-JP" altLang="en-US" sz="6000" dirty="0"/>
+              <a:t>学習についての概要</a:t>
+            </a:r>
+            <a:endParaRPr kumimoji="1" lang="ja-JP" altLang="en-US" sz="6000" dirty="0"/>
+          </a:p>
+        </p:txBody>
+      </p:sp>
+      <p:graphicFrame>
+        <p:nvGraphicFramePr>
+          <p:cNvPr id="13" name="表 12">
+            <a:extLst>
+              <a:ext uri="{FF2B5EF4-FFF2-40B4-BE49-F238E27FC236}">
+                <a16:creationId xmlns:a16="http://schemas.microsoft.com/office/drawing/2014/main" id="{9E027433-CBE0-4CC1-8336-7638DCA0619D}"/>
+              </a:ext>
+            </a:extLst>
+          </p:cNvPr>
+          <p:cNvGraphicFramePr>
+            <a:graphicFrameLocks noGrp="1"/>
+          </p:cNvGraphicFramePr>
+          <p:nvPr>
+            <p:extLst>
+              <p:ext uri="{D42A27DB-BD31-4B8C-83A1-F6EECF244321}">
+                <p14:modId xmlns:p14="http://schemas.microsoft.com/office/powerpoint/2010/main" val="487798003"/>
+              </p:ext>
+            </p:extLst>
+          </p:nvPr>
+        </p:nvGraphicFramePr>
+        <p:xfrm>
+          <a:off x="1166948" y="1820091"/>
+          <a:ext cx="10707552" cy="4204719"/>
+        </p:xfrm>
+        <a:graphic>
+          <a:graphicData uri="http://schemas.openxmlformats.org/drawingml/2006/table">
+            <a:tbl>
+              <a:tblPr>
+                <a:tableStyleId>{5C22544A-7EE6-4342-B048-85BDC9FD1C3A}</a:tableStyleId>
+              </a:tblPr>
+              <a:tblGrid>
+                <a:gridCol w="1180629">
+                  <a:extLst>
+                    <a:ext uri="{9D8B030D-6E8A-4147-A177-3AD203B41FA5}">
+                      <a16:colId xmlns:a16="http://schemas.microsoft.com/office/drawing/2014/main" val="723236475"/>
+                    </a:ext>
+                  </a:extLst>
+                </a:gridCol>
+                <a:gridCol w="4771746">
+                  <a:extLst>
+                    <a:ext uri="{9D8B030D-6E8A-4147-A177-3AD203B41FA5}">
+                      <a16:colId xmlns:a16="http://schemas.microsoft.com/office/drawing/2014/main" val="159393942"/>
+                    </a:ext>
+                  </a:extLst>
+                </a:gridCol>
+                <a:gridCol w="4755177">
+                  <a:extLst>
+                    <a:ext uri="{9D8B030D-6E8A-4147-A177-3AD203B41FA5}">
+                      <a16:colId xmlns:a16="http://schemas.microsoft.com/office/drawing/2014/main" val="2484370049"/>
+                    </a:ext>
+                  </a:extLst>
+                </a:gridCol>
+              </a:tblGrid>
+              <a:tr h="541783">
+                <a:tc>
+                  <a:txBody>
+                    <a:bodyPr/>
+                    <a:lstStyle/>
+                    <a:p>
+                      <a:pPr algn="l" fontAlgn="ctr">
+                        <a:buNone/>
+                      </a:pPr>
+                      <a:endParaRPr lang="ja-JP" altLang="en-US" sz="2800" b="0" i="0" u="none" strike="noStrike" dirty="0">
+                        <a:solidFill>
+                          <a:srgbClr val="000000"/>
+                        </a:solidFill>
+                        <a:effectLst/>
+                        <a:latin typeface="游ゴシック" panose="020B0400000000000000" pitchFamily="50" charset="-128"/>
+                        <a:ea typeface="游ゴシック" panose="020B0400000000000000" pitchFamily="50" charset="-128"/>
+                      </a:endParaRPr>
+                    </a:p>
+                  </a:txBody>
+                  <a:tcPr marL="9525" marR="9525" marT="9525" marB="0" anchor="ctr">
+                    <a:lnL w="12700" cap="flat" cmpd="sng" algn="ctr">
+                      <a:solidFill>
+                        <a:schemeClr val="tx1"/>
+                      </a:solidFill>
+                      <a:prstDash val="solid"/>
+                      <a:round/>
+                      <a:headEnd type="none" w="med" len="med"/>
+                      <a:tailEnd type="none" w="med" len="med"/>
+                    </a:lnL>
+                    <a:lnR w="12700" cap="flat" cmpd="sng" algn="ctr">
+                      <a:solidFill>
+                        <a:schemeClr val="tx1"/>
+                      </a:solidFill>
+                      <a:prstDash val="solid"/>
+                      <a:round/>
+                      <a:headEnd type="none" w="med" len="med"/>
+                      <a:tailEnd type="none" w="med" len="med"/>
+                    </a:lnR>
+                    <a:lnT w="12700" cap="flat" cmpd="sng" algn="ctr">
+                      <a:solidFill>
+                        <a:schemeClr val="tx1"/>
+                      </a:solidFill>
+                      <a:prstDash val="solid"/>
+                      <a:round/>
+                      <a:headEnd type="none" w="med" len="med"/>
+                      <a:tailEnd type="none" w="med" len="med"/>
+                    </a:lnT>
+                    <a:lnB w="12700" cap="flat" cmpd="sng" algn="ctr">
+                      <a:solidFill>
+                        <a:schemeClr val="tx1"/>
+                      </a:solidFill>
+                      <a:prstDash val="solid"/>
+                      <a:round/>
+                      <a:headEnd type="none" w="med" len="med"/>
+                      <a:tailEnd type="none" w="med" len="med"/>
+                    </a:lnB>
+                    <a:solidFill>
+                      <a:schemeClr val="bg1"/>
+                    </a:solidFill>
+                  </a:tcPr>
+                </a:tc>
+                <a:tc>
+                  <a:txBody>
+                    <a:bodyPr/>
+                    <a:lstStyle/>
+                    <a:p>
+                      <a:pPr algn="l" fontAlgn="ctr">
+                        <a:buNone/>
+                      </a:pPr>
+                      <a:r>
+                        <a:rPr lang="ja-JP" altLang="en-US" sz="2800" u="none" strike="noStrike" dirty="0">
+                          <a:effectLst/>
+                        </a:rPr>
+                        <a:t> 学習手法</a:t>
+                      </a:r>
+                      <a:endParaRPr lang="ja-JP" altLang="en-US" sz="2800" b="0" i="0" u="none" strike="noStrike" dirty="0">
+                        <a:solidFill>
+                          <a:srgbClr val="000000"/>
+                        </a:solidFill>
+                        <a:effectLst/>
+                        <a:latin typeface="游ゴシック" panose="020B0400000000000000" pitchFamily="50" charset="-128"/>
+                        <a:ea typeface="游ゴシック" panose="020B0400000000000000" pitchFamily="50" charset="-128"/>
+                      </a:endParaRPr>
+                    </a:p>
+                  </a:txBody>
+                  <a:tcPr marL="9525" marR="9525" marT="9525" marB="0" anchor="ctr">
+                    <a:lnL w="12700" cap="flat" cmpd="sng" algn="ctr">
+                      <a:solidFill>
+                        <a:schemeClr val="tx1"/>
+                      </a:solidFill>
+                      <a:prstDash val="solid"/>
+                      <a:round/>
+                      <a:headEnd type="none" w="med" len="med"/>
+                      <a:tailEnd type="none" w="med" len="med"/>
+                    </a:lnL>
+                    <a:lnR w="12700" cap="flat" cmpd="sng" algn="ctr">
+                      <a:solidFill>
+                        <a:schemeClr val="tx1"/>
+                      </a:solidFill>
+                      <a:prstDash val="solid"/>
+                      <a:round/>
+                      <a:headEnd type="none" w="med" len="med"/>
+                      <a:tailEnd type="none" w="med" len="med"/>
+                    </a:lnR>
+                    <a:lnT w="12700" cap="flat" cmpd="sng" algn="ctr">
+                      <a:solidFill>
+                        <a:schemeClr val="tx1"/>
+                      </a:solidFill>
+                      <a:prstDash val="solid"/>
+                      <a:round/>
+                      <a:headEnd type="none" w="med" len="med"/>
+                      <a:tailEnd type="none" w="med" len="med"/>
+                    </a:lnT>
+                    <a:lnB w="12700" cap="flat" cmpd="sng" algn="ctr">
+                      <a:solidFill>
+                        <a:schemeClr val="tx1"/>
+                      </a:solidFill>
+                      <a:prstDash val="solid"/>
+                      <a:round/>
+                      <a:headEnd type="none" w="med" len="med"/>
+                      <a:tailEnd type="none" w="med" len="med"/>
+                    </a:lnB>
+                    <a:solidFill>
+                      <a:schemeClr val="bg1"/>
+                    </a:solidFill>
+                  </a:tcPr>
+                </a:tc>
+                <a:tc>
+                  <a:txBody>
+                    <a:bodyPr/>
+                    <a:lstStyle/>
+                    <a:p>
+                      <a:pPr algn="l" fontAlgn="ctr">
+                        <a:buNone/>
+                      </a:pPr>
+                      <a:r>
+                        <a:rPr lang="ja-JP" altLang="en-US" sz="2800" u="none" strike="noStrike" dirty="0">
+                          <a:effectLst/>
+                        </a:rPr>
+                        <a:t> 使用アルゴリズム</a:t>
+                      </a:r>
+                      <a:endParaRPr lang="ja-JP" altLang="en-US" sz="2800" b="0" i="0" u="none" strike="noStrike" dirty="0">
+                        <a:solidFill>
+                          <a:srgbClr val="000000"/>
+                        </a:solidFill>
+                        <a:effectLst/>
+                        <a:latin typeface="游ゴシック" panose="020B0400000000000000" pitchFamily="50" charset="-128"/>
+                        <a:ea typeface="游ゴシック" panose="020B0400000000000000" pitchFamily="50" charset="-128"/>
+                      </a:endParaRPr>
+                    </a:p>
+                  </a:txBody>
+                  <a:tcPr marL="9525" marR="9525" marT="9525" marB="0" anchor="ctr">
+                    <a:lnL w="12700" cap="flat" cmpd="sng" algn="ctr">
+                      <a:solidFill>
+                        <a:schemeClr val="tx1"/>
+                      </a:solidFill>
+                      <a:prstDash val="solid"/>
+                      <a:round/>
+                      <a:headEnd type="none" w="med" len="med"/>
+                      <a:tailEnd type="none" w="med" len="med"/>
+                    </a:lnL>
+                    <a:lnR w="12700" cap="flat" cmpd="sng" algn="ctr">
+                      <a:solidFill>
+                        <a:schemeClr val="tx1"/>
+                      </a:solidFill>
+                      <a:prstDash val="solid"/>
+                      <a:round/>
+                      <a:headEnd type="none" w="med" len="med"/>
+                      <a:tailEnd type="none" w="med" len="med"/>
+                    </a:lnR>
+                    <a:lnT w="12700" cap="flat" cmpd="sng" algn="ctr">
+                      <a:solidFill>
+                        <a:schemeClr val="tx1"/>
+                      </a:solidFill>
+                      <a:prstDash val="solid"/>
+                      <a:round/>
+                      <a:headEnd type="none" w="med" len="med"/>
+                      <a:tailEnd type="none" w="med" len="med"/>
+                    </a:lnT>
+                    <a:lnB w="12700" cap="flat" cmpd="sng" algn="ctr">
+                      <a:solidFill>
+                        <a:schemeClr val="tx1"/>
+                      </a:solidFill>
+                      <a:prstDash val="solid"/>
+                      <a:round/>
+                      <a:headEnd type="none" w="med" len="med"/>
+                      <a:tailEnd type="none" w="med" len="med"/>
+                    </a:lnB>
+                    <a:solidFill>
+                      <a:schemeClr val="bg1"/>
+                    </a:solidFill>
+                  </a:tcPr>
+                </a:tc>
+                <a:extLst>
+                  <a:ext uri="{0D108BD9-81ED-4DB2-BD59-A6C34878D82A}">
+                    <a16:rowId xmlns:a16="http://schemas.microsoft.com/office/drawing/2014/main" val="3953469068"/>
+                  </a:ext>
+                </a:extLst>
+              </a:tr>
+              <a:tr h="541783">
+                <a:tc>
+                  <a:txBody>
+                    <a:bodyPr/>
+                    <a:lstStyle/>
+                    <a:p>
+                      <a:pPr algn="l" fontAlgn="ctr">
+                        <a:buNone/>
+                      </a:pPr>
+                      <a:r>
+                        <a:rPr lang="ja-JP" altLang="en-US" sz="2800" u="none" strike="noStrike" dirty="0">
+                          <a:effectLst/>
+                        </a:rPr>
+                        <a:t>区分</a:t>
+                      </a:r>
+                      <a:endParaRPr lang="ja-JP" altLang="en-US" sz="2800" b="0" i="0" u="none" strike="noStrike" dirty="0">
+                        <a:solidFill>
+                          <a:srgbClr val="000000"/>
+                        </a:solidFill>
+                        <a:effectLst/>
+                        <a:latin typeface="游ゴシック" panose="020B0400000000000000" pitchFamily="50" charset="-128"/>
+                        <a:ea typeface="游ゴシック" panose="020B0400000000000000" pitchFamily="50" charset="-128"/>
+                      </a:endParaRPr>
+                    </a:p>
+                  </a:txBody>
+                  <a:tcPr marL="9525" marR="9525" marT="9525" marB="0" anchor="ctr">
+                    <a:lnL w="12700" cap="flat" cmpd="sng" algn="ctr">
+                      <a:solidFill>
+                        <a:schemeClr val="tx1"/>
+                      </a:solidFill>
+                      <a:prstDash val="solid"/>
+                      <a:round/>
+                      <a:headEnd type="none" w="med" len="med"/>
+                      <a:tailEnd type="none" w="med" len="med"/>
+                    </a:lnL>
+                    <a:lnR w="12700" cap="flat" cmpd="sng" algn="ctr">
+                      <a:solidFill>
+                        <a:schemeClr val="tx1"/>
+                      </a:solidFill>
+                      <a:prstDash val="solid"/>
+                      <a:round/>
+                      <a:headEnd type="none" w="med" len="med"/>
+                      <a:tailEnd type="none" w="med" len="med"/>
+                    </a:lnR>
+                    <a:lnT w="12700" cap="flat" cmpd="sng" algn="ctr">
+                      <a:solidFill>
+                        <a:schemeClr val="tx1"/>
+                      </a:solidFill>
+                      <a:prstDash val="solid"/>
+                      <a:round/>
+                      <a:headEnd type="none" w="med" len="med"/>
+                      <a:tailEnd type="none" w="med" len="med"/>
+                    </a:lnT>
+                    <a:lnB w="12700" cap="flat" cmpd="sng" algn="ctr">
+                      <a:solidFill>
+                        <a:schemeClr val="tx1"/>
+                      </a:solidFill>
+                      <a:prstDash val="solid"/>
+                      <a:round/>
+                      <a:headEnd type="none" w="med" len="med"/>
+                      <a:tailEnd type="none" w="med" len="med"/>
+                    </a:lnB>
+                    <a:solidFill>
+                      <a:schemeClr val="bg1"/>
+                    </a:solidFill>
+                  </a:tcPr>
+                </a:tc>
+                <a:tc>
+                  <a:txBody>
+                    <a:bodyPr/>
+                    <a:lstStyle/>
+                    <a:p>
+                      <a:pPr algn="l" fontAlgn="ctr">
+                        <a:buNone/>
+                      </a:pPr>
+                      <a:r>
+                        <a:rPr lang="ja-JP" altLang="en-US" sz="2800" u="none" strike="noStrike" dirty="0">
+                          <a:effectLst/>
+                        </a:rPr>
+                        <a:t> 教師付き学習</a:t>
+                      </a:r>
+                      <a:endParaRPr lang="ja-JP" altLang="en-US" sz="2800" b="0" i="0" u="none" strike="noStrike" dirty="0">
+                        <a:solidFill>
+                          <a:srgbClr val="000000"/>
+                        </a:solidFill>
+                        <a:effectLst/>
+                        <a:latin typeface="游ゴシック" panose="020B0400000000000000" pitchFamily="50" charset="-128"/>
+                        <a:ea typeface="游ゴシック" panose="020B0400000000000000" pitchFamily="50" charset="-128"/>
+                      </a:endParaRPr>
+                    </a:p>
+                  </a:txBody>
+                  <a:tcPr marL="9525" marR="9525" marT="9525" marB="0" anchor="ctr">
+                    <a:lnL w="12700" cap="flat" cmpd="sng" algn="ctr">
+                      <a:solidFill>
+                        <a:schemeClr val="tx1"/>
+                      </a:solidFill>
+                      <a:prstDash val="solid"/>
+                      <a:round/>
+                      <a:headEnd type="none" w="med" len="med"/>
+                      <a:tailEnd type="none" w="med" len="med"/>
+                    </a:lnL>
+                    <a:lnR w="12700" cap="flat" cmpd="sng" algn="ctr">
+                      <a:solidFill>
+                        <a:schemeClr val="tx1"/>
+                      </a:solidFill>
+                      <a:prstDash val="solid"/>
+                      <a:round/>
+                      <a:headEnd type="none" w="med" len="med"/>
+                      <a:tailEnd type="none" w="med" len="med"/>
+                    </a:lnR>
+                    <a:lnT w="12700" cap="flat" cmpd="sng" algn="ctr">
+                      <a:solidFill>
+                        <a:schemeClr val="tx1"/>
+                      </a:solidFill>
+                      <a:prstDash val="solid"/>
+                      <a:round/>
+                      <a:headEnd type="none" w="med" len="med"/>
+                      <a:tailEnd type="none" w="med" len="med"/>
+                    </a:lnT>
+                    <a:lnB w="12700" cap="flat" cmpd="sng" algn="ctr">
+                      <a:solidFill>
+                        <a:schemeClr val="tx1"/>
+                      </a:solidFill>
+                      <a:prstDash val="solid"/>
+                      <a:round/>
+                      <a:headEnd type="none" w="med" len="med"/>
+                      <a:tailEnd type="none" w="med" len="med"/>
+                    </a:lnB>
+                    <a:solidFill>
+                      <a:schemeClr val="bg1"/>
+                    </a:solidFill>
+                  </a:tcPr>
+                </a:tc>
+                <a:tc>
+                  <a:txBody>
+                    <a:bodyPr/>
+                    <a:lstStyle/>
+                    <a:p>
+                      <a:pPr algn="l" fontAlgn="ctr">
+                        <a:buNone/>
+                      </a:pPr>
+                      <a:r>
+                        <a:rPr lang="en-US" sz="2800" u="none" strike="noStrike" dirty="0">
+                          <a:effectLst/>
+                        </a:rPr>
+                        <a:t> </a:t>
+                      </a:r>
+                      <a:r>
+                        <a:rPr lang="en-US" sz="2800" u="none" strike="noStrike" dirty="0" err="1">
+                          <a:effectLst/>
+                        </a:rPr>
+                        <a:t>LightGBM</a:t>
+                      </a:r>
+                      <a:endParaRPr lang="en-US" sz="2800" u="none" strike="noStrike" dirty="0">
+                        <a:effectLst/>
+                      </a:endParaRPr>
+                    </a:p>
+                    <a:p>
+                      <a:pPr algn="l" fontAlgn="ctr">
+                        <a:buNone/>
+                      </a:pPr>
+                      <a:r>
+                        <a:rPr lang="en-US" sz="2800" u="none" strike="noStrike" dirty="0">
+                          <a:effectLst/>
+                        </a:rPr>
+                        <a:t>（LGBM）</a:t>
+                      </a:r>
+                      <a:endParaRPr lang="en-US" sz="2800" b="0" i="0" u="none" strike="noStrike" dirty="0">
+                        <a:solidFill>
+                          <a:srgbClr val="000000"/>
+                        </a:solidFill>
+                        <a:effectLst/>
+                        <a:latin typeface="游ゴシック" panose="020B0400000000000000" pitchFamily="50" charset="-128"/>
+                        <a:ea typeface="游ゴシック" panose="020B0400000000000000" pitchFamily="50" charset="-128"/>
+                      </a:endParaRPr>
+                    </a:p>
+                  </a:txBody>
+                  <a:tcPr marL="9525" marR="9525" marT="9525" marB="0" anchor="ctr">
+                    <a:lnL w="12700" cap="flat" cmpd="sng" algn="ctr">
+                      <a:solidFill>
+                        <a:schemeClr val="tx1"/>
+                      </a:solidFill>
+                      <a:prstDash val="solid"/>
+                      <a:round/>
+                      <a:headEnd type="none" w="med" len="med"/>
+                      <a:tailEnd type="none" w="med" len="med"/>
+                    </a:lnL>
+                    <a:lnR w="12700" cap="flat" cmpd="sng" algn="ctr">
+                      <a:solidFill>
+                        <a:schemeClr val="tx1"/>
+                      </a:solidFill>
+                      <a:prstDash val="solid"/>
+                      <a:round/>
+                      <a:headEnd type="none" w="med" len="med"/>
+                      <a:tailEnd type="none" w="med" len="med"/>
+                    </a:lnR>
+                    <a:lnT w="12700" cap="flat" cmpd="sng" algn="ctr">
+                      <a:solidFill>
+                        <a:schemeClr val="tx1"/>
+                      </a:solidFill>
+                      <a:prstDash val="solid"/>
+                      <a:round/>
+                      <a:headEnd type="none" w="med" len="med"/>
+                      <a:tailEnd type="none" w="med" len="med"/>
+                    </a:lnT>
+                    <a:lnB w="12700" cap="flat" cmpd="sng" algn="ctr">
+                      <a:solidFill>
+                        <a:schemeClr val="tx1"/>
+                      </a:solidFill>
+                      <a:prstDash val="solid"/>
+                      <a:round/>
+                      <a:headEnd type="none" w="med" len="med"/>
+                      <a:tailEnd type="none" w="med" len="med"/>
+                    </a:lnB>
+                    <a:solidFill>
+                      <a:schemeClr val="bg1"/>
+                    </a:solidFill>
+                  </a:tcPr>
+                </a:tc>
+                <a:extLst>
+                  <a:ext uri="{0D108BD9-81ED-4DB2-BD59-A6C34878D82A}">
+                    <a16:rowId xmlns:a16="http://schemas.microsoft.com/office/drawing/2014/main" val="2980872199"/>
+                  </a:ext>
+                </a:extLst>
+              </a:tr>
+              <a:tr h="1083566">
+                <a:tc>
+                  <a:txBody>
+                    <a:bodyPr/>
+                    <a:lstStyle/>
+                    <a:p>
+                      <a:pPr algn="l" fontAlgn="ctr">
+                        <a:buNone/>
+                      </a:pPr>
+                      <a:r>
+                        <a:rPr lang="ja-JP" altLang="en-US" sz="2800" u="none" strike="noStrike" dirty="0">
+                          <a:effectLst/>
+                        </a:rPr>
+                        <a:t>詳細</a:t>
+                      </a:r>
+                      <a:endParaRPr lang="ja-JP" altLang="en-US" sz="2800" b="0" i="0" u="none" strike="noStrike" dirty="0">
+                        <a:solidFill>
+                          <a:srgbClr val="000000"/>
+                        </a:solidFill>
+                        <a:effectLst/>
+                        <a:latin typeface="游ゴシック" panose="020B0400000000000000" pitchFamily="50" charset="-128"/>
+                        <a:ea typeface="游ゴシック" panose="020B0400000000000000" pitchFamily="50" charset="-128"/>
+                      </a:endParaRPr>
+                    </a:p>
+                  </a:txBody>
+                  <a:tcPr marL="9525" marR="9525" marT="9525" marB="0" anchor="ctr">
+                    <a:lnL w="12700" cap="flat" cmpd="sng" algn="ctr">
+                      <a:solidFill>
+                        <a:schemeClr val="tx1"/>
+                      </a:solidFill>
+                      <a:prstDash val="solid"/>
+                      <a:round/>
+                      <a:headEnd type="none" w="med" len="med"/>
+                      <a:tailEnd type="none" w="med" len="med"/>
+                    </a:lnL>
+                    <a:lnR w="12700" cap="flat" cmpd="sng" algn="ctr">
+                      <a:solidFill>
+                        <a:schemeClr val="tx1"/>
+                      </a:solidFill>
+                      <a:prstDash val="solid"/>
+                      <a:round/>
+                      <a:headEnd type="none" w="med" len="med"/>
+                      <a:tailEnd type="none" w="med" len="med"/>
+                    </a:lnR>
+                    <a:lnT w="12700" cap="flat" cmpd="sng" algn="ctr">
+                      <a:solidFill>
+                        <a:schemeClr val="tx1"/>
+                      </a:solidFill>
+                      <a:prstDash val="solid"/>
+                      <a:round/>
+                      <a:headEnd type="none" w="med" len="med"/>
+                      <a:tailEnd type="none" w="med" len="med"/>
+                    </a:lnT>
+                    <a:lnB w="12700" cap="flat" cmpd="sng" algn="ctr">
+                      <a:solidFill>
+                        <a:schemeClr val="tx1"/>
+                      </a:solidFill>
+                      <a:prstDash val="solid"/>
+                      <a:round/>
+                      <a:headEnd type="none" w="med" len="med"/>
+                      <a:tailEnd type="none" w="med" len="med"/>
+                    </a:lnB>
+                    <a:solidFill>
+                      <a:schemeClr val="bg1"/>
+                    </a:solidFill>
+                  </a:tcPr>
+                </a:tc>
+                <a:tc>
+                  <a:txBody>
+                    <a:bodyPr/>
+                    <a:lstStyle/>
+                    <a:p>
+                      <a:pPr algn="l" fontAlgn="ctr">
+                        <a:buNone/>
+                      </a:pPr>
+                      <a:r>
+                        <a:rPr lang="ja-JP" altLang="en-US" sz="2800" u="none" strike="noStrike" dirty="0">
+                          <a:effectLst/>
+                        </a:rPr>
+                        <a:t> 正解ラベル付き</a:t>
+                      </a:r>
+                      <a:endParaRPr lang="en-US" altLang="ja-JP" sz="2800" u="none" strike="noStrike" dirty="0">
+                        <a:effectLst/>
+                      </a:endParaRPr>
+                    </a:p>
+                    <a:p>
+                      <a:pPr algn="l" fontAlgn="ctr">
+                        <a:buNone/>
+                      </a:pPr>
+                      <a:r>
+                        <a:rPr lang="ja-JP" altLang="en-US" sz="2800" u="none" strike="noStrike" dirty="0">
+                          <a:effectLst/>
+                        </a:rPr>
+                        <a:t> データを使い学習する方法</a:t>
+                      </a:r>
+                      <a:endParaRPr lang="ja-JP" altLang="en-US" sz="2800" b="0" i="0" u="none" strike="noStrike" dirty="0">
+                        <a:solidFill>
+                          <a:srgbClr val="000000"/>
+                        </a:solidFill>
+                        <a:effectLst/>
+                        <a:latin typeface="游ゴシック" panose="020B0400000000000000" pitchFamily="50" charset="-128"/>
+                        <a:ea typeface="游ゴシック" panose="020B0400000000000000" pitchFamily="50" charset="-128"/>
+                      </a:endParaRPr>
+                    </a:p>
+                  </a:txBody>
+                  <a:tcPr marL="9525" marR="9525" marT="9525" marB="0" anchor="ctr">
+                    <a:lnL w="12700" cap="flat" cmpd="sng" algn="ctr">
+                      <a:solidFill>
+                        <a:schemeClr val="tx1"/>
+                      </a:solidFill>
+                      <a:prstDash val="solid"/>
+                      <a:round/>
+                      <a:headEnd type="none" w="med" len="med"/>
+                      <a:tailEnd type="none" w="med" len="med"/>
+                    </a:lnL>
+                    <a:lnR w="12700" cap="flat" cmpd="sng" algn="ctr">
+                      <a:solidFill>
+                        <a:schemeClr val="tx1"/>
+                      </a:solidFill>
+                      <a:prstDash val="solid"/>
+                      <a:round/>
+                      <a:headEnd type="none" w="med" len="med"/>
+                      <a:tailEnd type="none" w="med" len="med"/>
+                    </a:lnR>
+                    <a:lnT w="12700" cap="flat" cmpd="sng" algn="ctr">
+                      <a:solidFill>
+                        <a:schemeClr val="tx1"/>
+                      </a:solidFill>
+                      <a:prstDash val="solid"/>
+                      <a:round/>
+                      <a:headEnd type="none" w="med" len="med"/>
+                      <a:tailEnd type="none" w="med" len="med"/>
+                    </a:lnT>
+                    <a:lnB w="12700" cap="flat" cmpd="sng" algn="ctr">
+                      <a:solidFill>
+                        <a:schemeClr val="tx1"/>
+                      </a:solidFill>
+                      <a:prstDash val="solid"/>
+                      <a:round/>
+                      <a:headEnd type="none" w="med" len="med"/>
+                      <a:tailEnd type="none" w="med" len="med"/>
+                    </a:lnB>
+                    <a:solidFill>
+                      <a:schemeClr val="bg1"/>
+                    </a:solidFill>
+                  </a:tcPr>
+                </a:tc>
+                <a:tc>
+                  <a:txBody>
+                    <a:bodyPr/>
+                    <a:lstStyle/>
+                    <a:p>
+                      <a:pPr algn="l" fontAlgn="ctr">
+                        <a:buNone/>
+                      </a:pPr>
+                      <a:r>
+                        <a:rPr lang="ja-JP" altLang="en-US" sz="2800" u="none" strike="noStrike" dirty="0">
+                          <a:effectLst/>
+                        </a:rPr>
+                        <a:t> 決定木アンサンブル</a:t>
+                      </a:r>
+                      <a:endParaRPr lang="ja-JP" altLang="en-US" sz="2800" b="0" i="0" u="none" strike="noStrike" dirty="0">
+                        <a:solidFill>
+                          <a:srgbClr val="000000"/>
+                        </a:solidFill>
+                        <a:effectLst/>
+                        <a:latin typeface="游ゴシック" panose="020B0400000000000000" pitchFamily="50" charset="-128"/>
+                        <a:ea typeface="游ゴシック" panose="020B0400000000000000" pitchFamily="50" charset="-128"/>
+                      </a:endParaRPr>
+                    </a:p>
+                  </a:txBody>
+                  <a:tcPr marL="9525" marR="9525" marT="9525" marB="0" anchor="ctr">
+                    <a:lnL w="12700" cap="flat" cmpd="sng" algn="ctr">
+                      <a:solidFill>
+                        <a:schemeClr val="tx1"/>
+                      </a:solidFill>
+                      <a:prstDash val="solid"/>
+                      <a:round/>
+                      <a:headEnd type="none" w="med" len="med"/>
+                      <a:tailEnd type="none" w="med" len="med"/>
+                    </a:lnL>
+                    <a:lnR w="12700" cap="flat" cmpd="sng" algn="ctr">
+                      <a:solidFill>
+                        <a:schemeClr val="tx1"/>
+                      </a:solidFill>
+                      <a:prstDash val="solid"/>
+                      <a:round/>
+                      <a:headEnd type="none" w="med" len="med"/>
+                      <a:tailEnd type="none" w="med" len="med"/>
+                    </a:lnR>
+                    <a:lnT w="12700" cap="flat" cmpd="sng" algn="ctr">
+                      <a:solidFill>
+                        <a:schemeClr val="tx1"/>
+                      </a:solidFill>
+                      <a:prstDash val="solid"/>
+                      <a:round/>
+                      <a:headEnd type="none" w="med" len="med"/>
+                      <a:tailEnd type="none" w="med" len="med"/>
+                    </a:lnT>
+                    <a:lnB w="12700" cap="flat" cmpd="sng" algn="ctr">
+                      <a:solidFill>
+                        <a:schemeClr val="tx1"/>
+                      </a:solidFill>
+                      <a:prstDash val="solid"/>
+                      <a:round/>
+                      <a:headEnd type="none" w="med" len="med"/>
+                      <a:tailEnd type="none" w="med" len="med"/>
+                    </a:lnB>
+                    <a:solidFill>
+                      <a:schemeClr val="bg1"/>
+                    </a:solidFill>
+                  </a:tcPr>
+                </a:tc>
+                <a:extLst>
+                  <a:ext uri="{0D108BD9-81ED-4DB2-BD59-A6C34878D82A}">
+                    <a16:rowId xmlns:a16="http://schemas.microsoft.com/office/drawing/2014/main" val="1056017188"/>
+                  </a:ext>
+                </a:extLst>
+              </a:tr>
+              <a:tr h="1170251">
+                <a:tc>
+                  <a:txBody>
+                    <a:bodyPr/>
+                    <a:lstStyle/>
+                    <a:p>
+                      <a:pPr algn="l" fontAlgn="ctr">
+                        <a:buNone/>
+                      </a:pPr>
+                      <a:r>
+                        <a:rPr lang="ja-JP" altLang="en-US" sz="2800" b="0" i="0" u="none" strike="noStrike" dirty="0">
+                          <a:solidFill>
+                            <a:srgbClr val="000000"/>
+                          </a:solidFill>
+                          <a:effectLst/>
+                          <a:latin typeface="游ゴシック" panose="020B0400000000000000" pitchFamily="50" charset="-128"/>
+                          <a:ea typeface="游ゴシック" panose="020B0400000000000000" pitchFamily="50" charset="-128"/>
+                        </a:rPr>
+                        <a:t>行った操作</a:t>
+                      </a:r>
+                    </a:p>
+                  </a:txBody>
+                  <a:tcPr marL="9525" marR="9525" marT="9525" marB="0" anchor="ctr">
+                    <a:lnL w="12700" cap="flat" cmpd="sng" algn="ctr">
+                      <a:solidFill>
+                        <a:schemeClr val="tx1"/>
+                      </a:solidFill>
+                      <a:prstDash val="solid"/>
+                      <a:round/>
+                      <a:headEnd type="none" w="med" len="med"/>
+                      <a:tailEnd type="none" w="med" len="med"/>
+                    </a:lnL>
+                    <a:lnR w="12700" cap="flat" cmpd="sng" algn="ctr">
+                      <a:solidFill>
+                        <a:schemeClr val="tx1"/>
+                      </a:solidFill>
+                      <a:prstDash val="solid"/>
+                      <a:round/>
+                      <a:headEnd type="none" w="med" len="med"/>
+                      <a:tailEnd type="none" w="med" len="med"/>
+                    </a:lnR>
+                    <a:lnT w="12700" cap="flat" cmpd="sng" algn="ctr">
+                      <a:solidFill>
+                        <a:schemeClr val="tx1"/>
+                      </a:solidFill>
+                      <a:prstDash val="solid"/>
+                      <a:round/>
+                      <a:headEnd type="none" w="med" len="med"/>
+                      <a:tailEnd type="none" w="med" len="med"/>
+                    </a:lnT>
+                    <a:lnB w="12700" cap="flat" cmpd="sng" algn="ctr">
+                      <a:solidFill>
+                        <a:schemeClr val="tx1"/>
+                      </a:solidFill>
+                      <a:prstDash val="solid"/>
+                      <a:round/>
+                      <a:headEnd type="none" w="med" len="med"/>
+                      <a:tailEnd type="none" w="med" len="med"/>
+                    </a:lnB>
+                    <a:solidFill>
+                      <a:schemeClr val="bg1"/>
+                    </a:solidFill>
+                  </a:tcPr>
+                </a:tc>
+                <a:tc>
+                  <a:txBody>
+                    <a:bodyPr/>
+                    <a:lstStyle/>
+                    <a:p>
+                      <a:pPr algn="l" fontAlgn="ctr">
+                        <a:buNone/>
+                      </a:pPr>
+                      <a:r>
+                        <a:rPr lang="ja-JP" altLang="en-US" sz="2800" u="none" strike="noStrike" dirty="0">
+                          <a:effectLst/>
+                        </a:rPr>
+                        <a:t> 曲に</a:t>
+                      </a:r>
+                      <a:endParaRPr lang="en-US" altLang="ja-JP" sz="2800" u="none" strike="noStrike" dirty="0">
+                        <a:effectLst/>
+                      </a:endParaRPr>
+                    </a:p>
+                    <a:p>
+                      <a:pPr algn="l" fontAlgn="ctr">
+                        <a:buNone/>
+                      </a:pPr>
+                      <a:r>
+                        <a:rPr lang="en-US" sz="2800" u="none" strike="noStrike" dirty="0">
+                          <a:effectLst/>
+                        </a:rPr>
+                        <a:t> Sad / fear / anxiety /trust </a:t>
+                      </a:r>
+                      <a:r>
+                        <a:rPr lang="ja-JP" altLang="en-US" sz="2800" u="none" strike="noStrike" dirty="0">
+                          <a:effectLst/>
+                        </a:rPr>
+                        <a:t>の感情ラベルを</a:t>
+                      </a:r>
+                      <a:endParaRPr lang="en-US" altLang="ja-JP" sz="2800" u="none" strike="noStrike" dirty="0">
+                        <a:effectLst/>
+                      </a:endParaRPr>
+                    </a:p>
+                    <a:p>
+                      <a:pPr algn="l" fontAlgn="ctr">
+                        <a:buNone/>
+                      </a:pPr>
+                      <a:r>
+                        <a:rPr lang="ja-JP" altLang="en-US" sz="2800" u="none" strike="noStrike" dirty="0">
+                          <a:effectLst/>
+                        </a:rPr>
+                        <a:t> 一つ一つ付ける</a:t>
+                      </a:r>
+                      <a:endParaRPr lang="ja-JP" altLang="en-US" sz="2800" b="0" i="0" u="none" strike="noStrike" dirty="0">
+                        <a:solidFill>
+                          <a:srgbClr val="000000"/>
+                        </a:solidFill>
+                        <a:effectLst/>
+                        <a:latin typeface="游ゴシック" panose="020B0400000000000000" pitchFamily="50" charset="-128"/>
+                        <a:ea typeface="游ゴシック" panose="020B0400000000000000" pitchFamily="50" charset="-128"/>
+                      </a:endParaRPr>
+                    </a:p>
+                  </a:txBody>
+                  <a:tcPr marL="9525" marR="9525" marT="9525" marB="0" anchor="ctr">
+                    <a:lnL w="12700" cap="flat" cmpd="sng" algn="ctr">
+                      <a:solidFill>
+                        <a:schemeClr val="tx1"/>
+                      </a:solidFill>
+                      <a:prstDash val="solid"/>
+                      <a:round/>
+                      <a:headEnd type="none" w="med" len="med"/>
+                      <a:tailEnd type="none" w="med" len="med"/>
+                    </a:lnL>
+                    <a:lnR w="12700" cap="flat" cmpd="sng" algn="ctr">
+                      <a:solidFill>
+                        <a:schemeClr val="tx1"/>
+                      </a:solidFill>
+                      <a:prstDash val="solid"/>
+                      <a:round/>
+                      <a:headEnd type="none" w="med" len="med"/>
+                      <a:tailEnd type="none" w="med" len="med"/>
+                    </a:lnR>
+                    <a:lnT w="12700" cap="flat" cmpd="sng" algn="ctr">
+                      <a:solidFill>
+                        <a:schemeClr val="tx1"/>
+                      </a:solidFill>
+                      <a:prstDash val="solid"/>
+                      <a:round/>
+                      <a:headEnd type="none" w="med" len="med"/>
+                      <a:tailEnd type="none" w="med" len="med"/>
+                    </a:lnT>
+                    <a:lnB w="12700" cap="flat" cmpd="sng" algn="ctr">
+                      <a:solidFill>
+                        <a:schemeClr val="tx1"/>
+                      </a:solidFill>
+                      <a:prstDash val="solid"/>
+                      <a:round/>
+                      <a:headEnd type="none" w="med" len="med"/>
+                      <a:tailEnd type="none" w="med" len="med"/>
+                    </a:lnB>
+                    <a:solidFill>
+                      <a:schemeClr val="bg1"/>
+                    </a:solidFill>
+                  </a:tcPr>
+                </a:tc>
+                <a:tc>
+                  <a:txBody>
+                    <a:bodyPr/>
+                    <a:lstStyle/>
+                    <a:p>
+                      <a:pPr algn="l" fontAlgn="ctr">
+                        <a:buNone/>
+                      </a:pPr>
+                      <a:r>
+                        <a:rPr lang="ja-JP" altLang="en-US" sz="2800" u="none" strike="noStrike" dirty="0">
+                          <a:effectLst/>
+                        </a:rPr>
+                        <a:t> 特徴量を数値での</a:t>
+                      </a:r>
+                      <a:endParaRPr lang="en-US" altLang="ja-JP" sz="2800" u="none" strike="noStrike" dirty="0">
+                        <a:effectLst/>
+                      </a:endParaRPr>
+                    </a:p>
+                    <a:p>
+                      <a:pPr algn="l" fontAlgn="ctr">
+                        <a:buNone/>
+                      </a:pPr>
+                      <a:r>
+                        <a:rPr lang="en-US" altLang="ja-JP" sz="2800" u="none" strike="noStrike" dirty="0">
+                          <a:effectLst/>
+                        </a:rPr>
+                        <a:t> </a:t>
+                      </a:r>
+                      <a:r>
+                        <a:rPr lang="ja-JP" altLang="en-US" sz="2800" u="none" strike="noStrike" dirty="0">
+                          <a:effectLst/>
+                        </a:rPr>
+                        <a:t>多寡による分岐で判別させ</a:t>
+                      </a:r>
+                      <a:endParaRPr lang="en-US" altLang="ja-JP" sz="2800" u="none" strike="noStrike" dirty="0">
+                        <a:effectLst/>
+                      </a:endParaRPr>
+                    </a:p>
+                    <a:p>
+                      <a:pPr algn="l" fontAlgn="ctr">
+                        <a:buNone/>
+                      </a:pPr>
+                      <a:r>
+                        <a:rPr lang="en-US" altLang="ja-JP" sz="2800" u="none" strike="noStrike" dirty="0">
+                          <a:effectLst/>
+                        </a:rPr>
+                        <a:t> </a:t>
+                      </a:r>
+                      <a:r>
+                        <a:rPr lang="ja-JP" altLang="en-US" sz="2800" u="none" strike="noStrike" dirty="0">
+                          <a:effectLst/>
+                        </a:rPr>
+                        <a:t>これを繰り返しモデルを生成。</a:t>
+                      </a:r>
+                      <a:endParaRPr lang="ja-JP" altLang="en-US" sz="2800" b="0" i="0" u="none" strike="noStrike" dirty="0">
+                        <a:solidFill>
+                          <a:srgbClr val="000000"/>
+                        </a:solidFill>
+                        <a:effectLst/>
+                        <a:latin typeface="游ゴシック" panose="020B0400000000000000" pitchFamily="50" charset="-128"/>
+                        <a:ea typeface="游ゴシック" panose="020B0400000000000000" pitchFamily="50" charset="-128"/>
+                      </a:endParaRPr>
+                    </a:p>
+                  </a:txBody>
+                  <a:tcPr marL="9525" marR="9525" marT="9525" marB="0" anchor="ctr">
+                    <a:lnL w="12700" cap="flat" cmpd="sng" algn="ctr">
+                      <a:solidFill>
+                        <a:schemeClr val="tx1"/>
+                      </a:solidFill>
+                      <a:prstDash val="solid"/>
+                      <a:round/>
+                      <a:headEnd type="none" w="med" len="med"/>
+                      <a:tailEnd type="none" w="med" len="med"/>
+                    </a:lnL>
+                    <a:lnR w="12700" cap="flat" cmpd="sng" algn="ctr">
+                      <a:solidFill>
+                        <a:schemeClr val="tx1"/>
+                      </a:solidFill>
+                      <a:prstDash val="solid"/>
+                      <a:round/>
+                      <a:headEnd type="none" w="med" len="med"/>
+                      <a:tailEnd type="none" w="med" len="med"/>
+                    </a:lnR>
+                    <a:lnT w="12700" cap="flat" cmpd="sng" algn="ctr">
+                      <a:solidFill>
+                        <a:schemeClr val="tx1"/>
+                      </a:solidFill>
+                      <a:prstDash val="solid"/>
+                      <a:round/>
+                      <a:headEnd type="none" w="med" len="med"/>
+                      <a:tailEnd type="none" w="med" len="med"/>
+                    </a:lnT>
+                    <a:lnB w="12700" cap="flat" cmpd="sng" algn="ctr">
+                      <a:solidFill>
+                        <a:schemeClr val="tx1"/>
+                      </a:solidFill>
+                      <a:prstDash val="solid"/>
+                      <a:round/>
+                      <a:headEnd type="none" w="med" len="med"/>
+                      <a:tailEnd type="none" w="med" len="med"/>
+                    </a:lnB>
+                    <a:solidFill>
+                      <a:schemeClr val="bg1"/>
+                    </a:solidFill>
+                  </a:tcPr>
+                </a:tc>
+                <a:extLst>
+                  <a:ext uri="{0D108BD9-81ED-4DB2-BD59-A6C34878D82A}">
+                    <a16:rowId xmlns:a16="http://schemas.microsoft.com/office/drawing/2014/main" val="1420370465"/>
+                  </a:ext>
+                </a:extLst>
+              </a:tr>
+            </a:tbl>
+          </a:graphicData>
+        </a:graphic>
+      </p:graphicFrame>
+    </p:spTree>
+    <p:extLst>
+      <p:ext uri="{BB962C8B-B14F-4D97-AF65-F5344CB8AC3E}">
+        <p14:creationId xmlns:p14="http://schemas.microsoft.com/office/powerpoint/2010/main" val="444966089"/>
       </p:ext>
     </p:extLst>
   </p:cSld>
@@ -8063,7 +14263,7 @@
         <p:cNvPr id="1" name="">
           <a:extLst>
             <a:ext uri="{FF2B5EF4-FFF2-40B4-BE49-F238E27FC236}">
-              <a16:creationId xmlns:a16="http://schemas.microsoft.com/office/drawing/2014/main" id="{DC26CFA2-05F5-EDF7-03EF-D784C54F9DA7}"/>
+              <a16:creationId xmlns:a16="http://schemas.microsoft.com/office/drawing/2014/main" id="{1F59FF1C-6319-7935-25D8-F25584F8883B}"/>
             </a:ext>
           </a:extLst>
         </p:cNvPr>
@@ -8083,7 +14283,7 @@
           <p:cNvPr id="2" name="タイトル 1">
             <a:extLst>
               <a:ext uri="{FF2B5EF4-FFF2-40B4-BE49-F238E27FC236}">
-                <a16:creationId xmlns:a16="http://schemas.microsoft.com/office/drawing/2014/main" id="{F9525B7C-76D2-FB88-417B-800751D7E1E8}"/>
+                <a16:creationId xmlns:a16="http://schemas.microsoft.com/office/drawing/2014/main" id="{C4A0EB03-794D-8554-3B6C-B920C40EA91A}"/>
               </a:ext>
             </a:extLst>
           </p:cNvPr>
@@ -8096,7 +14296,7 @@
         </p:nvSpPr>
         <p:spPr>
           <a:xfrm>
-            <a:off x="1285240" y="1050595"/>
+            <a:off x="1363617" y="571624"/>
             <a:ext cx="8074815" cy="1618489"/>
           </a:xfrm>
         </p:spPr>
@@ -8109,47 +14309,1215 @@
             <a:pPr algn="ctr"/>
             <a:r>
               <a:rPr kumimoji="1" lang="ja-JP" altLang="en-US" sz="6000" dirty="0"/>
-              <a:t>制作スケジュール</a:t>
+              <a:t>学習手法について</a:t>
             </a:r>
           </a:p>
         </p:txBody>
       </p:sp>
-      <p:sp>
-        <p:nvSpPr>
-          <p:cNvPr id="3" name="コンテンツ プレースホルダー 2">
+      <p:graphicFrame>
+        <p:nvGraphicFramePr>
+          <p:cNvPr id="3" name="表 2">
             <a:extLst>
               <a:ext uri="{FF2B5EF4-FFF2-40B4-BE49-F238E27FC236}">
-                <a16:creationId xmlns:a16="http://schemas.microsoft.com/office/drawing/2014/main" id="{DACB8269-9D23-4B30-8CEF-98A1E7A45C92}"/>
+                <a16:creationId xmlns:a16="http://schemas.microsoft.com/office/drawing/2014/main" id="{20E5A656-C70C-EA84-7A13-3F566B384D4F}"/>
               </a:ext>
             </a:extLst>
           </p:cNvPr>
-          <p:cNvSpPr>
-            <a:spLocks noGrp="1"/>
-          </p:cNvSpPr>
+          <p:cNvGraphicFramePr>
+            <a:graphicFrameLocks noGrp="1"/>
+          </p:cNvGraphicFramePr>
           <p:nvPr>
-            <p:ph idx="1"/>
+            <p:extLst>
+              <p:ext uri="{D42A27DB-BD31-4B8C-83A1-F6EECF244321}">
+                <p14:modId xmlns:p14="http://schemas.microsoft.com/office/powerpoint/2010/main" val="1140685113"/>
+              </p:ext>
+            </p:extLst>
           </p:nvPr>
-        </p:nvSpPr>
-        <p:spPr>
-          <a:xfrm>
-            <a:off x="1285240" y="2969469"/>
-            <a:ext cx="8074815" cy="2800395"/>
-          </a:xfrm>
-        </p:spPr>
-        <p:txBody>
-          <a:bodyPr anchor="t">
-            <a:normAutofit/>
-          </a:bodyPr>
-          <a:lstStyle/>
-          <a:p>
-            <a:endParaRPr kumimoji="1" lang="ja-JP" altLang="en-US" sz="2400" dirty="0"/>
-          </a:p>
-        </p:txBody>
-      </p:sp>
+        </p:nvGraphicFramePr>
+        <p:xfrm>
+          <a:off x="710474" y="2190112"/>
+          <a:ext cx="5269412" cy="4356609"/>
+        </p:xfrm>
+        <a:graphic>
+          <a:graphicData uri="http://schemas.openxmlformats.org/drawingml/2006/table">
+            <a:tbl>
+              <a:tblPr>
+                <a:tableStyleId>{5C22544A-7EE6-4342-B048-85BDC9FD1C3A}</a:tableStyleId>
+              </a:tblPr>
+              <a:tblGrid>
+                <a:gridCol w="5269412">
+                  <a:extLst>
+                    <a:ext uri="{9D8B030D-6E8A-4147-A177-3AD203B41FA5}">
+                      <a16:colId xmlns:a16="http://schemas.microsoft.com/office/drawing/2014/main" val="159393942"/>
+                    </a:ext>
+                  </a:extLst>
+                </a:gridCol>
+              </a:tblGrid>
+              <a:tr h="1276148">
+                <a:tc>
+                  <a:txBody>
+                    <a:bodyPr/>
+                    <a:lstStyle/>
+                    <a:p>
+                      <a:pPr algn="ctr" fontAlgn="ctr">
+                        <a:buNone/>
+                      </a:pPr>
+                      <a:r>
+                        <a:rPr lang="ja-JP" altLang="en-US" sz="3600" u="none" strike="noStrike" dirty="0">
+                          <a:effectLst/>
+                        </a:rPr>
+                        <a:t>教師付き学習とは？</a:t>
+                      </a:r>
+                      <a:endParaRPr lang="ja-JP" altLang="en-US" sz="3600" b="0" i="0" u="none" strike="noStrike" dirty="0">
+                        <a:solidFill>
+                          <a:srgbClr val="000000"/>
+                        </a:solidFill>
+                        <a:effectLst/>
+                        <a:latin typeface="游ゴシック" panose="020B0400000000000000" pitchFamily="50" charset="-128"/>
+                        <a:ea typeface="游ゴシック" panose="020B0400000000000000" pitchFamily="50" charset="-128"/>
+                      </a:endParaRPr>
+                    </a:p>
+                  </a:txBody>
+                  <a:tcPr marL="9525" marR="9525" marT="9525" marB="0" anchor="ctr">
+                    <a:lnL w="12700" cap="flat" cmpd="sng" algn="ctr">
+                      <a:solidFill>
+                        <a:schemeClr val="tx1"/>
+                      </a:solidFill>
+                      <a:prstDash val="solid"/>
+                      <a:round/>
+                      <a:headEnd type="none" w="med" len="med"/>
+                      <a:tailEnd type="none" w="med" len="med"/>
+                    </a:lnL>
+                    <a:lnR w="12700" cap="flat" cmpd="sng" algn="ctr">
+                      <a:solidFill>
+                        <a:schemeClr val="tx1"/>
+                      </a:solidFill>
+                      <a:prstDash val="solid"/>
+                      <a:round/>
+                      <a:headEnd type="none" w="med" len="med"/>
+                      <a:tailEnd type="none" w="med" len="med"/>
+                    </a:lnR>
+                    <a:lnT w="12700" cap="flat" cmpd="sng" algn="ctr">
+                      <a:solidFill>
+                        <a:schemeClr val="tx1"/>
+                      </a:solidFill>
+                      <a:prstDash val="solid"/>
+                      <a:round/>
+                      <a:headEnd type="none" w="med" len="med"/>
+                      <a:tailEnd type="none" w="med" len="med"/>
+                    </a:lnT>
+                    <a:lnB w="12700" cap="flat" cmpd="sng" algn="ctr">
+                      <a:solidFill>
+                        <a:schemeClr val="tx1"/>
+                      </a:solidFill>
+                      <a:prstDash val="solid"/>
+                      <a:round/>
+                      <a:headEnd type="none" w="med" len="med"/>
+                      <a:tailEnd type="none" w="med" len="med"/>
+                    </a:lnB>
+                    <a:lnTlToBr w="12700" cmpd="sng">
+                      <a:noFill/>
+                      <a:prstDash val="solid"/>
+                    </a:lnTlToBr>
+                    <a:lnBlToTr w="12700" cmpd="sng">
+                      <a:noFill/>
+                      <a:prstDash val="solid"/>
+                    </a:lnBlToTr>
+                    <a:noFill/>
+                  </a:tcPr>
+                </a:tc>
+                <a:extLst>
+                  <a:ext uri="{0D108BD9-81ED-4DB2-BD59-A6C34878D82A}">
+                    <a16:rowId xmlns:a16="http://schemas.microsoft.com/office/drawing/2014/main" val="2980872199"/>
+                  </a:ext>
+                </a:extLst>
+              </a:tr>
+              <a:tr h="862186">
+                <a:tc>
+                  <a:txBody>
+                    <a:bodyPr/>
+                    <a:lstStyle/>
+                    <a:p>
+                      <a:pPr algn="l" fontAlgn="ctr">
+                        <a:buNone/>
+                      </a:pPr>
+                      <a:r>
+                        <a:rPr lang="ja-JP" altLang="en-US" sz="2800" dirty="0"/>
+                        <a:t> 入力と正解をセットで</a:t>
+                      </a:r>
+                      <a:endParaRPr lang="en-US" altLang="ja-JP" sz="2800" dirty="0"/>
+                    </a:p>
+                    <a:p>
+                      <a:pPr algn="l" fontAlgn="ctr">
+                        <a:buNone/>
+                      </a:pPr>
+                      <a:r>
+                        <a:rPr lang="ja-JP" altLang="en-US" sz="2800" dirty="0"/>
+                        <a:t> 学習する方法</a:t>
+                      </a:r>
+                      <a:endParaRPr lang="ja-JP" altLang="en-US" sz="2800" b="0" i="0" u="none" strike="noStrike" dirty="0">
+                        <a:solidFill>
+                          <a:srgbClr val="000000"/>
+                        </a:solidFill>
+                        <a:effectLst/>
+                        <a:latin typeface="游ゴシック" panose="020B0400000000000000" pitchFamily="50" charset="-128"/>
+                        <a:ea typeface="游ゴシック" panose="020B0400000000000000" pitchFamily="50" charset="-128"/>
+                      </a:endParaRPr>
+                    </a:p>
+                  </a:txBody>
+                  <a:tcPr marL="9525" marR="9525" marT="9525" marB="0" anchor="ctr">
+                    <a:lnL w="12700" cap="flat" cmpd="sng" algn="ctr">
+                      <a:solidFill>
+                        <a:schemeClr val="tx1"/>
+                      </a:solidFill>
+                      <a:prstDash val="solid"/>
+                      <a:round/>
+                      <a:headEnd type="none" w="med" len="med"/>
+                      <a:tailEnd type="none" w="med" len="med"/>
+                    </a:lnL>
+                    <a:lnR w="12700" cap="flat" cmpd="sng" algn="ctr">
+                      <a:solidFill>
+                        <a:schemeClr val="tx1"/>
+                      </a:solidFill>
+                      <a:prstDash val="solid"/>
+                      <a:round/>
+                      <a:headEnd type="none" w="med" len="med"/>
+                      <a:tailEnd type="none" w="med" len="med"/>
+                    </a:lnR>
+                    <a:lnT w="12700" cap="flat" cmpd="sng" algn="ctr">
+                      <a:solidFill>
+                        <a:schemeClr val="tx1"/>
+                      </a:solidFill>
+                      <a:prstDash val="solid"/>
+                      <a:round/>
+                      <a:headEnd type="none" w="med" len="med"/>
+                      <a:tailEnd type="none" w="med" len="med"/>
+                    </a:lnT>
+                    <a:lnB w="12700" cap="flat" cmpd="sng" algn="ctr">
+                      <a:solidFill>
+                        <a:schemeClr val="tx1"/>
+                      </a:solidFill>
+                      <a:prstDash val="solid"/>
+                      <a:round/>
+                      <a:headEnd type="none" w="med" len="med"/>
+                      <a:tailEnd type="none" w="med" len="med"/>
+                    </a:lnB>
+                    <a:lnTlToBr w="12700" cmpd="sng">
+                      <a:noFill/>
+                      <a:prstDash val="solid"/>
+                    </a:lnTlToBr>
+                    <a:lnBlToTr w="12700" cmpd="sng">
+                      <a:noFill/>
+                      <a:prstDash val="solid"/>
+                    </a:lnBlToTr>
+                    <a:noFill/>
+                  </a:tcPr>
+                </a:tc>
+                <a:extLst>
+                  <a:ext uri="{0D108BD9-81ED-4DB2-BD59-A6C34878D82A}">
+                    <a16:rowId xmlns:a16="http://schemas.microsoft.com/office/drawing/2014/main" val="1056017188"/>
+                  </a:ext>
+                </a:extLst>
+              </a:tr>
+              <a:tr h="984030">
+                <a:tc>
+                  <a:txBody>
+                    <a:bodyPr/>
+                    <a:lstStyle/>
+                    <a:p>
+                      <a:pPr algn="l" fontAlgn="ctr">
+                        <a:buNone/>
+                      </a:pPr>
+                      <a:r>
+                        <a:rPr lang="ja-JP" altLang="en-US" sz="2800" u="none" strike="noStrike" dirty="0">
+                          <a:effectLst/>
+                        </a:rPr>
+                        <a:t> 学習元の曲に感情をタグつけし</a:t>
+                      </a:r>
+                      <a:endParaRPr lang="en-US" altLang="ja-JP" sz="2800" u="none" strike="noStrike" dirty="0">
+                        <a:effectLst/>
+                      </a:endParaRPr>
+                    </a:p>
+                    <a:p>
+                      <a:pPr algn="l" fontAlgn="ctr">
+                        <a:buNone/>
+                      </a:pPr>
+                      <a:r>
+                        <a:rPr lang="en-US" altLang="ja-JP" sz="2800" u="none" strike="noStrike" dirty="0">
+                          <a:effectLst/>
+                        </a:rPr>
+                        <a:t> </a:t>
+                      </a:r>
+                      <a:r>
+                        <a:rPr lang="ja-JP" altLang="en-US" sz="2800" u="none" strike="noStrike" dirty="0">
+                          <a:effectLst/>
+                        </a:rPr>
+                        <a:t>分類させる</a:t>
+                      </a:r>
+                      <a:endParaRPr lang="ja-JP" altLang="en-US" sz="2800" b="0" i="0" u="none" strike="noStrike" dirty="0">
+                        <a:solidFill>
+                          <a:srgbClr val="000000"/>
+                        </a:solidFill>
+                        <a:effectLst/>
+                        <a:latin typeface="游ゴシック" panose="020B0400000000000000" pitchFamily="50" charset="-128"/>
+                        <a:ea typeface="游ゴシック" panose="020B0400000000000000" pitchFamily="50" charset="-128"/>
+                      </a:endParaRPr>
+                    </a:p>
+                  </a:txBody>
+                  <a:tcPr marL="9525" marR="9525" marT="9525" marB="0" anchor="ctr">
+                    <a:lnL w="12700" cap="flat" cmpd="sng" algn="ctr">
+                      <a:solidFill>
+                        <a:schemeClr val="tx1"/>
+                      </a:solidFill>
+                      <a:prstDash val="solid"/>
+                      <a:round/>
+                      <a:headEnd type="none" w="med" len="med"/>
+                      <a:tailEnd type="none" w="med" len="med"/>
+                    </a:lnL>
+                    <a:lnR w="12700" cap="flat" cmpd="sng" algn="ctr">
+                      <a:solidFill>
+                        <a:schemeClr val="tx1"/>
+                      </a:solidFill>
+                      <a:prstDash val="solid"/>
+                      <a:round/>
+                      <a:headEnd type="none" w="med" len="med"/>
+                      <a:tailEnd type="none" w="med" len="med"/>
+                    </a:lnR>
+                    <a:lnT w="12700" cap="flat" cmpd="sng" algn="ctr">
+                      <a:solidFill>
+                        <a:schemeClr val="tx1"/>
+                      </a:solidFill>
+                      <a:prstDash val="solid"/>
+                      <a:round/>
+                      <a:headEnd type="none" w="med" len="med"/>
+                      <a:tailEnd type="none" w="med" len="med"/>
+                    </a:lnT>
+                    <a:lnB w="12700" cap="flat" cmpd="sng" algn="ctr">
+                      <a:solidFill>
+                        <a:schemeClr val="tx1"/>
+                      </a:solidFill>
+                      <a:prstDash val="solid"/>
+                      <a:round/>
+                      <a:headEnd type="none" w="med" len="med"/>
+                      <a:tailEnd type="none" w="med" len="med"/>
+                    </a:lnB>
+                    <a:lnTlToBr w="12700" cmpd="sng">
+                      <a:noFill/>
+                      <a:prstDash val="solid"/>
+                    </a:lnTlToBr>
+                    <a:lnBlToTr w="12700" cmpd="sng">
+                      <a:noFill/>
+                      <a:prstDash val="solid"/>
+                    </a:lnBlToTr>
+                    <a:noFill/>
+                  </a:tcPr>
+                </a:tc>
+                <a:extLst>
+                  <a:ext uri="{0D108BD9-81ED-4DB2-BD59-A6C34878D82A}">
+                    <a16:rowId xmlns:a16="http://schemas.microsoft.com/office/drawing/2014/main" val="1420370465"/>
+                  </a:ext>
+                </a:extLst>
+              </a:tr>
+              <a:tr h="1233466">
+                <a:tc>
+                  <a:txBody>
+                    <a:bodyPr/>
+                    <a:lstStyle/>
+                    <a:p>
+                      <a:pPr algn="l" fontAlgn="ctr">
+                        <a:buNone/>
+                      </a:pPr>
+                      <a:r>
+                        <a:rPr lang="ja-JP" altLang="en-US" sz="2800" u="none" strike="noStrike" dirty="0">
+                          <a:effectLst/>
+                        </a:rPr>
+                        <a:t> 数値を予測する。</a:t>
+                      </a:r>
+                      <a:endParaRPr lang="ja-JP" altLang="en-US" sz="2800" b="0" i="0" u="none" strike="noStrike" dirty="0">
+                        <a:solidFill>
+                          <a:srgbClr val="000000"/>
+                        </a:solidFill>
+                        <a:effectLst/>
+                        <a:latin typeface="游ゴシック" panose="020B0400000000000000" pitchFamily="50" charset="-128"/>
+                        <a:ea typeface="游ゴシック" panose="020B0400000000000000" pitchFamily="50" charset="-128"/>
+                      </a:endParaRPr>
+                    </a:p>
+                  </a:txBody>
+                  <a:tcPr marL="9525" marR="9525" marT="9525" marB="0" anchor="ctr">
+                    <a:lnL w="12700" cap="flat" cmpd="sng" algn="ctr">
+                      <a:solidFill>
+                        <a:schemeClr val="tx1"/>
+                      </a:solidFill>
+                      <a:prstDash val="solid"/>
+                      <a:round/>
+                      <a:headEnd type="none" w="med" len="med"/>
+                      <a:tailEnd type="none" w="med" len="med"/>
+                    </a:lnL>
+                    <a:lnR w="12700" cap="flat" cmpd="sng" algn="ctr">
+                      <a:solidFill>
+                        <a:schemeClr val="tx1"/>
+                      </a:solidFill>
+                      <a:prstDash val="solid"/>
+                      <a:round/>
+                      <a:headEnd type="none" w="med" len="med"/>
+                      <a:tailEnd type="none" w="med" len="med"/>
+                    </a:lnR>
+                    <a:lnT w="12700" cap="flat" cmpd="sng" algn="ctr">
+                      <a:solidFill>
+                        <a:schemeClr val="tx1"/>
+                      </a:solidFill>
+                      <a:prstDash val="solid"/>
+                      <a:round/>
+                      <a:headEnd type="none" w="med" len="med"/>
+                      <a:tailEnd type="none" w="med" len="med"/>
+                    </a:lnT>
+                    <a:lnB w="12700" cap="flat" cmpd="sng" algn="ctr">
+                      <a:solidFill>
+                        <a:schemeClr val="tx1"/>
+                      </a:solidFill>
+                      <a:prstDash val="solid"/>
+                      <a:round/>
+                      <a:headEnd type="none" w="med" len="med"/>
+                      <a:tailEnd type="none" w="med" len="med"/>
+                    </a:lnB>
+                    <a:lnTlToBr w="12700" cmpd="sng">
+                      <a:noFill/>
+                      <a:prstDash val="solid"/>
+                    </a:lnTlToBr>
+                    <a:lnBlToTr w="12700" cmpd="sng">
+                      <a:noFill/>
+                      <a:prstDash val="solid"/>
+                    </a:lnBlToTr>
+                    <a:noFill/>
+                  </a:tcPr>
+                </a:tc>
+                <a:extLst>
+                  <a:ext uri="{0D108BD9-81ED-4DB2-BD59-A6C34878D82A}">
+                    <a16:rowId xmlns:a16="http://schemas.microsoft.com/office/drawing/2014/main" val="30414892"/>
+                  </a:ext>
+                </a:extLst>
+              </a:tr>
+            </a:tbl>
+          </a:graphicData>
+        </a:graphic>
+      </p:graphicFrame>
+      <p:graphicFrame>
+        <p:nvGraphicFramePr>
+          <p:cNvPr id="5" name="表 4">
+            <a:extLst>
+              <a:ext uri="{FF2B5EF4-FFF2-40B4-BE49-F238E27FC236}">
+                <a16:creationId xmlns:a16="http://schemas.microsoft.com/office/drawing/2014/main" id="{ACBC5DBC-0B6B-5F03-ED4B-B420E7191DAF}"/>
+              </a:ext>
+            </a:extLst>
+          </p:cNvPr>
+          <p:cNvGraphicFramePr>
+            <a:graphicFrameLocks noGrp="1"/>
+          </p:cNvGraphicFramePr>
+          <p:nvPr>
+            <p:extLst>
+              <p:ext uri="{D42A27DB-BD31-4B8C-83A1-F6EECF244321}">
+                <p14:modId xmlns:p14="http://schemas.microsoft.com/office/powerpoint/2010/main" val="4153301486"/>
+              </p:ext>
+            </p:extLst>
+          </p:nvPr>
+        </p:nvGraphicFramePr>
+        <p:xfrm>
+          <a:off x="8579290" y="2186239"/>
+          <a:ext cx="2599404" cy="4357436"/>
+        </p:xfrm>
+        <a:graphic>
+          <a:graphicData uri="http://schemas.openxmlformats.org/drawingml/2006/table">
+            <a:tbl>
+              <a:tblPr>
+                <a:tableStyleId>{073A0DAA-6AF3-43AB-8588-CEC1D06C72B9}</a:tableStyleId>
+              </a:tblPr>
+              <a:tblGrid>
+                <a:gridCol w="2599404">
+                  <a:extLst>
+                    <a:ext uri="{9D8B030D-6E8A-4147-A177-3AD203B41FA5}">
+                      <a16:colId xmlns:a16="http://schemas.microsoft.com/office/drawing/2014/main" val="159393942"/>
+                    </a:ext>
+                  </a:extLst>
+                </a:gridCol>
+              </a:tblGrid>
+              <a:tr h="842711">
+                <a:tc>
+                  <a:txBody>
+                    <a:bodyPr/>
+                    <a:lstStyle/>
+                    <a:p>
+                      <a:pPr algn="l" fontAlgn="ctr">
+                        <a:buNone/>
+                      </a:pPr>
+                      <a:r>
+                        <a:rPr lang="ja-JP" altLang="en-US" sz="3600" b="0" i="0" u="none" strike="noStrike" dirty="0">
+                          <a:solidFill>
+                            <a:srgbClr val="000000"/>
+                          </a:solidFill>
+                          <a:effectLst/>
+                          <a:latin typeface="+mj-ea"/>
+                          <a:ea typeface="+mj-ea"/>
+                        </a:rPr>
+                        <a:t> 選定理由</a:t>
+                      </a:r>
+                    </a:p>
+                  </a:txBody>
+                  <a:tcPr marL="9525" marR="9525" marT="9525" marB="0" anchor="ctr">
+                    <a:lnL w="12700" cap="flat" cmpd="sng" algn="ctr">
+                      <a:solidFill>
+                        <a:schemeClr val="tx1"/>
+                      </a:solidFill>
+                      <a:prstDash val="solid"/>
+                      <a:round/>
+                      <a:headEnd type="none" w="med" len="med"/>
+                      <a:tailEnd type="none" w="med" len="med"/>
+                    </a:lnL>
+                    <a:lnR w="12700" cap="flat" cmpd="sng" algn="ctr">
+                      <a:solidFill>
+                        <a:schemeClr val="tx1"/>
+                      </a:solidFill>
+                      <a:prstDash val="solid"/>
+                      <a:round/>
+                      <a:headEnd type="none" w="med" len="med"/>
+                      <a:tailEnd type="none" w="med" len="med"/>
+                    </a:lnR>
+                    <a:lnT w="12700" cap="flat" cmpd="sng" algn="ctr">
+                      <a:solidFill>
+                        <a:schemeClr val="tx1"/>
+                      </a:solidFill>
+                      <a:prstDash val="solid"/>
+                      <a:round/>
+                      <a:headEnd type="none" w="med" len="med"/>
+                      <a:tailEnd type="none" w="med" len="med"/>
+                    </a:lnT>
+                    <a:lnB w="12700" cap="flat" cmpd="sng" algn="ctr">
+                      <a:solidFill>
+                        <a:schemeClr val="tx1"/>
+                      </a:solidFill>
+                      <a:prstDash val="solid"/>
+                      <a:round/>
+                      <a:headEnd type="none" w="med" len="med"/>
+                      <a:tailEnd type="none" w="med" len="med"/>
+                    </a:lnB>
+                    <a:solidFill>
+                      <a:schemeClr val="bg1"/>
+                    </a:solidFill>
+                  </a:tcPr>
+                </a:tc>
+                <a:extLst>
+                  <a:ext uri="{0D108BD9-81ED-4DB2-BD59-A6C34878D82A}">
+                    <a16:rowId xmlns:a16="http://schemas.microsoft.com/office/drawing/2014/main" val="3953469068"/>
+                  </a:ext>
+                </a:extLst>
+              </a:tr>
+              <a:tr h="1057275">
+                <a:tc>
+                  <a:txBody>
+                    <a:bodyPr/>
+                    <a:lstStyle/>
+                    <a:p>
+                      <a:pPr algn="l" fontAlgn="ctr">
+                        <a:buNone/>
+                      </a:pPr>
+                      <a:r>
+                        <a:rPr lang="ja-JP" altLang="en-US" sz="2800" dirty="0"/>
+                        <a:t> 精度が高い</a:t>
+                      </a:r>
+                      <a:endParaRPr lang="ja-JP" altLang="en-US" sz="2800" b="0" i="0" u="none" strike="noStrike" dirty="0">
+                        <a:solidFill>
+                          <a:srgbClr val="000000"/>
+                        </a:solidFill>
+                        <a:effectLst/>
+                        <a:latin typeface="游ゴシック" panose="020B0400000000000000" pitchFamily="50" charset="-128"/>
+                        <a:ea typeface="游ゴシック" panose="020B0400000000000000" pitchFamily="50" charset="-128"/>
+                      </a:endParaRPr>
+                    </a:p>
+                  </a:txBody>
+                  <a:tcPr marL="9525" marR="9525" marT="9525" marB="0" anchor="ctr">
+                    <a:lnL w="12700" cap="flat" cmpd="sng" algn="ctr">
+                      <a:solidFill>
+                        <a:schemeClr val="tx1"/>
+                      </a:solidFill>
+                      <a:prstDash val="solid"/>
+                      <a:round/>
+                      <a:headEnd type="none" w="med" len="med"/>
+                      <a:tailEnd type="none" w="med" len="med"/>
+                    </a:lnL>
+                    <a:lnR w="12700" cap="flat" cmpd="sng" algn="ctr">
+                      <a:solidFill>
+                        <a:schemeClr val="tx1"/>
+                      </a:solidFill>
+                      <a:prstDash val="solid"/>
+                      <a:round/>
+                      <a:headEnd type="none" w="med" len="med"/>
+                      <a:tailEnd type="none" w="med" len="med"/>
+                    </a:lnR>
+                    <a:lnT w="12700" cap="flat" cmpd="sng" algn="ctr">
+                      <a:solidFill>
+                        <a:schemeClr val="tx1"/>
+                      </a:solidFill>
+                      <a:prstDash val="solid"/>
+                      <a:round/>
+                      <a:headEnd type="none" w="med" len="med"/>
+                      <a:tailEnd type="none" w="med" len="med"/>
+                    </a:lnT>
+                    <a:lnB w="12700" cap="flat" cmpd="sng" algn="ctr">
+                      <a:solidFill>
+                        <a:schemeClr val="tx1"/>
+                      </a:solidFill>
+                      <a:prstDash val="solid"/>
+                      <a:round/>
+                      <a:headEnd type="none" w="med" len="med"/>
+                      <a:tailEnd type="none" w="med" len="med"/>
+                    </a:lnB>
+                    <a:solidFill>
+                      <a:schemeClr val="bg1"/>
+                    </a:solidFill>
+                  </a:tcPr>
+                </a:tc>
+                <a:extLst>
+                  <a:ext uri="{0D108BD9-81ED-4DB2-BD59-A6C34878D82A}">
+                    <a16:rowId xmlns:a16="http://schemas.microsoft.com/office/drawing/2014/main" val="2980872199"/>
+                  </a:ext>
+                </a:extLst>
+              </a:tr>
+              <a:tr h="1126919">
+                <a:tc>
+                  <a:txBody>
+                    <a:bodyPr/>
+                    <a:lstStyle/>
+                    <a:p>
+                      <a:pPr algn="l" fontAlgn="ctr">
+                        <a:buNone/>
+                      </a:pPr>
+                      <a:r>
+                        <a:rPr lang="en-US" altLang="ja-JP" sz="2800" u="none" strike="noStrike" dirty="0">
+                          <a:effectLst/>
+                        </a:rPr>
+                        <a:t> </a:t>
+                      </a:r>
+                      <a:r>
+                        <a:rPr lang="ja-JP" altLang="en-US" sz="2800" u="none" strike="noStrike" dirty="0">
+                          <a:effectLst/>
+                        </a:rPr>
+                        <a:t>新しいラベルを追加しやすい</a:t>
+                      </a:r>
+                      <a:endParaRPr lang="ja-JP" altLang="en-US" sz="2800" b="0" i="0" u="none" strike="noStrike" dirty="0">
+                        <a:solidFill>
+                          <a:srgbClr val="000000"/>
+                        </a:solidFill>
+                        <a:effectLst/>
+                        <a:latin typeface="游ゴシック" panose="020B0400000000000000" pitchFamily="50" charset="-128"/>
+                        <a:ea typeface="游ゴシック" panose="020B0400000000000000" pitchFamily="50" charset="-128"/>
+                      </a:endParaRPr>
+                    </a:p>
+                  </a:txBody>
+                  <a:tcPr marL="9525" marR="9525" marT="9525" marB="0" anchor="ctr">
+                    <a:lnL w="12700" cap="flat" cmpd="sng" algn="ctr">
+                      <a:solidFill>
+                        <a:schemeClr val="tx1"/>
+                      </a:solidFill>
+                      <a:prstDash val="solid"/>
+                      <a:round/>
+                      <a:headEnd type="none" w="med" len="med"/>
+                      <a:tailEnd type="none" w="med" len="med"/>
+                    </a:lnL>
+                    <a:lnR w="12700" cap="flat" cmpd="sng" algn="ctr">
+                      <a:solidFill>
+                        <a:schemeClr val="tx1"/>
+                      </a:solidFill>
+                      <a:prstDash val="solid"/>
+                      <a:round/>
+                      <a:headEnd type="none" w="med" len="med"/>
+                      <a:tailEnd type="none" w="med" len="med"/>
+                    </a:lnR>
+                    <a:lnT w="12700" cap="flat" cmpd="sng" algn="ctr">
+                      <a:solidFill>
+                        <a:schemeClr val="tx1"/>
+                      </a:solidFill>
+                      <a:prstDash val="solid"/>
+                      <a:round/>
+                      <a:headEnd type="none" w="med" len="med"/>
+                      <a:tailEnd type="none" w="med" len="med"/>
+                    </a:lnT>
+                    <a:lnB w="12700" cap="flat" cmpd="sng" algn="ctr">
+                      <a:solidFill>
+                        <a:schemeClr val="tx1"/>
+                      </a:solidFill>
+                      <a:prstDash val="solid"/>
+                      <a:round/>
+                      <a:headEnd type="none" w="med" len="med"/>
+                      <a:tailEnd type="none" w="med" len="med"/>
+                    </a:lnB>
+                    <a:solidFill>
+                      <a:schemeClr val="bg1"/>
+                    </a:solidFill>
+                  </a:tcPr>
+                </a:tc>
+                <a:extLst>
+                  <a:ext uri="{0D108BD9-81ED-4DB2-BD59-A6C34878D82A}">
+                    <a16:rowId xmlns:a16="http://schemas.microsoft.com/office/drawing/2014/main" val="1056017188"/>
+                  </a:ext>
+                </a:extLst>
+              </a:tr>
+              <a:tr h="1330531">
+                <a:tc>
+                  <a:txBody>
+                    <a:bodyPr/>
+                    <a:lstStyle/>
+                    <a:p>
+                      <a:pPr algn="l" fontAlgn="ctr">
+                        <a:buNone/>
+                      </a:pPr>
+                      <a:r>
+                        <a:rPr lang="en-US" altLang="ja-JP" sz="2800" u="none" strike="noStrike" dirty="0">
+                          <a:effectLst/>
+                        </a:rPr>
+                        <a:t> </a:t>
+                      </a:r>
+                      <a:r>
+                        <a:rPr lang="ja-JP" altLang="en-US" sz="2800" u="none" strike="noStrike" dirty="0">
+                          <a:effectLst/>
+                        </a:rPr>
+                        <a:t>設計と相性がいい</a:t>
+                      </a:r>
+                      <a:endParaRPr lang="ja-JP" altLang="en-US" sz="2800" b="0" i="0" u="none" strike="noStrike" dirty="0">
+                        <a:solidFill>
+                          <a:srgbClr val="000000"/>
+                        </a:solidFill>
+                        <a:effectLst/>
+                        <a:latin typeface="游ゴシック" panose="020B0400000000000000" pitchFamily="50" charset="-128"/>
+                        <a:ea typeface="游ゴシック" panose="020B0400000000000000" pitchFamily="50" charset="-128"/>
+                      </a:endParaRPr>
+                    </a:p>
+                  </a:txBody>
+                  <a:tcPr marL="9525" marR="9525" marT="9525" marB="0" anchor="ctr">
+                    <a:lnL w="12700" cap="flat" cmpd="sng" algn="ctr">
+                      <a:solidFill>
+                        <a:schemeClr val="tx1"/>
+                      </a:solidFill>
+                      <a:prstDash val="solid"/>
+                      <a:round/>
+                      <a:headEnd type="none" w="med" len="med"/>
+                      <a:tailEnd type="none" w="med" len="med"/>
+                    </a:lnL>
+                    <a:lnR w="12700" cap="flat" cmpd="sng" algn="ctr">
+                      <a:solidFill>
+                        <a:schemeClr val="tx1"/>
+                      </a:solidFill>
+                      <a:prstDash val="solid"/>
+                      <a:round/>
+                      <a:headEnd type="none" w="med" len="med"/>
+                      <a:tailEnd type="none" w="med" len="med"/>
+                    </a:lnR>
+                    <a:lnT w="12700" cap="flat" cmpd="sng" algn="ctr">
+                      <a:solidFill>
+                        <a:schemeClr val="tx1"/>
+                      </a:solidFill>
+                      <a:prstDash val="solid"/>
+                      <a:round/>
+                      <a:headEnd type="none" w="med" len="med"/>
+                      <a:tailEnd type="none" w="med" len="med"/>
+                    </a:lnT>
+                    <a:lnB w="12700" cap="flat" cmpd="sng" algn="ctr">
+                      <a:solidFill>
+                        <a:schemeClr val="tx1"/>
+                      </a:solidFill>
+                      <a:prstDash val="solid"/>
+                      <a:round/>
+                      <a:headEnd type="none" w="med" len="med"/>
+                      <a:tailEnd type="none" w="med" len="med"/>
+                    </a:lnB>
+                    <a:solidFill>
+                      <a:schemeClr val="bg1"/>
+                    </a:solidFill>
+                  </a:tcPr>
+                </a:tc>
+                <a:extLst>
+                  <a:ext uri="{0D108BD9-81ED-4DB2-BD59-A6C34878D82A}">
+                    <a16:rowId xmlns:a16="http://schemas.microsoft.com/office/drawing/2014/main" val="1420370465"/>
+                  </a:ext>
+                </a:extLst>
+              </a:tr>
+            </a:tbl>
+          </a:graphicData>
+        </a:graphic>
+      </p:graphicFrame>
+      <p:graphicFrame>
+        <p:nvGraphicFramePr>
+          <p:cNvPr id="9" name="表 8">
+            <a:extLst>
+              <a:ext uri="{FF2B5EF4-FFF2-40B4-BE49-F238E27FC236}">
+                <a16:creationId xmlns:a16="http://schemas.microsoft.com/office/drawing/2014/main" id="{1E18A129-FF4F-0DE6-ACA0-AA4ED37C2B96}"/>
+              </a:ext>
+            </a:extLst>
+          </p:cNvPr>
+          <p:cNvGraphicFramePr>
+            <a:graphicFrameLocks noGrp="1"/>
+          </p:cNvGraphicFramePr>
+          <p:nvPr>
+            <p:extLst>
+              <p:ext uri="{D42A27DB-BD31-4B8C-83A1-F6EECF244321}">
+                <p14:modId xmlns:p14="http://schemas.microsoft.com/office/powerpoint/2010/main" val="1577293840"/>
+              </p:ext>
+            </p:extLst>
+          </p:nvPr>
+        </p:nvGraphicFramePr>
+        <p:xfrm>
+          <a:off x="5979886" y="2188566"/>
+          <a:ext cx="2599404" cy="4355829"/>
+        </p:xfrm>
+        <a:graphic>
+          <a:graphicData uri="http://schemas.openxmlformats.org/drawingml/2006/table">
+            <a:tbl>
+              <a:tblPr>
+                <a:tableStyleId>{073A0DAA-6AF3-43AB-8588-CEC1D06C72B9}</a:tableStyleId>
+              </a:tblPr>
+              <a:tblGrid>
+                <a:gridCol w="2599404">
+                  <a:extLst>
+                    <a:ext uri="{9D8B030D-6E8A-4147-A177-3AD203B41FA5}">
+                      <a16:colId xmlns:a16="http://schemas.microsoft.com/office/drawing/2014/main" val="159393942"/>
+                    </a:ext>
+                  </a:extLst>
+                </a:gridCol>
+              </a:tblGrid>
+              <a:tr h="822278">
+                <a:tc>
+                  <a:txBody>
+                    <a:bodyPr/>
+                    <a:lstStyle/>
+                    <a:p>
+                      <a:pPr algn="l" fontAlgn="ctr">
+                        <a:buNone/>
+                      </a:pPr>
+                      <a:r>
+                        <a:rPr lang="ja-JP" altLang="en-US" sz="3600" b="0" i="0" u="none" strike="noStrike" dirty="0">
+                          <a:solidFill>
+                            <a:srgbClr val="000000"/>
+                          </a:solidFill>
+                          <a:effectLst/>
+                          <a:latin typeface="+mj-ea"/>
+                          <a:ea typeface="+mj-ea"/>
+                        </a:rPr>
+                        <a:t> 感情タグ</a:t>
+                      </a:r>
+                    </a:p>
+                  </a:txBody>
+                  <a:tcPr marL="9525" marR="9525" marT="9525" marB="0" anchor="ctr">
+                    <a:lnL w="12700" cap="flat" cmpd="sng" algn="ctr">
+                      <a:solidFill>
+                        <a:schemeClr val="tx1"/>
+                      </a:solidFill>
+                      <a:prstDash val="solid"/>
+                      <a:round/>
+                      <a:headEnd type="none" w="med" len="med"/>
+                      <a:tailEnd type="none" w="med" len="med"/>
+                    </a:lnL>
+                    <a:lnR w="12700" cap="flat" cmpd="sng" algn="ctr">
+                      <a:solidFill>
+                        <a:schemeClr val="tx1"/>
+                      </a:solidFill>
+                      <a:prstDash val="solid"/>
+                      <a:round/>
+                      <a:headEnd type="none" w="med" len="med"/>
+                      <a:tailEnd type="none" w="med" len="med"/>
+                    </a:lnR>
+                    <a:lnT w="12700" cap="flat" cmpd="sng" algn="ctr">
+                      <a:solidFill>
+                        <a:schemeClr val="tx1"/>
+                      </a:solidFill>
+                      <a:prstDash val="solid"/>
+                      <a:round/>
+                      <a:headEnd type="none" w="med" len="med"/>
+                      <a:tailEnd type="none" w="med" len="med"/>
+                    </a:lnT>
+                    <a:lnB w="12700" cap="flat" cmpd="sng" algn="ctr">
+                      <a:solidFill>
+                        <a:schemeClr val="tx1"/>
+                      </a:solidFill>
+                      <a:prstDash val="solid"/>
+                      <a:round/>
+                      <a:headEnd type="none" w="med" len="med"/>
+                      <a:tailEnd type="none" w="med" len="med"/>
+                    </a:lnB>
+                    <a:solidFill>
+                      <a:schemeClr val="bg1"/>
+                    </a:solidFill>
+                  </a:tcPr>
+                </a:tc>
+                <a:extLst>
+                  <a:ext uri="{0D108BD9-81ED-4DB2-BD59-A6C34878D82A}">
+                    <a16:rowId xmlns:a16="http://schemas.microsoft.com/office/drawing/2014/main" val="3953469068"/>
+                  </a:ext>
+                </a:extLst>
+              </a:tr>
+              <a:tr h="822278">
+                <a:tc>
+                  <a:txBody>
+                    <a:bodyPr/>
+                    <a:lstStyle/>
+                    <a:p>
+                      <a:pPr algn="l" fontAlgn="ctr">
+                        <a:buNone/>
+                      </a:pPr>
+                      <a:r>
+                        <a:rPr lang="ja-JP" altLang="en-US" sz="3600" b="0" i="0" u="none" strike="noStrike" dirty="0">
+                          <a:solidFill>
+                            <a:srgbClr val="000000"/>
+                          </a:solidFill>
+                          <a:effectLst/>
+                          <a:latin typeface="+mj-ea"/>
+                          <a:ea typeface="+mj-ea"/>
+                        </a:rPr>
+                        <a:t> </a:t>
+                      </a:r>
+                      <a:r>
+                        <a:rPr lang="en-US" altLang="ja-JP" sz="2800" b="0" i="0" u="none" strike="noStrike" dirty="0">
+                          <a:solidFill>
+                            <a:srgbClr val="000000"/>
+                          </a:solidFill>
+                          <a:effectLst/>
+                          <a:latin typeface="+mj-ea"/>
+                          <a:ea typeface="+mj-ea"/>
+                        </a:rPr>
+                        <a:t>Sad(</a:t>
+                      </a:r>
+                      <a:r>
+                        <a:rPr lang="ja-JP" altLang="en-US" sz="2800" b="0" i="0" u="none" strike="noStrike" dirty="0">
+                          <a:solidFill>
+                            <a:srgbClr val="000000"/>
+                          </a:solidFill>
+                          <a:effectLst/>
+                          <a:latin typeface="+mj-ea"/>
+                          <a:ea typeface="+mj-ea"/>
+                        </a:rPr>
+                        <a:t>悲しみ</a:t>
+                      </a:r>
+                      <a:r>
+                        <a:rPr lang="en-US" altLang="ja-JP" sz="2800" b="0" i="0" u="none" strike="noStrike" dirty="0">
+                          <a:solidFill>
+                            <a:srgbClr val="000000"/>
+                          </a:solidFill>
+                          <a:effectLst/>
+                          <a:latin typeface="+mj-ea"/>
+                          <a:ea typeface="+mj-ea"/>
+                        </a:rPr>
+                        <a:t>)</a:t>
+                      </a:r>
+                      <a:endParaRPr lang="ja-JP" altLang="en-US" sz="2800" b="0" i="0" u="none" strike="noStrike" dirty="0">
+                        <a:solidFill>
+                          <a:srgbClr val="000000"/>
+                        </a:solidFill>
+                        <a:effectLst/>
+                        <a:latin typeface="+mj-ea"/>
+                        <a:ea typeface="+mj-ea"/>
+                      </a:endParaRPr>
+                    </a:p>
+                  </a:txBody>
+                  <a:tcPr marL="9525" marR="9525" marT="9525" marB="0" anchor="ctr">
+                    <a:lnL w="12700" cap="flat" cmpd="sng" algn="ctr">
+                      <a:solidFill>
+                        <a:schemeClr val="tx1"/>
+                      </a:solidFill>
+                      <a:prstDash val="solid"/>
+                      <a:round/>
+                      <a:headEnd type="none" w="med" len="med"/>
+                      <a:tailEnd type="none" w="med" len="med"/>
+                    </a:lnL>
+                    <a:lnR w="12700" cap="flat" cmpd="sng" algn="ctr">
+                      <a:solidFill>
+                        <a:schemeClr val="tx1"/>
+                      </a:solidFill>
+                      <a:prstDash val="solid"/>
+                      <a:round/>
+                      <a:headEnd type="none" w="med" len="med"/>
+                      <a:tailEnd type="none" w="med" len="med"/>
+                    </a:lnR>
+                    <a:lnT w="12700" cap="flat" cmpd="sng" algn="ctr">
+                      <a:solidFill>
+                        <a:schemeClr val="tx1"/>
+                      </a:solidFill>
+                      <a:prstDash val="solid"/>
+                      <a:round/>
+                      <a:headEnd type="none" w="med" len="med"/>
+                      <a:tailEnd type="none" w="med" len="med"/>
+                    </a:lnT>
+                    <a:lnB w="12700" cap="flat" cmpd="sng" algn="ctr">
+                      <a:solidFill>
+                        <a:schemeClr val="tx1"/>
+                      </a:solidFill>
+                      <a:prstDash val="solid"/>
+                      <a:round/>
+                      <a:headEnd type="none" w="med" len="med"/>
+                      <a:tailEnd type="none" w="med" len="med"/>
+                    </a:lnB>
+                    <a:solidFill>
+                      <a:schemeClr val="bg1"/>
+                    </a:solidFill>
+                  </a:tcPr>
+                </a:tc>
+                <a:extLst>
+                  <a:ext uri="{0D108BD9-81ED-4DB2-BD59-A6C34878D82A}">
+                    <a16:rowId xmlns:a16="http://schemas.microsoft.com/office/drawing/2014/main" val="499997343"/>
+                  </a:ext>
+                </a:extLst>
+              </a:tr>
+              <a:tr h="767018">
+                <a:tc>
+                  <a:txBody>
+                    <a:bodyPr/>
+                    <a:lstStyle/>
+                    <a:p>
+                      <a:pPr algn="l" fontAlgn="ctr">
+                        <a:buNone/>
+                      </a:pPr>
+                      <a:r>
+                        <a:rPr lang="ja-JP" altLang="en-US" sz="2800" dirty="0"/>
+                        <a:t> </a:t>
+                      </a:r>
+                      <a:r>
+                        <a:rPr lang="en-US" altLang="ja-JP" sz="2800" dirty="0"/>
+                        <a:t>Trust(</a:t>
+                      </a:r>
+                      <a:r>
+                        <a:rPr lang="ja-JP" altLang="en-US" sz="2800" dirty="0"/>
+                        <a:t>信頼</a:t>
+                      </a:r>
+                      <a:r>
+                        <a:rPr lang="en-US" altLang="ja-JP" sz="2800" dirty="0"/>
+                        <a:t>)</a:t>
+                      </a:r>
+                      <a:endParaRPr lang="ja-JP" altLang="en-US" sz="2800" b="0" i="0" u="none" strike="noStrike" dirty="0">
+                        <a:solidFill>
+                          <a:srgbClr val="000000"/>
+                        </a:solidFill>
+                        <a:effectLst/>
+                        <a:latin typeface="游ゴシック" panose="020B0400000000000000" pitchFamily="50" charset="-128"/>
+                        <a:ea typeface="游ゴシック" panose="020B0400000000000000" pitchFamily="50" charset="-128"/>
+                      </a:endParaRPr>
+                    </a:p>
+                  </a:txBody>
+                  <a:tcPr marL="9525" marR="9525" marT="9525" marB="0" anchor="ctr">
+                    <a:lnL w="12700" cap="flat" cmpd="sng" algn="ctr">
+                      <a:solidFill>
+                        <a:schemeClr val="tx1"/>
+                      </a:solidFill>
+                      <a:prstDash val="solid"/>
+                      <a:round/>
+                      <a:headEnd type="none" w="med" len="med"/>
+                      <a:tailEnd type="none" w="med" len="med"/>
+                    </a:lnL>
+                    <a:lnR w="12700" cap="flat" cmpd="sng" algn="ctr">
+                      <a:solidFill>
+                        <a:schemeClr val="tx1"/>
+                      </a:solidFill>
+                      <a:prstDash val="solid"/>
+                      <a:round/>
+                      <a:headEnd type="none" w="med" len="med"/>
+                      <a:tailEnd type="none" w="med" len="med"/>
+                    </a:lnR>
+                    <a:lnT w="12700" cap="flat" cmpd="sng" algn="ctr">
+                      <a:solidFill>
+                        <a:schemeClr val="tx1"/>
+                      </a:solidFill>
+                      <a:prstDash val="solid"/>
+                      <a:round/>
+                      <a:headEnd type="none" w="med" len="med"/>
+                      <a:tailEnd type="none" w="med" len="med"/>
+                    </a:lnT>
+                    <a:lnB w="12700" cap="flat" cmpd="sng" algn="ctr">
+                      <a:solidFill>
+                        <a:schemeClr val="tx1"/>
+                      </a:solidFill>
+                      <a:prstDash val="solid"/>
+                      <a:round/>
+                      <a:headEnd type="none" w="med" len="med"/>
+                      <a:tailEnd type="none" w="med" len="med"/>
+                    </a:lnB>
+                    <a:solidFill>
+                      <a:schemeClr val="bg1"/>
+                    </a:solidFill>
+                  </a:tcPr>
+                </a:tc>
+                <a:extLst>
+                  <a:ext uri="{0D108BD9-81ED-4DB2-BD59-A6C34878D82A}">
+                    <a16:rowId xmlns:a16="http://schemas.microsoft.com/office/drawing/2014/main" val="2980872199"/>
+                  </a:ext>
+                </a:extLst>
+              </a:tr>
+              <a:tr h="934039">
+                <a:tc>
+                  <a:txBody>
+                    <a:bodyPr/>
+                    <a:lstStyle/>
+                    <a:p>
+                      <a:pPr algn="l" fontAlgn="ctr">
+                        <a:buNone/>
+                      </a:pPr>
+                      <a:r>
+                        <a:rPr lang="en-US" altLang="ja-JP" sz="2800" u="none" strike="noStrike" dirty="0">
+                          <a:effectLst/>
+                        </a:rPr>
+                        <a:t> Fear(</a:t>
+                      </a:r>
+                      <a:r>
+                        <a:rPr lang="ja-JP" altLang="en-US" sz="2800" u="none" strike="noStrike" dirty="0">
+                          <a:effectLst/>
+                        </a:rPr>
+                        <a:t>恐怖）</a:t>
+                      </a:r>
+                      <a:endParaRPr lang="ja-JP" altLang="en-US" sz="2800" b="0" i="0" u="none" strike="noStrike" dirty="0">
+                        <a:solidFill>
+                          <a:srgbClr val="000000"/>
+                        </a:solidFill>
+                        <a:effectLst/>
+                        <a:latin typeface="游ゴシック" panose="020B0400000000000000" pitchFamily="50" charset="-128"/>
+                        <a:ea typeface="游ゴシック" panose="020B0400000000000000" pitchFamily="50" charset="-128"/>
+                      </a:endParaRPr>
+                    </a:p>
+                  </a:txBody>
+                  <a:tcPr marL="9525" marR="9525" marT="9525" marB="0" anchor="ctr">
+                    <a:lnL w="12700" cap="flat" cmpd="sng" algn="ctr">
+                      <a:solidFill>
+                        <a:schemeClr val="tx1"/>
+                      </a:solidFill>
+                      <a:prstDash val="solid"/>
+                      <a:round/>
+                      <a:headEnd type="none" w="med" len="med"/>
+                      <a:tailEnd type="none" w="med" len="med"/>
+                    </a:lnL>
+                    <a:lnR w="12700" cap="flat" cmpd="sng" algn="ctr">
+                      <a:solidFill>
+                        <a:schemeClr val="tx1"/>
+                      </a:solidFill>
+                      <a:prstDash val="solid"/>
+                      <a:round/>
+                      <a:headEnd type="none" w="med" len="med"/>
+                      <a:tailEnd type="none" w="med" len="med"/>
+                    </a:lnR>
+                    <a:lnT w="12700" cap="flat" cmpd="sng" algn="ctr">
+                      <a:solidFill>
+                        <a:schemeClr val="tx1"/>
+                      </a:solidFill>
+                      <a:prstDash val="solid"/>
+                      <a:round/>
+                      <a:headEnd type="none" w="med" len="med"/>
+                      <a:tailEnd type="none" w="med" len="med"/>
+                    </a:lnT>
+                    <a:lnB w="12700" cap="flat" cmpd="sng" algn="ctr">
+                      <a:solidFill>
+                        <a:schemeClr val="tx1"/>
+                      </a:solidFill>
+                      <a:prstDash val="solid"/>
+                      <a:round/>
+                      <a:headEnd type="none" w="med" len="med"/>
+                      <a:tailEnd type="none" w="med" len="med"/>
+                    </a:lnB>
+                    <a:solidFill>
+                      <a:schemeClr val="bg1"/>
+                    </a:solidFill>
+                  </a:tcPr>
+                </a:tc>
+                <a:extLst>
+                  <a:ext uri="{0D108BD9-81ED-4DB2-BD59-A6C34878D82A}">
+                    <a16:rowId xmlns:a16="http://schemas.microsoft.com/office/drawing/2014/main" val="1056017188"/>
+                  </a:ext>
+                </a:extLst>
+              </a:tr>
+              <a:tr h="1010216">
+                <a:tc>
+                  <a:txBody>
+                    <a:bodyPr/>
+                    <a:lstStyle/>
+                    <a:p>
+                      <a:pPr algn="l" fontAlgn="ctr">
+                        <a:buNone/>
+                      </a:pPr>
+                      <a:r>
+                        <a:rPr lang="en-US" altLang="ja-JP" sz="2800" u="none" strike="noStrike" dirty="0">
+                          <a:effectLst/>
+                        </a:rPr>
+                        <a:t> Anxiety(</a:t>
+                      </a:r>
+                      <a:r>
+                        <a:rPr lang="ja-JP" altLang="en-US" sz="2800" u="none" strike="noStrike" dirty="0">
+                          <a:effectLst/>
+                        </a:rPr>
+                        <a:t>不安</a:t>
+                      </a:r>
+                      <a:r>
+                        <a:rPr lang="en-US" altLang="ja-JP" sz="2800" u="none" strike="noStrike" dirty="0">
+                          <a:effectLst/>
+                        </a:rPr>
+                        <a:t>)</a:t>
+                      </a:r>
+                      <a:endParaRPr lang="ja-JP" altLang="en-US" sz="2800" b="0" i="0" u="none" strike="noStrike" dirty="0">
+                        <a:solidFill>
+                          <a:srgbClr val="000000"/>
+                        </a:solidFill>
+                        <a:effectLst/>
+                        <a:latin typeface="游ゴシック" panose="020B0400000000000000" pitchFamily="50" charset="-128"/>
+                        <a:ea typeface="游ゴシック" panose="020B0400000000000000" pitchFamily="50" charset="-128"/>
+                      </a:endParaRPr>
+                    </a:p>
+                  </a:txBody>
+                  <a:tcPr marL="9525" marR="9525" marT="9525" marB="0" anchor="ctr">
+                    <a:lnL w="12700" cap="flat" cmpd="sng" algn="ctr">
+                      <a:solidFill>
+                        <a:schemeClr val="tx1"/>
+                      </a:solidFill>
+                      <a:prstDash val="solid"/>
+                      <a:round/>
+                      <a:headEnd type="none" w="med" len="med"/>
+                      <a:tailEnd type="none" w="med" len="med"/>
+                    </a:lnL>
+                    <a:lnR w="12700" cap="flat" cmpd="sng" algn="ctr">
+                      <a:solidFill>
+                        <a:schemeClr val="tx1"/>
+                      </a:solidFill>
+                      <a:prstDash val="solid"/>
+                      <a:round/>
+                      <a:headEnd type="none" w="med" len="med"/>
+                      <a:tailEnd type="none" w="med" len="med"/>
+                    </a:lnR>
+                    <a:lnT w="12700" cap="flat" cmpd="sng" algn="ctr">
+                      <a:solidFill>
+                        <a:schemeClr val="tx1"/>
+                      </a:solidFill>
+                      <a:prstDash val="solid"/>
+                      <a:round/>
+                      <a:headEnd type="none" w="med" len="med"/>
+                      <a:tailEnd type="none" w="med" len="med"/>
+                    </a:lnT>
+                    <a:lnB w="12700" cap="flat" cmpd="sng" algn="ctr">
+                      <a:solidFill>
+                        <a:schemeClr val="tx1"/>
+                      </a:solidFill>
+                      <a:prstDash val="solid"/>
+                      <a:round/>
+                      <a:headEnd type="none" w="med" len="med"/>
+                      <a:tailEnd type="none" w="med" len="med"/>
+                    </a:lnB>
+                    <a:solidFill>
+                      <a:schemeClr val="bg1"/>
+                    </a:solidFill>
+                  </a:tcPr>
+                </a:tc>
+                <a:extLst>
+                  <a:ext uri="{0D108BD9-81ED-4DB2-BD59-A6C34878D82A}">
+                    <a16:rowId xmlns:a16="http://schemas.microsoft.com/office/drawing/2014/main" val="1420370465"/>
+                  </a:ext>
+                </a:extLst>
+              </a:tr>
+            </a:tbl>
+          </a:graphicData>
+        </a:graphic>
+      </p:graphicFrame>
     </p:spTree>
     <p:extLst>
       <p:ext uri="{BB962C8B-B14F-4D97-AF65-F5344CB8AC3E}">
-        <p14:creationId xmlns:p14="http://schemas.microsoft.com/office/powerpoint/2010/main" val="2122248352"/>
+        <p14:creationId xmlns:p14="http://schemas.microsoft.com/office/powerpoint/2010/main" val="363158036"/>
       </p:ext>
     </p:extLst>
   </p:cSld>

--- a/発表用/発表用スライド.pptx
+++ b/発表用/発表用スライド.pptx
@@ -10943,7 +10943,7 @@
           <p:nvPr>
             <p:extLst>
               <p:ext uri="{D42A27DB-BD31-4B8C-83A1-F6EECF244321}">
-                <p14:modId xmlns:p14="http://schemas.microsoft.com/office/powerpoint/2010/main" val="2735387633"/>
+                <p14:modId xmlns:p14="http://schemas.microsoft.com/office/powerpoint/2010/main" val="3308131632"/>
               </p:ext>
             </p:extLst>
           </p:nvPr>
@@ -11540,14 +11540,14 @@
           <p:nvPr>
             <p:extLst>
               <p:ext uri="{D42A27DB-BD31-4B8C-83A1-F6EECF244321}">
-                <p14:modId xmlns:p14="http://schemas.microsoft.com/office/powerpoint/2010/main" val="3982450191"/>
+                <p14:modId xmlns:p14="http://schemas.microsoft.com/office/powerpoint/2010/main" val="1118642108"/>
               </p:ext>
             </p:extLst>
           </p:nvPr>
         </p:nvGraphicFramePr>
         <p:xfrm>
-          <a:off x="7844833" y="1820091"/>
-          <a:ext cx="3813767" cy="4128776"/>
+          <a:off x="7343775" y="1820090"/>
+          <a:ext cx="4667250" cy="4085285"/>
         </p:xfrm>
         <a:graphic>
           <a:graphicData uri="http://schemas.openxmlformats.org/drawingml/2006/table">
@@ -11556,7 +11556,7 @@
                 <a:tableStyleId>{073A0DAA-6AF3-43AB-8588-CEC1D06C72B9}</a:tableStyleId>
               </a:tblPr>
               <a:tblGrid>
-                <a:gridCol w="3813767">
+                <a:gridCol w="4667250">
                   <a:extLst>
                     <a:ext uri="{9D8B030D-6E8A-4147-A177-3AD203B41FA5}">
                       <a16:colId xmlns:a16="http://schemas.microsoft.com/office/drawing/2014/main" val="159393942"/>
@@ -11564,7 +11564,7 @@
                   </a:extLst>
                 </a:gridCol>
               </a:tblGrid>
-              <a:tr h="532584">
+              <a:tr h="585339">
                 <a:tc>
                   <a:txBody>
                     <a:bodyPr/>
@@ -11596,7 +11596,7 @@
                         <a:t>micromamba</a:t>
                       </a:r>
                       <a:r>
-                        <a:rPr lang="ja-JP" altLang="en-US" sz="2800" b="0" i="0" u="none" strike="noStrike">
+                        <a:rPr lang="ja-JP" altLang="en-US" sz="2800" b="0" i="0" u="none" strike="noStrike" dirty="0">
                           <a:solidFill>
                             <a:srgbClr val="000000"/>
                           </a:solidFill>
@@ -11604,16 +11604,8 @@
                           <a:latin typeface="+mj-ea"/>
                           <a:ea typeface="+mj-ea"/>
                         </a:rPr>
-                        <a:t>の理由</a:t>
+                        <a:t>である理由</a:t>
                       </a:r>
-                      <a:endParaRPr lang="ja-JP" altLang="en-US" sz="2800" b="0" i="0" u="none" strike="noStrike" dirty="0">
-                        <a:solidFill>
-                          <a:srgbClr val="000000"/>
-                        </a:solidFill>
-                        <a:effectLst/>
-                        <a:latin typeface="+mj-ea"/>
-                        <a:ea typeface="+mj-ea"/>
-                      </a:endParaRPr>
                     </a:p>
                   </a:txBody>
                   <a:tcPr marL="9525" marR="9525" marT="9525" marB="0" anchor="ctr">
@@ -11664,7 +11656,7 @@
                   </a:ext>
                 </a:extLst>
               </a:tr>
-              <a:tr h="991241">
+              <a:tr h="1039500">
                 <a:tc>
                   <a:txBody>
                     <a:bodyPr/>
@@ -11753,7 +11745,7 @@
                   </a:ext>
                 </a:extLst>
               </a:tr>
-              <a:tr h="1056535">
+              <a:tr h="1107973">
                 <a:tc>
                   <a:txBody>
                     <a:bodyPr/>
@@ -11833,7 +11825,7 @@
                   </a:ext>
                 </a:extLst>
               </a:tr>
-              <a:tr h="1247430">
+              <a:tr h="1352473">
                 <a:tc>
                   <a:txBody>
                     <a:bodyPr/>
@@ -11846,7 +11838,7 @@
                         <a:rPr lang="en-US" altLang="ja-JP" sz="2800" u="none" strike="noStrike" dirty="0">
                           <a:effectLst/>
                         </a:rPr>
-                        <a:t> C</a:t>
+                        <a:t> C++</a:t>
                       </a:r>
                       <a:r>
                         <a:rPr lang="ja-JP" altLang="en-US" sz="2800" u="none" strike="noStrike" dirty="0">
@@ -11859,6 +11851,18 @@
                           <a:effectLst/>
                         </a:rPr>
                         <a:t>music21</a:t>
+                      </a:r>
+                      <a:r>
+                        <a:rPr lang="ja-JP" altLang="en-US" sz="2800" u="none" strike="noStrike" dirty="0">
+                          <a:effectLst/>
+                        </a:rPr>
+                        <a:t>や</a:t>
+                      </a:r>
+                      <a:r>
+                        <a:rPr lang="en-US" altLang="ja-JP" sz="2800" u="none" strike="noStrike" dirty="0">
+                          <a:effectLst/>
+                        </a:rPr>
+                        <a:t>LGBM</a:t>
                       </a:r>
                       <a:r>
                         <a:rPr lang="ja-JP" altLang="en-US" sz="2800" u="none" strike="noStrike" dirty="0">
